--- a/presentation.pptx
+++ b/presentation.pptx
@@ -9304,6 +9304,7 @@
               </a:defRPr>
             </a:pPr>
             <a:r>
+              <a:rPr dirty="0"/>
               <a:t>From Components to Algorithm</a:t>
             </a:r>
           </a:p>
@@ -9362,7 +9363,7 @@
         <p:spPr>
           <a:xfrm>
             <a:off x="822960" y="1188720"/>
-            <a:ext cx="9601200" cy="457200"/>
+            <a:ext cx="9601200" cy="646331"/>
           </a:xfrm>
           <a:prstGeom prst="rect">
             <a:avLst/>
@@ -9387,21 +9388,27 @@
               </a:defRPr>
             </a:pPr>
             <a:r>
-              <a:t>We have now covered the two building blocks — the surrogate model and the acquisition function. Bayesian Optimisation puts them together in a simple iterative loop:</a:t>
-            </a:r>
-          </a:p>
-        </p:txBody>
-      </p:sp>
-      <p:sp>
-        <p:nvSpPr>
-          <p:cNvPr id="5" name="TextBox 4"/>
+              <a:rPr dirty="0"/>
+              <a:t>We have now covered the two building blocks — the surrogate model and the acquisition function. Bayesian Optimization puts them together in a simple iterative loop:</a:t>
+            </a:r>
+            <a:r>
+              <a:rPr lang="en-US" dirty="0"/>
+              <a:t>  </a:t>
+            </a:r>
+            <a:endParaRPr dirty="0"/>
+          </a:p>
+        </p:txBody>
+      </p:sp>
+      <p:sp>
+        <p:nvSpPr>
+          <p:cNvPr id="6" name="TextBox 5"/>
           <p:cNvSpPr txBox="1"/>
           <p:nvPr/>
         </p:nvSpPr>
         <p:spPr>
           <a:xfrm>
-            <a:off x="822960" y="1572768"/>
-            <a:ext cx="9601200" cy="457200"/>
+            <a:off x="1188720" y="1956816"/>
+            <a:ext cx="9601200" cy="369332"/>
           </a:xfrm>
           <a:prstGeom prst="rect">
             <a:avLst/>
@@ -9425,20 +9432,182 @@
                 <a:latin typeface="Nunito"/>
               </a:defRPr>
             </a:pPr>
-            <a:endParaRPr/>
-          </a:p>
-        </p:txBody>
-      </p:sp>
-      <p:sp>
-        <p:nvSpPr>
-          <p:cNvPr id="6" name="TextBox 5"/>
+            <a:r>
+              <a:rPr dirty="0"/>
+              <a:t>•  </a:t>
+            </a:r>
+            <a:r>
+              <a:rPr b="1" dirty="0"/>
+              <a:t>Step 1.  </a:t>
+            </a:r>
+            <a:r>
+              <a:rPr dirty="0"/>
+              <a:t>Start with a small initial dataset (e.g. 3–5 random evaluations)</a:t>
+            </a:r>
+          </a:p>
+        </p:txBody>
+      </p:sp>
+      <mc:AlternateContent xmlns:mc="http://schemas.openxmlformats.org/markup-compatibility/2006" xmlns:a14="http://schemas.microsoft.com/office/drawing/2010/main">
+        <mc:Choice Requires="a14">
+          <p:sp>
+            <p:nvSpPr>
+              <p:cNvPr id="7" name="TextBox 6"/>
+              <p:cNvSpPr txBox="1"/>
+              <p:nvPr/>
+            </p:nvSpPr>
+            <p:spPr>
+              <a:xfrm>
+                <a:off x="1188720" y="2340864"/>
+                <a:ext cx="9601200" cy="369332"/>
+              </a:xfrm>
+              <a:prstGeom prst="rect">
+                <a:avLst/>
+              </a:prstGeom>
+              <a:noFill/>
+            </p:spPr>
+            <p:txBody>
+              <a:bodyPr wrap="square">
+                <a:spAutoFit/>
+              </a:bodyPr>
+              <a:lstStyle/>
+              <a:p>
+                <a:pPr algn="l">
+                  <a:spcAft>
+                    <a:spcPts val="400"/>
+                  </a:spcAft>
+                  <a:defRPr sz="1800" b="0">
+                    <a:solidFill>
+                      <a:srgbClr val="444444"/>
+                    </a:solidFill>
+                    <a:latin typeface="Nunito"/>
+                  </a:defRPr>
+                </a:pPr>
+                <a:r>
+                  <a:rPr dirty="0"/>
+                  <a:t>•  </a:t>
+                </a:r>
+                <a:r>
+                  <a:rPr b="1" dirty="0"/>
+                  <a:t>Step 2.  </a:t>
+                </a:r>
+                <a:r>
+                  <a:rPr dirty="0"/>
+                  <a:t>Fit the surrogate to all data collected so far → obtain </a:t>
+                </a:r>
+                <a14:m>
+                  <m:oMath xmlns:m="http://schemas.openxmlformats.org/officeDocument/2006/math">
+                    <m:r>
+                      <a:rPr lang="en-US" i="1" dirty="0" smtClean="0">
+                        <a:latin typeface="Cambria Math" panose="02040503050406030204" pitchFamily="18" charset="0"/>
+                      </a:rPr>
+                      <m:t>𝜇</m:t>
+                    </m:r>
+                    <m:r>
+                      <a:rPr lang="en-US" i="1" dirty="0" smtClean="0">
+                        <a:latin typeface="Cambria Math" panose="02040503050406030204" pitchFamily="18" charset="0"/>
+                      </a:rPr>
+                      <m:t>(</m:t>
+                    </m:r>
+                    <m:r>
+                      <a:rPr lang="en-US" i="1" dirty="0" smtClean="0">
+                        <a:latin typeface="Cambria Math" panose="02040503050406030204" pitchFamily="18" charset="0"/>
+                      </a:rPr>
+                      <m:t>𝑥</m:t>
+                    </m:r>
+                    <m:r>
+                      <a:rPr lang="en-US" i="1" dirty="0" smtClean="0">
+                        <a:latin typeface="Cambria Math" panose="02040503050406030204" pitchFamily="18" charset="0"/>
+                      </a:rPr>
+                      <m:t>)</m:t>
+                    </m:r>
+                  </m:oMath>
+                </a14:m>
+                <a:r>
+                  <a:rPr dirty="0"/>
+                  <a:t> and </a:t>
+                </a:r>
+                <a14:m>
+                  <m:oMath xmlns:m="http://schemas.openxmlformats.org/officeDocument/2006/math">
+                    <m:r>
+                      <a:rPr lang="en-US" i="1" dirty="0" smtClean="0">
+                        <a:latin typeface="Cambria Math" panose="02040503050406030204" pitchFamily="18" charset="0"/>
+                      </a:rPr>
+                      <m:t>𝜎</m:t>
+                    </m:r>
+                    <m:r>
+                      <a:rPr lang="en-US" i="1" dirty="0" smtClean="0">
+                        <a:latin typeface="Cambria Math" panose="02040503050406030204" pitchFamily="18" charset="0"/>
+                      </a:rPr>
+                      <m:t>(</m:t>
+                    </m:r>
+                    <m:r>
+                      <a:rPr lang="en-US" i="1" dirty="0" smtClean="0">
+                        <a:latin typeface="Cambria Math" panose="02040503050406030204" pitchFamily="18" charset="0"/>
+                      </a:rPr>
+                      <m:t>𝑥</m:t>
+                    </m:r>
+                    <m:r>
+                      <a:rPr lang="en-US" i="1" dirty="0" smtClean="0">
+                        <a:latin typeface="Cambria Math" panose="02040503050406030204" pitchFamily="18" charset="0"/>
+                      </a:rPr>
+                      <m:t>)</m:t>
+                    </m:r>
+                  </m:oMath>
+                </a14:m>
+                <a:endParaRPr dirty="0"/>
+              </a:p>
+            </p:txBody>
+          </p:sp>
+        </mc:Choice>
+        <mc:Fallback xmlns="">
+          <p:sp>
+            <p:nvSpPr>
+              <p:cNvPr id="7" name="TextBox 6"/>
+              <p:cNvSpPr txBox="1">
+                <a:spLocks noRot="1" noChangeAspect="1" noMove="1" noResize="1" noEditPoints="1" noAdjustHandles="1" noChangeArrowheads="1" noChangeShapeType="1" noTextEdit="1"/>
+              </p:cNvSpPr>
+              <p:nvPr/>
+            </p:nvSpPr>
+            <p:spPr>
+              <a:xfrm>
+                <a:off x="1188720" y="2340864"/>
+                <a:ext cx="9601200" cy="369332"/>
+              </a:xfrm>
+              <a:prstGeom prst="rect">
+                <a:avLst/>
+              </a:prstGeom>
+              <a:blipFill>
+                <a:blip r:embed="rId2"/>
+                <a:stretch>
+                  <a:fillRect l="-508" t="-11475" b="-26230"/>
+                </a:stretch>
+              </a:blipFill>
+            </p:spPr>
+            <p:txBody>
+              <a:bodyPr/>
+              <a:lstStyle/>
+              <a:p>
+                <a:r>
+                  <a:rPr lang="en-US">
+                    <a:noFill/>
+                  </a:rPr>
+                  <a:t> </a:t>
+                </a:r>
+              </a:p>
+            </p:txBody>
+          </p:sp>
+        </mc:Fallback>
+      </mc:AlternateContent>
+      <p:sp>
+        <p:nvSpPr>
+          <p:cNvPr id="8" name="TextBox 7"/>
           <p:cNvSpPr txBox="1"/>
           <p:nvPr/>
         </p:nvSpPr>
         <p:spPr>
           <a:xfrm>
-            <a:off x="1188720" y="1956816"/>
-            <a:ext cx="9601200" cy="457200"/>
+            <a:off x="1188720" y="2724912"/>
+            <a:ext cx="9601200" cy="369332"/>
           </a:xfrm>
           <a:prstGeom prst="rect">
             <a:avLst/>
@@ -9463,21 +9632,158 @@
               </a:defRPr>
             </a:pPr>
             <a:r>
-              <a:t>•  Step 1.  Start with a small initial dataset (e.g. 3–5 random evaluations)</a:t>
-            </a:r>
-          </a:p>
-        </p:txBody>
-      </p:sp>
-      <p:sp>
-        <p:nvSpPr>
-          <p:cNvPr id="7" name="TextBox 6"/>
+              <a:rPr dirty="0"/>
+              <a:t>•  </a:t>
+            </a:r>
+            <a:r>
+              <a:rPr b="1" dirty="0"/>
+              <a:t>Step 3.</a:t>
+            </a:r>
+            <a:r>
+              <a:rPr dirty="0"/>
+              <a:t>  Maximize the acquisition function to choose the next evaluation point</a:t>
+            </a:r>
+          </a:p>
+        </p:txBody>
+      </p:sp>
+      <mc:AlternateContent xmlns:mc="http://schemas.openxmlformats.org/markup-compatibility/2006" xmlns:a14="http://schemas.microsoft.com/office/drawing/2010/main">
+        <mc:Choice Requires="a14">
+          <p:sp>
+            <p:nvSpPr>
+              <p:cNvPr id="9" name="TextBox 8"/>
+              <p:cNvSpPr txBox="1"/>
+              <p:nvPr/>
+            </p:nvSpPr>
+            <p:spPr>
+              <a:xfrm>
+                <a:off x="1188720" y="3108960"/>
+                <a:ext cx="9601200" cy="369332"/>
+              </a:xfrm>
+              <a:prstGeom prst="rect">
+                <a:avLst/>
+              </a:prstGeom>
+              <a:noFill/>
+            </p:spPr>
+            <p:txBody>
+              <a:bodyPr wrap="square">
+                <a:spAutoFit/>
+              </a:bodyPr>
+              <a:lstStyle/>
+              <a:p>
+                <a:pPr algn="l">
+                  <a:spcAft>
+                    <a:spcPts val="400"/>
+                  </a:spcAft>
+                  <a:defRPr sz="1800" b="0">
+                    <a:solidFill>
+                      <a:srgbClr val="444444"/>
+                    </a:solidFill>
+                    <a:latin typeface="Nunito"/>
+                  </a:defRPr>
+                </a:pPr>
+                <a:r>
+                  <a:rPr dirty="0"/>
+                  <a:t>•  </a:t>
+                </a:r>
+                <a:r>
+                  <a:rPr b="1" dirty="0"/>
+                  <a:t>Step 4.</a:t>
+                </a:r>
+                <a:r>
+                  <a:rPr dirty="0"/>
+                  <a:t>  Evaluate the expensive function at </a:t>
+                </a:r>
+                <a14:m>
+                  <m:oMath xmlns:m="http://schemas.openxmlformats.org/officeDocument/2006/math">
+                    <m:r>
+                      <a:rPr lang="en-US" i="1" dirty="0" smtClean="0">
+                        <a:latin typeface="Cambria Math" panose="02040503050406030204" pitchFamily="18" charset="0"/>
+                      </a:rPr>
+                      <m:t>𝑥</m:t>
+                    </m:r>
+                    <m:r>
+                      <a:rPr lang="en-US" i="1" dirty="0" smtClean="0">
+                        <a:latin typeface="Cambria Math" panose="02040503050406030204" pitchFamily="18" charset="0"/>
+                      </a:rPr>
+                      <m:t>ₙ</m:t>
+                    </m:r>
+                    <m:r>
+                      <a:rPr lang="en-US" i="1" dirty="0" smtClean="0">
+                        <a:latin typeface="Cambria Math" panose="02040503050406030204" pitchFamily="18" charset="0"/>
+                      </a:rPr>
+                      <m:t>₊</m:t>
+                    </m:r>
+                    <m:r>
+                      <a:rPr lang="en-US" i="1" dirty="0" smtClean="0">
+                        <a:latin typeface="Cambria Math" panose="02040503050406030204" pitchFamily="18" charset="0"/>
+                      </a:rPr>
+                      <m:t>₁</m:t>
+                    </m:r>
+                    <m:r>
+                      <a:rPr lang="en-US" i="1" dirty="0" smtClean="0">
+                        <a:latin typeface="Cambria Math" panose="02040503050406030204" pitchFamily="18" charset="0"/>
+                      </a:rPr>
+                      <m:t> </m:t>
+                    </m:r>
+                  </m:oMath>
+                </a14:m>
+                <a:r>
+                  <a:rPr dirty="0"/>
+                  <a:t>and add the result to the dataset</a:t>
+                </a:r>
+              </a:p>
+            </p:txBody>
+          </p:sp>
+        </mc:Choice>
+        <mc:Fallback xmlns="">
+          <p:sp>
+            <p:nvSpPr>
+              <p:cNvPr id="9" name="TextBox 8"/>
+              <p:cNvSpPr txBox="1">
+                <a:spLocks noRot="1" noChangeAspect="1" noMove="1" noResize="1" noEditPoints="1" noAdjustHandles="1" noChangeArrowheads="1" noChangeShapeType="1" noTextEdit="1"/>
+              </p:cNvSpPr>
+              <p:nvPr/>
+            </p:nvSpPr>
+            <p:spPr>
+              <a:xfrm>
+                <a:off x="1188720" y="3108960"/>
+                <a:ext cx="9601200" cy="369332"/>
+              </a:xfrm>
+              <a:prstGeom prst="rect">
+                <a:avLst/>
+              </a:prstGeom>
+              <a:blipFill>
+                <a:blip r:embed="rId3"/>
+                <a:stretch>
+                  <a:fillRect l="-508" t="-6557" b="-26230"/>
+                </a:stretch>
+              </a:blipFill>
+            </p:spPr>
+            <p:txBody>
+              <a:bodyPr/>
+              <a:lstStyle/>
+              <a:p>
+                <a:r>
+                  <a:rPr lang="en-US">
+                    <a:noFill/>
+                  </a:rPr>
+                  <a:t> </a:t>
+                </a:r>
+              </a:p>
+            </p:txBody>
+          </p:sp>
+        </mc:Fallback>
+      </mc:AlternateContent>
+      <p:sp>
+        <p:nvSpPr>
+          <p:cNvPr id="10" name="TextBox 9"/>
           <p:cNvSpPr txBox="1"/>
           <p:nvPr/>
         </p:nvSpPr>
         <p:spPr>
           <a:xfrm>
-            <a:off x="1188720" y="2340864"/>
-            <a:ext cx="9601200" cy="457200"/>
+            <a:off x="1188720" y="3493008"/>
+            <a:ext cx="9601200" cy="369332"/>
           </a:xfrm>
           <a:prstGeom prst="rect">
             <a:avLst/>
@@ -9502,21 +9808,30 @@
               </a:defRPr>
             </a:pPr>
             <a:r>
-              <a:t>•  Step 2.  Fit the surrogate to all data collected so far → obtain μ(x) and σ(x)</a:t>
-            </a:r>
-          </a:p>
-        </p:txBody>
-      </p:sp>
-      <p:sp>
-        <p:nvSpPr>
-          <p:cNvPr id="8" name="TextBox 7"/>
+              <a:rPr dirty="0"/>
+              <a:t>•  </a:t>
+            </a:r>
+            <a:r>
+              <a:rPr b="1" dirty="0"/>
+              <a:t>Step 5.</a:t>
+            </a:r>
+            <a:r>
+              <a:rPr dirty="0"/>
+              <a:t>  Go back to Step 2 until the evaluation budget is exhausted</a:t>
+            </a:r>
+          </a:p>
+        </p:txBody>
+      </p:sp>
+      <p:sp>
+        <p:nvSpPr>
+          <p:cNvPr id="12" name="TextBox 11"/>
           <p:cNvSpPr txBox="1"/>
           <p:nvPr/>
         </p:nvSpPr>
         <p:spPr>
           <a:xfrm>
-            <a:off x="1188720" y="2724912"/>
-            <a:ext cx="9601200" cy="457200"/>
+            <a:off x="822960" y="4275820"/>
+            <a:ext cx="9601200" cy="646331"/>
           </a:xfrm>
           <a:prstGeom prst="rect">
             <a:avLst/>
@@ -9541,161 +9856,16 @@
               </a:defRPr>
             </a:pPr>
             <a:r>
-              <a:t>•  Step 3.  Maximise the acquisition function to choose the next evaluation point</a:t>
-            </a:r>
-          </a:p>
-        </p:txBody>
-      </p:sp>
-      <p:sp>
-        <p:nvSpPr>
-          <p:cNvPr id="9" name="TextBox 8"/>
-          <p:cNvSpPr txBox="1"/>
-          <p:nvPr/>
-        </p:nvSpPr>
-        <p:spPr>
-          <a:xfrm>
-            <a:off x="1188720" y="3108960"/>
-            <a:ext cx="9601200" cy="457200"/>
-          </a:xfrm>
-          <a:prstGeom prst="rect">
-            <a:avLst/>
-          </a:prstGeom>
-          <a:noFill/>
-        </p:spPr>
-        <p:txBody>
-          <a:bodyPr wrap="square">
-            <a:spAutoFit/>
-          </a:bodyPr>
-          <a:lstStyle/>
-          <a:p>
-            <a:pPr algn="l">
-              <a:spcAft>
-                <a:spcPts val="400"/>
-              </a:spcAft>
-              <a:defRPr sz="1800" b="0">
-                <a:solidFill>
-                  <a:srgbClr val="444444"/>
-                </a:solidFill>
-                <a:latin typeface="Nunito"/>
-              </a:defRPr>
-            </a:pPr>
-            <a:r>
-              <a:t>•  Step 4.  Evaluate the expensive function at xₙ₊₁ and add the result to the dataset</a:t>
-            </a:r>
-          </a:p>
-        </p:txBody>
-      </p:sp>
-      <p:sp>
-        <p:nvSpPr>
-          <p:cNvPr id="10" name="TextBox 9"/>
-          <p:cNvSpPr txBox="1"/>
-          <p:nvPr/>
-        </p:nvSpPr>
-        <p:spPr>
-          <a:xfrm>
-            <a:off x="1188720" y="3493008"/>
-            <a:ext cx="9601200" cy="457200"/>
-          </a:xfrm>
-          <a:prstGeom prst="rect">
-            <a:avLst/>
-          </a:prstGeom>
-          <a:noFill/>
-        </p:spPr>
-        <p:txBody>
-          <a:bodyPr wrap="square">
-            <a:spAutoFit/>
-          </a:bodyPr>
-          <a:lstStyle/>
-          <a:p>
-            <a:pPr algn="l">
-              <a:spcAft>
-                <a:spcPts val="400"/>
-              </a:spcAft>
-              <a:defRPr sz="1800" b="0">
-                <a:solidFill>
-                  <a:srgbClr val="444444"/>
-                </a:solidFill>
-                <a:latin typeface="Nunito"/>
-              </a:defRPr>
-            </a:pPr>
-            <a:r>
-              <a:t>•  Step 5.  Go back to Step 2 until the evaluation budget is exhausted</a:t>
-            </a:r>
-          </a:p>
-        </p:txBody>
-      </p:sp>
-      <p:sp>
-        <p:nvSpPr>
-          <p:cNvPr id="11" name="TextBox 10"/>
-          <p:cNvSpPr txBox="1"/>
-          <p:nvPr/>
-        </p:nvSpPr>
-        <p:spPr>
-          <a:xfrm>
-            <a:off x="822960" y="3877056"/>
-            <a:ext cx="9601200" cy="457200"/>
-          </a:xfrm>
-          <a:prstGeom prst="rect">
-            <a:avLst/>
-          </a:prstGeom>
-          <a:noFill/>
-        </p:spPr>
-        <p:txBody>
-          <a:bodyPr wrap="square">
-            <a:spAutoFit/>
-          </a:bodyPr>
-          <a:lstStyle/>
-          <a:p>
-            <a:pPr algn="l">
-              <a:spcAft>
-                <a:spcPts val="400"/>
-              </a:spcAft>
-              <a:defRPr sz="1800" b="0">
-                <a:solidFill>
-                  <a:srgbClr val="444444"/>
-                </a:solidFill>
-                <a:latin typeface="Nunito"/>
-              </a:defRPr>
-            </a:pPr>
-            <a:endParaRPr/>
-          </a:p>
-        </p:txBody>
-      </p:sp>
-      <p:sp>
-        <p:nvSpPr>
-          <p:cNvPr id="12" name="TextBox 11"/>
-          <p:cNvSpPr txBox="1"/>
-          <p:nvPr/>
-        </p:nvSpPr>
-        <p:spPr>
-          <a:xfrm>
-            <a:off x="822960" y="4261104"/>
-            <a:ext cx="9601200" cy="457200"/>
-          </a:xfrm>
-          <a:prstGeom prst="rect">
-            <a:avLst/>
-          </a:prstGeom>
-          <a:noFill/>
-        </p:spPr>
-        <p:txBody>
-          <a:bodyPr wrap="square">
-            <a:spAutoFit/>
-          </a:bodyPr>
-          <a:lstStyle/>
-          <a:p>
-            <a:pPr algn="l">
-              <a:spcAft>
-                <a:spcPts val="400"/>
-              </a:spcAft>
-              <a:defRPr sz="1800" b="0">
-                <a:solidFill>
-                  <a:srgbClr val="444444"/>
-                </a:solidFill>
-                <a:latin typeface="Nunito"/>
-              </a:defRPr>
-            </a:pPr>
-            <a:r>
-              <a:t>Each iteration, the surrogate becomes more accurate and the acquisition function makes better-informed decisions.</a:t>
+              <a:rPr dirty="0"/>
+              <a:t>Each iteration, the surrogate becomes more accurate and the acquisition function makes</a:t>
+            </a:r>
+            <a:r>
+              <a:rPr lang="en-US" dirty="0"/>
+              <a:t> </a:t>
+            </a:r>
+            <a:r>
+              <a:rPr dirty="0"/>
+              <a:t>better-informed decisions.</a:t>
             </a:r>
           </a:p>
         </p:txBody>
@@ -9727,56 +9897,28 @@
       </p:grpSpPr>
       <p:sp>
         <p:nvSpPr>
-          <p:cNvPr id="2" name="TextBox 1"/>
-          <p:cNvSpPr txBox="1"/>
-          <p:nvPr/>
-        </p:nvSpPr>
-        <p:spPr>
-          <a:xfrm>
-            <a:off x="822960" y="457200"/>
-            <a:ext cx="10058400" cy="640080"/>
-          </a:xfrm>
-          <a:prstGeom prst="rect">
-            <a:avLst/>
-          </a:prstGeom>
-          <a:noFill/>
-        </p:spPr>
-        <p:txBody>
-          <a:bodyPr wrap="square">
-            <a:spAutoFit/>
-          </a:bodyPr>
-          <a:lstStyle/>
-          <a:p>
-            <a:pPr algn="l">
-              <a:defRPr sz="2800" b="1">
-                <a:solidFill>
-                  <a:srgbClr val="1A1A1A"/>
-                </a:solidFill>
-                <a:latin typeface="Archivo"/>
-              </a:defRPr>
-            </a:pPr>
-            <a:r>
-              <a:t>The Bayesian Optimisation Algorithm</a:t>
-            </a:r>
-          </a:p>
-        </p:txBody>
-      </p:sp>
-      <p:sp>
-        <p:nvSpPr>
-          <p:cNvPr id="3" name="Rectangle 2"/>
+          <p:cNvPr id="13" name="Rectangle 12">
+            <a:extLst>
+              <a:ext uri="{FF2B5EF4-FFF2-40B4-BE49-F238E27FC236}">
+                <a16:creationId xmlns:a16="http://schemas.microsoft.com/office/drawing/2014/main" id="{AE44ACF3-CF2E-54E8-EBBB-D0E9DDC94321}"/>
+              </a:ext>
+            </a:extLst>
+          </p:cNvPr>
           <p:cNvSpPr/>
           <p:nvPr/>
         </p:nvSpPr>
         <p:spPr>
           <a:xfrm>
-            <a:off x="822960" y="960120"/>
-            <a:ext cx="3657600" cy="38100"/>
+            <a:off x="771728" y="1188720"/>
+            <a:ext cx="10597312" cy="3578644"/>
           </a:xfrm>
           <a:prstGeom prst="rect">
             <a:avLst/>
           </a:prstGeom>
           <a:solidFill>
-            <a:srgbClr val="1A1A1A"/>
+            <a:schemeClr val="bg1">
+              <a:lumMod val="85000"/>
+            </a:schemeClr>
           </a:solidFill>
           <a:ln>
             <a:noFill/>
@@ -9801,20 +9943,20 @@
           <a:lstStyle/>
           <a:p>
             <a:pPr algn="ctr"/>
-            <a:endParaRPr/>
-          </a:p>
-        </p:txBody>
-      </p:sp>
-      <p:sp>
-        <p:nvSpPr>
-          <p:cNvPr id="4" name="TextBox 3"/>
+            <a:endParaRPr lang="en-US"/>
+          </a:p>
+        </p:txBody>
+      </p:sp>
+      <p:sp>
+        <p:nvSpPr>
+          <p:cNvPr id="2" name="TextBox 1"/>
           <p:cNvSpPr txBox="1"/>
           <p:nvPr/>
         </p:nvSpPr>
         <p:spPr>
           <a:xfrm>
-            <a:off x="822960" y="1188720"/>
-            <a:ext cx="9601200" cy="411480"/>
+            <a:off x="822960" y="457200"/>
+            <a:ext cx="10058400" cy="640080"/>
           </a:xfrm>
           <a:prstGeom prst="rect">
             <a:avLst/>
@@ -9828,307 +9970,1685 @@
           <a:lstStyle/>
           <a:p>
             <a:pPr algn="l">
-              <a:defRPr sz="1800" b="0">
-                <a:solidFill>
-                  <a:srgbClr val="444444"/>
-                </a:solidFill>
-                <a:latin typeface="Nunito"/>
+              <a:defRPr sz="2800" b="1">
+                <a:solidFill>
+                  <a:srgbClr val="1A1A1A"/>
+                </a:solidFill>
+                <a:latin typeface="Archivo"/>
               </a:defRPr>
             </a:pPr>
             <a:r>
-              <a:t>Input: search space X, budget T, acquisition function α</a:t>
-            </a:r>
-          </a:p>
-        </p:txBody>
-      </p:sp>
-      <p:sp>
-        <p:nvSpPr>
-          <p:cNvPr id="5" name="TextBox 4"/>
-          <p:cNvSpPr txBox="1"/>
-          <p:nvPr/>
-        </p:nvSpPr>
-        <p:spPr>
-          <a:xfrm>
-            <a:off x="822960" y="1572768"/>
-            <a:ext cx="9601200" cy="411480"/>
-          </a:xfrm>
-          <a:prstGeom prst="rect">
-            <a:avLst/>
-          </a:prstGeom>
-          <a:noFill/>
-        </p:spPr>
-        <p:txBody>
-          <a:bodyPr wrap="square">
-            <a:spAutoFit/>
-          </a:bodyPr>
-          <a:lstStyle/>
-          <a:p>
-            <a:pPr algn="l">
-              <a:defRPr sz="1800" b="0">
-                <a:solidFill>
-                  <a:srgbClr val="444444"/>
-                </a:solidFill>
-                <a:latin typeface="Nunito"/>
-              </a:defRPr>
-            </a:pPr>
-            <a:r>
-              <a:t>1.  Choose initial design {x₁, …, xₙ₀} and evaluate yᵢ = f(xᵢ)</a:t>
-            </a:r>
-          </a:p>
-        </p:txBody>
-      </p:sp>
-      <p:sp>
-        <p:nvSpPr>
-          <p:cNvPr id="6" name="TextBox 5"/>
-          <p:cNvSpPr txBox="1"/>
-          <p:nvPr/>
-        </p:nvSpPr>
-        <p:spPr>
-          <a:xfrm>
-            <a:off x="822960" y="1956816"/>
-            <a:ext cx="9601200" cy="411480"/>
-          </a:xfrm>
-          <a:prstGeom prst="rect">
-            <a:avLst/>
-          </a:prstGeom>
-          <a:noFill/>
-        </p:spPr>
-        <p:txBody>
-          <a:bodyPr wrap="square">
-            <a:spAutoFit/>
-          </a:bodyPr>
-          <a:lstStyle/>
-          <a:p>
-            <a:pPr algn="l">
-              <a:defRPr sz="1800" b="0">
-                <a:solidFill>
-                  <a:srgbClr val="444444"/>
-                </a:solidFill>
-                <a:latin typeface="Nunito"/>
-              </a:defRPr>
-            </a:pPr>
-            <a:r>
-              <a:t>2.  for t = n₀ + 1 to T do</a:t>
-            </a:r>
-          </a:p>
-        </p:txBody>
-      </p:sp>
-      <p:sp>
-        <p:nvSpPr>
-          <p:cNvPr id="7" name="TextBox 6"/>
-          <p:cNvSpPr txBox="1"/>
-          <p:nvPr/>
-        </p:nvSpPr>
-        <p:spPr>
-          <a:xfrm>
-            <a:off x="822960" y="2340864"/>
-            <a:ext cx="9601200" cy="411480"/>
-          </a:xfrm>
-          <a:prstGeom prst="rect">
-            <a:avLst/>
-          </a:prstGeom>
-          <a:noFill/>
-        </p:spPr>
-        <p:txBody>
-          <a:bodyPr wrap="square">
-            <a:spAutoFit/>
-          </a:bodyPr>
-          <a:lstStyle/>
-          <a:p>
-            <a:pPr algn="l">
-              <a:defRPr sz="1800" b="0">
-                <a:solidFill>
-                  <a:srgbClr val="444444"/>
-                </a:solidFill>
-                <a:latin typeface="Nunito"/>
-              </a:defRPr>
-            </a:pPr>
-            <a:r>
-              <a:t>      a.  Fit GP to data Dₜ₋₁ = {(xᵢ, yᵢ)}</a:t>
-            </a:r>
-          </a:p>
-        </p:txBody>
-      </p:sp>
-      <p:sp>
-        <p:nvSpPr>
-          <p:cNvPr id="8" name="TextBox 7"/>
-          <p:cNvSpPr txBox="1"/>
-          <p:nvPr/>
-        </p:nvSpPr>
-        <p:spPr>
-          <a:xfrm>
-            <a:off x="822960" y="2724912"/>
-            <a:ext cx="9601200" cy="411480"/>
-          </a:xfrm>
-          <a:prstGeom prst="rect">
-            <a:avLst/>
-          </a:prstGeom>
-          <a:noFill/>
-        </p:spPr>
-        <p:txBody>
-          <a:bodyPr wrap="square">
-            <a:spAutoFit/>
-          </a:bodyPr>
-          <a:lstStyle/>
-          <a:p>
-            <a:pPr algn="l">
-              <a:defRPr sz="1800" b="0">
-                <a:solidFill>
-                  <a:srgbClr val="444444"/>
-                </a:solidFill>
-                <a:latin typeface="Nunito"/>
-              </a:defRPr>
-            </a:pPr>
-            <a:r>
-              <a:t>      b.  Compute α(x) using GP posterior μ(x), σ(x)</a:t>
-            </a:r>
-          </a:p>
-        </p:txBody>
-      </p:sp>
-      <p:sp>
-        <p:nvSpPr>
-          <p:cNvPr id="9" name="TextBox 8"/>
-          <p:cNvSpPr txBox="1"/>
-          <p:nvPr/>
-        </p:nvSpPr>
-        <p:spPr>
-          <a:xfrm>
-            <a:off x="822960" y="3108960"/>
-            <a:ext cx="9601200" cy="411480"/>
-          </a:xfrm>
-          <a:prstGeom prst="rect">
-            <a:avLst/>
-          </a:prstGeom>
-          <a:noFill/>
-        </p:spPr>
-        <p:txBody>
-          <a:bodyPr wrap="square">
-            <a:spAutoFit/>
-          </a:bodyPr>
-          <a:lstStyle/>
-          <a:p>
-            <a:pPr algn="l">
-              <a:defRPr sz="1800" b="0">
-                <a:solidFill>
-                  <a:srgbClr val="444444"/>
-                </a:solidFill>
-                <a:latin typeface="Nunito"/>
-              </a:defRPr>
-            </a:pPr>
-            <a:r>
-              <a:t>      c.  xₜ = argmax α(x)</a:t>
-            </a:r>
-          </a:p>
-        </p:txBody>
-      </p:sp>
-      <p:sp>
-        <p:nvSpPr>
-          <p:cNvPr id="10" name="TextBox 9"/>
-          <p:cNvSpPr txBox="1"/>
-          <p:nvPr/>
-        </p:nvSpPr>
-        <p:spPr>
-          <a:xfrm>
-            <a:off x="822960" y="3493008"/>
-            <a:ext cx="9601200" cy="411480"/>
-          </a:xfrm>
-          <a:prstGeom prst="rect">
-            <a:avLst/>
-          </a:prstGeom>
-          <a:noFill/>
-        </p:spPr>
-        <p:txBody>
-          <a:bodyPr wrap="square">
-            <a:spAutoFit/>
-          </a:bodyPr>
-          <a:lstStyle/>
-          <a:p>
-            <a:pPr algn="l">
-              <a:defRPr sz="1800" b="0">
-                <a:solidFill>
-                  <a:srgbClr val="444444"/>
-                </a:solidFill>
-                <a:latin typeface="Nunito"/>
-              </a:defRPr>
-            </a:pPr>
-            <a:r>
-              <a:t>      d.  yₜ = f(xₜ) + ε     ← the expensive evaluation</a:t>
-            </a:r>
-          </a:p>
-        </p:txBody>
-      </p:sp>
-      <p:sp>
-        <p:nvSpPr>
-          <p:cNvPr id="11" name="TextBox 10"/>
-          <p:cNvSpPr txBox="1"/>
-          <p:nvPr/>
-        </p:nvSpPr>
-        <p:spPr>
-          <a:xfrm>
-            <a:off x="822960" y="3877056"/>
-            <a:ext cx="9601200" cy="411480"/>
-          </a:xfrm>
-          <a:prstGeom prst="rect">
-            <a:avLst/>
-          </a:prstGeom>
-          <a:noFill/>
-        </p:spPr>
-        <p:txBody>
-          <a:bodyPr wrap="square">
-            <a:spAutoFit/>
-          </a:bodyPr>
-          <a:lstStyle/>
-          <a:p>
-            <a:pPr algn="l">
-              <a:defRPr sz="1800" b="0">
-                <a:solidFill>
-                  <a:srgbClr val="444444"/>
-                </a:solidFill>
-                <a:latin typeface="Nunito"/>
-              </a:defRPr>
-            </a:pPr>
-            <a:r>
-              <a:t>      e.  Dₜ = Dₜ₋₁ ∪ {(xₜ, yₜ)}</a:t>
-            </a:r>
-          </a:p>
-        </p:txBody>
-      </p:sp>
-      <p:sp>
-        <p:nvSpPr>
-          <p:cNvPr id="12" name="TextBox 11"/>
-          <p:cNvSpPr txBox="1"/>
-          <p:nvPr/>
-        </p:nvSpPr>
-        <p:spPr>
-          <a:xfrm>
-            <a:off x="822960" y="4261104"/>
-            <a:ext cx="9601200" cy="411480"/>
-          </a:xfrm>
-          <a:prstGeom prst="rect">
-            <a:avLst/>
-          </a:prstGeom>
-          <a:noFill/>
-        </p:spPr>
-        <p:txBody>
-          <a:bodyPr wrap="square">
-            <a:spAutoFit/>
-          </a:bodyPr>
-          <a:lstStyle/>
-          <a:p>
-            <a:pPr algn="l">
-              <a:defRPr sz="1800" b="0">
-                <a:solidFill>
-                  <a:srgbClr val="444444"/>
-                </a:solidFill>
-                <a:latin typeface="Nunito"/>
-              </a:defRPr>
-            </a:pPr>
-            <a:r>
-              <a:t>3.  Return x* = argmax yᵢ in D_T</a:t>
-            </a:r>
-          </a:p>
-        </p:txBody>
-      </p:sp>
+              <a:t>The Bayesian Optimisation Algorithm</a:t>
+            </a:r>
+          </a:p>
+        </p:txBody>
+      </p:sp>
+      <p:sp>
+        <p:nvSpPr>
+          <p:cNvPr id="3" name="Rectangle 2"/>
+          <p:cNvSpPr/>
+          <p:nvPr/>
+        </p:nvSpPr>
+        <p:spPr>
+          <a:xfrm>
+            <a:off x="822960" y="960120"/>
+            <a:ext cx="3657600" cy="38100"/>
+          </a:xfrm>
+          <a:prstGeom prst="rect">
+            <a:avLst/>
+          </a:prstGeom>
+          <a:solidFill>
+            <a:srgbClr val="1A1A1A"/>
+          </a:solidFill>
+          <a:ln>
+            <a:noFill/>
+          </a:ln>
+        </p:spPr>
+        <p:style>
+          <a:lnRef idx="1">
+            <a:schemeClr val="accent1"/>
+          </a:lnRef>
+          <a:fillRef idx="3">
+            <a:schemeClr val="accent1"/>
+          </a:fillRef>
+          <a:effectRef idx="2">
+            <a:schemeClr val="accent1"/>
+          </a:effectRef>
+          <a:fontRef idx="minor">
+            <a:schemeClr val="lt1"/>
+          </a:fontRef>
+        </p:style>
+        <p:txBody>
+          <a:bodyPr rtlCol="0" anchor="ctr"/>
+          <a:lstStyle/>
+          <a:p>
+            <a:pPr algn="ctr"/>
+            <a:endParaRPr/>
+          </a:p>
+        </p:txBody>
+      </p:sp>
+      <mc:AlternateContent xmlns:mc="http://schemas.openxmlformats.org/markup-compatibility/2006" xmlns:a14="http://schemas.microsoft.com/office/drawing/2010/main">
+        <mc:Choice Requires="a14">
+          <p:sp>
+            <p:nvSpPr>
+              <p:cNvPr id="4" name="TextBox 3"/>
+              <p:cNvSpPr txBox="1"/>
+              <p:nvPr/>
+            </p:nvSpPr>
+            <p:spPr>
+              <a:xfrm>
+                <a:off x="822960" y="1188720"/>
+                <a:ext cx="9601200" cy="369332"/>
+              </a:xfrm>
+              <a:prstGeom prst="rect">
+                <a:avLst/>
+              </a:prstGeom>
+              <a:noFill/>
+            </p:spPr>
+            <p:txBody>
+              <a:bodyPr wrap="square">
+                <a:spAutoFit/>
+              </a:bodyPr>
+              <a:lstStyle/>
+              <a:p>
+                <a:pPr algn="l">
+                  <a:defRPr sz="1800" b="0">
+                    <a:solidFill>
+                      <a:srgbClr val="444444"/>
+                    </a:solidFill>
+                    <a:latin typeface="Nunito"/>
+                  </a:defRPr>
+                </a:pPr>
+                <a:r>
+                  <a:rPr dirty="0"/>
+                  <a:t>Input: search space </a:t>
+                </a:r>
+                <a14:m>
+                  <m:oMath xmlns:m="http://schemas.openxmlformats.org/officeDocument/2006/math">
+                    <m:r>
+                      <a:rPr lang="en-US" i="1" dirty="0" smtClean="0">
+                        <a:latin typeface="Cambria Math" panose="02040503050406030204" pitchFamily="18" charset="0"/>
+                        <a:ea typeface="Cambria Math" panose="02040503050406030204" pitchFamily="18" charset="0"/>
+                      </a:rPr>
+                      <m:t>𝜒</m:t>
+                    </m:r>
+                  </m:oMath>
+                </a14:m>
+                <a:r>
+                  <a:rPr dirty="0"/>
+                  <a:t>, budget </a:t>
+                </a:r>
+                <a14:m>
+                  <m:oMath xmlns:m="http://schemas.openxmlformats.org/officeDocument/2006/math">
+                    <m:r>
+                      <a:rPr lang="en-US" i="1" dirty="0" smtClean="0">
+                        <a:latin typeface="Cambria Math" panose="02040503050406030204" pitchFamily="18" charset="0"/>
+                      </a:rPr>
+                      <m:t>𝑇</m:t>
+                    </m:r>
+                  </m:oMath>
+                </a14:m>
+                <a:r>
+                  <a:rPr dirty="0"/>
+                  <a:t>, acquisition function </a:t>
+                </a:r>
+                <a14:m>
+                  <m:oMath xmlns:m="http://schemas.openxmlformats.org/officeDocument/2006/math">
+                    <m:r>
+                      <a:rPr lang="en-US" i="1" dirty="0" smtClean="0">
+                        <a:latin typeface="Cambria Math" panose="02040503050406030204" pitchFamily="18" charset="0"/>
+                      </a:rPr>
+                      <m:t>𝛼</m:t>
+                    </m:r>
+                  </m:oMath>
+                </a14:m>
+                <a:endParaRPr dirty="0"/>
+              </a:p>
+            </p:txBody>
+          </p:sp>
+        </mc:Choice>
+        <mc:Fallback xmlns="">
+          <p:sp>
+            <p:nvSpPr>
+              <p:cNvPr id="4" name="TextBox 3"/>
+              <p:cNvSpPr txBox="1">
+                <a:spLocks noRot="1" noChangeAspect="1" noMove="1" noResize="1" noEditPoints="1" noAdjustHandles="1" noChangeArrowheads="1" noChangeShapeType="1" noTextEdit="1"/>
+              </p:cNvSpPr>
+              <p:nvPr/>
+            </p:nvSpPr>
+            <p:spPr>
+              <a:xfrm>
+                <a:off x="822960" y="1188720"/>
+                <a:ext cx="9601200" cy="369332"/>
+              </a:xfrm>
+              <a:prstGeom prst="rect">
+                <a:avLst/>
+              </a:prstGeom>
+              <a:blipFill>
+                <a:blip r:embed="rId2"/>
+                <a:stretch>
+                  <a:fillRect l="-508" t="-6557" b="-26230"/>
+                </a:stretch>
+              </a:blipFill>
+            </p:spPr>
+            <p:txBody>
+              <a:bodyPr/>
+              <a:lstStyle/>
+              <a:p>
+                <a:r>
+                  <a:rPr lang="en-US">
+                    <a:noFill/>
+                  </a:rPr>
+                  <a:t> </a:t>
+                </a:r>
+              </a:p>
+            </p:txBody>
+          </p:sp>
+        </mc:Fallback>
+      </mc:AlternateContent>
+      <mc:AlternateContent xmlns:mc="http://schemas.openxmlformats.org/markup-compatibility/2006" xmlns:a14="http://schemas.microsoft.com/office/drawing/2010/main">
+        <mc:Choice Requires="a14">
+          <p:sp>
+            <p:nvSpPr>
+              <p:cNvPr id="5" name="TextBox 4"/>
+              <p:cNvSpPr txBox="1"/>
+              <p:nvPr/>
+            </p:nvSpPr>
+            <p:spPr>
+              <a:xfrm>
+                <a:off x="822960" y="1572768"/>
+                <a:ext cx="9601200" cy="384529"/>
+              </a:xfrm>
+              <a:prstGeom prst="rect">
+                <a:avLst/>
+              </a:prstGeom>
+              <a:noFill/>
+            </p:spPr>
+            <p:txBody>
+              <a:bodyPr wrap="square">
+                <a:spAutoFit/>
+              </a:bodyPr>
+              <a:lstStyle/>
+              <a:p>
+                <a:pPr>
+                  <a:defRPr sz="1800" b="0">
+                    <a:solidFill>
+                      <a:srgbClr val="444444"/>
+                    </a:solidFill>
+                    <a:latin typeface="Nunito"/>
+                  </a:defRPr>
+                </a:pPr>
+                <a:r>
+                  <a:rPr lang="en-US" dirty="0"/>
+                  <a:t>1.  Choose initial design </a:t>
+                </a:r>
+                <a14:m>
+                  <m:oMath xmlns:m="http://schemas.openxmlformats.org/officeDocument/2006/math">
+                    <m:r>
+                      <a:rPr lang="en-US" i="1" dirty="0" smtClean="0">
+                        <a:latin typeface="Cambria Math" panose="02040503050406030204" pitchFamily="18" charset="0"/>
+                      </a:rPr>
+                      <m:t>{</m:t>
+                    </m:r>
+                    <m:sSub>
+                      <m:sSubPr>
+                        <m:ctrlPr>
+                          <a:rPr lang="ar-AE" i="1" dirty="0" smtClean="0">
+                            <a:latin typeface="Cambria Math" panose="02040503050406030204" pitchFamily="18" charset="0"/>
+                          </a:rPr>
+                        </m:ctrlPr>
+                      </m:sSubPr>
+                      <m:e>
+                        <m:r>
+                          <a:rPr lang="ar-AE" b="0" i="1" dirty="0" smtClean="0">
+                            <a:latin typeface="Cambria Math" panose="02040503050406030204" pitchFamily="18" charset="0"/>
+                          </a:rPr>
+                          <m:t>𝑥</m:t>
+                        </m:r>
+                      </m:e>
+                      <m:sub>
+                        <m:r>
+                          <a:rPr lang="en-US" b="0" i="1" dirty="0" smtClean="0">
+                            <a:latin typeface="Cambria Math" panose="02040503050406030204" pitchFamily="18" charset="0"/>
+                          </a:rPr>
+                          <m:t>1</m:t>
+                        </m:r>
+                      </m:sub>
+                    </m:sSub>
+                    <m:r>
+                      <a:rPr lang="ar-AE" i="1" dirty="0" smtClean="0">
+                        <a:latin typeface="Cambria Math" panose="02040503050406030204" pitchFamily="18" charset="0"/>
+                      </a:rPr>
+                      <m:t>, …, </m:t>
+                    </m:r>
+                    <m:sSub>
+                      <m:sSubPr>
+                        <m:ctrlPr>
+                          <a:rPr lang="ar-AE" i="1" dirty="0" smtClean="0">
+                            <a:latin typeface="Cambria Math" panose="02040503050406030204" pitchFamily="18" charset="0"/>
+                          </a:rPr>
+                        </m:ctrlPr>
+                      </m:sSubPr>
+                      <m:e>
+                        <m:r>
+                          <a:rPr lang="ar-AE" i="1" dirty="0">
+                            <a:latin typeface="Cambria Math" panose="02040503050406030204" pitchFamily="18" charset="0"/>
+                          </a:rPr>
+                          <m:t>𝑥</m:t>
+                        </m:r>
+                      </m:e>
+                      <m:sub>
+                        <m:r>
+                          <a:rPr lang="en-US" i="1" dirty="0">
+                            <a:latin typeface="Cambria Math" panose="02040503050406030204" pitchFamily="18" charset="0"/>
+                          </a:rPr>
+                          <m:t>ₙ</m:t>
+                        </m:r>
+                        <m:r>
+                          <a:rPr lang="en-US" i="1" dirty="0">
+                            <a:latin typeface="Cambria Math" panose="02040503050406030204" pitchFamily="18" charset="0"/>
+                          </a:rPr>
+                          <m:t>₀</m:t>
+                        </m:r>
+                      </m:sub>
+                    </m:sSub>
+                    <m:r>
+                      <a:rPr lang="ar-AE" i="1" dirty="0" smtClean="0">
+                        <a:latin typeface="Cambria Math" panose="02040503050406030204" pitchFamily="18" charset="0"/>
+                      </a:rPr>
+                      <m:t>}</m:t>
+                    </m:r>
+                  </m:oMath>
+                </a14:m>
+                <a:r>
+                  <a:rPr lang="ar-AE" dirty="0"/>
+                  <a:t> </a:t>
+                </a:r>
+                <a:r>
+                  <a:rPr lang="en-US" dirty="0"/>
+                  <a:t>and evaluate </a:t>
+                </a:r>
+                <a14:m>
+                  <m:oMath xmlns:m="http://schemas.openxmlformats.org/officeDocument/2006/math">
+                    <m:r>
+                      <a:rPr lang="en-US" i="1" dirty="0" smtClean="0">
+                        <a:latin typeface="Cambria Math" panose="02040503050406030204" pitchFamily="18" charset="0"/>
+                      </a:rPr>
+                      <m:t>𝑦</m:t>
+                    </m:r>
+                    <m:r>
+                      <a:rPr lang="en-US" i="1" dirty="0" smtClean="0">
+                        <a:latin typeface="Cambria Math" panose="02040503050406030204" pitchFamily="18" charset="0"/>
+                      </a:rPr>
+                      <m:t>ᵢ = </m:t>
+                    </m:r>
+                    <m:r>
+                      <a:rPr lang="en-US" i="1" dirty="0" smtClean="0">
+                        <a:latin typeface="Cambria Math" panose="02040503050406030204" pitchFamily="18" charset="0"/>
+                      </a:rPr>
+                      <m:t>𝑓</m:t>
+                    </m:r>
+                    <m:r>
+                      <a:rPr lang="en-US" i="1" dirty="0" smtClean="0">
+                        <a:latin typeface="Cambria Math" panose="02040503050406030204" pitchFamily="18" charset="0"/>
+                      </a:rPr>
+                      <m:t>(</m:t>
+                    </m:r>
+                    <m:r>
+                      <a:rPr lang="en-US" i="1" dirty="0" smtClean="0">
+                        <a:latin typeface="Cambria Math" panose="02040503050406030204" pitchFamily="18" charset="0"/>
+                      </a:rPr>
+                      <m:t>𝑥</m:t>
+                    </m:r>
+                    <m:r>
+                      <a:rPr lang="en-US" i="1" dirty="0" smtClean="0">
+                        <a:latin typeface="Cambria Math" panose="02040503050406030204" pitchFamily="18" charset="0"/>
+                      </a:rPr>
+                      <m:t>ᵢ)</m:t>
+                    </m:r>
+                  </m:oMath>
+                </a14:m>
+                <a:endParaRPr dirty="0"/>
+              </a:p>
+            </p:txBody>
+          </p:sp>
+        </mc:Choice>
+        <mc:Fallback xmlns="">
+          <p:sp>
+            <p:nvSpPr>
+              <p:cNvPr id="5" name="TextBox 4"/>
+              <p:cNvSpPr txBox="1">
+                <a:spLocks noRot="1" noChangeAspect="1" noMove="1" noResize="1" noEditPoints="1" noAdjustHandles="1" noChangeArrowheads="1" noChangeShapeType="1" noTextEdit="1"/>
+              </p:cNvSpPr>
+              <p:nvPr/>
+            </p:nvSpPr>
+            <p:spPr>
+              <a:xfrm>
+                <a:off x="822960" y="1572768"/>
+                <a:ext cx="9601200" cy="384529"/>
+              </a:xfrm>
+              <a:prstGeom prst="rect">
+                <a:avLst/>
+              </a:prstGeom>
+              <a:blipFill>
+                <a:blip r:embed="rId3"/>
+                <a:stretch>
+                  <a:fillRect l="-508" t="-7937" b="-25397"/>
+                </a:stretch>
+              </a:blipFill>
+            </p:spPr>
+            <p:txBody>
+              <a:bodyPr/>
+              <a:lstStyle/>
+              <a:p>
+                <a:r>
+                  <a:rPr lang="en-US">
+                    <a:noFill/>
+                  </a:rPr>
+                  <a:t> </a:t>
+                </a:r>
+              </a:p>
+            </p:txBody>
+          </p:sp>
+        </mc:Fallback>
+      </mc:AlternateContent>
+      <mc:AlternateContent xmlns:mc="http://schemas.openxmlformats.org/markup-compatibility/2006" xmlns:a14="http://schemas.microsoft.com/office/drawing/2010/main">
+        <mc:Choice Requires="a14">
+          <p:sp>
+            <p:nvSpPr>
+              <p:cNvPr id="6" name="TextBox 5"/>
+              <p:cNvSpPr txBox="1"/>
+              <p:nvPr/>
+            </p:nvSpPr>
+            <p:spPr>
+              <a:xfrm>
+                <a:off x="822960" y="1956816"/>
+                <a:ext cx="9601200" cy="369332"/>
+              </a:xfrm>
+              <a:prstGeom prst="rect">
+                <a:avLst/>
+              </a:prstGeom>
+              <a:noFill/>
+            </p:spPr>
+            <p:txBody>
+              <a:bodyPr wrap="square">
+                <a:spAutoFit/>
+              </a:bodyPr>
+              <a:lstStyle/>
+              <a:p>
+                <a:pPr algn="l">
+                  <a:defRPr sz="1800" b="0">
+                    <a:solidFill>
+                      <a:srgbClr val="444444"/>
+                    </a:solidFill>
+                    <a:latin typeface="Nunito"/>
+                  </a:defRPr>
+                </a:pPr>
+                <a:r>
+                  <a:rPr dirty="0"/>
+                  <a:t>2.  for </a:t>
+                </a:r>
+                <a14:m>
+                  <m:oMath xmlns:m="http://schemas.openxmlformats.org/officeDocument/2006/math">
+                    <m:r>
+                      <a:rPr lang="en-US" i="1" dirty="0" smtClean="0">
+                        <a:latin typeface="Cambria Math" panose="02040503050406030204" pitchFamily="18" charset="0"/>
+                      </a:rPr>
+                      <m:t>𝑡</m:t>
+                    </m:r>
+                    <m:r>
+                      <a:rPr lang="en-US" i="1" dirty="0" smtClean="0">
+                        <a:latin typeface="Cambria Math" panose="02040503050406030204" pitchFamily="18" charset="0"/>
+                      </a:rPr>
+                      <m:t> = </m:t>
+                    </m:r>
+                    <m:r>
+                      <a:rPr lang="en-US" i="1" dirty="0" smtClean="0">
+                        <a:latin typeface="Cambria Math" panose="02040503050406030204" pitchFamily="18" charset="0"/>
+                      </a:rPr>
+                      <m:t>𝑛</m:t>
+                    </m:r>
+                    <m:r>
+                      <a:rPr lang="en-US" i="1" dirty="0" smtClean="0">
+                        <a:latin typeface="Cambria Math" panose="02040503050406030204" pitchFamily="18" charset="0"/>
+                      </a:rPr>
+                      <m:t>₀</m:t>
+                    </m:r>
+                    <m:r>
+                      <a:rPr lang="en-US" i="1" dirty="0" smtClean="0">
+                        <a:latin typeface="Cambria Math" panose="02040503050406030204" pitchFamily="18" charset="0"/>
+                      </a:rPr>
+                      <m:t> + </m:t>
+                    </m:r>
+                    <m:r>
+                      <a:rPr lang="en-US" i="1" dirty="0" smtClean="0">
+                        <a:latin typeface="Cambria Math" panose="02040503050406030204" pitchFamily="18" charset="0"/>
+                      </a:rPr>
+                      <m:t>1</m:t>
+                    </m:r>
+                    <m:r>
+                      <a:rPr lang="en-US" i="1" dirty="0" smtClean="0">
+                        <a:latin typeface="Cambria Math" panose="02040503050406030204" pitchFamily="18" charset="0"/>
+                      </a:rPr>
+                      <m:t> </m:t>
+                    </m:r>
+                  </m:oMath>
+                </a14:m>
+                <a:r>
+                  <a:rPr b="1" dirty="0"/>
+                  <a:t>to</a:t>
+                </a:r>
+                <a:r>
+                  <a:rPr dirty="0"/>
+                  <a:t> </a:t>
+                </a:r>
+                <a14:m>
+                  <m:oMath xmlns:m="http://schemas.openxmlformats.org/officeDocument/2006/math">
+                    <m:r>
+                      <a:rPr lang="en-US" i="1" dirty="0" smtClean="0">
+                        <a:latin typeface="Cambria Math" panose="02040503050406030204" pitchFamily="18" charset="0"/>
+                      </a:rPr>
+                      <m:t>𝑇</m:t>
+                    </m:r>
+                  </m:oMath>
+                </a14:m>
+                <a:r>
+                  <a:rPr dirty="0"/>
+                  <a:t> </a:t>
+                </a:r>
+                <a:r>
+                  <a:rPr b="1" dirty="0"/>
+                  <a:t>do</a:t>
+                </a:r>
+              </a:p>
+            </p:txBody>
+          </p:sp>
+        </mc:Choice>
+        <mc:Fallback xmlns="">
+          <p:sp>
+            <p:nvSpPr>
+              <p:cNvPr id="6" name="TextBox 5"/>
+              <p:cNvSpPr txBox="1">
+                <a:spLocks noRot="1" noChangeAspect="1" noMove="1" noResize="1" noEditPoints="1" noAdjustHandles="1" noChangeArrowheads="1" noChangeShapeType="1" noTextEdit="1"/>
+              </p:cNvSpPr>
+              <p:nvPr/>
+            </p:nvSpPr>
+            <p:spPr>
+              <a:xfrm>
+                <a:off x="822960" y="1956816"/>
+                <a:ext cx="9601200" cy="369332"/>
+              </a:xfrm>
+              <a:prstGeom prst="rect">
+                <a:avLst/>
+              </a:prstGeom>
+              <a:blipFill>
+                <a:blip r:embed="rId4"/>
+                <a:stretch>
+                  <a:fillRect l="-508" t="-6557" b="-26230"/>
+                </a:stretch>
+              </a:blipFill>
+            </p:spPr>
+            <p:txBody>
+              <a:bodyPr/>
+              <a:lstStyle/>
+              <a:p>
+                <a:r>
+                  <a:rPr lang="en-US">
+                    <a:noFill/>
+                  </a:rPr>
+                  <a:t> </a:t>
+                </a:r>
+              </a:p>
+            </p:txBody>
+          </p:sp>
+        </mc:Fallback>
+      </mc:AlternateContent>
+      <mc:AlternateContent xmlns:mc="http://schemas.openxmlformats.org/markup-compatibility/2006" xmlns:a14="http://schemas.microsoft.com/office/drawing/2010/main">
+        <mc:Choice Requires="a14">
+          <p:sp>
+            <p:nvSpPr>
+              <p:cNvPr id="7" name="TextBox 6"/>
+              <p:cNvSpPr txBox="1"/>
+              <p:nvPr/>
+            </p:nvSpPr>
+            <p:spPr>
+              <a:xfrm>
+                <a:off x="822960" y="2340864"/>
+                <a:ext cx="9601200" cy="395621"/>
+              </a:xfrm>
+              <a:prstGeom prst="rect">
+                <a:avLst/>
+              </a:prstGeom>
+              <a:noFill/>
+            </p:spPr>
+            <p:txBody>
+              <a:bodyPr wrap="square">
+                <a:spAutoFit/>
+              </a:bodyPr>
+              <a:lstStyle/>
+              <a:p>
+                <a:pPr>
+                  <a:defRPr sz="1800" b="0">
+                    <a:solidFill>
+                      <a:srgbClr val="444444"/>
+                    </a:solidFill>
+                    <a:latin typeface="Nunito"/>
+                  </a:defRPr>
+                </a:pPr>
+                <a:r>
+                  <a:rPr lang="en-US" dirty="0"/>
+                  <a:t>      a.  Fit GP to data </a:t>
+                </a:r>
+                <a14:m>
+                  <m:oMath xmlns:m="http://schemas.openxmlformats.org/officeDocument/2006/math">
+                    <m:sSub>
+                      <m:sSubPr>
+                        <m:ctrlPr>
+                          <a:rPr lang="ar-AE" i="1" dirty="0" smtClean="0">
+                            <a:latin typeface="Cambria Math" panose="02040503050406030204" pitchFamily="18" charset="0"/>
+                          </a:rPr>
+                        </m:ctrlPr>
+                      </m:sSubPr>
+                      <m:e>
+                        <m:r>
+                          <a:rPr lang="ar-AE" i="1" dirty="0" smtClean="0">
+                            <a:latin typeface="Cambria Math" panose="02040503050406030204" pitchFamily="18" charset="0"/>
+                            <a:ea typeface="Cambria Math" panose="02040503050406030204" pitchFamily="18" charset="0"/>
+                          </a:rPr>
+                          <m:t>𝒟</m:t>
+                        </m:r>
+                      </m:e>
+                      <m:sub>
+                        <m:r>
+                          <a:rPr lang="en-US" b="0" i="1" dirty="0" smtClean="0">
+                            <a:latin typeface="Cambria Math" panose="02040503050406030204" pitchFamily="18" charset="0"/>
+                          </a:rPr>
+                          <m:t>𝑡</m:t>
+                        </m:r>
+                        <m:r>
+                          <a:rPr lang="en-US" b="0" i="1" dirty="0" smtClean="0">
+                            <a:latin typeface="Cambria Math" panose="02040503050406030204" pitchFamily="18" charset="0"/>
+                          </a:rPr>
+                          <m:t>−</m:t>
+                        </m:r>
+                        <m:r>
+                          <a:rPr lang="en-US" b="0" i="1" dirty="0" smtClean="0">
+                            <a:latin typeface="Cambria Math" panose="02040503050406030204" pitchFamily="18" charset="0"/>
+                          </a:rPr>
+                          <m:t>1</m:t>
+                        </m:r>
+                      </m:sub>
+                    </m:sSub>
+                    <m:r>
+                      <a:rPr lang="ar-AE" i="1" dirty="0" smtClean="0">
+                        <a:latin typeface="Cambria Math" panose="02040503050406030204" pitchFamily="18" charset="0"/>
+                      </a:rPr>
+                      <m:t> = </m:t>
+                    </m:r>
+                    <m:sSubSup>
+                      <m:sSubSupPr>
+                        <m:ctrlPr>
+                          <a:rPr lang="en-US" i="1" dirty="0" smtClean="0">
+                            <a:latin typeface="Cambria Math" panose="02040503050406030204" pitchFamily="18" charset="0"/>
+                          </a:rPr>
+                        </m:ctrlPr>
+                      </m:sSubSupPr>
+                      <m:e>
+                        <m:r>
+                          <a:rPr lang="ar-AE" i="1" dirty="0">
+                            <a:latin typeface="Cambria Math" panose="02040503050406030204" pitchFamily="18" charset="0"/>
+                          </a:rPr>
+                          <m:t>{(</m:t>
+                        </m:r>
+                        <m:r>
+                          <a:rPr lang="ar-AE" i="1" dirty="0">
+                            <a:latin typeface="Cambria Math" panose="02040503050406030204" pitchFamily="18" charset="0"/>
+                          </a:rPr>
+                          <m:t>𝑥</m:t>
+                        </m:r>
+                        <m:r>
+                          <a:rPr lang="en-US" i="1" dirty="0">
+                            <a:latin typeface="Cambria Math" panose="02040503050406030204" pitchFamily="18" charset="0"/>
+                          </a:rPr>
+                          <m:t>ᵢ, </m:t>
+                        </m:r>
+                        <m:r>
+                          <a:rPr lang="en-US" i="1" dirty="0">
+                            <a:latin typeface="Cambria Math" panose="02040503050406030204" pitchFamily="18" charset="0"/>
+                          </a:rPr>
+                          <m:t>𝑦</m:t>
+                        </m:r>
+                        <m:r>
+                          <a:rPr lang="en-US" i="1" dirty="0">
+                            <a:latin typeface="Cambria Math" panose="02040503050406030204" pitchFamily="18" charset="0"/>
+                          </a:rPr>
+                          <m:t>ᵢ)}</m:t>
+                        </m:r>
+                      </m:e>
+                      <m:sub>
+                        <m:r>
+                          <a:rPr lang="en-US" b="0" i="1" dirty="0" smtClean="0">
+                            <a:latin typeface="Cambria Math" panose="02040503050406030204" pitchFamily="18" charset="0"/>
+                          </a:rPr>
+                          <m:t>𝑖</m:t>
+                        </m:r>
+                        <m:r>
+                          <a:rPr lang="en-US" b="0" i="1" dirty="0" smtClean="0">
+                            <a:latin typeface="Cambria Math" panose="02040503050406030204" pitchFamily="18" charset="0"/>
+                          </a:rPr>
+                          <m:t>=</m:t>
+                        </m:r>
+                        <m:r>
+                          <a:rPr lang="en-US" b="0" i="1" dirty="0" smtClean="0">
+                            <a:latin typeface="Cambria Math" panose="02040503050406030204" pitchFamily="18" charset="0"/>
+                          </a:rPr>
+                          <m:t>1</m:t>
+                        </m:r>
+                      </m:sub>
+                      <m:sup>
+                        <m:r>
+                          <a:rPr lang="en-US" b="0" i="1" dirty="0" smtClean="0">
+                            <a:latin typeface="Cambria Math" panose="02040503050406030204" pitchFamily="18" charset="0"/>
+                          </a:rPr>
+                          <m:t>𝑡</m:t>
+                        </m:r>
+                        <m:r>
+                          <a:rPr lang="en-US" b="0" i="1" dirty="0" smtClean="0">
+                            <a:latin typeface="Cambria Math" panose="02040503050406030204" pitchFamily="18" charset="0"/>
+                          </a:rPr>
+                          <m:t>−</m:t>
+                        </m:r>
+                        <m:r>
+                          <a:rPr lang="en-US" b="0" i="1" dirty="0" smtClean="0">
+                            <a:latin typeface="Cambria Math" panose="02040503050406030204" pitchFamily="18" charset="0"/>
+                          </a:rPr>
+                          <m:t>1</m:t>
+                        </m:r>
+                      </m:sup>
+                    </m:sSubSup>
+                  </m:oMath>
+                </a14:m>
+                <a:endParaRPr dirty="0"/>
+              </a:p>
+            </p:txBody>
+          </p:sp>
+        </mc:Choice>
+        <mc:Fallback xmlns="">
+          <p:sp>
+            <p:nvSpPr>
+              <p:cNvPr id="7" name="TextBox 6"/>
+              <p:cNvSpPr txBox="1">
+                <a:spLocks noRot="1" noChangeAspect="1" noMove="1" noResize="1" noEditPoints="1" noAdjustHandles="1" noChangeArrowheads="1" noChangeShapeType="1" noTextEdit="1"/>
+              </p:cNvSpPr>
+              <p:nvPr/>
+            </p:nvSpPr>
+            <p:spPr>
+              <a:xfrm>
+                <a:off x="822960" y="2340864"/>
+                <a:ext cx="9601200" cy="395621"/>
+              </a:xfrm>
+              <a:prstGeom prst="rect">
+                <a:avLst/>
+              </a:prstGeom>
+              <a:blipFill>
+                <a:blip r:embed="rId5"/>
+                <a:stretch>
+                  <a:fillRect t="-3077" b="-21538"/>
+                </a:stretch>
+              </a:blipFill>
+            </p:spPr>
+            <p:txBody>
+              <a:bodyPr/>
+              <a:lstStyle/>
+              <a:p>
+                <a:r>
+                  <a:rPr lang="en-US">
+                    <a:noFill/>
+                  </a:rPr>
+                  <a:t> </a:t>
+                </a:r>
+              </a:p>
+            </p:txBody>
+          </p:sp>
+        </mc:Fallback>
+      </mc:AlternateContent>
+      <mc:AlternateContent xmlns:mc="http://schemas.openxmlformats.org/markup-compatibility/2006" xmlns:a14="http://schemas.microsoft.com/office/drawing/2010/main">
+        <mc:Choice Requires="a14">
+          <p:sp>
+            <p:nvSpPr>
+              <p:cNvPr id="8" name="TextBox 7"/>
+              <p:cNvSpPr txBox="1"/>
+              <p:nvPr/>
+            </p:nvSpPr>
+            <p:spPr>
+              <a:xfrm>
+                <a:off x="822960" y="2724912"/>
+                <a:ext cx="9601200" cy="369332"/>
+              </a:xfrm>
+              <a:prstGeom prst="rect">
+                <a:avLst/>
+              </a:prstGeom>
+              <a:noFill/>
+            </p:spPr>
+            <p:txBody>
+              <a:bodyPr wrap="square">
+                <a:spAutoFit/>
+              </a:bodyPr>
+              <a:lstStyle/>
+              <a:p>
+                <a:pPr algn="l">
+                  <a:defRPr sz="1800" b="0">
+                    <a:solidFill>
+                      <a:srgbClr val="444444"/>
+                    </a:solidFill>
+                    <a:latin typeface="Nunito"/>
+                  </a:defRPr>
+                </a:pPr>
+                <a:r>
+                  <a:rPr dirty="0"/>
+                  <a:t>      b.  Compute </a:t>
+                </a:r>
+                <a14:m>
+                  <m:oMath xmlns:m="http://schemas.openxmlformats.org/officeDocument/2006/math">
+                    <m:r>
+                      <a:rPr lang="en-US" i="1" dirty="0" smtClean="0">
+                        <a:latin typeface="Cambria Math" panose="02040503050406030204" pitchFamily="18" charset="0"/>
+                      </a:rPr>
+                      <m:t>𝛼</m:t>
+                    </m:r>
+                    <m:r>
+                      <a:rPr lang="en-US" i="1" dirty="0" smtClean="0">
+                        <a:latin typeface="Cambria Math" panose="02040503050406030204" pitchFamily="18" charset="0"/>
+                      </a:rPr>
+                      <m:t>(</m:t>
+                    </m:r>
+                    <m:r>
+                      <a:rPr lang="en-US" i="1" dirty="0" smtClean="0">
+                        <a:latin typeface="Cambria Math" panose="02040503050406030204" pitchFamily="18" charset="0"/>
+                      </a:rPr>
+                      <m:t>𝑥</m:t>
+                    </m:r>
+                    <m:r>
+                      <a:rPr lang="en-US" i="1" dirty="0" smtClean="0">
+                        <a:latin typeface="Cambria Math" panose="02040503050406030204" pitchFamily="18" charset="0"/>
+                      </a:rPr>
+                      <m:t>)</m:t>
+                    </m:r>
+                  </m:oMath>
+                </a14:m>
+                <a:r>
+                  <a:rPr dirty="0"/>
+                  <a:t> using GP posterior </a:t>
+                </a:r>
+                <a14:m>
+                  <m:oMath xmlns:m="http://schemas.openxmlformats.org/officeDocument/2006/math">
+                    <m:r>
+                      <a:rPr lang="en-US" i="1" dirty="0" smtClean="0">
+                        <a:latin typeface="Cambria Math" panose="02040503050406030204" pitchFamily="18" charset="0"/>
+                      </a:rPr>
+                      <m:t>𝜇</m:t>
+                    </m:r>
+                    <m:r>
+                      <a:rPr lang="en-US" i="1" dirty="0" smtClean="0">
+                        <a:latin typeface="Cambria Math" panose="02040503050406030204" pitchFamily="18" charset="0"/>
+                      </a:rPr>
+                      <m:t>(</m:t>
+                    </m:r>
+                    <m:r>
+                      <a:rPr lang="en-US" i="1" dirty="0" smtClean="0">
+                        <a:latin typeface="Cambria Math" panose="02040503050406030204" pitchFamily="18" charset="0"/>
+                      </a:rPr>
+                      <m:t>𝑥</m:t>
+                    </m:r>
+                    <m:r>
+                      <a:rPr lang="en-US" i="1" dirty="0" smtClean="0">
+                        <a:latin typeface="Cambria Math" panose="02040503050406030204" pitchFamily="18" charset="0"/>
+                      </a:rPr>
+                      <m:t>), </m:t>
+                    </m:r>
+                    <m:r>
+                      <a:rPr lang="en-US" i="1" dirty="0" smtClean="0">
+                        <a:latin typeface="Cambria Math" panose="02040503050406030204" pitchFamily="18" charset="0"/>
+                      </a:rPr>
+                      <m:t>𝜎</m:t>
+                    </m:r>
+                    <m:r>
+                      <a:rPr lang="en-US" i="1" dirty="0" smtClean="0">
+                        <a:latin typeface="Cambria Math" panose="02040503050406030204" pitchFamily="18" charset="0"/>
+                      </a:rPr>
+                      <m:t>(</m:t>
+                    </m:r>
+                    <m:r>
+                      <a:rPr lang="en-US" i="1" dirty="0" smtClean="0">
+                        <a:latin typeface="Cambria Math" panose="02040503050406030204" pitchFamily="18" charset="0"/>
+                      </a:rPr>
+                      <m:t>𝑥</m:t>
+                    </m:r>
+                    <m:r>
+                      <a:rPr lang="en-US" i="1" dirty="0" smtClean="0">
+                        <a:latin typeface="Cambria Math" panose="02040503050406030204" pitchFamily="18" charset="0"/>
+                      </a:rPr>
+                      <m:t>)</m:t>
+                    </m:r>
+                  </m:oMath>
+                </a14:m>
+                <a:endParaRPr dirty="0"/>
+              </a:p>
+            </p:txBody>
+          </p:sp>
+        </mc:Choice>
+        <mc:Fallback xmlns="">
+          <p:sp>
+            <p:nvSpPr>
+              <p:cNvPr id="8" name="TextBox 7"/>
+              <p:cNvSpPr txBox="1">
+                <a:spLocks noRot="1" noChangeAspect="1" noMove="1" noResize="1" noEditPoints="1" noAdjustHandles="1" noChangeArrowheads="1" noChangeShapeType="1" noTextEdit="1"/>
+              </p:cNvSpPr>
+              <p:nvPr/>
+            </p:nvSpPr>
+            <p:spPr>
+              <a:xfrm>
+                <a:off x="822960" y="2724912"/>
+                <a:ext cx="9601200" cy="369332"/>
+              </a:xfrm>
+              <a:prstGeom prst="rect">
+                <a:avLst/>
+              </a:prstGeom>
+              <a:blipFill>
+                <a:blip r:embed="rId6"/>
+                <a:stretch>
+                  <a:fillRect t="-6557" b="-26230"/>
+                </a:stretch>
+              </a:blipFill>
+            </p:spPr>
+            <p:txBody>
+              <a:bodyPr/>
+              <a:lstStyle/>
+              <a:p>
+                <a:r>
+                  <a:rPr lang="en-US">
+                    <a:noFill/>
+                  </a:rPr>
+                  <a:t> </a:t>
+                </a:r>
+              </a:p>
+            </p:txBody>
+          </p:sp>
+        </mc:Fallback>
+      </mc:AlternateContent>
+      <mc:AlternateContent xmlns:mc="http://schemas.openxmlformats.org/markup-compatibility/2006" xmlns:a14="http://schemas.microsoft.com/office/drawing/2010/main">
+        <mc:Choice Requires="a14">
+          <p:sp>
+            <p:nvSpPr>
+              <p:cNvPr id="9" name="TextBox 8"/>
+              <p:cNvSpPr txBox="1"/>
+              <p:nvPr/>
+            </p:nvSpPr>
+            <p:spPr>
+              <a:xfrm>
+                <a:off x="822960" y="3108960"/>
+                <a:ext cx="9601200" cy="393890"/>
+              </a:xfrm>
+              <a:prstGeom prst="rect">
+                <a:avLst/>
+              </a:prstGeom>
+              <a:noFill/>
+            </p:spPr>
+            <p:txBody>
+              <a:bodyPr wrap="square">
+                <a:spAutoFit/>
+              </a:bodyPr>
+              <a:lstStyle/>
+              <a:p>
+                <a:pPr>
+                  <a:defRPr sz="1800" b="0">
+                    <a:solidFill>
+                      <a:srgbClr val="444444"/>
+                    </a:solidFill>
+                    <a:latin typeface="Nunito"/>
+                  </a:defRPr>
+                </a:pPr>
+                <a:r>
+                  <a:rPr lang="en-US" dirty="0"/>
+                  <a:t>      c.  </a:t>
+                </a:r>
+                <a14:m>
+                  <m:oMath xmlns:m="http://schemas.openxmlformats.org/officeDocument/2006/math">
+                    <m:r>
+                      <a:rPr lang="en-US" i="1" dirty="0" smtClean="0">
+                        <a:latin typeface="Cambria Math" panose="02040503050406030204" pitchFamily="18" charset="0"/>
+                      </a:rPr>
+                      <m:t>𝑥</m:t>
+                    </m:r>
+                    <m:r>
+                      <a:rPr lang="en-US" i="1" dirty="0" smtClean="0">
+                        <a:latin typeface="Cambria Math" panose="02040503050406030204" pitchFamily="18" charset="0"/>
+                      </a:rPr>
+                      <m:t>ₜ = </m:t>
+                    </m:r>
+                    <m:sSub>
+                      <m:sSubPr>
+                        <m:ctrlPr>
+                          <a:rPr lang="ar-AE" i="1" dirty="0" smtClean="0">
+                            <a:latin typeface="Cambria Math" panose="02040503050406030204" pitchFamily="18" charset="0"/>
+                          </a:rPr>
+                        </m:ctrlPr>
+                      </m:sSubPr>
+                      <m:e>
+                        <m:r>
+                          <m:rPr>
+                            <m:nor/>
+                          </m:rPr>
+                          <a:rPr lang="en-US" dirty="0">
+                            <a:latin typeface="Cambria Math" panose="02040503050406030204" pitchFamily="18" charset="0"/>
+                          </a:rPr>
+                          <m:t>arg</m:t>
+                        </m:r>
+                        <m:r>
+                          <m:rPr>
+                            <m:nor/>
+                          </m:rPr>
+                          <a:rPr lang="en-US" b="0" i="0" dirty="0" smtClean="0">
+                            <a:latin typeface="Cambria Math" panose="02040503050406030204" pitchFamily="18" charset="0"/>
+                          </a:rPr>
+                          <m:t> </m:t>
+                        </m:r>
+                        <m:r>
+                          <m:rPr>
+                            <m:nor/>
+                          </m:rPr>
+                          <a:rPr lang="en-US" dirty="0">
+                            <a:latin typeface="Cambria Math" panose="02040503050406030204" pitchFamily="18" charset="0"/>
+                          </a:rPr>
+                          <m:t>max</m:t>
+                        </m:r>
+                      </m:e>
+                      <m:sub>
+                        <m:r>
+                          <a:rPr lang="ar-AE" b="0" i="1" dirty="0" smtClean="0">
+                            <a:latin typeface="Cambria Math" panose="02040503050406030204" pitchFamily="18" charset="0"/>
+                          </a:rPr>
+                          <m:t>𝑥</m:t>
+                        </m:r>
+                        <m:r>
+                          <a:rPr lang="ar-AE" b="0" i="1" dirty="0" smtClean="0">
+                            <a:latin typeface="Cambria Math" panose="02040503050406030204" pitchFamily="18" charset="0"/>
+                            <a:ea typeface="Cambria Math" panose="02040503050406030204" pitchFamily="18" charset="0"/>
+                          </a:rPr>
+                          <m:t>∈</m:t>
+                        </m:r>
+                        <m:r>
+                          <a:rPr lang="ar-AE" b="0" i="1" dirty="0" smtClean="0">
+                            <a:latin typeface="Cambria Math" panose="02040503050406030204" pitchFamily="18" charset="0"/>
+                            <a:ea typeface="Cambria Math" panose="02040503050406030204" pitchFamily="18" charset="0"/>
+                          </a:rPr>
+                          <m:t>𝜒</m:t>
+                        </m:r>
+                      </m:sub>
+                    </m:sSub>
+                    <m:r>
+                      <a:rPr lang="ar-AE" i="1" dirty="0" smtClean="0">
+                        <a:latin typeface="Cambria Math" panose="02040503050406030204" pitchFamily="18" charset="0"/>
+                      </a:rPr>
+                      <m:t> </m:t>
+                    </m:r>
+                    <m:r>
+                      <a:rPr lang="ar-AE" i="1" dirty="0" smtClean="0">
+                        <a:latin typeface="Cambria Math" panose="02040503050406030204" pitchFamily="18" charset="0"/>
+                      </a:rPr>
+                      <m:t>𝛼</m:t>
+                    </m:r>
+                    <m:r>
+                      <a:rPr lang="ar-AE" i="1" dirty="0" smtClean="0">
+                        <a:latin typeface="Cambria Math" panose="02040503050406030204" pitchFamily="18" charset="0"/>
+                      </a:rPr>
+                      <m:t>(</m:t>
+                    </m:r>
+                    <m:r>
+                      <a:rPr lang="ar-AE" i="1" dirty="0" smtClean="0">
+                        <a:latin typeface="Cambria Math" panose="02040503050406030204" pitchFamily="18" charset="0"/>
+                      </a:rPr>
+                      <m:t>𝑥</m:t>
+                    </m:r>
+                    <m:r>
+                      <a:rPr lang="ar-AE" i="1" dirty="0" smtClean="0">
+                        <a:latin typeface="Cambria Math" panose="02040503050406030204" pitchFamily="18" charset="0"/>
+                      </a:rPr>
+                      <m:t>)</m:t>
+                    </m:r>
+                  </m:oMath>
+                </a14:m>
+                <a:endParaRPr dirty="0"/>
+              </a:p>
+            </p:txBody>
+          </p:sp>
+        </mc:Choice>
+        <mc:Fallback xmlns="">
+          <p:sp>
+            <p:nvSpPr>
+              <p:cNvPr id="9" name="TextBox 8"/>
+              <p:cNvSpPr txBox="1">
+                <a:spLocks noRot="1" noChangeAspect="1" noMove="1" noResize="1" noEditPoints="1" noAdjustHandles="1" noChangeArrowheads="1" noChangeShapeType="1" noTextEdit="1"/>
+              </p:cNvSpPr>
+              <p:nvPr/>
+            </p:nvSpPr>
+            <p:spPr>
+              <a:xfrm>
+                <a:off x="822960" y="3108960"/>
+                <a:ext cx="9601200" cy="393890"/>
+              </a:xfrm>
+              <a:prstGeom prst="rect">
+                <a:avLst/>
+              </a:prstGeom>
+              <a:blipFill>
+                <a:blip r:embed="rId7"/>
+                <a:stretch>
+                  <a:fillRect t="-3077" b="-21538"/>
+                </a:stretch>
+              </a:blipFill>
+            </p:spPr>
+            <p:txBody>
+              <a:bodyPr/>
+              <a:lstStyle/>
+              <a:p>
+                <a:r>
+                  <a:rPr lang="en-US">
+                    <a:noFill/>
+                  </a:rPr>
+                  <a:t> </a:t>
+                </a:r>
+              </a:p>
+            </p:txBody>
+          </p:sp>
+        </mc:Fallback>
+      </mc:AlternateContent>
+      <mc:AlternateContent xmlns:mc="http://schemas.openxmlformats.org/markup-compatibility/2006" xmlns:a14="http://schemas.microsoft.com/office/drawing/2010/main">
+        <mc:Choice Requires="a14">
+          <p:sp>
+            <p:nvSpPr>
+              <p:cNvPr id="10" name="TextBox 9"/>
+              <p:cNvSpPr txBox="1"/>
+              <p:nvPr/>
+            </p:nvSpPr>
+            <p:spPr>
+              <a:xfrm>
+                <a:off x="822960" y="3493008"/>
+                <a:ext cx="9601200" cy="369332"/>
+              </a:xfrm>
+              <a:prstGeom prst="rect">
+                <a:avLst/>
+              </a:prstGeom>
+              <a:noFill/>
+            </p:spPr>
+            <p:txBody>
+              <a:bodyPr wrap="square">
+                <a:spAutoFit/>
+              </a:bodyPr>
+              <a:lstStyle/>
+              <a:p>
+                <a:pPr algn="l">
+                  <a:defRPr sz="1800" b="0">
+                    <a:solidFill>
+                      <a:srgbClr val="444444"/>
+                    </a:solidFill>
+                    <a:latin typeface="Nunito"/>
+                  </a:defRPr>
+                </a:pPr>
+                <a:r>
+                  <a:rPr dirty="0"/>
+                  <a:t>      d.  </a:t>
+                </a:r>
+                <a14:m>
+                  <m:oMath xmlns:m="http://schemas.openxmlformats.org/officeDocument/2006/math">
+                    <m:r>
+                      <a:rPr lang="en-US" i="1" dirty="0" smtClean="0">
+                        <a:latin typeface="Cambria Math" panose="02040503050406030204" pitchFamily="18" charset="0"/>
+                      </a:rPr>
+                      <m:t>𝑦</m:t>
+                    </m:r>
+                    <m:r>
+                      <a:rPr lang="en-US" i="1" dirty="0" smtClean="0">
+                        <a:latin typeface="Cambria Math" panose="02040503050406030204" pitchFamily="18" charset="0"/>
+                      </a:rPr>
+                      <m:t>ₜ = </m:t>
+                    </m:r>
+                    <m:r>
+                      <a:rPr lang="en-US" i="1" dirty="0" smtClean="0">
+                        <a:latin typeface="Cambria Math" panose="02040503050406030204" pitchFamily="18" charset="0"/>
+                      </a:rPr>
+                      <m:t>𝑓</m:t>
+                    </m:r>
+                    <m:r>
+                      <a:rPr lang="en-US" i="1" dirty="0" smtClean="0">
+                        <a:latin typeface="Cambria Math" panose="02040503050406030204" pitchFamily="18" charset="0"/>
+                      </a:rPr>
+                      <m:t>(</m:t>
+                    </m:r>
+                    <m:r>
+                      <a:rPr lang="en-US" i="1" dirty="0" smtClean="0">
+                        <a:latin typeface="Cambria Math" panose="02040503050406030204" pitchFamily="18" charset="0"/>
+                      </a:rPr>
+                      <m:t>𝑥</m:t>
+                    </m:r>
+                    <m:r>
+                      <a:rPr lang="en-US" i="1" dirty="0" smtClean="0">
+                        <a:latin typeface="Cambria Math" panose="02040503050406030204" pitchFamily="18" charset="0"/>
+                      </a:rPr>
+                      <m:t>ₜ) + </m:t>
+                    </m:r>
+                    <m:r>
+                      <a:rPr lang="en-US" i="1" dirty="0" smtClean="0">
+                        <a:latin typeface="Cambria Math" panose="02040503050406030204" pitchFamily="18" charset="0"/>
+                      </a:rPr>
+                      <m:t>𝜀</m:t>
+                    </m:r>
+                    <m:r>
+                      <a:rPr lang="en-US" i="1" dirty="0" smtClean="0">
+                        <a:latin typeface="Cambria Math" panose="02040503050406030204" pitchFamily="18" charset="0"/>
+                      </a:rPr>
+                      <m:t>     </m:t>
+                    </m:r>
+                  </m:oMath>
+                </a14:m>
+                <a:r>
+                  <a:rPr dirty="0"/>
+                  <a:t>← </a:t>
+                </a:r>
+                <a:r>
+                  <a:rPr i="1" dirty="0"/>
+                  <a:t>the expensive evaluation</a:t>
+                </a:r>
+              </a:p>
+            </p:txBody>
+          </p:sp>
+        </mc:Choice>
+        <mc:Fallback xmlns="">
+          <p:sp>
+            <p:nvSpPr>
+              <p:cNvPr id="10" name="TextBox 9"/>
+              <p:cNvSpPr txBox="1">
+                <a:spLocks noRot="1" noChangeAspect="1" noMove="1" noResize="1" noEditPoints="1" noAdjustHandles="1" noChangeArrowheads="1" noChangeShapeType="1" noTextEdit="1"/>
+              </p:cNvSpPr>
+              <p:nvPr/>
+            </p:nvSpPr>
+            <p:spPr>
+              <a:xfrm>
+                <a:off x="822960" y="3493008"/>
+                <a:ext cx="9601200" cy="369332"/>
+              </a:xfrm>
+              <a:prstGeom prst="rect">
+                <a:avLst/>
+              </a:prstGeom>
+              <a:blipFill>
+                <a:blip r:embed="rId8"/>
+                <a:stretch>
+                  <a:fillRect t="-11475" b="-26230"/>
+                </a:stretch>
+              </a:blipFill>
+            </p:spPr>
+            <p:txBody>
+              <a:bodyPr/>
+              <a:lstStyle/>
+              <a:p>
+                <a:r>
+                  <a:rPr lang="en-US">
+                    <a:noFill/>
+                  </a:rPr>
+                  <a:t> </a:t>
+                </a:r>
+              </a:p>
+            </p:txBody>
+          </p:sp>
+        </mc:Fallback>
+      </mc:AlternateContent>
+      <mc:AlternateContent xmlns:mc="http://schemas.openxmlformats.org/markup-compatibility/2006" xmlns:a14="http://schemas.microsoft.com/office/drawing/2010/main">
+        <mc:Choice Requires="a14">
+          <p:sp>
+            <p:nvSpPr>
+              <p:cNvPr id="11" name="TextBox 10"/>
+              <p:cNvSpPr txBox="1"/>
+              <p:nvPr/>
+            </p:nvSpPr>
+            <p:spPr>
+              <a:xfrm>
+                <a:off x="822960" y="3877056"/>
+                <a:ext cx="9601200" cy="369332"/>
+              </a:xfrm>
+              <a:prstGeom prst="rect">
+                <a:avLst/>
+              </a:prstGeom>
+              <a:noFill/>
+            </p:spPr>
+            <p:txBody>
+              <a:bodyPr wrap="square">
+                <a:spAutoFit/>
+              </a:bodyPr>
+              <a:lstStyle/>
+              <a:p>
+                <a:pPr algn="l">
+                  <a:defRPr sz="1800" b="0">
+                    <a:solidFill>
+                      <a:srgbClr val="444444"/>
+                    </a:solidFill>
+                    <a:latin typeface="Nunito"/>
+                  </a:defRPr>
+                </a:pPr>
+                <a:r>
+                  <a:rPr dirty="0"/>
+                  <a:t>      e.  </a:t>
+                </a:r>
+                <a14:m>
+                  <m:oMath xmlns:m="http://schemas.openxmlformats.org/officeDocument/2006/math">
+                    <m:r>
+                      <a:rPr lang="en-US" i="1" dirty="0" smtClean="0">
+                        <a:latin typeface="Cambria Math" panose="02040503050406030204" pitchFamily="18" charset="0"/>
+                      </a:rPr>
+                      <m:t>𝐷</m:t>
+                    </m:r>
+                    <m:r>
+                      <a:rPr lang="en-US" i="1" dirty="0" smtClean="0">
+                        <a:latin typeface="Cambria Math" panose="02040503050406030204" pitchFamily="18" charset="0"/>
+                      </a:rPr>
+                      <m:t>ₜ = </m:t>
+                    </m:r>
+                    <m:r>
+                      <a:rPr lang="en-US" i="1" dirty="0" smtClean="0">
+                        <a:latin typeface="Cambria Math" panose="02040503050406030204" pitchFamily="18" charset="0"/>
+                      </a:rPr>
+                      <m:t>𝐷</m:t>
+                    </m:r>
+                    <m:r>
+                      <a:rPr lang="en-US" i="1" dirty="0" smtClean="0">
+                        <a:latin typeface="Cambria Math" panose="02040503050406030204" pitchFamily="18" charset="0"/>
+                      </a:rPr>
+                      <m:t>ₜ</m:t>
+                    </m:r>
+                    <m:r>
+                      <a:rPr lang="en-US" i="1" dirty="0" smtClean="0">
+                        <a:latin typeface="Cambria Math" panose="02040503050406030204" pitchFamily="18" charset="0"/>
+                      </a:rPr>
+                      <m:t>₋</m:t>
+                    </m:r>
+                    <m:r>
+                      <a:rPr lang="en-US" i="1" dirty="0" smtClean="0">
+                        <a:latin typeface="Cambria Math" panose="02040503050406030204" pitchFamily="18" charset="0"/>
+                      </a:rPr>
+                      <m:t>₁</m:t>
+                    </m:r>
+                    <m:r>
+                      <a:rPr lang="en-US" i="1" dirty="0" smtClean="0">
+                        <a:latin typeface="Cambria Math" panose="02040503050406030204" pitchFamily="18" charset="0"/>
+                      </a:rPr>
+                      <m:t> ∪ {(</m:t>
+                    </m:r>
+                    <m:r>
+                      <a:rPr lang="en-US" i="1" dirty="0" smtClean="0">
+                        <a:latin typeface="Cambria Math" panose="02040503050406030204" pitchFamily="18" charset="0"/>
+                      </a:rPr>
+                      <m:t>𝑥</m:t>
+                    </m:r>
+                    <m:r>
+                      <a:rPr lang="en-US" i="1" dirty="0" smtClean="0">
+                        <a:latin typeface="Cambria Math" panose="02040503050406030204" pitchFamily="18" charset="0"/>
+                      </a:rPr>
+                      <m:t>ₜ, </m:t>
+                    </m:r>
+                    <m:r>
+                      <a:rPr lang="en-US" i="1" dirty="0" smtClean="0">
+                        <a:latin typeface="Cambria Math" panose="02040503050406030204" pitchFamily="18" charset="0"/>
+                      </a:rPr>
+                      <m:t>𝑦</m:t>
+                    </m:r>
+                    <m:r>
+                      <a:rPr lang="en-US" i="1" dirty="0" smtClean="0">
+                        <a:latin typeface="Cambria Math" panose="02040503050406030204" pitchFamily="18" charset="0"/>
+                      </a:rPr>
+                      <m:t>ₜ)}</m:t>
+                    </m:r>
+                  </m:oMath>
+                </a14:m>
+                <a:endParaRPr dirty="0"/>
+              </a:p>
+            </p:txBody>
+          </p:sp>
+        </mc:Choice>
+        <mc:Fallback xmlns="">
+          <p:sp>
+            <p:nvSpPr>
+              <p:cNvPr id="11" name="TextBox 10"/>
+              <p:cNvSpPr txBox="1">
+                <a:spLocks noRot="1" noChangeAspect="1" noMove="1" noResize="1" noEditPoints="1" noAdjustHandles="1" noChangeArrowheads="1" noChangeShapeType="1" noTextEdit="1"/>
+              </p:cNvSpPr>
+              <p:nvPr/>
+            </p:nvSpPr>
+            <p:spPr>
+              <a:xfrm>
+                <a:off x="822960" y="3877056"/>
+                <a:ext cx="9601200" cy="369332"/>
+              </a:xfrm>
+              <a:prstGeom prst="rect">
+                <a:avLst/>
+              </a:prstGeom>
+              <a:blipFill>
+                <a:blip r:embed="rId9"/>
+                <a:stretch>
+                  <a:fillRect t="-6557" b="-26230"/>
+                </a:stretch>
+              </a:blipFill>
+            </p:spPr>
+            <p:txBody>
+              <a:bodyPr/>
+              <a:lstStyle/>
+              <a:p>
+                <a:r>
+                  <a:rPr lang="en-US">
+                    <a:noFill/>
+                  </a:rPr>
+                  <a:t> </a:t>
+                </a:r>
+              </a:p>
+            </p:txBody>
+          </p:sp>
+        </mc:Fallback>
+      </mc:AlternateContent>
+      <mc:AlternateContent xmlns:mc="http://schemas.openxmlformats.org/markup-compatibility/2006" xmlns:a14="http://schemas.microsoft.com/office/drawing/2010/main">
+        <mc:Choice Requires="a14">
+          <p:sp>
+            <p:nvSpPr>
+              <p:cNvPr id="12" name="TextBox 11"/>
+              <p:cNvSpPr txBox="1"/>
+              <p:nvPr/>
+            </p:nvSpPr>
+            <p:spPr>
+              <a:xfrm>
+                <a:off x="822960" y="4261104"/>
+                <a:ext cx="9601200" cy="404213"/>
+              </a:xfrm>
+              <a:prstGeom prst="rect">
+                <a:avLst/>
+              </a:prstGeom>
+              <a:noFill/>
+            </p:spPr>
+            <p:txBody>
+              <a:bodyPr wrap="square">
+                <a:spAutoFit/>
+              </a:bodyPr>
+              <a:lstStyle/>
+              <a:p>
+                <a:pPr>
+                  <a:defRPr sz="1800" b="0">
+                    <a:solidFill>
+                      <a:srgbClr val="444444"/>
+                    </a:solidFill>
+                    <a:latin typeface="Nunito"/>
+                  </a:defRPr>
+                </a:pPr>
+                <a:r>
+                  <a:rPr lang="en-US" dirty="0"/>
+                  <a:t>3.  </a:t>
+                </a:r>
+                <a:r>
+                  <a:rPr lang="en-US" b="1" dirty="0"/>
+                  <a:t>Return</a:t>
+                </a:r>
+                <a:r>
+                  <a:rPr lang="en-US" dirty="0"/>
+                  <a:t> </a:t>
+                </a:r>
+                <a14:m>
+                  <m:oMath xmlns:m="http://schemas.openxmlformats.org/officeDocument/2006/math">
+                    <m:sSup>
+                      <m:sSupPr>
+                        <m:ctrlPr>
+                          <a:rPr lang="ar-AE" i="1" dirty="0" smtClean="0">
+                            <a:latin typeface="Cambria Math" panose="02040503050406030204" pitchFamily="18" charset="0"/>
+                          </a:rPr>
+                        </m:ctrlPr>
+                      </m:sSupPr>
+                      <m:e>
+                        <m:r>
+                          <a:rPr lang="en-US" b="0" i="1" dirty="0" smtClean="0">
+                            <a:latin typeface="Cambria Math" panose="02040503050406030204" pitchFamily="18" charset="0"/>
+                          </a:rPr>
+                          <m:t>𝑥</m:t>
+                        </m:r>
+                      </m:e>
+                      <m:sup>
+                        <m:r>
+                          <a:rPr lang="en-US" b="0" i="1" dirty="0" smtClean="0">
+                            <a:latin typeface="Cambria Math" panose="02040503050406030204" pitchFamily="18" charset="0"/>
+                          </a:rPr>
+                          <m:t>∗</m:t>
+                        </m:r>
+                      </m:sup>
+                    </m:sSup>
+                    <m:r>
+                      <a:rPr lang="ar-AE" i="1" dirty="0" smtClean="0">
+                        <a:latin typeface="Cambria Math" panose="02040503050406030204" pitchFamily="18" charset="0"/>
+                      </a:rPr>
+                      <m:t>=</m:t>
+                    </m:r>
+                    <m:sSub>
+                      <m:sSubPr>
+                        <m:ctrlPr>
+                          <a:rPr lang="ar-AE" i="1" dirty="0">
+                            <a:latin typeface="Cambria Math" panose="02040503050406030204" pitchFamily="18" charset="0"/>
+                          </a:rPr>
+                        </m:ctrlPr>
+                      </m:sSubPr>
+                      <m:e>
+                        <m:r>
+                          <m:rPr>
+                            <m:nor/>
+                          </m:rPr>
+                          <a:rPr lang="en-US" dirty="0">
+                            <a:latin typeface="Cambria Math" panose="02040503050406030204" pitchFamily="18" charset="0"/>
+                          </a:rPr>
+                          <m:t>arg</m:t>
+                        </m:r>
+                        <m:r>
+                          <m:rPr>
+                            <m:nor/>
+                          </m:rPr>
+                          <a:rPr lang="en-US" dirty="0">
+                            <a:latin typeface="Cambria Math" panose="02040503050406030204" pitchFamily="18" charset="0"/>
+                          </a:rPr>
+                          <m:t> </m:t>
+                        </m:r>
+                        <m:r>
+                          <m:rPr>
+                            <m:nor/>
+                          </m:rPr>
+                          <a:rPr lang="en-US" dirty="0">
+                            <a:latin typeface="Cambria Math" panose="02040503050406030204" pitchFamily="18" charset="0"/>
+                          </a:rPr>
+                          <m:t>max</m:t>
+                        </m:r>
+                      </m:e>
+                      <m:sub>
+                        <m:sSub>
+                          <m:sSubPr>
+                            <m:ctrlPr>
+                              <a:rPr lang="ar-AE" i="1" dirty="0" smtClean="0">
+                                <a:latin typeface="Cambria Math" panose="02040503050406030204" pitchFamily="18" charset="0"/>
+                              </a:rPr>
+                            </m:ctrlPr>
+                          </m:sSubPr>
+                          <m:e>
+                            <m:r>
+                              <a:rPr lang="en-US" b="0" i="1" dirty="0" smtClean="0">
+                                <a:latin typeface="Cambria Math" panose="02040503050406030204" pitchFamily="18" charset="0"/>
+                              </a:rPr>
+                              <m:t>𝑥</m:t>
+                            </m:r>
+                          </m:e>
+                          <m:sub>
+                            <m:r>
+                              <a:rPr lang="en-US" b="0" i="1" dirty="0" smtClean="0">
+                                <a:latin typeface="Cambria Math" panose="02040503050406030204" pitchFamily="18" charset="0"/>
+                              </a:rPr>
+                              <m:t>𝑖</m:t>
+                            </m:r>
+                          </m:sub>
+                        </m:sSub>
+                        <m:r>
+                          <a:rPr lang="ar-AE" i="1" dirty="0" smtClean="0">
+                            <a:latin typeface="Cambria Math" panose="02040503050406030204" pitchFamily="18" charset="0"/>
+                          </a:rPr>
+                          <m:t>𝑥</m:t>
+                        </m:r>
+                        <m:r>
+                          <a:rPr lang="ar-AE" i="1" dirty="0">
+                            <a:latin typeface="Cambria Math" panose="02040503050406030204" pitchFamily="18" charset="0"/>
+                            <a:ea typeface="Cambria Math" panose="02040503050406030204" pitchFamily="18" charset="0"/>
+                          </a:rPr>
+                          <m:t>∈</m:t>
+                        </m:r>
+                        <m:sSub>
+                          <m:sSubPr>
+                            <m:ctrlPr>
+                              <a:rPr lang="ar-AE" i="1" dirty="0" smtClean="0">
+                                <a:latin typeface="Cambria Math" panose="02040503050406030204" pitchFamily="18" charset="0"/>
+                                <a:ea typeface="Cambria Math" panose="02040503050406030204" pitchFamily="18" charset="0"/>
+                              </a:rPr>
+                            </m:ctrlPr>
+                          </m:sSubPr>
+                          <m:e>
+                            <m:r>
+                              <a:rPr lang="ar-AE" i="1" dirty="0">
+                                <a:latin typeface="Cambria Math" panose="02040503050406030204" pitchFamily="18" charset="0"/>
+                                <a:ea typeface="Cambria Math" panose="02040503050406030204" pitchFamily="18" charset="0"/>
+                              </a:rPr>
+                              <m:t>𝒟</m:t>
+                            </m:r>
+                          </m:e>
+                          <m:sub>
+                            <m:r>
+                              <a:rPr lang="en-US" b="0" i="1" dirty="0" smtClean="0">
+                                <a:latin typeface="Cambria Math" panose="02040503050406030204" pitchFamily="18" charset="0"/>
+                                <a:ea typeface="Cambria Math" panose="02040503050406030204" pitchFamily="18" charset="0"/>
+                              </a:rPr>
+                              <m:t>𝑇</m:t>
+                            </m:r>
+                          </m:sub>
+                        </m:sSub>
+                      </m:sub>
+                    </m:sSub>
+                    <m:r>
+                      <a:rPr lang="ar-AE" i="1" dirty="0" smtClean="0">
+                        <a:latin typeface="Cambria Math" panose="02040503050406030204" pitchFamily="18" charset="0"/>
+                      </a:rPr>
+                      <m:t> </m:t>
+                    </m:r>
+                    <m:sSub>
+                      <m:sSubPr>
+                        <m:ctrlPr>
+                          <a:rPr lang="ar-AE" i="1" dirty="0" smtClean="0">
+                            <a:latin typeface="Cambria Math" panose="02040503050406030204" pitchFamily="18" charset="0"/>
+                          </a:rPr>
+                        </m:ctrlPr>
+                      </m:sSubPr>
+                      <m:e>
+                        <m:r>
+                          <a:rPr lang="en-US" b="0" i="1" dirty="0" smtClean="0">
+                            <a:latin typeface="Cambria Math" panose="02040503050406030204" pitchFamily="18" charset="0"/>
+                          </a:rPr>
+                          <m:t>𝑦</m:t>
+                        </m:r>
+                      </m:e>
+                      <m:sub>
+                        <m:r>
+                          <a:rPr lang="en-US" b="0" i="1" dirty="0" smtClean="0">
+                            <a:latin typeface="Cambria Math" panose="02040503050406030204" pitchFamily="18" charset="0"/>
+                          </a:rPr>
+                          <m:t>𝑖</m:t>
+                        </m:r>
+                      </m:sub>
+                    </m:sSub>
+                  </m:oMath>
+                </a14:m>
+                <a:endParaRPr dirty="0"/>
+              </a:p>
+            </p:txBody>
+          </p:sp>
+        </mc:Choice>
+        <mc:Fallback xmlns="">
+          <p:sp>
+            <p:nvSpPr>
+              <p:cNvPr id="12" name="TextBox 11"/>
+              <p:cNvSpPr txBox="1">
+                <a:spLocks noRot="1" noChangeAspect="1" noMove="1" noResize="1" noEditPoints="1" noAdjustHandles="1" noChangeArrowheads="1" noChangeShapeType="1" noTextEdit="1"/>
+              </p:cNvSpPr>
+              <p:nvPr/>
+            </p:nvSpPr>
+            <p:spPr>
+              <a:xfrm>
+                <a:off x="822960" y="4261104"/>
+                <a:ext cx="9601200" cy="404213"/>
+              </a:xfrm>
+              <a:prstGeom prst="rect">
+                <a:avLst/>
+              </a:prstGeom>
+              <a:blipFill>
+                <a:blip r:embed="rId10"/>
+                <a:stretch>
+                  <a:fillRect l="-508" t="-3030" b="-19697"/>
+                </a:stretch>
+              </a:blipFill>
+            </p:spPr>
+            <p:txBody>
+              <a:bodyPr/>
+              <a:lstStyle/>
+              <a:p>
+                <a:r>
+                  <a:rPr lang="en-US">
+                    <a:noFill/>
+                  </a:rPr>
+                  <a:t> </a:t>
+                </a:r>
+              </a:p>
+            </p:txBody>
+          </p:sp>
+        </mc:Fallback>
+      </mc:AlternateContent>
+      <p:cxnSp>
+        <p:nvCxnSpPr>
+          <p:cNvPr id="15" name="Straight Connector 14">
+            <a:extLst>
+              <a:ext uri="{FF2B5EF4-FFF2-40B4-BE49-F238E27FC236}">
+                <a16:creationId xmlns:a16="http://schemas.microsoft.com/office/drawing/2014/main" id="{36D9A2A2-D7D8-7886-77D7-8A9CF893BBB3}"/>
+              </a:ext>
+            </a:extLst>
+          </p:cNvPr>
+          <p:cNvCxnSpPr>
+            <a:cxnSpLocks/>
+          </p:cNvCxnSpPr>
+          <p:nvPr/>
+        </p:nvCxnSpPr>
+        <p:spPr>
+          <a:xfrm>
+            <a:off x="771728" y="1188720"/>
+            <a:ext cx="0" cy="3578644"/>
+          </a:xfrm>
+          <a:prstGeom prst="line">
+            <a:avLst/>
+          </a:prstGeom>
+        </p:spPr>
+        <p:style>
+          <a:lnRef idx="2">
+            <a:schemeClr val="accent2"/>
+          </a:lnRef>
+          <a:fillRef idx="0">
+            <a:schemeClr val="accent2"/>
+          </a:fillRef>
+          <a:effectRef idx="1">
+            <a:schemeClr val="accent2"/>
+          </a:effectRef>
+          <a:fontRef idx="minor">
+            <a:schemeClr val="tx1"/>
+          </a:fontRef>
+        </p:style>
+      </p:cxnSp>
     </p:spTree>
   </p:cSld>
   <p:clrMapOvr>
@@ -10190,42 +11710,194 @@
           </a:p>
         </p:txBody>
       </p:sp>
-      <p:sp>
-        <p:nvSpPr>
-          <p:cNvPr id="3" name="TextBox 2"/>
-          <p:cNvSpPr txBox="1"/>
-          <p:nvPr/>
-        </p:nvSpPr>
-        <p:spPr>
-          <a:xfrm>
-            <a:off x="822960" y="914400"/>
-            <a:ext cx="10058400" cy="502920"/>
-          </a:xfrm>
-          <a:prstGeom prst="rect">
-            <a:avLst/>
-          </a:prstGeom>
-          <a:noFill/>
-        </p:spPr>
-        <p:txBody>
-          <a:bodyPr wrap="square">
-            <a:spAutoFit/>
-          </a:bodyPr>
-          <a:lstStyle/>
-          <a:p>
-            <a:pPr algn="l">
-              <a:defRPr sz="1600" b="0">
-                <a:solidFill>
-                  <a:srgbClr val="444444"/>
-                </a:solidFill>
-                <a:latin typeface="Nunito"/>
-              </a:defRPr>
-            </a:pPr>
-            <a:r>
-              <a:t>Top panel: GP surrogate (step 2a). Bottom panel: EI acquisition function (step 2b). Green dashed line: xₙ₊₁ = argmax EI(x) (step 2c).</a:t>
-            </a:r>
-          </a:p>
-        </p:txBody>
-      </p:sp>
+      <mc:AlternateContent xmlns:mc="http://schemas.openxmlformats.org/markup-compatibility/2006" xmlns:a14="http://schemas.microsoft.com/office/drawing/2010/main">
+        <mc:Choice Requires="a14">
+          <p:sp>
+            <p:nvSpPr>
+              <p:cNvPr id="3" name="TextBox 2"/>
+              <p:cNvSpPr txBox="1"/>
+              <p:nvPr/>
+            </p:nvSpPr>
+            <p:spPr>
+              <a:xfrm>
+                <a:off x="822960" y="914400"/>
+                <a:ext cx="10058400" cy="584775"/>
+              </a:xfrm>
+              <a:prstGeom prst="rect">
+                <a:avLst/>
+              </a:prstGeom>
+              <a:noFill/>
+            </p:spPr>
+            <p:txBody>
+              <a:bodyPr wrap="square">
+                <a:spAutoFit/>
+              </a:bodyPr>
+              <a:lstStyle/>
+              <a:p>
+                <a:pPr algn="l">
+                  <a:defRPr sz="1600" b="0">
+                    <a:solidFill>
+                      <a:srgbClr val="444444"/>
+                    </a:solidFill>
+                    <a:latin typeface="Nunito"/>
+                  </a:defRPr>
+                </a:pPr>
+                <a:r>
+                  <a:rPr dirty="0"/>
+                  <a:t>Top panel: GP surrogate (step 2a). Bottom panel: EI acquisition function (step 2b). Green dashed line: </a:t>
+                </a:r>
+                <a:endParaRPr lang="en-US" dirty="0"/>
+              </a:p>
+              <a:p>
+                <a:pPr algn="l">
+                  <a:defRPr sz="1600" b="0">
+                    <a:solidFill>
+                      <a:srgbClr val="444444"/>
+                    </a:solidFill>
+                    <a:latin typeface="Nunito"/>
+                  </a:defRPr>
+                </a:pPr>
+                <a14:m>
+                  <m:oMath xmlns:m="http://schemas.openxmlformats.org/officeDocument/2006/math">
+                    <m:r>
+                      <a:rPr lang="en-US" i="1" dirty="0" smtClean="0">
+                        <a:latin typeface="Cambria Math" panose="02040503050406030204" pitchFamily="18" charset="0"/>
+                      </a:rPr>
+                      <m:t>𝑥</m:t>
+                    </m:r>
+                    <m:r>
+                      <a:rPr lang="en-US" i="1" dirty="0" smtClean="0">
+                        <a:latin typeface="Cambria Math" panose="02040503050406030204" pitchFamily="18" charset="0"/>
+                      </a:rPr>
+                      <m:t>ₙ</m:t>
+                    </m:r>
+                    <m:r>
+                      <a:rPr lang="en-US" i="1" dirty="0" smtClean="0">
+                        <a:latin typeface="Cambria Math" panose="02040503050406030204" pitchFamily="18" charset="0"/>
+                      </a:rPr>
+                      <m:t>₊</m:t>
+                    </m:r>
+                    <m:r>
+                      <a:rPr lang="en-US" i="1" dirty="0" smtClean="0">
+                        <a:latin typeface="Cambria Math" panose="02040503050406030204" pitchFamily="18" charset="0"/>
+                      </a:rPr>
+                      <m:t>₁</m:t>
+                    </m:r>
+                    <m:r>
+                      <a:rPr lang="en-US" i="1" dirty="0" smtClean="0">
+                        <a:latin typeface="Cambria Math" panose="02040503050406030204" pitchFamily="18" charset="0"/>
+                      </a:rPr>
+                      <m:t>=</m:t>
+                    </m:r>
+                    <m:r>
+                      <m:rPr>
+                        <m:nor/>
+                      </m:rPr>
+                      <a:rPr lang="en-US" i="0" dirty="0" smtClean="0">
+                        <a:latin typeface="Cambria Math" panose="02040503050406030204" pitchFamily="18" charset="0"/>
+                      </a:rPr>
+                      <m:t>arg</m:t>
+                    </m:r>
+                    <m:r>
+                      <m:rPr>
+                        <m:nor/>
+                      </m:rPr>
+                      <a:rPr lang="en-US" b="0" i="0" dirty="0" smtClean="0">
+                        <a:latin typeface="Cambria Math" panose="02040503050406030204" pitchFamily="18" charset="0"/>
+                      </a:rPr>
+                      <m:t> </m:t>
+                    </m:r>
+                    <m:r>
+                      <m:rPr>
+                        <m:nor/>
+                      </m:rPr>
+                      <a:rPr lang="en-US" i="0" dirty="0" smtClean="0">
+                        <a:latin typeface="Cambria Math" panose="02040503050406030204" pitchFamily="18" charset="0"/>
+                      </a:rPr>
+                      <m:t>max</m:t>
+                    </m:r>
+                    <m:r>
+                      <a:rPr lang="en-US" i="1" dirty="0" smtClean="0">
+                        <a:latin typeface="Cambria Math" panose="02040503050406030204" pitchFamily="18" charset="0"/>
+                      </a:rPr>
+                      <m:t> </m:t>
+                    </m:r>
+                    <m:r>
+                      <m:rPr>
+                        <m:sty m:val="p"/>
+                      </m:rPr>
+                      <a:rPr lang="en-US" b="0" i="0" dirty="0" smtClean="0">
+                        <a:latin typeface="Cambria Math" panose="02040503050406030204" pitchFamily="18" charset="0"/>
+                      </a:rPr>
+                      <m:t>EI</m:t>
+                    </m:r>
+                    <m:r>
+                      <a:rPr lang="en-US" i="1" dirty="0" smtClean="0">
+                        <a:latin typeface="Cambria Math" panose="02040503050406030204" pitchFamily="18" charset="0"/>
+                      </a:rPr>
+                      <m:t>(</m:t>
+                    </m:r>
+                    <m:r>
+                      <a:rPr lang="en-US" i="1" dirty="0" smtClean="0">
+                        <a:latin typeface="Cambria Math" panose="02040503050406030204" pitchFamily="18" charset="0"/>
+                      </a:rPr>
+                      <m:t>𝑥</m:t>
+                    </m:r>
+                    <m:r>
+                      <a:rPr lang="en-US" i="1" dirty="0" smtClean="0">
+                        <a:latin typeface="Cambria Math" panose="02040503050406030204" pitchFamily="18" charset="0"/>
+                      </a:rPr>
+                      <m:t>)</m:t>
+                    </m:r>
+                  </m:oMath>
+                </a14:m>
+                <a:r>
+                  <a:rPr dirty="0"/>
+                  <a:t> (step 2c).</a:t>
+                </a:r>
+              </a:p>
+            </p:txBody>
+          </p:sp>
+        </mc:Choice>
+        <mc:Fallback xmlns="">
+          <p:sp>
+            <p:nvSpPr>
+              <p:cNvPr id="3" name="TextBox 2"/>
+              <p:cNvSpPr txBox="1">
+                <a:spLocks noRot="1" noChangeAspect="1" noMove="1" noResize="1" noEditPoints="1" noAdjustHandles="1" noChangeArrowheads="1" noChangeShapeType="1" noTextEdit="1"/>
+              </p:cNvSpPr>
+              <p:nvPr/>
+            </p:nvSpPr>
+            <p:spPr>
+              <a:xfrm>
+                <a:off x="822960" y="914400"/>
+                <a:ext cx="10058400" cy="584775"/>
+              </a:xfrm>
+              <a:prstGeom prst="rect">
+                <a:avLst/>
+              </a:prstGeom>
+              <a:blipFill>
+                <a:blip r:embed="rId2"/>
+                <a:stretch>
+                  <a:fillRect l="-303" t="-2083" b="-13542"/>
+                </a:stretch>
+              </a:blipFill>
+            </p:spPr>
+            <p:txBody>
+              <a:bodyPr/>
+              <a:lstStyle/>
+              <a:p>
+                <a:r>
+                  <a:rPr lang="en-US">
+                    <a:noFill/>
+                  </a:rPr>
+                  <a:t> </a:t>
+                </a:r>
+              </a:p>
+            </p:txBody>
+          </p:sp>
+        </mc:Fallback>
+      </mc:AlternateContent>
       <p:pic>
         <p:nvPicPr>
           <p:cNvPr id="4" name="Picture 3" descr="ei_acquisition.png"/>
@@ -10235,15 +11907,15 @@
           <p:nvPr/>
         </p:nvPicPr>
         <p:blipFill>
-          <a:blip r:embed="rId2"/>
+          <a:blip r:embed="rId3"/>
           <a:stretch>
             <a:fillRect/>
           </a:stretch>
         </p:blipFill>
         <p:spPr>
           <a:xfrm>
-            <a:off x="4243194" y="1417320"/>
-            <a:ext cx="3705307" cy="2926079"/>
+            <a:off x="3627208" y="1417320"/>
+            <a:ext cx="4736340" cy="3740285"/>
           </a:xfrm>
           <a:prstGeom prst="rect">
             <a:avLst/>
@@ -10258,7 +11930,7 @@
         </p:nvSpPr>
         <p:spPr>
           <a:xfrm>
-            <a:off x="1188720" y="4480560"/>
+            <a:off x="1188720" y="5157605"/>
             <a:ext cx="9601200" cy="365760"/>
           </a:xfrm>
           <a:prstGeom prst="rect">
@@ -10294,7 +11966,7 @@
         </p:nvSpPr>
         <p:spPr>
           <a:xfrm>
-            <a:off x="1188720" y="4800600"/>
+            <a:off x="1188720" y="5477645"/>
             <a:ext cx="9601200" cy="365760"/>
           </a:xfrm>
           <a:prstGeom prst="rect">
@@ -10319,6 +11991,56 @@
             <a:r>
               <a:t>•  EI is near zero at observed points (no uncertainty = no expected improvement)</a:t>
             </a:r>
+          </a:p>
+        </p:txBody>
+      </p:sp>
+      <p:sp>
+        <p:nvSpPr>
+          <p:cNvPr id="7" name="Rectangle 6">
+            <a:extLst>
+              <a:ext uri="{FF2B5EF4-FFF2-40B4-BE49-F238E27FC236}">
+                <a16:creationId xmlns:a16="http://schemas.microsoft.com/office/drawing/2014/main" id="{1D282B98-C9BE-E03E-56AC-7C746CC4D29B}"/>
+              </a:ext>
+            </a:extLst>
+          </p:cNvPr>
+          <p:cNvSpPr/>
+          <p:nvPr/>
+        </p:nvSpPr>
+        <p:spPr>
+          <a:xfrm>
+            <a:off x="822960" y="830012"/>
+            <a:ext cx="3657600" cy="38100"/>
+          </a:xfrm>
+          <a:prstGeom prst="rect">
+            <a:avLst/>
+          </a:prstGeom>
+          <a:solidFill>
+            <a:srgbClr val="1A1A1A"/>
+          </a:solidFill>
+          <a:ln>
+            <a:noFill/>
+          </a:ln>
+        </p:spPr>
+        <p:style>
+          <a:lnRef idx="1">
+            <a:schemeClr val="accent1"/>
+          </a:lnRef>
+          <a:fillRef idx="3">
+            <a:schemeClr val="accent1"/>
+          </a:fillRef>
+          <a:effectRef idx="2">
+            <a:schemeClr val="accent1"/>
+          </a:effectRef>
+          <a:fontRef idx="minor">
+            <a:schemeClr val="lt1"/>
+          </a:fontRef>
+        </p:style>
+        <p:txBody>
+          <a:bodyPr rtlCol="0" anchor="ctr"/>
+          <a:lstStyle/>
+          <a:p>
+            <a:pPr algn="ctr"/>
+            <a:endParaRPr/>
           </a:p>
         </p:txBody>
       </p:sp>
@@ -10435,8 +12157,8 @@
         </p:blipFill>
         <p:spPr>
           <a:xfrm>
-            <a:off x="4034474" y="1417320"/>
-            <a:ext cx="4122747" cy="2926079"/>
+            <a:off x="3334624" y="1417320"/>
+            <a:ext cx="5199579" cy="3690350"/>
           </a:xfrm>
           <a:prstGeom prst="rect">
             <a:avLst/>
@@ -10451,7 +12173,7 @@
         </p:nvSpPr>
         <p:spPr>
           <a:xfrm>
-            <a:off x="1188720" y="4480560"/>
+            <a:off x="1188720" y="5107670"/>
             <a:ext cx="9601200" cy="365760"/>
           </a:xfrm>
           <a:prstGeom prst="rect">
@@ -10487,7 +12209,7 @@
         </p:nvSpPr>
         <p:spPr>
           <a:xfrm>
-            <a:off x="1188720" y="4800600"/>
+            <a:off x="1188720" y="5427710"/>
             <a:ext cx="9601200" cy="365760"/>
           </a:xfrm>
           <a:prstGeom prst="rect">
@@ -10523,7 +12245,7 @@
         </p:nvSpPr>
         <p:spPr>
           <a:xfrm>
-            <a:off x="1188720" y="5120640"/>
+            <a:off x="1188720" y="5747750"/>
             <a:ext cx="9601200" cy="365760"/>
           </a:xfrm>
           <a:prstGeom prst="rect">
@@ -10548,6 +12270,56 @@
             <a:r>
               <a:t>•  New samples (green stars) migrate toward the optimum — the algorithm self-focuses</a:t>
             </a:r>
+          </a:p>
+        </p:txBody>
+      </p:sp>
+      <p:sp>
+        <p:nvSpPr>
+          <p:cNvPr id="8" name="Rectangle 7">
+            <a:extLst>
+              <a:ext uri="{FF2B5EF4-FFF2-40B4-BE49-F238E27FC236}">
+                <a16:creationId xmlns:a16="http://schemas.microsoft.com/office/drawing/2014/main" id="{F88B8DF6-19A0-F663-37D5-D620FE4F1B3A}"/>
+              </a:ext>
+            </a:extLst>
+          </p:cNvPr>
+          <p:cNvSpPr/>
+          <p:nvPr/>
+        </p:nvSpPr>
+        <p:spPr>
+          <a:xfrm>
+            <a:off x="822960" y="824685"/>
+            <a:ext cx="3657600" cy="38100"/>
+          </a:xfrm>
+          <a:prstGeom prst="rect">
+            <a:avLst/>
+          </a:prstGeom>
+          <a:solidFill>
+            <a:srgbClr val="1A1A1A"/>
+          </a:solidFill>
+          <a:ln>
+            <a:noFill/>
+          </a:ln>
+        </p:spPr>
+        <p:style>
+          <a:lnRef idx="1">
+            <a:schemeClr val="accent1"/>
+          </a:lnRef>
+          <a:fillRef idx="3">
+            <a:schemeClr val="accent1"/>
+          </a:fillRef>
+          <a:effectRef idx="2">
+            <a:schemeClr val="accent1"/>
+          </a:effectRef>
+          <a:fontRef idx="minor">
+            <a:schemeClr val="lt1"/>
+          </a:fontRef>
+        </p:style>
+        <p:txBody>
+          <a:bodyPr rtlCol="0" anchor="ctr"/>
+          <a:lstStyle/>
+          <a:p>
+            <a:pPr algn="ctr"/>
+            <a:endParaRPr/>
           </a:p>
         </p:txBody>
       </p:sp>
@@ -10730,7 +12502,7 @@
         <p:spPr>
           <a:xfrm>
             <a:off x="822960" y="457200"/>
-            <a:ext cx="10058400" cy="640080"/>
+            <a:ext cx="10058400" cy="523220"/>
           </a:xfrm>
           <a:prstGeom prst="rect">
             <a:avLst/>
@@ -10752,8 +12524,10 @@
               </a:defRPr>
             </a:pPr>
             <a:r>
-              <a:t>What the Notebook Demonstrates</a:t>
-            </a:r>
+              <a:rPr lang="en-US" dirty="0"/>
+              <a:t>A Coded Example Case</a:t>
+            </a:r>
+            <a:endParaRPr dirty="0"/>
           </a:p>
         </p:txBody>
       </p:sp>
@@ -10886,7 +12660,7 @@
         <p:spPr>
           <a:xfrm>
             <a:off x="1188720" y="1956816"/>
-            <a:ext cx="9601200" cy="457200"/>
+            <a:ext cx="9601200" cy="369332"/>
           </a:xfrm>
           <a:prstGeom prst="rect">
             <a:avLst/>
@@ -10911,7 +12685,16 @@
               </a:defRPr>
             </a:pPr>
             <a:r>
-              <a:t>•  Step 0: Define a 1-D test function as a stand-in for an expensive black-box</a:t>
+              <a:rPr dirty="0"/>
+              <a:t>•  </a:t>
+            </a:r>
+            <a:r>
+              <a:rPr b="1" dirty="0"/>
+              <a:t>Step 0: </a:t>
+            </a:r>
+            <a:r>
+              <a:rPr dirty="0"/>
+              <a:t>Define a 1-D test function as a stand-in for an expensive black-box</a:t>
             </a:r>
           </a:p>
         </p:txBody>
@@ -10925,7 +12708,7 @@
         <p:spPr>
           <a:xfrm>
             <a:off x="1188720" y="2340864"/>
-            <a:ext cx="9601200" cy="457200"/>
+            <a:ext cx="9601200" cy="369332"/>
           </a:xfrm>
           <a:prstGeom prst="rect">
             <a:avLst/>
@@ -10950,7 +12733,16 @@
               </a:defRPr>
             </a:pPr>
             <a:r>
-              <a:t>•  Step 1: Draw 3 random initial samples</a:t>
+              <a:rPr dirty="0"/>
+              <a:t>•  </a:t>
+            </a:r>
+            <a:r>
+              <a:rPr b="1" dirty="0"/>
+              <a:t>Step 1: </a:t>
+            </a:r>
+            <a:r>
+              <a:rPr dirty="0"/>
+              <a:t>Draw 3 random initial samples</a:t>
             </a:r>
           </a:p>
         </p:txBody>
@@ -10964,7 +12756,7 @@
         <p:spPr>
           <a:xfrm>
             <a:off x="1188720" y="2724912"/>
-            <a:ext cx="9601200" cy="457200"/>
+            <a:ext cx="9601200" cy="369332"/>
           </a:xfrm>
           <a:prstGeom prst="rect">
             <a:avLst/>
@@ -10989,7 +12781,16 @@
               </a:defRPr>
             </a:pPr>
             <a:r>
-              <a:t>•  Step 2: Fit a GP surrogate (GaussianProcessRegressor with a Matérn kernel)</a:t>
+              <a:rPr dirty="0"/>
+              <a:t>•  </a:t>
+            </a:r>
+            <a:r>
+              <a:rPr b="1" dirty="0"/>
+              <a:t>Step 2: </a:t>
+            </a:r>
+            <a:r>
+              <a:rPr dirty="0"/>
+              <a:t>Fit a GP surrogate </a:t>
             </a:r>
           </a:p>
         </p:txBody>
@@ -11003,7 +12804,7 @@
         <p:spPr>
           <a:xfrm>
             <a:off x="1188720" y="3108960"/>
-            <a:ext cx="9601200" cy="457200"/>
+            <a:ext cx="9601200" cy="369332"/>
           </a:xfrm>
           <a:prstGeom prst="rect">
             <a:avLst/>
@@ -11028,7 +12829,16 @@
               </a:defRPr>
             </a:pPr>
             <a:r>
-              <a:t>•  Step 3: Implement the EI acquisition function as a Python function</a:t>
+              <a:rPr dirty="0"/>
+              <a:t>•  </a:t>
+            </a:r>
+            <a:r>
+              <a:rPr b="1" dirty="0"/>
+              <a:t>Step 3: </a:t>
+            </a:r>
+            <a:r>
+              <a:rPr dirty="0"/>
+              <a:t>Implement the EI acquisition function as a Python function</a:t>
             </a:r>
           </a:p>
         </p:txBody>
@@ -11042,7 +12852,7 @@
         <p:spPr>
           <a:xfrm>
             <a:off x="1188720" y="3493008"/>
-            <a:ext cx="9601200" cy="457200"/>
+            <a:ext cx="9601200" cy="369332"/>
           </a:xfrm>
           <a:prstGeom prst="rect">
             <a:avLst/>
@@ -11067,7 +12877,16 @@
               </a:defRPr>
             </a:pPr>
             <a:r>
-              <a:t>•  Step 4: Run the BO loop for 7 iterations, plotting the surrogate at each step</a:t>
+              <a:rPr dirty="0"/>
+              <a:t>•  </a:t>
+            </a:r>
+            <a:r>
+              <a:rPr b="1" dirty="0"/>
+              <a:t>Step 4: </a:t>
+            </a:r>
+            <a:r>
+              <a:rPr dirty="0"/>
+              <a:t>Run the BO loop for 7 iterations, plotting the surrogate at each step</a:t>
             </a:r>
           </a:p>
         </p:txBody>
@@ -11081,7 +12900,7 @@
         <p:spPr>
           <a:xfrm>
             <a:off x="1188720" y="3877056"/>
-            <a:ext cx="9601200" cy="457200"/>
+            <a:ext cx="9601200" cy="369332"/>
           </a:xfrm>
           <a:prstGeom prst="rect">
             <a:avLst/>
@@ -11106,45 +12925,17 @@
               </a:defRPr>
             </a:pPr>
             <a:r>
-              <a:t>•  Step 5: Compare BO against random search, and compare EI vs. PI vs. UCB</a:t>
-            </a:r>
-          </a:p>
-        </p:txBody>
-      </p:sp>
-      <p:sp>
-        <p:nvSpPr>
-          <p:cNvPr id="12" name="TextBox 11"/>
-          <p:cNvSpPr txBox="1"/>
-          <p:nvPr/>
-        </p:nvSpPr>
-        <p:spPr>
-          <a:xfrm>
-            <a:off x="822960" y="4261104"/>
-            <a:ext cx="9601200" cy="457200"/>
-          </a:xfrm>
-          <a:prstGeom prst="rect">
-            <a:avLst/>
-          </a:prstGeom>
-          <a:noFill/>
-        </p:spPr>
-        <p:txBody>
-          <a:bodyPr wrap="square">
-            <a:spAutoFit/>
-          </a:bodyPr>
-          <a:lstStyle/>
-          <a:p>
-            <a:pPr algn="l">
-              <a:spcAft>
-                <a:spcPts val="400"/>
-              </a:spcAft>
-              <a:defRPr sz="1800" b="0">
-                <a:solidFill>
-                  <a:srgbClr val="444444"/>
-                </a:solidFill>
-                <a:latin typeface="Nunito"/>
-              </a:defRPr>
-            </a:pPr>
-            <a:endParaRPr/>
+              <a:rPr dirty="0"/>
+              <a:t>•  </a:t>
+            </a:r>
+            <a:r>
+              <a:rPr b="1" dirty="0"/>
+              <a:t>Step 5: </a:t>
+            </a:r>
+            <a:r>
+              <a:rPr dirty="0"/>
+              <a:t>Compare BO against random search, and compare EI vs. PI vs. UCB</a:t>
+            </a:r>
           </a:p>
         </p:txBody>
       </p:sp>
@@ -11446,7 +13237,7 @@
         <p:spPr>
           <a:xfrm>
             <a:off x="1005840" y="1188720"/>
-            <a:ext cx="4754880" cy="2377440"/>
+            <a:ext cx="4754880" cy="692497"/>
           </a:xfrm>
           <a:prstGeom prst="rect">
             <a:avLst/>
@@ -11468,70 +13259,462 @@
               </a:defRPr>
             </a:pPr>
             <a:r>
-              <a:rPr dirty="0"/>
-              <a:t>def objective(x):</a:t>
+              <a:rPr lang="en-US" b="0" i="0" dirty="0">
+                <a:solidFill>
+                  <a:srgbClr val="FF7B72"/>
+                </a:solidFill>
+                <a:effectLst/>
+                <a:latin typeface="Courier New" panose="02070309020205020404" pitchFamily="49" charset="0"/>
+              </a:rPr>
+              <a:t>def</a:t>
+            </a:r>
+            <a:r>
+              <a:rPr lang="en-US" b="0" i="0" dirty="0">
+                <a:solidFill>
+                  <a:srgbClr val="E0E0E0"/>
+                </a:solidFill>
+                <a:effectLst/>
+                <a:latin typeface="Courier New" panose="02070309020205020404" pitchFamily="49" charset="0"/>
+              </a:rPr>
+              <a:t> </a:t>
+            </a:r>
+            <a:r>
+              <a:rPr lang="en-US" b="0" i="0" dirty="0">
+                <a:solidFill>
+                  <a:srgbClr val="D2A8FF"/>
+                </a:solidFill>
+                <a:effectLst/>
+                <a:latin typeface="Courier New" panose="02070309020205020404" pitchFamily="49" charset="0"/>
+              </a:rPr>
+              <a:t>objective</a:t>
+            </a:r>
+            <a:r>
+              <a:rPr lang="en-US" b="0" i="0" dirty="0">
+                <a:solidFill>
+                  <a:srgbClr val="E0E0E0"/>
+                </a:solidFill>
+                <a:effectLst/>
+                <a:latin typeface="Courier New" panose="02070309020205020404" pitchFamily="49" charset="0"/>
+              </a:rPr>
+              <a:t>(x):</a:t>
             </a:r>
             <a:br>
-              <a:rPr dirty="0"/>
+              <a:rPr lang="en-US" dirty="0"/>
             </a:br>
             <a:r>
-              <a:rPr dirty="0"/>
-              <a:t>    """Expensive in real life."""</a:t>
+              <a:rPr lang="en-US" b="0" i="0" dirty="0">
+                <a:solidFill>
+                  <a:srgbClr val="E0E0E0"/>
+                </a:solidFill>
+                <a:effectLst/>
+                <a:latin typeface="Courier New" panose="02070309020205020404" pitchFamily="49" charset="0"/>
+              </a:rPr>
+              <a:t>  </a:t>
+            </a:r>
+            <a:r>
+              <a:rPr lang="en-US" b="0" i="0" dirty="0">
+                <a:solidFill>
+                  <a:srgbClr val="8B949E"/>
+                </a:solidFill>
+                <a:effectLst/>
+                <a:latin typeface="Courier New" panose="02070309020205020404" pitchFamily="49" charset="0"/>
+              </a:rPr>
+              <a:t>"""Expensive in real life."""</a:t>
             </a:r>
             <a:br>
-              <a:rPr dirty="0"/>
+              <a:rPr lang="en-US" dirty="0"/>
             </a:br>
             <a:r>
-              <a:rPr dirty="0"/>
-              <a:t>    return -</a:t>
-            </a:r>
-            <a:r>
-              <a:rPr dirty="0" err="1"/>
+              <a:rPr lang="en-US" b="0" i="0" dirty="0">
+                <a:solidFill>
+                  <a:srgbClr val="E0E0E0"/>
+                </a:solidFill>
+                <a:effectLst/>
+                <a:latin typeface="Courier New" panose="02070309020205020404" pitchFamily="49" charset="0"/>
+              </a:rPr>
+              <a:t>  </a:t>
+            </a:r>
+            <a:r>
+              <a:rPr lang="en-US" b="0" i="0" dirty="0">
+                <a:solidFill>
+                  <a:srgbClr val="FF7B72"/>
+                </a:solidFill>
+                <a:effectLst/>
+                <a:latin typeface="Courier New" panose="02070309020205020404" pitchFamily="49" charset="0"/>
+              </a:rPr>
+              <a:t>return</a:t>
+            </a:r>
+            <a:r>
+              <a:rPr lang="en-US" b="0" i="0" dirty="0">
+                <a:solidFill>
+                  <a:srgbClr val="E0E0E0"/>
+                </a:solidFill>
+                <a:effectLst/>
+                <a:latin typeface="Courier New" panose="02070309020205020404" pitchFamily="49" charset="0"/>
+              </a:rPr>
+              <a:t> -</a:t>
+            </a:r>
+            <a:r>
+              <a:rPr lang="en-US" b="0" i="0" dirty="0" err="1">
+                <a:solidFill>
+                  <a:srgbClr val="E0E0E0"/>
+                </a:solidFill>
+                <a:effectLst/>
+                <a:latin typeface="Courier New" panose="02070309020205020404" pitchFamily="49" charset="0"/>
+              </a:rPr>
               <a:t>np.sin</a:t>
             </a:r>
             <a:r>
-              <a:rPr dirty="0"/>
-              <a:t>(3*x) - x**2 + 0.7*x</a:t>
-            </a:r>
-          </a:p>
-        </p:txBody>
-      </p:sp>
-      <p:sp>
-        <p:nvSpPr>
-          <p:cNvPr id="5" name="TextBox 4"/>
-          <p:cNvSpPr txBox="1"/>
-          <p:nvPr/>
-        </p:nvSpPr>
-        <p:spPr>
-          <a:xfrm>
-            <a:off x="822960" y="3794760"/>
-            <a:ext cx="5029200" cy="1371600"/>
-          </a:xfrm>
-          <a:prstGeom prst="rect">
-            <a:avLst/>
-          </a:prstGeom>
-          <a:noFill/>
-        </p:spPr>
-        <p:txBody>
-          <a:bodyPr wrap="square">
-            <a:spAutoFit/>
-          </a:bodyPr>
-          <a:lstStyle/>
-          <a:p>
-            <a:pPr algn="l">
-              <a:defRPr sz="1600" b="0">
-                <a:solidFill>
-                  <a:srgbClr val="444444"/>
-                </a:solidFill>
-                <a:latin typeface="Nunito"/>
-              </a:defRPr>
-            </a:pPr>
-            <a:r>
-              <a:t>A known test function f(x) = -sin(3x) - x² + 0.7x on [-2, 2]. In practice, we would never see this curve — only point evaluations. The graph shows a global maximum near x ≈ 0.3.</a:t>
-            </a:r>
-          </a:p>
-        </p:txBody>
-      </p:sp>
+              <a:rPr lang="en-US" b="0" i="0" dirty="0">
+                <a:solidFill>
+                  <a:srgbClr val="E0E0E0"/>
+                </a:solidFill>
+                <a:effectLst/>
+                <a:latin typeface="Courier New" panose="02070309020205020404" pitchFamily="49" charset="0"/>
+              </a:rPr>
+              <a:t>(</a:t>
+            </a:r>
+            <a:r>
+              <a:rPr lang="en-US" b="0" i="0" dirty="0">
+                <a:solidFill>
+                  <a:srgbClr val="79C0FF"/>
+                </a:solidFill>
+                <a:effectLst/>
+                <a:latin typeface="Courier New" panose="02070309020205020404" pitchFamily="49" charset="0"/>
+              </a:rPr>
+              <a:t>3</a:t>
+            </a:r>
+            <a:r>
+              <a:rPr lang="en-US" b="0" i="0" dirty="0">
+                <a:solidFill>
+                  <a:srgbClr val="E0E0E0"/>
+                </a:solidFill>
+                <a:effectLst/>
+                <a:latin typeface="Courier New" panose="02070309020205020404" pitchFamily="49" charset="0"/>
+              </a:rPr>
+              <a:t>*x) - x**</a:t>
+            </a:r>
+            <a:r>
+              <a:rPr lang="en-US" b="0" i="0" dirty="0">
+                <a:solidFill>
+                  <a:srgbClr val="79C0FF"/>
+                </a:solidFill>
+                <a:effectLst/>
+                <a:latin typeface="Courier New" panose="02070309020205020404" pitchFamily="49" charset="0"/>
+              </a:rPr>
+              <a:t>2</a:t>
+            </a:r>
+            <a:r>
+              <a:rPr lang="en-US" b="0" i="0" dirty="0">
+                <a:solidFill>
+                  <a:srgbClr val="E0E0E0"/>
+                </a:solidFill>
+                <a:effectLst/>
+                <a:latin typeface="Courier New" panose="02070309020205020404" pitchFamily="49" charset="0"/>
+              </a:rPr>
+              <a:t> + </a:t>
+            </a:r>
+            <a:r>
+              <a:rPr lang="en-US" b="0" i="0" dirty="0">
+                <a:solidFill>
+                  <a:srgbClr val="79C0FF"/>
+                </a:solidFill>
+                <a:effectLst/>
+                <a:latin typeface="Courier New" panose="02070309020205020404" pitchFamily="49" charset="0"/>
+              </a:rPr>
+              <a:t>0.7</a:t>
+            </a:r>
+            <a:r>
+              <a:rPr lang="en-US" b="0" i="0" dirty="0">
+                <a:solidFill>
+                  <a:srgbClr val="E0E0E0"/>
+                </a:solidFill>
+                <a:effectLst/>
+                <a:latin typeface="Courier New" panose="02070309020205020404" pitchFamily="49" charset="0"/>
+              </a:rPr>
+              <a:t>*x</a:t>
+            </a:r>
+            <a:endParaRPr dirty="0"/>
+          </a:p>
+        </p:txBody>
+      </p:sp>
+      <mc:AlternateContent xmlns:mc="http://schemas.openxmlformats.org/markup-compatibility/2006" xmlns:a14="http://schemas.microsoft.com/office/drawing/2010/main">
+        <mc:Choice Requires="a14">
+          <p:sp>
+            <p:nvSpPr>
+              <p:cNvPr id="5" name="TextBox 4"/>
+              <p:cNvSpPr txBox="1"/>
+              <p:nvPr/>
+            </p:nvSpPr>
+            <p:spPr>
+              <a:xfrm>
+                <a:off x="822960" y="3794760"/>
+                <a:ext cx="5212080" cy="1323439"/>
+              </a:xfrm>
+              <a:prstGeom prst="rect">
+                <a:avLst/>
+              </a:prstGeom>
+              <a:noFill/>
+            </p:spPr>
+            <p:txBody>
+              <a:bodyPr wrap="square">
+                <a:spAutoFit/>
+              </a:bodyPr>
+              <a:lstStyle/>
+              <a:p>
+                <a:pPr>
+                  <a:defRPr sz="1600" b="0">
+                    <a:solidFill>
+                      <a:srgbClr val="444444"/>
+                    </a:solidFill>
+                    <a:latin typeface="Nunito"/>
+                  </a:defRPr>
+                </a:pPr>
+                <a:r>
+                  <a:rPr dirty="0"/>
+                  <a:t>A known test function </a:t>
+                </a:r>
+                <a14:m>
+                  <m:oMath xmlns:m="http://schemas.openxmlformats.org/officeDocument/2006/math">
+                    <m:r>
+                      <a:rPr lang="en-US" i="1" dirty="0" smtClean="0">
+                        <a:latin typeface="Cambria Math" panose="02040503050406030204" pitchFamily="18" charset="0"/>
+                      </a:rPr>
+                      <m:t>𝑓</m:t>
+                    </m:r>
+                    <m:r>
+                      <a:rPr lang="en-US" i="1" dirty="0" smtClean="0">
+                        <a:latin typeface="Cambria Math" panose="02040503050406030204" pitchFamily="18" charset="0"/>
+                      </a:rPr>
+                      <m:t>(</m:t>
+                    </m:r>
+                    <m:r>
+                      <a:rPr lang="en-US" i="1" dirty="0" smtClean="0">
+                        <a:latin typeface="Cambria Math" panose="02040503050406030204" pitchFamily="18" charset="0"/>
+                      </a:rPr>
+                      <m:t>𝑥</m:t>
+                    </m:r>
+                    <m:r>
+                      <a:rPr lang="en-US" i="1" dirty="0" smtClean="0">
+                        <a:latin typeface="Cambria Math" panose="02040503050406030204" pitchFamily="18" charset="0"/>
+                      </a:rPr>
+                      <m:t>) = −</m:t>
+                    </m:r>
+                    <m:r>
+                      <m:rPr>
+                        <m:sty m:val="p"/>
+                      </m:rPr>
+                      <a:rPr lang="en-US" i="1" dirty="0" smtClean="0">
+                        <a:latin typeface="Cambria Math" panose="02040503050406030204" pitchFamily="18" charset="0"/>
+                      </a:rPr>
+                      <m:t>sin</m:t>
+                    </m:r>
+                    <m:r>
+                      <a:rPr lang="en-US" i="1" dirty="0" smtClean="0">
+                        <a:latin typeface="Cambria Math" panose="02040503050406030204" pitchFamily="18" charset="0"/>
+                      </a:rPr>
+                      <m:t>⁡(</m:t>
+                    </m:r>
+                    <m:r>
+                      <a:rPr lang="en-US" i="1" dirty="0" smtClean="0">
+                        <a:latin typeface="Cambria Math" panose="02040503050406030204" pitchFamily="18" charset="0"/>
+                      </a:rPr>
+                      <m:t>3</m:t>
+                    </m:r>
+                    <m:r>
+                      <a:rPr lang="en-US" i="1" dirty="0" smtClean="0">
+                        <a:latin typeface="Cambria Math" panose="02040503050406030204" pitchFamily="18" charset="0"/>
+                      </a:rPr>
+                      <m:t>𝑥</m:t>
+                    </m:r>
+                    <m:r>
+                      <a:rPr lang="en-US" i="1" dirty="0" smtClean="0">
+                        <a:latin typeface="Cambria Math" panose="02040503050406030204" pitchFamily="18" charset="0"/>
+                      </a:rPr>
+                      <m:t>) − </m:t>
+                    </m:r>
+                    <m:r>
+                      <a:rPr lang="en-US" i="1" dirty="0" smtClean="0">
+                        <a:latin typeface="Cambria Math" panose="02040503050406030204" pitchFamily="18" charset="0"/>
+                      </a:rPr>
+                      <m:t>𝑥</m:t>
+                    </m:r>
+                    <m:r>
+                      <a:rPr lang="en-US" i="1" dirty="0" smtClean="0">
+                        <a:latin typeface="Cambria Math" panose="02040503050406030204" pitchFamily="18" charset="0"/>
+                      </a:rPr>
+                      <m:t>²</m:t>
+                    </m:r>
+                    <m:r>
+                      <a:rPr lang="en-US" i="1" dirty="0" smtClean="0">
+                        <a:latin typeface="Cambria Math" panose="02040503050406030204" pitchFamily="18" charset="0"/>
+                      </a:rPr>
+                      <m:t> + </m:t>
+                    </m:r>
+                    <m:r>
+                      <a:rPr lang="en-US" i="1" dirty="0" smtClean="0">
+                        <a:latin typeface="Cambria Math" panose="02040503050406030204" pitchFamily="18" charset="0"/>
+                      </a:rPr>
+                      <m:t>0</m:t>
+                    </m:r>
+                    <m:r>
+                      <a:rPr lang="en-US" i="1" dirty="0" smtClean="0">
+                        <a:latin typeface="Cambria Math" panose="02040503050406030204" pitchFamily="18" charset="0"/>
+                      </a:rPr>
+                      <m:t>.</m:t>
+                    </m:r>
+                    <m:r>
+                      <a:rPr lang="en-US" i="1" dirty="0" smtClean="0">
+                        <a:latin typeface="Cambria Math" panose="02040503050406030204" pitchFamily="18" charset="0"/>
+                      </a:rPr>
+                      <m:t>7</m:t>
+                    </m:r>
+                    <m:r>
+                      <a:rPr lang="en-US" i="1" dirty="0" smtClean="0">
+                        <a:latin typeface="Cambria Math" panose="02040503050406030204" pitchFamily="18" charset="0"/>
+                      </a:rPr>
+                      <m:t>𝑥</m:t>
+                    </m:r>
+                  </m:oMath>
+                </a14:m>
+                <a:r>
+                  <a:rPr lang="en-US" dirty="0"/>
+                  <a:t> on </a:t>
+                </a:r>
+                <a14:m>
+                  <m:oMath xmlns:m="http://schemas.openxmlformats.org/officeDocument/2006/math">
+                    <m:r>
+                      <a:rPr lang="en-US" i="1" dirty="0">
+                        <a:latin typeface="Cambria Math" panose="02040503050406030204" pitchFamily="18" charset="0"/>
+                      </a:rPr>
+                      <m:t>[−</m:t>
+                    </m:r>
+                    <m:r>
+                      <a:rPr lang="en-US" i="1" dirty="0">
+                        <a:latin typeface="Cambria Math" panose="02040503050406030204" pitchFamily="18" charset="0"/>
+                      </a:rPr>
+                      <m:t>2</m:t>
+                    </m:r>
+                    <m:r>
+                      <a:rPr lang="en-US" i="1" dirty="0">
+                        <a:latin typeface="Cambria Math" panose="02040503050406030204" pitchFamily="18" charset="0"/>
+                      </a:rPr>
+                      <m:t>, </m:t>
+                    </m:r>
+                    <m:r>
+                      <a:rPr lang="en-US" i="1" dirty="0">
+                        <a:latin typeface="Cambria Math" panose="02040503050406030204" pitchFamily="18" charset="0"/>
+                      </a:rPr>
+                      <m:t>2</m:t>
+                    </m:r>
+                    <m:r>
+                      <a:rPr lang="en-US" i="1" dirty="0">
+                        <a:latin typeface="Cambria Math" panose="02040503050406030204" pitchFamily="18" charset="0"/>
+                      </a:rPr>
+                      <m:t>]</m:t>
+                    </m:r>
+                  </m:oMath>
+                </a14:m>
+                <a:r>
+                  <a:rPr dirty="0"/>
+                  <a:t>. </a:t>
+                </a:r>
+                <a:endParaRPr lang="en-US" dirty="0"/>
+              </a:p>
+              <a:p>
+                <a:pPr algn="l">
+                  <a:defRPr sz="1600" b="0">
+                    <a:solidFill>
+                      <a:srgbClr val="444444"/>
+                    </a:solidFill>
+                    <a:latin typeface="Nunito"/>
+                  </a:defRPr>
+                </a:pPr>
+                <a:r>
+                  <a:rPr dirty="0"/>
+                  <a:t>In practice, we would never see this curve — only point evaluations. The graph shows a global maximum near </a:t>
+                </a:r>
+                <a14:m>
+                  <m:oMath xmlns:m="http://schemas.openxmlformats.org/officeDocument/2006/math">
+                    <m:r>
+                      <a:rPr lang="en-US" i="1" dirty="0" smtClean="0">
+                        <a:latin typeface="Cambria Math" panose="02040503050406030204" pitchFamily="18" charset="0"/>
+                      </a:rPr>
+                      <m:t>𝑥</m:t>
+                    </m:r>
+                    <m:r>
+                      <a:rPr lang="en-US" i="1" dirty="0" smtClean="0">
+                        <a:latin typeface="Cambria Math" panose="02040503050406030204" pitchFamily="18" charset="0"/>
+                      </a:rPr>
+                      <m:t> ≈ </m:t>
+                    </m:r>
+                    <m:r>
+                      <a:rPr lang="en-US" i="1" dirty="0" smtClean="0">
+                        <a:latin typeface="Cambria Math" panose="02040503050406030204" pitchFamily="18" charset="0"/>
+                      </a:rPr>
+                      <m:t>0</m:t>
+                    </m:r>
+                    <m:r>
+                      <a:rPr lang="en-US" i="1" dirty="0" smtClean="0">
+                        <a:latin typeface="Cambria Math" panose="02040503050406030204" pitchFamily="18" charset="0"/>
+                      </a:rPr>
+                      <m:t>.</m:t>
+                    </m:r>
+                    <m:r>
+                      <a:rPr lang="en-US" i="1" dirty="0" smtClean="0">
+                        <a:latin typeface="Cambria Math" panose="02040503050406030204" pitchFamily="18" charset="0"/>
+                      </a:rPr>
+                      <m:t>3</m:t>
+                    </m:r>
+                  </m:oMath>
+                </a14:m>
+                <a:r>
+                  <a:rPr dirty="0"/>
+                  <a:t>.</a:t>
+                </a:r>
+              </a:p>
+            </p:txBody>
+          </p:sp>
+        </mc:Choice>
+        <mc:Fallback xmlns="">
+          <p:sp>
+            <p:nvSpPr>
+              <p:cNvPr id="5" name="TextBox 4"/>
+              <p:cNvSpPr txBox="1">
+                <a:spLocks noRot="1" noChangeAspect="1" noMove="1" noResize="1" noEditPoints="1" noAdjustHandles="1" noChangeArrowheads="1" noChangeShapeType="1" noTextEdit="1"/>
+              </p:cNvSpPr>
+              <p:nvPr/>
+            </p:nvSpPr>
+            <p:spPr>
+              <a:xfrm>
+                <a:off x="822960" y="3794760"/>
+                <a:ext cx="5212080" cy="1323439"/>
+              </a:xfrm>
+              <a:prstGeom prst="rect">
+                <a:avLst/>
+              </a:prstGeom>
+              <a:blipFill>
+                <a:blip r:embed="rId2"/>
+                <a:stretch>
+                  <a:fillRect l="-585" t="-922" r="-1520" b="-5069"/>
+                </a:stretch>
+              </a:blipFill>
+            </p:spPr>
+            <p:txBody>
+              <a:bodyPr/>
+              <a:lstStyle/>
+              <a:p>
+                <a:r>
+                  <a:rPr lang="en-US">
+                    <a:noFill/>
+                  </a:rPr>
+                  <a:t> </a:t>
+                </a:r>
+              </a:p>
+            </p:txBody>
+          </p:sp>
+        </mc:Fallback>
+      </mc:AlternateContent>
       <p:pic>
         <p:nvPicPr>
           <p:cNvPr id="6" name="Picture 5" descr="objective_function.png"/>
@@ -11541,21 +13724,71 @@
           <p:nvPr/>
         </p:nvPicPr>
         <p:blipFill>
-          <a:blip r:embed="rId2"/>
+          <a:blip r:embed="rId3"/>
           <a:stretch>
             <a:fillRect/>
           </a:stretch>
         </p:blipFill>
         <p:spPr>
           <a:xfrm>
-            <a:off x="6400800" y="1097280"/>
-            <a:ext cx="5029200" cy="2461097"/>
+            <a:off x="6035040" y="1654351"/>
+            <a:ext cx="5775299" cy="2826209"/>
           </a:xfrm>
           <a:prstGeom prst="rect">
             <a:avLst/>
           </a:prstGeom>
         </p:spPr>
       </p:pic>
+      <p:sp>
+        <p:nvSpPr>
+          <p:cNvPr id="7" name="Rectangle 6">
+            <a:extLst>
+              <a:ext uri="{FF2B5EF4-FFF2-40B4-BE49-F238E27FC236}">
+                <a16:creationId xmlns:a16="http://schemas.microsoft.com/office/drawing/2014/main" id="{B5F39191-9F06-DF09-A4CB-93638FA2B2AF}"/>
+              </a:ext>
+            </a:extLst>
+          </p:cNvPr>
+          <p:cNvSpPr/>
+          <p:nvPr/>
+        </p:nvSpPr>
+        <p:spPr>
+          <a:xfrm>
+            <a:off x="822960" y="856845"/>
+            <a:ext cx="3657600" cy="38100"/>
+          </a:xfrm>
+          <a:prstGeom prst="rect">
+            <a:avLst/>
+          </a:prstGeom>
+          <a:solidFill>
+            <a:srgbClr val="1A1A1A"/>
+          </a:solidFill>
+          <a:ln>
+            <a:noFill/>
+          </a:ln>
+        </p:spPr>
+        <p:style>
+          <a:lnRef idx="1">
+            <a:schemeClr val="accent1"/>
+          </a:lnRef>
+          <a:fillRef idx="3">
+            <a:schemeClr val="accent1"/>
+          </a:fillRef>
+          <a:effectRef idx="2">
+            <a:schemeClr val="accent1"/>
+          </a:effectRef>
+          <a:fontRef idx="minor">
+            <a:schemeClr val="lt1"/>
+          </a:fontRef>
+        </p:style>
+        <p:txBody>
+          <a:bodyPr rtlCol="0" anchor="ctr"/>
+          <a:lstStyle/>
+          <a:p>
+            <a:pPr algn="ctr"/>
+            <a:endParaRPr/>
+          </a:p>
+        </p:txBody>
+      </p:sp>
     </p:spTree>
   </p:cSld>
   <p:clrMapOvr>
@@ -11670,7 +13903,7 @@
         <p:spPr>
           <a:xfrm>
             <a:off x="1005840" y="1188720"/>
-            <a:ext cx="4754880" cy="2377440"/>
+            <a:ext cx="4754880" cy="1892826"/>
           </a:xfrm>
           <a:prstGeom prst="rect">
             <a:avLst/>
@@ -11692,37 +13925,400 @@
               </a:defRPr>
             </a:pPr>
             <a:r>
+              <a:rPr lang="en-US" b="0" i="0" dirty="0">
+                <a:solidFill>
+                  <a:srgbClr val="8B949E"/>
+                </a:solidFill>
+                <a:effectLst/>
+                <a:latin typeface="Courier New" panose="02070309020205020404" pitchFamily="49" charset="0"/>
+              </a:rPr>
               <a:t># 3 random initial points</a:t>
             </a:r>
-            <a:br/>
-            <a:r>
-              <a:t>X_init = rng.uniform(-2, 2, size=3)</a:t>
-            </a:r>
-            <a:br/>
-            <a:r>
-              <a:t>y_init = objective(X_init)</a:t>
-            </a:r>
-            <a:br/>
-            <a:br/>
-            <a:r>
+            <a:br>
+              <a:rPr lang="en-US" dirty="0"/>
+            </a:br>
+            <a:r>
+              <a:rPr lang="en-US" b="0" i="0" dirty="0" err="1">
+                <a:solidFill>
+                  <a:srgbClr val="E0E0E0"/>
+                </a:solidFill>
+                <a:effectLst/>
+                <a:latin typeface="Courier New" panose="02070309020205020404" pitchFamily="49" charset="0"/>
+              </a:rPr>
+              <a:t>X_init</a:t>
+            </a:r>
+            <a:r>
+              <a:rPr lang="en-US" b="0" i="0" dirty="0">
+                <a:solidFill>
+                  <a:srgbClr val="E0E0E0"/>
+                </a:solidFill>
+                <a:effectLst/>
+                <a:latin typeface="Courier New" panose="02070309020205020404" pitchFamily="49" charset="0"/>
+              </a:rPr>
+              <a:t> = </a:t>
+            </a:r>
+            <a:r>
+              <a:rPr lang="en-US" b="0" i="0" dirty="0" err="1">
+                <a:solidFill>
+                  <a:srgbClr val="E0E0E0"/>
+                </a:solidFill>
+                <a:effectLst/>
+                <a:latin typeface="Courier New" panose="02070309020205020404" pitchFamily="49" charset="0"/>
+              </a:rPr>
+              <a:t>rng.uniform</a:t>
+            </a:r>
+            <a:r>
+              <a:rPr lang="en-US" b="0" i="0" dirty="0">
+                <a:solidFill>
+                  <a:srgbClr val="E0E0E0"/>
+                </a:solidFill>
+                <a:effectLst/>
+                <a:latin typeface="Courier New" panose="02070309020205020404" pitchFamily="49" charset="0"/>
+              </a:rPr>
+              <a:t>(-</a:t>
+            </a:r>
+            <a:r>
+              <a:rPr lang="en-US" b="0" i="0" dirty="0">
+                <a:solidFill>
+                  <a:srgbClr val="79C0FF"/>
+                </a:solidFill>
+                <a:effectLst/>
+                <a:latin typeface="Courier New" panose="02070309020205020404" pitchFamily="49" charset="0"/>
+              </a:rPr>
+              <a:t>2</a:t>
+            </a:r>
+            <a:r>
+              <a:rPr lang="en-US" b="0" i="0" dirty="0">
+                <a:solidFill>
+                  <a:srgbClr val="E0E0E0"/>
+                </a:solidFill>
+                <a:effectLst/>
+                <a:latin typeface="Courier New" panose="02070309020205020404" pitchFamily="49" charset="0"/>
+              </a:rPr>
+              <a:t>, </a:t>
+            </a:r>
+            <a:r>
+              <a:rPr lang="en-US" b="0" i="0" dirty="0">
+                <a:solidFill>
+                  <a:srgbClr val="79C0FF"/>
+                </a:solidFill>
+                <a:effectLst/>
+                <a:latin typeface="Courier New" panose="02070309020205020404" pitchFamily="49" charset="0"/>
+              </a:rPr>
+              <a:t>2</a:t>
+            </a:r>
+            <a:r>
+              <a:rPr lang="en-US" b="0" i="0" dirty="0">
+                <a:solidFill>
+                  <a:srgbClr val="E0E0E0"/>
+                </a:solidFill>
+                <a:effectLst/>
+                <a:latin typeface="Courier New" panose="02070309020205020404" pitchFamily="49" charset="0"/>
+              </a:rPr>
+              <a:t>, size=</a:t>
+            </a:r>
+            <a:r>
+              <a:rPr lang="en-US" b="0" i="0" dirty="0">
+                <a:solidFill>
+                  <a:srgbClr val="79C0FF"/>
+                </a:solidFill>
+                <a:effectLst/>
+                <a:latin typeface="Courier New" panose="02070309020205020404" pitchFamily="49" charset="0"/>
+              </a:rPr>
+              <a:t>3</a:t>
+            </a:r>
+            <a:r>
+              <a:rPr lang="en-US" b="0" i="0" dirty="0">
+                <a:solidFill>
+                  <a:srgbClr val="E0E0E0"/>
+                </a:solidFill>
+                <a:effectLst/>
+                <a:latin typeface="Courier New" panose="02070309020205020404" pitchFamily="49" charset="0"/>
+              </a:rPr>
+              <a:t>)</a:t>
+            </a:r>
+            <a:br>
+              <a:rPr lang="en-US" dirty="0"/>
+            </a:br>
+            <a:r>
+              <a:rPr lang="en-US" b="0" i="0" dirty="0" err="1">
+                <a:solidFill>
+                  <a:srgbClr val="E0E0E0"/>
+                </a:solidFill>
+                <a:effectLst/>
+                <a:latin typeface="Courier New" panose="02070309020205020404" pitchFamily="49" charset="0"/>
+              </a:rPr>
+              <a:t>y_init</a:t>
+            </a:r>
+            <a:r>
+              <a:rPr lang="en-US" b="0" i="0" dirty="0">
+                <a:solidFill>
+                  <a:srgbClr val="E0E0E0"/>
+                </a:solidFill>
+                <a:effectLst/>
+                <a:latin typeface="Courier New" panose="02070309020205020404" pitchFamily="49" charset="0"/>
+              </a:rPr>
+              <a:t> = </a:t>
+            </a:r>
+            <a:r>
+              <a:rPr lang="en-US" b="0" i="0" dirty="0">
+                <a:solidFill>
+                  <a:srgbClr val="D2A8FF"/>
+                </a:solidFill>
+                <a:effectLst/>
+                <a:latin typeface="Courier New" panose="02070309020205020404" pitchFamily="49" charset="0"/>
+              </a:rPr>
+              <a:t>objective</a:t>
+            </a:r>
+            <a:r>
+              <a:rPr lang="en-US" b="0" i="0" dirty="0">
+                <a:solidFill>
+                  <a:srgbClr val="E0E0E0"/>
+                </a:solidFill>
+                <a:effectLst/>
+                <a:latin typeface="Courier New" panose="02070309020205020404" pitchFamily="49" charset="0"/>
+              </a:rPr>
+              <a:t>(</a:t>
+            </a:r>
+            <a:r>
+              <a:rPr lang="en-US" b="0" i="0" dirty="0" err="1">
+                <a:solidFill>
+                  <a:srgbClr val="E0E0E0"/>
+                </a:solidFill>
+                <a:effectLst/>
+                <a:latin typeface="Courier New" panose="02070309020205020404" pitchFamily="49" charset="0"/>
+              </a:rPr>
+              <a:t>X_init</a:t>
+            </a:r>
+            <a:r>
+              <a:rPr lang="en-US" b="0" i="0" dirty="0">
+                <a:solidFill>
+                  <a:srgbClr val="E0E0E0"/>
+                </a:solidFill>
+                <a:effectLst/>
+                <a:latin typeface="Courier New" panose="02070309020205020404" pitchFamily="49" charset="0"/>
+              </a:rPr>
+              <a:t>)</a:t>
+            </a:r>
+            <a:br>
+              <a:rPr lang="en-US" dirty="0"/>
+            </a:br>
+            <a:br>
+              <a:rPr lang="en-US" dirty="0"/>
+            </a:br>
+            <a:r>
+              <a:rPr lang="en-US" b="0" i="0" dirty="0">
+                <a:solidFill>
+                  <a:srgbClr val="8B949E"/>
+                </a:solidFill>
+                <a:effectLst/>
+                <a:latin typeface="Courier New" panose="02070309020205020404" pitchFamily="49" charset="0"/>
+              </a:rPr>
               <a:t># Fit GP surrogate</a:t>
             </a:r>
-            <a:br/>
-            <a:r>
-              <a:t>gp = GaussianProcessRegressor(</a:t>
-            </a:r>
-            <a:br/>
-            <a:r>
-              <a:t>    kernel=Matern(nu=2.5),</a:t>
-            </a:r>
-            <a:br/>
-            <a:r>
-              <a:t>    alpha=1e-6)</a:t>
-            </a:r>
-            <a:br/>
-            <a:r>
-              <a:t>gp.fit(X_init, y_init)</a:t>
-            </a:r>
+            <a:br>
+              <a:rPr lang="en-US" dirty="0"/>
+            </a:br>
+            <a:r>
+              <a:rPr lang="en-US" b="0" i="0" dirty="0" err="1">
+                <a:solidFill>
+                  <a:srgbClr val="E0E0E0"/>
+                </a:solidFill>
+                <a:effectLst/>
+                <a:latin typeface="Courier New" panose="02070309020205020404" pitchFamily="49" charset="0"/>
+              </a:rPr>
+              <a:t>gp</a:t>
+            </a:r>
+            <a:r>
+              <a:rPr lang="en-US" b="0" i="0" dirty="0">
+                <a:solidFill>
+                  <a:srgbClr val="E0E0E0"/>
+                </a:solidFill>
+                <a:effectLst/>
+                <a:latin typeface="Courier New" panose="02070309020205020404" pitchFamily="49" charset="0"/>
+              </a:rPr>
+              <a:t> = </a:t>
+            </a:r>
+            <a:r>
+              <a:rPr lang="en-US" b="0" i="0" dirty="0" err="1">
+                <a:solidFill>
+                  <a:srgbClr val="D2A8FF"/>
+                </a:solidFill>
+                <a:effectLst/>
+                <a:latin typeface="Courier New" panose="02070309020205020404" pitchFamily="49" charset="0"/>
+              </a:rPr>
+              <a:t>GaussianProcessRegressor</a:t>
+            </a:r>
+            <a:r>
+              <a:rPr lang="en-US" b="0" i="0" dirty="0">
+                <a:solidFill>
+                  <a:srgbClr val="E0E0E0"/>
+                </a:solidFill>
+                <a:effectLst/>
+                <a:latin typeface="Courier New" panose="02070309020205020404" pitchFamily="49" charset="0"/>
+              </a:rPr>
+              <a:t>(</a:t>
+            </a:r>
+            <a:br>
+              <a:rPr lang="en-US" dirty="0"/>
+            </a:br>
+            <a:r>
+              <a:rPr lang="en-US" b="0" i="0" dirty="0">
+                <a:solidFill>
+                  <a:srgbClr val="E0E0E0"/>
+                </a:solidFill>
+                <a:effectLst/>
+                <a:latin typeface="Courier New" panose="02070309020205020404" pitchFamily="49" charset="0"/>
+              </a:rPr>
+              <a:t>  kernel=</a:t>
+            </a:r>
+            <a:r>
+              <a:rPr lang="en-US" b="0" i="0" dirty="0" err="1">
+                <a:solidFill>
+                  <a:srgbClr val="D2A8FF"/>
+                </a:solidFill>
+                <a:effectLst/>
+                <a:latin typeface="Courier New" panose="02070309020205020404" pitchFamily="49" charset="0"/>
+              </a:rPr>
+              <a:t>Matern</a:t>
+            </a:r>
+            <a:r>
+              <a:rPr lang="en-US" b="0" i="0" dirty="0">
+                <a:solidFill>
+                  <a:srgbClr val="E0E0E0"/>
+                </a:solidFill>
+                <a:effectLst/>
+                <a:latin typeface="Courier New" panose="02070309020205020404" pitchFamily="49" charset="0"/>
+              </a:rPr>
+              <a:t>(nu=</a:t>
+            </a:r>
+            <a:r>
+              <a:rPr lang="en-US" b="0" i="0" dirty="0">
+                <a:solidFill>
+                  <a:srgbClr val="79C0FF"/>
+                </a:solidFill>
+                <a:effectLst/>
+                <a:latin typeface="Courier New" panose="02070309020205020404" pitchFamily="49" charset="0"/>
+              </a:rPr>
+              <a:t>2.5</a:t>
+            </a:r>
+            <a:r>
+              <a:rPr lang="en-US" b="0" i="0" dirty="0">
+                <a:solidFill>
+                  <a:srgbClr val="E0E0E0"/>
+                </a:solidFill>
+                <a:effectLst/>
+                <a:latin typeface="Courier New" panose="02070309020205020404" pitchFamily="49" charset="0"/>
+              </a:rPr>
+              <a:t>),</a:t>
+            </a:r>
+            <a:br>
+              <a:rPr lang="en-US" dirty="0"/>
+            </a:br>
+            <a:r>
+              <a:rPr lang="en-US" b="0" i="0" dirty="0">
+                <a:solidFill>
+                  <a:srgbClr val="E0E0E0"/>
+                </a:solidFill>
+                <a:effectLst/>
+                <a:latin typeface="Courier New" panose="02070309020205020404" pitchFamily="49" charset="0"/>
+              </a:rPr>
+              <a:t>  alpha=</a:t>
+            </a:r>
+            <a:r>
+              <a:rPr lang="en-US" b="0" i="0" dirty="0">
+                <a:solidFill>
+                  <a:srgbClr val="79C0FF"/>
+                </a:solidFill>
+                <a:effectLst/>
+                <a:latin typeface="Courier New" panose="02070309020205020404" pitchFamily="49" charset="0"/>
+              </a:rPr>
+              <a:t>1e-6</a:t>
+            </a:r>
+            <a:r>
+              <a:rPr lang="en-US" b="0" i="0" dirty="0">
+                <a:solidFill>
+                  <a:srgbClr val="E0E0E0"/>
+                </a:solidFill>
+                <a:effectLst/>
+                <a:latin typeface="Courier New" panose="02070309020205020404" pitchFamily="49" charset="0"/>
+              </a:rPr>
+              <a:t>)</a:t>
+            </a:r>
+            <a:br>
+              <a:rPr lang="en-US" dirty="0"/>
+            </a:br>
+            <a:r>
+              <a:rPr lang="en-US" b="0" i="0" dirty="0" err="1">
+                <a:solidFill>
+                  <a:srgbClr val="E0E0E0"/>
+                </a:solidFill>
+                <a:effectLst/>
+                <a:latin typeface="Courier New" panose="02070309020205020404" pitchFamily="49" charset="0"/>
+              </a:rPr>
+              <a:t>gp.</a:t>
+            </a:r>
+            <a:r>
+              <a:rPr lang="en-US" b="0" i="0" dirty="0" err="1">
+                <a:solidFill>
+                  <a:srgbClr val="D2A8FF"/>
+                </a:solidFill>
+                <a:effectLst/>
+                <a:latin typeface="Courier New" panose="02070309020205020404" pitchFamily="49" charset="0"/>
+              </a:rPr>
+              <a:t>fit</a:t>
+            </a:r>
+            <a:r>
+              <a:rPr lang="en-US" b="0" i="0" dirty="0">
+                <a:solidFill>
+                  <a:srgbClr val="E0E0E0"/>
+                </a:solidFill>
+                <a:effectLst/>
+                <a:latin typeface="Courier New" panose="02070309020205020404" pitchFamily="49" charset="0"/>
+              </a:rPr>
+              <a:t>(</a:t>
+            </a:r>
+            <a:r>
+              <a:rPr lang="en-US" b="0" i="0" dirty="0" err="1">
+                <a:solidFill>
+                  <a:srgbClr val="E0E0E0"/>
+                </a:solidFill>
+                <a:effectLst/>
+                <a:latin typeface="Courier New" panose="02070309020205020404" pitchFamily="49" charset="0"/>
+              </a:rPr>
+              <a:t>X_init</a:t>
+            </a:r>
+            <a:r>
+              <a:rPr lang="en-US" b="0" i="0" dirty="0">
+                <a:solidFill>
+                  <a:srgbClr val="E0E0E0"/>
+                </a:solidFill>
+                <a:effectLst/>
+                <a:latin typeface="Courier New" panose="02070309020205020404" pitchFamily="49" charset="0"/>
+              </a:rPr>
+              <a:t>, </a:t>
+            </a:r>
+            <a:r>
+              <a:rPr lang="en-US" b="0" i="0" dirty="0" err="1">
+                <a:solidFill>
+                  <a:srgbClr val="E0E0E0"/>
+                </a:solidFill>
+                <a:effectLst/>
+                <a:latin typeface="Courier New" panose="02070309020205020404" pitchFamily="49" charset="0"/>
+              </a:rPr>
+              <a:t>y_init</a:t>
+            </a:r>
+            <a:r>
+              <a:rPr lang="en-US" b="0" i="0" dirty="0">
+                <a:solidFill>
+                  <a:srgbClr val="E0E0E0"/>
+                </a:solidFill>
+                <a:effectLst/>
+                <a:latin typeface="Courier New" panose="02070309020205020404" pitchFamily="49" charset="0"/>
+              </a:rPr>
+              <a:t>)</a:t>
+            </a:r>
+            <a:endParaRPr lang="en-US" dirty="0"/>
           </a:p>
         </p:txBody>
       </p:sp>
@@ -11735,7 +14331,7 @@
         <p:spPr>
           <a:xfrm>
             <a:off x="822960" y="3794760"/>
-            <a:ext cx="5029200" cy="1371600"/>
+            <a:ext cx="5029200" cy="830997"/>
           </a:xfrm>
           <a:prstGeom prst="rect">
             <a:avLst/>
@@ -11757,7 +14353,35 @@
               </a:defRPr>
             </a:pPr>
             <a:r>
-              <a:t>Top: 3 random samples (red dots). Bottom: the GP surrogate fitted to those points. With so little data, the surrogate is highly uncertain.</a:t>
+              <a:rPr lang="en-US" b="1" dirty="0"/>
+              <a:t>Step 1</a:t>
+            </a:r>
+            <a:r>
+              <a:rPr b="1" dirty="0"/>
+              <a:t>:</a:t>
+            </a:r>
+            <a:r>
+              <a:rPr dirty="0"/>
+              <a:t> 3 random samples (red dots). </a:t>
+            </a:r>
+            <a:endParaRPr lang="en-US" dirty="0"/>
+          </a:p>
+          <a:p>
+            <a:pPr algn="l">
+              <a:defRPr sz="1600" b="0">
+                <a:solidFill>
+                  <a:srgbClr val="444444"/>
+                </a:solidFill>
+                <a:latin typeface="Nunito"/>
+              </a:defRPr>
+            </a:pPr>
+            <a:r>
+              <a:rPr lang="en-US" b="1" dirty="0"/>
+              <a:t>Step 2:</a:t>
+            </a:r>
+            <a:r>
+              <a:rPr dirty="0"/>
+              <a:t> GP surrogate fitted to those points. With so little data, the surrogate is highly uncertain.</a:t>
             </a:r>
           </a:p>
         </p:txBody>
@@ -11778,8 +14402,8 @@
         </p:blipFill>
         <p:spPr>
           <a:xfrm>
-            <a:off x="6579704" y="1097280"/>
-            <a:ext cx="4671391" cy="2285999"/>
+            <a:off x="6270926" y="1097280"/>
+            <a:ext cx="4980169" cy="2437103"/>
           </a:xfrm>
           <a:prstGeom prst="rect">
             <a:avLst/>
@@ -11802,14 +14426,64 @@
         </p:blipFill>
         <p:spPr>
           <a:xfrm>
-            <a:off x="7062952" y="3566160"/>
-            <a:ext cx="3704896" cy="2285999"/>
+            <a:off x="6579704" y="3609611"/>
+            <a:ext cx="4671848" cy="2882629"/>
           </a:xfrm>
           <a:prstGeom prst="rect">
             <a:avLst/>
           </a:prstGeom>
         </p:spPr>
       </p:pic>
+      <p:sp>
+        <p:nvSpPr>
+          <p:cNvPr id="8" name="Rectangle 7">
+            <a:extLst>
+              <a:ext uri="{FF2B5EF4-FFF2-40B4-BE49-F238E27FC236}">
+                <a16:creationId xmlns:a16="http://schemas.microsoft.com/office/drawing/2014/main" id="{530BB5C5-C38C-D2F8-9C7D-3BBFF0E2511A}"/>
+              </a:ext>
+            </a:extLst>
+          </p:cNvPr>
+          <p:cNvSpPr/>
+          <p:nvPr/>
+        </p:nvSpPr>
+        <p:spPr>
+          <a:xfrm>
+            <a:off x="822960" y="856845"/>
+            <a:ext cx="3657600" cy="38100"/>
+          </a:xfrm>
+          <a:prstGeom prst="rect">
+            <a:avLst/>
+          </a:prstGeom>
+          <a:solidFill>
+            <a:srgbClr val="1A1A1A"/>
+          </a:solidFill>
+          <a:ln>
+            <a:noFill/>
+          </a:ln>
+        </p:spPr>
+        <p:style>
+          <a:lnRef idx="1">
+            <a:schemeClr val="accent1"/>
+          </a:lnRef>
+          <a:fillRef idx="3">
+            <a:schemeClr val="accent1"/>
+          </a:fillRef>
+          <a:effectRef idx="2">
+            <a:schemeClr val="accent1"/>
+          </a:effectRef>
+          <a:fontRef idx="minor">
+            <a:schemeClr val="lt1"/>
+          </a:fontRef>
+        </p:style>
+        <p:txBody>
+          <a:bodyPr rtlCol="0" anchor="ctr"/>
+          <a:lstStyle/>
+          <a:p>
+            <a:pPr algn="ctr"/>
+            <a:endParaRPr/>
+          </a:p>
+        </p:txBody>
+      </p:sp>
     </p:spTree>
   </p:cSld>
   <p:clrMapOvr>
@@ -11917,13 +14591,13 @@
       </p:sp>
       <p:sp>
         <p:nvSpPr>
-          <p:cNvPr id="4" name="TextBox 3"/>
+          <p:cNvPr id="11" name="TextBox 10"/>
           <p:cNvSpPr txBox="1"/>
           <p:nvPr/>
         </p:nvSpPr>
         <p:spPr>
           <a:xfrm>
-            <a:off x="822960" y="1188720"/>
+            <a:off x="641122" y="3531816"/>
             <a:ext cx="9601200" cy="457200"/>
           </a:xfrm>
           <a:prstGeom prst="rect">
@@ -11949,21 +14623,293 @@
               </a:defRPr>
             </a:pPr>
             <a:r>
-              <a:t>def expected_improvement(X, gp, f_best):</a:t>
-            </a:r>
-          </a:p>
-        </p:txBody>
-      </p:sp>
-      <p:sp>
-        <p:nvSpPr>
-          <p:cNvPr id="5" name="TextBox 4"/>
+              <a:t>This is a direct translation of the closed-form EI formula into code:</a:t>
+            </a:r>
+          </a:p>
+        </p:txBody>
+      </p:sp>
+      <mc:AlternateContent xmlns:mc="http://schemas.openxmlformats.org/markup-compatibility/2006" xmlns:a14="http://schemas.microsoft.com/office/drawing/2010/main">
+        <mc:Choice Requires="a14">
+          <p:sp>
+            <p:nvSpPr>
+              <p:cNvPr id="12" name="TextBox 11"/>
+              <p:cNvSpPr txBox="1"/>
+              <p:nvPr/>
+            </p:nvSpPr>
+            <p:spPr>
+              <a:xfrm>
+                <a:off x="824001" y="3915864"/>
+                <a:ext cx="10284849" cy="369332"/>
+              </a:xfrm>
+              <a:prstGeom prst="rect">
+                <a:avLst/>
+              </a:prstGeom>
+              <a:noFill/>
+            </p:spPr>
+            <p:txBody>
+              <a:bodyPr wrap="square">
+                <a:spAutoFit/>
+              </a:bodyPr>
+              <a:lstStyle/>
+              <a:p>
+                <a:pPr algn="l">
+                  <a:spcAft>
+                    <a:spcPts val="400"/>
+                  </a:spcAft>
+                  <a:defRPr sz="1800" b="0">
+                    <a:solidFill>
+                      <a:srgbClr val="444444"/>
+                    </a:solidFill>
+                    <a:latin typeface="Nunito"/>
+                  </a:defRPr>
+                </a:pPr>
+                <a:r>
+                  <a:rPr lang="en-US" dirty="0"/>
+                  <a:t>•  </a:t>
+                </a:r>
+                <a:r>
+                  <a:rPr lang="en-US" i="1" dirty="0"/>
+                  <a:t>mu - </a:t>
+                </a:r>
+                <a:r>
+                  <a:rPr lang="en-US" i="1" dirty="0" err="1"/>
+                  <a:t>f_best</a:t>
+                </a:r>
+                <a:r>
+                  <a:rPr lang="en-US" i="1" dirty="0"/>
+                  <a:t> </a:t>
+                </a:r>
+                <a:r>
+                  <a:rPr lang="en-US" dirty="0"/>
+                  <a:t>computes </a:t>
+                </a:r>
+                <a14:m>
+                  <m:oMath xmlns:m="http://schemas.openxmlformats.org/officeDocument/2006/math">
+                    <m:r>
+                      <a:rPr lang="en-US" i="1" dirty="0" smtClean="0">
+                        <a:latin typeface="Cambria Math" panose="02040503050406030204" pitchFamily="18" charset="0"/>
+                      </a:rPr>
+                      <m:t>𝜇</m:t>
+                    </m:r>
+                    <m:r>
+                      <a:rPr lang="en-US" i="1" dirty="0" smtClean="0">
+                        <a:latin typeface="Cambria Math" panose="02040503050406030204" pitchFamily="18" charset="0"/>
+                      </a:rPr>
+                      <m:t>(</m:t>
+                    </m:r>
+                    <m:r>
+                      <a:rPr lang="en-US" i="1" dirty="0" smtClean="0">
+                        <a:latin typeface="Cambria Math" panose="02040503050406030204" pitchFamily="18" charset="0"/>
+                      </a:rPr>
+                      <m:t>𝑥</m:t>
+                    </m:r>
+                    <m:r>
+                      <a:rPr lang="en-US" i="1" dirty="0" smtClean="0">
+                        <a:latin typeface="Cambria Math" panose="02040503050406030204" pitchFamily="18" charset="0"/>
+                      </a:rPr>
+                      <m:t>) − </m:t>
+                    </m:r>
+                    <m:sSup>
+                      <m:sSupPr>
+                        <m:ctrlPr>
+                          <a:rPr lang="ar-AE" i="1" dirty="0" smtClean="0">
+                            <a:latin typeface="Cambria Math" panose="02040503050406030204" pitchFamily="18" charset="0"/>
+                          </a:rPr>
+                        </m:ctrlPr>
+                      </m:sSupPr>
+                      <m:e>
+                        <m:r>
+                          <a:rPr lang="ar-AE" b="0" i="1" dirty="0" smtClean="0">
+                            <a:latin typeface="Cambria Math" panose="02040503050406030204" pitchFamily="18" charset="0"/>
+                          </a:rPr>
+                          <m:t>𝑓</m:t>
+                        </m:r>
+                      </m:e>
+                      <m:sup>
+                        <m:r>
+                          <a:rPr lang="en-US" b="0" i="1" dirty="0" smtClean="0">
+                            <a:latin typeface="Cambria Math" panose="02040503050406030204" pitchFamily="18" charset="0"/>
+                          </a:rPr>
+                          <m:t>∗</m:t>
+                        </m:r>
+                      </m:sup>
+                    </m:sSup>
+                  </m:oMath>
+                </a14:m>
+                <a:r>
+                  <a:rPr lang="ar-AE" dirty="0"/>
+                  <a:t> — </a:t>
+                </a:r>
+                <a:r>
+                  <a:rPr lang="en-US" dirty="0"/>
+                  <a:t>the predicted improvement in the mean</a:t>
+                </a:r>
+                <a:endParaRPr dirty="0"/>
+              </a:p>
+            </p:txBody>
+          </p:sp>
+        </mc:Choice>
+        <mc:Fallback xmlns="">
+          <p:sp>
+            <p:nvSpPr>
+              <p:cNvPr id="12" name="TextBox 11"/>
+              <p:cNvSpPr txBox="1">
+                <a:spLocks noRot="1" noChangeAspect="1" noMove="1" noResize="1" noEditPoints="1" noAdjustHandles="1" noChangeArrowheads="1" noChangeShapeType="1" noTextEdit="1"/>
+              </p:cNvSpPr>
+              <p:nvPr/>
+            </p:nvSpPr>
+            <p:spPr>
+              <a:xfrm>
+                <a:off x="824001" y="3915864"/>
+                <a:ext cx="10284849" cy="369332"/>
+              </a:xfrm>
+              <a:prstGeom prst="rect">
+                <a:avLst/>
+              </a:prstGeom>
+              <a:blipFill>
+                <a:blip r:embed="rId2"/>
+                <a:stretch>
+                  <a:fillRect l="-474" t="-9836" b="-26230"/>
+                </a:stretch>
+              </a:blipFill>
+            </p:spPr>
+            <p:txBody>
+              <a:bodyPr/>
+              <a:lstStyle/>
+              <a:p>
+                <a:r>
+                  <a:rPr lang="en-US">
+                    <a:noFill/>
+                  </a:rPr>
+                  <a:t> </a:t>
+                </a:r>
+              </a:p>
+            </p:txBody>
+          </p:sp>
+        </mc:Fallback>
+      </mc:AlternateContent>
+      <mc:AlternateContent xmlns:mc="http://schemas.openxmlformats.org/markup-compatibility/2006" xmlns:a14="http://schemas.microsoft.com/office/drawing/2010/main">
+        <mc:Choice Requires="a14">
+          <p:sp>
+            <p:nvSpPr>
+              <p:cNvPr id="13" name="TextBox 12"/>
+              <p:cNvSpPr txBox="1"/>
+              <p:nvPr/>
+            </p:nvSpPr>
+            <p:spPr>
+              <a:xfrm>
+                <a:off x="824001" y="4261103"/>
+                <a:ext cx="10848935" cy="369332"/>
+              </a:xfrm>
+              <a:prstGeom prst="rect">
+                <a:avLst/>
+              </a:prstGeom>
+              <a:noFill/>
+            </p:spPr>
+            <p:txBody>
+              <a:bodyPr wrap="square">
+                <a:spAutoFit/>
+              </a:bodyPr>
+              <a:lstStyle/>
+              <a:p>
+                <a:pPr algn="l">
+                  <a:spcAft>
+                    <a:spcPts val="400"/>
+                  </a:spcAft>
+                  <a:defRPr sz="1800" b="0">
+                    <a:solidFill>
+                      <a:srgbClr val="444444"/>
+                    </a:solidFill>
+                    <a:latin typeface="Nunito"/>
+                  </a:defRPr>
+                </a:pPr>
+                <a:r>
+                  <a:rPr dirty="0"/>
+                  <a:t>•  </a:t>
+                </a:r>
+                <a:r>
+                  <a:rPr lang="en-US" i="1" dirty="0"/>
+                  <a:t>Z = (mu - </a:t>
+                </a:r>
+                <a:r>
+                  <a:rPr lang="en-US" i="1" dirty="0" err="1"/>
+                  <a:t>f_best</a:t>
+                </a:r>
+                <a:r>
+                  <a:rPr lang="en-US" i="1" dirty="0"/>
+                  <a:t>) / sigma </a:t>
+                </a:r>
+                <a:r>
+                  <a:rPr lang="en-US" dirty="0"/>
+                  <a:t>computes the standardized score </a:t>
+                </a:r>
+                <a14:m>
+                  <m:oMath xmlns:m="http://schemas.openxmlformats.org/officeDocument/2006/math">
+                    <m:r>
+                      <a:rPr lang="en-US" i="1" dirty="0" smtClean="0">
+                        <a:latin typeface="Cambria Math" panose="02040503050406030204" pitchFamily="18" charset="0"/>
+                      </a:rPr>
+                      <m:t>𝑍</m:t>
+                    </m:r>
+                  </m:oMath>
+                </a14:m>
+                <a:r>
+                  <a:rPr lang="en-US" dirty="0"/>
+                  <a:t> - the key to balancing explore and exploit</a:t>
+                </a:r>
+              </a:p>
+            </p:txBody>
+          </p:sp>
+        </mc:Choice>
+        <mc:Fallback xmlns="">
+          <p:sp>
+            <p:nvSpPr>
+              <p:cNvPr id="13" name="TextBox 12"/>
+              <p:cNvSpPr txBox="1">
+                <a:spLocks noRot="1" noChangeAspect="1" noMove="1" noResize="1" noEditPoints="1" noAdjustHandles="1" noChangeArrowheads="1" noChangeShapeType="1" noTextEdit="1"/>
+              </p:cNvSpPr>
+              <p:nvPr/>
+            </p:nvSpPr>
+            <p:spPr>
+              <a:xfrm>
+                <a:off x="824001" y="4261103"/>
+                <a:ext cx="10848935" cy="369332"/>
+              </a:xfrm>
+              <a:prstGeom prst="rect">
+                <a:avLst/>
+              </a:prstGeom>
+              <a:blipFill>
+                <a:blip r:embed="rId3"/>
+                <a:stretch>
+                  <a:fillRect l="-449" t="-9836" b="-26230"/>
+                </a:stretch>
+              </a:blipFill>
+            </p:spPr>
+            <p:txBody>
+              <a:bodyPr/>
+              <a:lstStyle/>
+              <a:p>
+                <a:r>
+                  <a:rPr lang="en-US">
+                    <a:noFill/>
+                  </a:rPr>
+                  <a:t> </a:t>
+                </a:r>
+              </a:p>
+            </p:txBody>
+          </p:sp>
+        </mc:Fallback>
+      </mc:AlternateContent>
+      <p:sp>
+        <p:nvSpPr>
+          <p:cNvPr id="14" name="TextBox 13"/>
           <p:cNvSpPr txBox="1"/>
           <p:nvPr/>
         </p:nvSpPr>
         <p:spPr>
           <a:xfrm>
-            <a:off x="822960" y="1572768"/>
-            <a:ext cx="9601200" cy="457200"/>
+            <a:off x="824001" y="4617522"/>
+            <a:ext cx="10284849" cy="369332"/>
           </a:xfrm>
           <a:prstGeom prst="rect">
             <a:avLst/>
@@ -11988,21 +14934,127 @@
               </a:defRPr>
             </a:pPr>
             <a:r>
-              <a:t>    mu, sigma = gp.predict(X, return_std=True)</a:t>
-            </a:r>
-          </a:p>
-        </p:txBody>
-      </p:sp>
-      <p:sp>
-        <p:nvSpPr>
-          <p:cNvPr id="6" name="TextBox 5"/>
+              <a:rPr dirty="0"/>
+              <a:t>•  </a:t>
+            </a:r>
+            <a:r>
+              <a:rPr i="1" dirty="0" err="1"/>
+              <a:t>norm.cdf</a:t>
+            </a:r>
+            <a:r>
+              <a:rPr i="1" dirty="0"/>
+              <a:t>(Z) </a:t>
+            </a:r>
+            <a:r>
+              <a:rPr dirty="0"/>
+              <a:t>and </a:t>
+            </a:r>
+            <a:r>
+              <a:rPr i="1" dirty="0"/>
+              <a:t>norm.pdf(Z) </a:t>
+            </a:r>
+            <a:r>
+              <a:rPr dirty="0"/>
+              <a:t>are </a:t>
+            </a:r>
+            <a:r>
+              <a:rPr i="1" dirty="0"/>
+              <a:t>Φ(</a:t>
+            </a:r>
+            <a:r>
+              <a:rPr lang="en-US" i="1" dirty="0"/>
+              <a:t>Z</a:t>
+            </a:r>
+            <a:r>
+              <a:rPr i="1" dirty="0"/>
+              <a:t>)</a:t>
+            </a:r>
+            <a:r>
+              <a:rPr dirty="0"/>
+              <a:t> and </a:t>
+            </a:r>
+            <a:r>
+              <a:rPr i="1" dirty="0"/>
+              <a:t>φ(Z)</a:t>
+            </a:r>
+            <a:r>
+              <a:rPr dirty="0"/>
+              <a:t> from </a:t>
+            </a:r>
+            <a:r>
+              <a:rPr i="1" dirty="0" err="1"/>
+              <a:t>scipy.stats</a:t>
+            </a:r>
+            <a:endParaRPr i="1" dirty="0"/>
+          </a:p>
+        </p:txBody>
+      </p:sp>
+      <p:sp>
+        <p:nvSpPr>
+          <p:cNvPr id="15" name="Rectangle 14">
+            <a:extLst>
+              <a:ext uri="{FF2B5EF4-FFF2-40B4-BE49-F238E27FC236}">
+                <a16:creationId xmlns:a16="http://schemas.microsoft.com/office/drawing/2014/main" id="{DA437B95-6B80-438D-F0E6-BEFEB43DF1D1}"/>
+              </a:ext>
+            </a:extLst>
+          </p:cNvPr>
+          <p:cNvSpPr/>
+          <p:nvPr/>
+        </p:nvSpPr>
+        <p:spPr>
+          <a:xfrm>
+            <a:off x="822959" y="1097279"/>
+            <a:ext cx="10493551" cy="2119333"/>
+          </a:xfrm>
+          <a:prstGeom prst="rect">
+            <a:avLst/>
+          </a:prstGeom>
+          <a:solidFill>
+            <a:srgbClr val="1A1A1A"/>
+          </a:solidFill>
+          <a:ln>
+            <a:noFill/>
+          </a:ln>
+        </p:spPr>
+        <p:style>
+          <a:lnRef idx="1">
+            <a:schemeClr val="accent1"/>
+          </a:lnRef>
+          <a:fillRef idx="3">
+            <a:schemeClr val="accent1"/>
+          </a:fillRef>
+          <a:effectRef idx="2">
+            <a:schemeClr val="accent1"/>
+          </a:effectRef>
+          <a:fontRef idx="minor">
+            <a:schemeClr val="lt1"/>
+          </a:fontRef>
+        </p:style>
+        <p:txBody>
+          <a:bodyPr rtlCol="0" anchor="ctr"/>
+          <a:lstStyle/>
+          <a:p>
+            <a:pPr algn="ctr"/>
+            <a:endParaRPr/>
+          </a:p>
+        </p:txBody>
+      </p:sp>
+      <p:sp>
+        <p:nvSpPr>
+          <p:cNvPr id="16" name="TextBox 15">
+            <a:extLst>
+              <a:ext uri="{FF2B5EF4-FFF2-40B4-BE49-F238E27FC236}">
+                <a16:creationId xmlns:a16="http://schemas.microsoft.com/office/drawing/2014/main" id="{A6206B94-8DC8-6F98-8CB7-870333A138AF}"/>
+              </a:ext>
+            </a:extLst>
+          </p:cNvPr>
           <p:cNvSpPr txBox="1"/>
           <p:nvPr/>
         </p:nvSpPr>
         <p:spPr>
           <a:xfrm>
-            <a:off x="822960" y="1956816"/>
-            <a:ext cx="9601200" cy="457200"/>
+            <a:off x="1005839" y="1188720"/>
+            <a:ext cx="9921175" cy="1292662"/>
           </a:xfrm>
           <a:prstGeom prst="rect">
             <a:avLst/>
@@ -12016,329 +15068,429 @@
           <a:lstStyle/>
           <a:p>
             <a:pPr algn="l">
-              <a:spcAft>
-                <a:spcPts val="400"/>
-              </a:spcAft>
-              <a:defRPr sz="1800" b="0">
-                <a:solidFill>
-                  <a:srgbClr val="444444"/>
-                </a:solidFill>
-                <a:latin typeface="Nunito"/>
+              <a:defRPr sz="1300" b="0">
+                <a:solidFill>
+                  <a:srgbClr val="E0E0E0"/>
+                </a:solidFill>
+                <a:latin typeface="Courier New"/>
               </a:defRPr>
             </a:pPr>
             <a:r>
-              <a:t>    sigma = np.maximum(sigma, 1e-9)    # avoid /0</a:t>
-            </a:r>
-          </a:p>
-        </p:txBody>
-      </p:sp>
-      <p:sp>
-        <p:nvSpPr>
-          <p:cNvPr id="7" name="TextBox 6"/>
-          <p:cNvSpPr txBox="1"/>
-          <p:nvPr/>
-        </p:nvSpPr>
-        <p:spPr>
-          <a:xfrm>
-            <a:off x="822960" y="2340864"/>
-            <a:ext cx="9601200" cy="457200"/>
-          </a:xfrm>
-          <a:prstGeom prst="rect">
-            <a:avLst/>
-          </a:prstGeom>
-          <a:noFill/>
-        </p:spPr>
-        <p:txBody>
-          <a:bodyPr wrap="square">
-            <a:spAutoFit/>
-          </a:bodyPr>
-          <a:lstStyle/>
-          <a:p>
-            <a:pPr algn="l">
-              <a:spcAft>
-                <a:spcPts val="400"/>
-              </a:spcAft>
-              <a:defRPr sz="1800" b="0">
-                <a:solidFill>
-                  <a:srgbClr val="444444"/>
-                </a:solidFill>
-                <a:latin typeface="Nunito"/>
-              </a:defRPr>
-            </a:pPr>
-            <a:r>
-              <a:t>    Z = (mu - f_best) / sigma</a:t>
-            </a:r>
-          </a:p>
-        </p:txBody>
-      </p:sp>
-      <p:sp>
-        <p:nvSpPr>
-          <p:cNvPr id="8" name="TextBox 7"/>
-          <p:cNvSpPr txBox="1"/>
-          <p:nvPr/>
-        </p:nvSpPr>
-        <p:spPr>
-          <a:xfrm>
-            <a:off x="822960" y="2724912"/>
-            <a:ext cx="9601200" cy="457200"/>
-          </a:xfrm>
-          <a:prstGeom prst="rect">
-            <a:avLst/>
-          </a:prstGeom>
-          <a:noFill/>
-        </p:spPr>
-        <p:txBody>
-          <a:bodyPr wrap="square">
-            <a:spAutoFit/>
-          </a:bodyPr>
-          <a:lstStyle/>
-          <a:p>
-            <a:pPr algn="l">
-              <a:spcAft>
-                <a:spcPts val="400"/>
-              </a:spcAft>
-              <a:defRPr sz="1800" b="0">
-                <a:solidFill>
-                  <a:srgbClr val="444444"/>
-                </a:solidFill>
-                <a:latin typeface="Nunito"/>
-              </a:defRPr>
-            </a:pPr>
-            <a:r>
-              <a:t>    ei = (mu - f_best) * norm.cdf(Z) + sigma * norm.pdf(Z)</a:t>
-            </a:r>
-          </a:p>
-        </p:txBody>
-      </p:sp>
-      <p:sp>
-        <p:nvSpPr>
-          <p:cNvPr id="9" name="TextBox 8"/>
-          <p:cNvSpPr txBox="1"/>
-          <p:nvPr/>
-        </p:nvSpPr>
-        <p:spPr>
-          <a:xfrm>
-            <a:off x="822960" y="3108960"/>
-            <a:ext cx="9601200" cy="457200"/>
-          </a:xfrm>
-          <a:prstGeom prst="rect">
-            <a:avLst/>
-          </a:prstGeom>
-          <a:noFill/>
-        </p:spPr>
-        <p:txBody>
-          <a:bodyPr wrap="square">
-            <a:spAutoFit/>
-          </a:bodyPr>
-          <a:lstStyle/>
-          <a:p>
-            <a:pPr algn="l">
-              <a:spcAft>
-                <a:spcPts val="400"/>
-              </a:spcAft>
-              <a:defRPr sz="1800" b="0">
-                <a:solidFill>
-                  <a:srgbClr val="444444"/>
-                </a:solidFill>
-                <a:latin typeface="Nunito"/>
-              </a:defRPr>
-            </a:pPr>
-            <a:r>
-              <a:t>    return ei</a:t>
-            </a:r>
-          </a:p>
-        </p:txBody>
-      </p:sp>
-      <p:sp>
-        <p:nvSpPr>
-          <p:cNvPr id="10" name="TextBox 9"/>
-          <p:cNvSpPr txBox="1"/>
-          <p:nvPr/>
-        </p:nvSpPr>
-        <p:spPr>
-          <a:xfrm>
-            <a:off x="822960" y="3493008"/>
-            <a:ext cx="9601200" cy="457200"/>
-          </a:xfrm>
-          <a:prstGeom prst="rect">
-            <a:avLst/>
-          </a:prstGeom>
-          <a:noFill/>
-        </p:spPr>
-        <p:txBody>
-          <a:bodyPr wrap="square">
-            <a:spAutoFit/>
-          </a:bodyPr>
-          <a:lstStyle/>
-          <a:p>
-            <a:pPr algn="l">
-              <a:spcAft>
-                <a:spcPts val="400"/>
-              </a:spcAft>
-              <a:defRPr sz="1800" b="0">
-                <a:solidFill>
-                  <a:srgbClr val="444444"/>
-                </a:solidFill>
-                <a:latin typeface="Nunito"/>
-              </a:defRPr>
-            </a:pPr>
-            <a:endParaRPr/>
-          </a:p>
-        </p:txBody>
-      </p:sp>
-      <p:sp>
-        <p:nvSpPr>
-          <p:cNvPr id="11" name="TextBox 10"/>
-          <p:cNvSpPr txBox="1"/>
-          <p:nvPr/>
-        </p:nvSpPr>
-        <p:spPr>
-          <a:xfrm>
-            <a:off x="822960" y="3877056"/>
-            <a:ext cx="9601200" cy="457200"/>
-          </a:xfrm>
-          <a:prstGeom prst="rect">
-            <a:avLst/>
-          </a:prstGeom>
-          <a:noFill/>
-        </p:spPr>
-        <p:txBody>
-          <a:bodyPr wrap="square">
-            <a:spAutoFit/>
-          </a:bodyPr>
-          <a:lstStyle/>
-          <a:p>
-            <a:pPr algn="l">
-              <a:spcAft>
-                <a:spcPts val="400"/>
-              </a:spcAft>
-              <a:defRPr sz="1800" b="0">
-                <a:solidFill>
-                  <a:srgbClr val="444444"/>
-                </a:solidFill>
-                <a:latin typeface="Nunito"/>
-              </a:defRPr>
-            </a:pPr>
-            <a:r>
-              <a:t>This is a direct translation of the closed-form EI formula into code:</a:t>
-            </a:r>
-          </a:p>
-        </p:txBody>
-      </p:sp>
-      <p:sp>
-        <p:nvSpPr>
-          <p:cNvPr id="12" name="TextBox 11"/>
-          <p:cNvSpPr txBox="1"/>
-          <p:nvPr/>
-        </p:nvSpPr>
-        <p:spPr>
-          <a:xfrm>
-            <a:off x="1188720" y="4261104"/>
-            <a:ext cx="9601200" cy="457200"/>
-          </a:xfrm>
-          <a:prstGeom prst="rect">
-            <a:avLst/>
-          </a:prstGeom>
-          <a:noFill/>
-        </p:spPr>
-        <p:txBody>
-          <a:bodyPr wrap="square">
-            <a:spAutoFit/>
-          </a:bodyPr>
-          <a:lstStyle/>
-          <a:p>
-            <a:pPr algn="l">
-              <a:spcAft>
-                <a:spcPts val="400"/>
-              </a:spcAft>
-              <a:defRPr sz="1800" b="0">
-                <a:solidFill>
-                  <a:srgbClr val="444444"/>
-                </a:solidFill>
-                <a:latin typeface="Nunito"/>
-              </a:defRPr>
-            </a:pPr>
-            <a:r>
-              <a:t>•  mu - f_best computes μ(x) - f* — the predicted improvement in the mean</a:t>
-            </a:r>
-          </a:p>
-        </p:txBody>
-      </p:sp>
-      <p:sp>
-        <p:nvSpPr>
-          <p:cNvPr id="13" name="TextBox 12"/>
-          <p:cNvSpPr txBox="1"/>
-          <p:nvPr/>
-        </p:nvSpPr>
-        <p:spPr>
-          <a:xfrm>
-            <a:off x="1188720" y="4645152"/>
-            <a:ext cx="9601200" cy="457200"/>
-          </a:xfrm>
-          <a:prstGeom prst="rect">
-            <a:avLst/>
-          </a:prstGeom>
-          <a:noFill/>
-        </p:spPr>
-        <p:txBody>
-          <a:bodyPr wrap="square">
-            <a:spAutoFit/>
-          </a:bodyPr>
-          <a:lstStyle/>
-          <a:p>
-            <a:pPr algn="l">
-              <a:spcAft>
-                <a:spcPts val="400"/>
-              </a:spcAft>
-              <a:defRPr sz="1800" b="0">
-                <a:solidFill>
-                  <a:srgbClr val="444444"/>
-                </a:solidFill>
-                <a:latin typeface="Nunito"/>
-              </a:defRPr>
-            </a:pPr>
-            <a:r>
-              <a:t>•  Z standardises this improvement by the uncertainty — the key to balancing explore/exploit</a:t>
-            </a:r>
-          </a:p>
-        </p:txBody>
-      </p:sp>
-      <p:sp>
-        <p:nvSpPr>
-          <p:cNvPr id="14" name="TextBox 13"/>
-          <p:cNvSpPr txBox="1"/>
-          <p:nvPr/>
-        </p:nvSpPr>
-        <p:spPr>
-          <a:xfrm>
-            <a:off x="1188720" y="5029200"/>
-            <a:ext cx="9601200" cy="457200"/>
-          </a:xfrm>
-          <a:prstGeom prst="rect">
-            <a:avLst/>
-          </a:prstGeom>
-          <a:noFill/>
-        </p:spPr>
-        <p:txBody>
-          <a:bodyPr wrap="square">
-            <a:spAutoFit/>
-          </a:bodyPr>
-          <a:lstStyle/>
-          <a:p>
-            <a:pPr algn="l">
-              <a:spcAft>
-                <a:spcPts val="400"/>
-              </a:spcAft>
-              <a:defRPr sz="1800" b="0">
-                <a:solidFill>
-                  <a:srgbClr val="444444"/>
-                </a:solidFill>
-                <a:latin typeface="Nunito"/>
-              </a:defRPr>
-            </a:pPr>
-            <a:r>
-              <a:t>•  norm.cdf(Z) and norm.pdf(Z) are Φ(Z) and φ(Z) from scipy.stats</a:t>
-            </a:r>
+              <a:rPr lang="en-US" b="0" i="0" dirty="0">
+                <a:solidFill>
+                  <a:srgbClr val="FF7B72"/>
+                </a:solidFill>
+                <a:effectLst/>
+                <a:latin typeface="Courier New" panose="02070309020205020404" pitchFamily="49" charset="0"/>
+              </a:rPr>
+              <a:t>def</a:t>
+            </a:r>
+            <a:r>
+              <a:rPr lang="en-US" b="0" i="0" dirty="0">
+                <a:solidFill>
+                  <a:srgbClr val="E0E0E0"/>
+                </a:solidFill>
+                <a:effectLst/>
+                <a:latin typeface="Courier New" panose="02070309020205020404" pitchFamily="49" charset="0"/>
+              </a:rPr>
+              <a:t> </a:t>
+            </a:r>
+            <a:r>
+              <a:rPr lang="en-US" b="0" i="0" dirty="0" err="1">
+                <a:solidFill>
+                  <a:srgbClr val="D2A8FF"/>
+                </a:solidFill>
+                <a:effectLst/>
+                <a:latin typeface="Courier New" panose="02070309020205020404" pitchFamily="49" charset="0"/>
+              </a:rPr>
+              <a:t>expected_improvement</a:t>
+            </a:r>
+            <a:r>
+              <a:rPr lang="en-US" b="0" i="0" dirty="0">
+                <a:solidFill>
+                  <a:srgbClr val="E0E0E0"/>
+                </a:solidFill>
+                <a:effectLst/>
+                <a:latin typeface="Courier New" panose="02070309020205020404" pitchFamily="49" charset="0"/>
+              </a:rPr>
+              <a:t>(X, </a:t>
+            </a:r>
+            <a:r>
+              <a:rPr lang="en-US" b="0" i="0" dirty="0" err="1">
+                <a:solidFill>
+                  <a:srgbClr val="E0E0E0"/>
+                </a:solidFill>
+                <a:effectLst/>
+                <a:latin typeface="Courier New" panose="02070309020205020404" pitchFamily="49" charset="0"/>
+              </a:rPr>
+              <a:t>gp</a:t>
+            </a:r>
+            <a:r>
+              <a:rPr lang="en-US" b="0" i="0" dirty="0">
+                <a:solidFill>
+                  <a:srgbClr val="E0E0E0"/>
+                </a:solidFill>
+                <a:effectLst/>
+                <a:latin typeface="Courier New" panose="02070309020205020404" pitchFamily="49" charset="0"/>
+              </a:rPr>
+              <a:t>, </a:t>
+            </a:r>
+            <a:r>
+              <a:rPr lang="en-US" b="0" i="0" dirty="0" err="1">
+                <a:solidFill>
+                  <a:srgbClr val="E0E0E0"/>
+                </a:solidFill>
+                <a:effectLst/>
+                <a:latin typeface="Courier New" panose="02070309020205020404" pitchFamily="49" charset="0"/>
+              </a:rPr>
+              <a:t>f_best</a:t>
+            </a:r>
+            <a:r>
+              <a:rPr lang="en-US" b="0" i="0" dirty="0">
+                <a:solidFill>
+                  <a:srgbClr val="E0E0E0"/>
+                </a:solidFill>
+                <a:effectLst/>
+                <a:latin typeface="Courier New" panose="02070309020205020404" pitchFamily="49" charset="0"/>
+              </a:rPr>
+              <a:t>):</a:t>
+            </a:r>
+            <a:br>
+              <a:rPr lang="en-US" dirty="0"/>
+            </a:br>
+            <a:r>
+              <a:rPr lang="en-US" b="0" i="0" dirty="0">
+                <a:solidFill>
+                  <a:srgbClr val="E0E0E0"/>
+                </a:solidFill>
+                <a:effectLst/>
+                <a:latin typeface="Courier New" panose="02070309020205020404" pitchFamily="49" charset="0"/>
+              </a:rPr>
+              <a:t>  mu, sigma = </a:t>
+            </a:r>
+            <a:r>
+              <a:rPr lang="en-US" b="0" i="0" dirty="0" err="1">
+                <a:solidFill>
+                  <a:srgbClr val="E0E0E0"/>
+                </a:solidFill>
+                <a:effectLst/>
+                <a:latin typeface="Courier New" panose="02070309020205020404" pitchFamily="49" charset="0"/>
+              </a:rPr>
+              <a:t>gp.</a:t>
+            </a:r>
+            <a:r>
+              <a:rPr lang="en-US" b="0" i="0" dirty="0" err="1">
+                <a:solidFill>
+                  <a:srgbClr val="D2A8FF"/>
+                </a:solidFill>
+                <a:effectLst/>
+                <a:latin typeface="Courier New" panose="02070309020205020404" pitchFamily="49" charset="0"/>
+              </a:rPr>
+              <a:t>predict</a:t>
+            </a:r>
+            <a:r>
+              <a:rPr lang="en-US" b="0" i="0" dirty="0">
+                <a:solidFill>
+                  <a:srgbClr val="E0E0E0"/>
+                </a:solidFill>
+                <a:effectLst/>
+                <a:latin typeface="Courier New" panose="02070309020205020404" pitchFamily="49" charset="0"/>
+              </a:rPr>
+              <a:t>(X, </a:t>
+            </a:r>
+            <a:r>
+              <a:rPr lang="en-US" b="0" i="0" dirty="0" err="1">
+                <a:solidFill>
+                  <a:srgbClr val="E0E0E0"/>
+                </a:solidFill>
+                <a:effectLst/>
+                <a:latin typeface="Courier New" panose="02070309020205020404" pitchFamily="49" charset="0"/>
+              </a:rPr>
+              <a:t>return_std</a:t>
+            </a:r>
+            <a:r>
+              <a:rPr lang="en-US" b="0" i="0" dirty="0">
+                <a:solidFill>
+                  <a:srgbClr val="E0E0E0"/>
+                </a:solidFill>
+                <a:effectLst/>
+                <a:latin typeface="Courier New" panose="02070309020205020404" pitchFamily="49" charset="0"/>
+              </a:rPr>
+              <a:t>=</a:t>
+            </a:r>
+            <a:r>
+              <a:rPr lang="en-US" b="0" i="0" dirty="0">
+                <a:solidFill>
+                  <a:srgbClr val="FF7B72"/>
+                </a:solidFill>
+                <a:effectLst/>
+                <a:latin typeface="Courier New" panose="02070309020205020404" pitchFamily="49" charset="0"/>
+              </a:rPr>
+              <a:t>True</a:t>
+            </a:r>
+            <a:r>
+              <a:rPr lang="en-US" b="0" i="0" dirty="0">
+                <a:solidFill>
+                  <a:srgbClr val="E0E0E0"/>
+                </a:solidFill>
+                <a:effectLst/>
+                <a:latin typeface="Courier New" panose="02070309020205020404" pitchFamily="49" charset="0"/>
+              </a:rPr>
+              <a:t>)</a:t>
+            </a:r>
+            <a:br>
+              <a:rPr lang="en-US" dirty="0"/>
+            </a:br>
+            <a:r>
+              <a:rPr lang="en-US" b="0" i="0" dirty="0">
+                <a:solidFill>
+                  <a:srgbClr val="E0E0E0"/>
+                </a:solidFill>
+                <a:effectLst/>
+                <a:latin typeface="Courier New" panose="02070309020205020404" pitchFamily="49" charset="0"/>
+              </a:rPr>
+              <a:t>  sigma = </a:t>
+            </a:r>
+            <a:r>
+              <a:rPr lang="en-US" b="0" i="0" dirty="0" err="1">
+                <a:solidFill>
+                  <a:srgbClr val="E0E0E0"/>
+                </a:solidFill>
+                <a:effectLst/>
+                <a:latin typeface="Courier New" panose="02070309020205020404" pitchFamily="49" charset="0"/>
+              </a:rPr>
+              <a:t>np.</a:t>
+            </a:r>
+            <a:r>
+              <a:rPr lang="en-US" b="0" i="0" dirty="0" err="1">
+                <a:solidFill>
+                  <a:srgbClr val="D2A8FF"/>
+                </a:solidFill>
+                <a:effectLst/>
+                <a:latin typeface="Courier New" panose="02070309020205020404" pitchFamily="49" charset="0"/>
+              </a:rPr>
+              <a:t>maximum</a:t>
+            </a:r>
+            <a:r>
+              <a:rPr lang="en-US" b="0" i="0" dirty="0">
+                <a:solidFill>
+                  <a:srgbClr val="E0E0E0"/>
+                </a:solidFill>
+                <a:effectLst/>
+                <a:latin typeface="Courier New" panose="02070309020205020404" pitchFamily="49" charset="0"/>
+              </a:rPr>
+              <a:t>(sigma, </a:t>
+            </a:r>
+            <a:r>
+              <a:rPr lang="en-US" b="0" i="0" dirty="0">
+                <a:solidFill>
+                  <a:srgbClr val="79C0FF"/>
+                </a:solidFill>
+                <a:effectLst/>
+                <a:latin typeface="Courier New" panose="02070309020205020404" pitchFamily="49" charset="0"/>
+              </a:rPr>
+              <a:t>1e-9</a:t>
+            </a:r>
+            <a:r>
+              <a:rPr lang="en-US" b="0" i="0" dirty="0">
+                <a:solidFill>
+                  <a:srgbClr val="E0E0E0"/>
+                </a:solidFill>
+                <a:effectLst/>
+                <a:latin typeface="Courier New" panose="02070309020205020404" pitchFamily="49" charset="0"/>
+              </a:rPr>
+              <a:t>)  </a:t>
+            </a:r>
+            <a:r>
+              <a:rPr lang="en-US" b="0" i="0" dirty="0">
+                <a:solidFill>
+                  <a:srgbClr val="8B949E"/>
+                </a:solidFill>
+                <a:effectLst/>
+                <a:latin typeface="Courier New" panose="02070309020205020404" pitchFamily="49" charset="0"/>
+              </a:rPr>
+              <a:t># avoid division by zero</a:t>
+            </a:r>
+            <a:br>
+              <a:rPr lang="en-US" dirty="0"/>
+            </a:br>
+            <a:r>
+              <a:rPr lang="en-US" b="0" i="0" dirty="0">
+                <a:solidFill>
+                  <a:srgbClr val="E0E0E0"/>
+                </a:solidFill>
+                <a:effectLst/>
+                <a:latin typeface="Courier New" panose="02070309020205020404" pitchFamily="49" charset="0"/>
+              </a:rPr>
+              <a:t>  Z = (mu - </a:t>
+            </a:r>
+            <a:r>
+              <a:rPr lang="en-US" b="0" i="0" dirty="0" err="1">
+                <a:solidFill>
+                  <a:srgbClr val="E0E0E0"/>
+                </a:solidFill>
+                <a:effectLst/>
+                <a:latin typeface="Courier New" panose="02070309020205020404" pitchFamily="49" charset="0"/>
+              </a:rPr>
+              <a:t>f_best</a:t>
+            </a:r>
+            <a:r>
+              <a:rPr lang="en-US" b="0" i="0" dirty="0">
+                <a:solidFill>
+                  <a:srgbClr val="E0E0E0"/>
+                </a:solidFill>
+                <a:effectLst/>
+                <a:latin typeface="Courier New" panose="02070309020205020404" pitchFamily="49" charset="0"/>
+              </a:rPr>
+              <a:t>) / sigma</a:t>
+            </a:r>
+            <a:br>
+              <a:rPr lang="en-US" dirty="0"/>
+            </a:br>
+            <a:r>
+              <a:rPr lang="en-US" b="0" i="0" dirty="0">
+                <a:solidFill>
+                  <a:srgbClr val="E0E0E0"/>
+                </a:solidFill>
+                <a:effectLst/>
+                <a:latin typeface="Courier New" panose="02070309020205020404" pitchFamily="49" charset="0"/>
+              </a:rPr>
+              <a:t>  </a:t>
+            </a:r>
+            <a:r>
+              <a:rPr lang="en-US" b="0" i="0" dirty="0" err="1">
+                <a:solidFill>
+                  <a:srgbClr val="E0E0E0"/>
+                </a:solidFill>
+                <a:effectLst/>
+                <a:latin typeface="Courier New" panose="02070309020205020404" pitchFamily="49" charset="0"/>
+              </a:rPr>
+              <a:t>ei</a:t>
+            </a:r>
+            <a:r>
+              <a:rPr lang="en-US" b="0" i="0" dirty="0">
+                <a:solidFill>
+                  <a:srgbClr val="E0E0E0"/>
+                </a:solidFill>
+                <a:effectLst/>
+                <a:latin typeface="Courier New" panose="02070309020205020404" pitchFamily="49" charset="0"/>
+              </a:rPr>
+              <a:t> = (mu - </a:t>
+            </a:r>
+            <a:r>
+              <a:rPr lang="en-US" b="0" i="0" dirty="0" err="1">
+                <a:solidFill>
+                  <a:srgbClr val="E0E0E0"/>
+                </a:solidFill>
+                <a:effectLst/>
+                <a:latin typeface="Courier New" panose="02070309020205020404" pitchFamily="49" charset="0"/>
+              </a:rPr>
+              <a:t>f_best</a:t>
+            </a:r>
+            <a:r>
+              <a:rPr lang="en-US" b="0" i="0" dirty="0">
+                <a:solidFill>
+                  <a:srgbClr val="E0E0E0"/>
+                </a:solidFill>
+                <a:effectLst/>
+                <a:latin typeface="Courier New" panose="02070309020205020404" pitchFamily="49" charset="0"/>
+              </a:rPr>
+              <a:t>) * </a:t>
+            </a:r>
+            <a:r>
+              <a:rPr lang="en-US" b="0" i="0" dirty="0" err="1">
+                <a:solidFill>
+                  <a:srgbClr val="E0E0E0"/>
+                </a:solidFill>
+                <a:effectLst/>
+                <a:latin typeface="Courier New" panose="02070309020205020404" pitchFamily="49" charset="0"/>
+              </a:rPr>
+              <a:t>norm.</a:t>
+            </a:r>
+            <a:r>
+              <a:rPr lang="en-US" b="0" i="0" dirty="0" err="1">
+                <a:solidFill>
+                  <a:srgbClr val="D2A8FF"/>
+                </a:solidFill>
+                <a:effectLst/>
+                <a:latin typeface="Courier New" panose="02070309020205020404" pitchFamily="49" charset="0"/>
+              </a:rPr>
+              <a:t>cdf</a:t>
+            </a:r>
+            <a:r>
+              <a:rPr lang="en-US" b="0" i="0" dirty="0">
+                <a:solidFill>
+                  <a:srgbClr val="E0E0E0"/>
+                </a:solidFill>
+                <a:effectLst/>
+                <a:latin typeface="Courier New" panose="02070309020205020404" pitchFamily="49" charset="0"/>
+              </a:rPr>
+              <a:t>(Z) + sigma * norm.</a:t>
+            </a:r>
+            <a:r>
+              <a:rPr lang="en-US" b="0" i="0" dirty="0">
+                <a:solidFill>
+                  <a:srgbClr val="D2A8FF"/>
+                </a:solidFill>
+                <a:effectLst/>
+                <a:latin typeface="Courier New" panose="02070309020205020404" pitchFamily="49" charset="0"/>
+              </a:rPr>
+              <a:t>pdf</a:t>
+            </a:r>
+            <a:r>
+              <a:rPr lang="en-US" b="0" i="0" dirty="0">
+                <a:solidFill>
+                  <a:srgbClr val="E0E0E0"/>
+                </a:solidFill>
+                <a:effectLst/>
+                <a:latin typeface="Courier New" panose="02070309020205020404" pitchFamily="49" charset="0"/>
+              </a:rPr>
+              <a:t>(Z)</a:t>
+            </a:r>
+            <a:br>
+              <a:rPr lang="en-US" dirty="0"/>
+            </a:br>
+            <a:r>
+              <a:rPr lang="en-US" b="0" i="0" dirty="0">
+                <a:solidFill>
+                  <a:srgbClr val="E0E0E0"/>
+                </a:solidFill>
+                <a:effectLst/>
+                <a:latin typeface="Courier New" panose="02070309020205020404" pitchFamily="49" charset="0"/>
+              </a:rPr>
+              <a:t>  </a:t>
+            </a:r>
+            <a:r>
+              <a:rPr lang="en-US" b="0" i="0" dirty="0">
+                <a:solidFill>
+                  <a:srgbClr val="FF7B72"/>
+                </a:solidFill>
+                <a:effectLst/>
+                <a:latin typeface="Courier New" panose="02070309020205020404" pitchFamily="49" charset="0"/>
+              </a:rPr>
+              <a:t>return</a:t>
+            </a:r>
+            <a:r>
+              <a:rPr lang="en-US" b="0" i="0" dirty="0">
+                <a:solidFill>
+                  <a:srgbClr val="E0E0E0"/>
+                </a:solidFill>
+                <a:effectLst/>
+                <a:latin typeface="Courier New" panose="02070309020205020404" pitchFamily="49" charset="0"/>
+              </a:rPr>
+              <a:t> </a:t>
+            </a:r>
+            <a:r>
+              <a:rPr lang="en-US" b="0" i="0" dirty="0" err="1">
+                <a:solidFill>
+                  <a:srgbClr val="E0E0E0"/>
+                </a:solidFill>
+                <a:effectLst/>
+                <a:latin typeface="Courier New" panose="02070309020205020404" pitchFamily="49" charset="0"/>
+              </a:rPr>
+              <a:t>ei</a:t>
+            </a:r>
+            <a:endParaRPr lang="en-US" dirty="0"/>
           </a:p>
         </p:txBody>
       </p:sp>
@@ -12449,14 +15601,14 @@
       </p:sp>
       <p:sp>
         <p:nvSpPr>
-          <p:cNvPr id="4" name="TextBox 3"/>
+          <p:cNvPr id="13" name="TextBox 12"/>
           <p:cNvSpPr txBox="1"/>
           <p:nvPr/>
         </p:nvSpPr>
         <p:spPr>
           <a:xfrm>
-            <a:off x="822960" y="1188720"/>
-            <a:ext cx="9601200" cy="457200"/>
+            <a:off x="822960" y="3527431"/>
+            <a:ext cx="9601200" cy="646331"/>
           </a:xfrm>
           <a:prstGeom prst="rect">
             <a:avLst/>
@@ -12481,355 +15633,7 @@
               </a:defRPr>
             </a:pPr>
             <a:r>
-              <a:t>for i in range(n_iterations):</a:t>
-            </a:r>
-          </a:p>
-        </p:txBody>
-      </p:sp>
-      <p:sp>
-        <p:nvSpPr>
-          <p:cNvPr id="5" name="TextBox 4"/>
-          <p:cNvSpPr txBox="1"/>
-          <p:nvPr/>
-        </p:nvSpPr>
-        <p:spPr>
-          <a:xfrm>
-            <a:off x="822960" y="1572768"/>
-            <a:ext cx="9601200" cy="457200"/>
-          </a:xfrm>
-          <a:prstGeom prst="rect">
-            <a:avLst/>
-          </a:prstGeom>
-          <a:noFill/>
-        </p:spPr>
-        <p:txBody>
-          <a:bodyPr wrap="square">
-            <a:spAutoFit/>
-          </a:bodyPr>
-          <a:lstStyle/>
-          <a:p>
-            <a:pPr algn="l">
-              <a:spcAft>
-                <a:spcPts val="400"/>
-              </a:spcAft>
-              <a:defRPr sz="1800" b="0">
-                <a:solidFill>
-                  <a:srgbClr val="444444"/>
-                </a:solidFill>
-                <a:latin typeface="Nunito"/>
-              </a:defRPr>
-            </a:pPr>
-            <a:r>
-              <a:t>    gp = fit_gp(X_obs, y_obs)              # step 2a: fit surrogate</a:t>
-            </a:r>
-          </a:p>
-        </p:txBody>
-      </p:sp>
-      <p:sp>
-        <p:nvSpPr>
-          <p:cNvPr id="6" name="TextBox 5"/>
-          <p:cNvSpPr txBox="1"/>
-          <p:nvPr/>
-        </p:nvSpPr>
-        <p:spPr>
-          <a:xfrm>
-            <a:off x="822960" y="1956816"/>
-            <a:ext cx="9601200" cy="457200"/>
-          </a:xfrm>
-          <a:prstGeom prst="rect">
-            <a:avLst/>
-          </a:prstGeom>
-          <a:noFill/>
-        </p:spPr>
-        <p:txBody>
-          <a:bodyPr wrap="square">
-            <a:spAutoFit/>
-          </a:bodyPr>
-          <a:lstStyle/>
-          <a:p>
-            <a:pPr algn="l">
-              <a:spcAft>
-                <a:spcPts val="400"/>
-              </a:spcAft>
-              <a:defRPr sz="1800" b="0">
-                <a:solidFill>
-                  <a:srgbClr val="444444"/>
-                </a:solidFill>
-                <a:latin typeface="Nunito"/>
-              </a:defRPr>
-            </a:pPr>
-            <a:r>
-              <a:t>    f_best = np.max(y_obs)                  # current incumbent</a:t>
-            </a:r>
-          </a:p>
-        </p:txBody>
-      </p:sp>
-      <p:sp>
-        <p:nvSpPr>
-          <p:cNvPr id="7" name="TextBox 6"/>
-          <p:cNvSpPr txBox="1"/>
-          <p:nvPr/>
-        </p:nvSpPr>
-        <p:spPr>
-          <a:xfrm>
-            <a:off x="822960" y="2340864"/>
-            <a:ext cx="9601200" cy="457200"/>
-          </a:xfrm>
-          <a:prstGeom prst="rect">
-            <a:avLst/>
-          </a:prstGeom>
-          <a:noFill/>
-        </p:spPr>
-        <p:txBody>
-          <a:bodyPr wrap="square">
-            <a:spAutoFit/>
-          </a:bodyPr>
-          <a:lstStyle/>
-          <a:p>
-            <a:pPr algn="l">
-              <a:spcAft>
-                <a:spcPts val="400"/>
-              </a:spcAft>
-              <a:defRPr sz="1800" b="0">
-                <a:solidFill>
-                  <a:srgbClr val="444444"/>
-                </a:solidFill>
-                <a:latin typeface="Nunito"/>
-              </a:defRPr>
-            </a:pPr>
-            <a:r>
-              <a:t>    ei = expected_improvement(X, gp, f_best) # step 2b: compute α</a:t>
-            </a:r>
-          </a:p>
-        </p:txBody>
-      </p:sp>
-      <p:sp>
-        <p:nvSpPr>
-          <p:cNvPr id="8" name="TextBox 7"/>
-          <p:cNvSpPr txBox="1"/>
-          <p:nvPr/>
-        </p:nvSpPr>
-        <p:spPr>
-          <a:xfrm>
-            <a:off x="822960" y="2724912"/>
-            <a:ext cx="9601200" cy="457200"/>
-          </a:xfrm>
-          <a:prstGeom prst="rect">
-            <a:avLst/>
-          </a:prstGeom>
-          <a:noFill/>
-        </p:spPr>
-        <p:txBody>
-          <a:bodyPr wrap="square">
-            <a:spAutoFit/>
-          </a:bodyPr>
-          <a:lstStyle/>
-          <a:p>
-            <a:pPr algn="l">
-              <a:spcAft>
-                <a:spcPts val="400"/>
-              </a:spcAft>
-              <a:defRPr sz="1800" b="0">
-                <a:solidFill>
-                  <a:srgbClr val="444444"/>
-                </a:solidFill>
-                <a:latin typeface="Nunito"/>
-              </a:defRPr>
-            </a:pPr>
-            <a:r>
-              <a:t>    x_new = X[np.argmax(ei)]                # step 2c: argmax α</a:t>
-            </a:r>
-          </a:p>
-        </p:txBody>
-      </p:sp>
-      <p:sp>
-        <p:nvSpPr>
-          <p:cNvPr id="9" name="TextBox 8"/>
-          <p:cNvSpPr txBox="1"/>
-          <p:nvPr/>
-        </p:nvSpPr>
-        <p:spPr>
-          <a:xfrm>
-            <a:off x="822960" y="3108960"/>
-            <a:ext cx="9601200" cy="457200"/>
-          </a:xfrm>
-          <a:prstGeom prst="rect">
-            <a:avLst/>
-          </a:prstGeom>
-          <a:noFill/>
-        </p:spPr>
-        <p:txBody>
-          <a:bodyPr wrap="square">
-            <a:spAutoFit/>
-          </a:bodyPr>
-          <a:lstStyle/>
-          <a:p>
-            <a:pPr algn="l">
-              <a:spcAft>
-                <a:spcPts val="400"/>
-              </a:spcAft>
-              <a:defRPr sz="1800" b="0">
-                <a:solidFill>
-                  <a:srgbClr val="444444"/>
-                </a:solidFill>
-                <a:latin typeface="Nunito"/>
-              </a:defRPr>
-            </a:pPr>
-            <a:r>
-              <a:t>    y_new = objective(x_new)                # step 2d: EXPENSIVE call</a:t>
-            </a:r>
-          </a:p>
-        </p:txBody>
-      </p:sp>
-      <p:sp>
-        <p:nvSpPr>
-          <p:cNvPr id="10" name="TextBox 9"/>
-          <p:cNvSpPr txBox="1"/>
-          <p:nvPr/>
-        </p:nvSpPr>
-        <p:spPr>
-          <a:xfrm>
-            <a:off x="822960" y="3493008"/>
-            <a:ext cx="9601200" cy="457200"/>
-          </a:xfrm>
-          <a:prstGeom prst="rect">
-            <a:avLst/>
-          </a:prstGeom>
-          <a:noFill/>
-        </p:spPr>
-        <p:txBody>
-          <a:bodyPr wrap="square">
-            <a:spAutoFit/>
-          </a:bodyPr>
-          <a:lstStyle/>
-          <a:p>
-            <a:pPr algn="l">
-              <a:spcAft>
-                <a:spcPts val="400"/>
-              </a:spcAft>
-              <a:defRPr sz="1800" b="0">
-                <a:solidFill>
-                  <a:srgbClr val="444444"/>
-                </a:solidFill>
-                <a:latin typeface="Nunito"/>
-              </a:defRPr>
-            </a:pPr>
-            <a:r>
-              <a:t>    X_obs = np.vstack([X_obs, x_new])       # step 2e: update data</a:t>
-            </a:r>
-          </a:p>
-        </p:txBody>
-      </p:sp>
-      <p:sp>
-        <p:nvSpPr>
-          <p:cNvPr id="11" name="TextBox 10"/>
-          <p:cNvSpPr txBox="1"/>
-          <p:nvPr/>
-        </p:nvSpPr>
-        <p:spPr>
-          <a:xfrm>
-            <a:off x="822960" y="3877056"/>
-            <a:ext cx="9601200" cy="457200"/>
-          </a:xfrm>
-          <a:prstGeom prst="rect">
-            <a:avLst/>
-          </a:prstGeom>
-          <a:noFill/>
-        </p:spPr>
-        <p:txBody>
-          <a:bodyPr wrap="square">
-            <a:spAutoFit/>
-          </a:bodyPr>
-          <a:lstStyle/>
-          <a:p>
-            <a:pPr algn="l">
-              <a:spcAft>
-                <a:spcPts val="400"/>
-              </a:spcAft>
-              <a:defRPr sz="1800" b="0">
-                <a:solidFill>
-                  <a:srgbClr val="444444"/>
-                </a:solidFill>
-                <a:latin typeface="Nunito"/>
-              </a:defRPr>
-            </a:pPr>
-            <a:r>
-              <a:t>    y_obs = np.vstack([y_obs, y_new])</a:t>
-            </a:r>
-          </a:p>
-        </p:txBody>
-      </p:sp>
-      <p:sp>
-        <p:nvSpPr>
-          <p:cNvPr id="12" name="TextBox 11"/>
-          <p:cNvSpPr txBox="1"/>
-          <p:nvPr/>
-        </p:nvSpPr>
-        <p:spPr>
-          <a:xfrm>
-            <a:off x="822960" y="4261104"/>
-            <a:ext cx="9601200" cy="457200"/>
-          </a:xfrm>
-          <a:prstGeom prst="rect">
-            <a:avLst/>
-          </a:prstGeom>
-          <a:noFill/>
-        </p:spPr>
-        <p:txBody>
-          <a:bodyPr wrap="square">
-            <a:spAutoFit/>
-          </a:bodyPr>
-          <a:lstStyle/>
-          <a:p>
-            <a:pPr algn="l">
-              <a:spcAft>
-                <a:spcPts val="400"/>
-              </a:spcAft>
-              <a:defRPr sz="1800" b="0">
-                <a:solidFill>
-                  <a:srgbClr val="444444"/>
-                </a:solidFill>
-                <a:latin typeface="Nunito"/>
-              </a:defRPr>
-            </a:pPr>
-            <a:endParaRPr/>
-          </a:p>
-        </p:txBody>
-      </p:sp>
-      <p:sp>
-        <p:nvSpPr>
-          <p:cNvPr id="13" name="TextBox 12"/>
-          <p:cNvSpPr txBox="1"/>
-          <p:nvPr/>
-        </p:nvSpPr>
-        <p:spPr>
-          <a:xfrm>
-            <a:off x="822960" y="4645152"/>
-            <a:ext cx="9601200" cy="457200"/>
-          </a:xfrm>
-          <a:prstGeom prst="rect">
-            <a:avLst/>
-          </a:prstGeom>
-          <a:noFill/>
-        </p:spPr>
-        <p:txBody>
-          <a:bodyPr wrap="square">
-            <a:spAutoFit/>
-          </a:bodyPr>
-          <a:lstStyle/>
-          <a:p>
-            <a:pPr algn="l">
-              <a:spcAft>
-                <a:spcPts val="400"/>
-              </a:spcAft>
-              <a:defRPr sz="1800" b="0">
-                <a:solidFill>
-                  <a:srgbClr val="444444"/>
-                </a:solidFill>
-                <a:latin typeface="Nunito"/>
-              </a:defRPr>
-            </a:pPr>
-            <a:r>
+              <a:rPr dirty="0"/>
               <a:t>Each iteration maps directly to steps 2a–2e of the pseudocode. The entire BO engine is under 10 lines of Python.</a:t>
             </a:r>
           </a:p>
@@ -12843,7 +15647,7 @@
         </p:nvSpPr>
         <p:spPr>
           <a:xfrm>
-            <a:off x="822960" y="5120640"/>
+            <a:off x="822960" y="4902014"/>
             <a:ext cx="50800" cy="457200"/>
           </a:xfrm>
           <a:prstGeom prst="rect">
@@ -12887,8 +15691,8 @@
         </p:nvSpPr>
         <p:spPr>
           <a:xfrm>
-            <a:off x="1005840" y="5120640"/>
-            <a:ext cx="9144000" cy="457200"/>
+            <a:off x="1005840" y="4902014"/>
+            <a:ext cx="9144000" cy="646331"/>
           </a:xfrm>
           <a:prstGeom prst="rect">
             <a:avLst/>
@@ -12910,8 +15714,894 @@
               </a:defRPr>
             </a:pPr>
             <a:r>
+              <a:rPr dirty="0"/>
               <a:t>Result after 7 iterations (10 total evaluations): f(x*) = 0.5003 — matching the true optimum to 4 decimal places.</a:t>
             </a:r>
+            <a:r>
+              <a:rPr lang="en-US" dirty="0"/>
+              <a:t> </a:t>
+            </a:r>
+          </a:p>
+        </p:txBody>
+      </p:sp>
+      <p:sp>
+        <p:nvSpPr>
+          <p:cNvPr id="16" name="Rectangle 15">
+            <a:extLst>
+              <a:ext uri="{FF2B5EF4-FFF2-40B4-BE49-F238E27FC236}">
+                <a16:creationId xmlns:a16="http://schemas.microsoft.com/office/drawing/2014/main" id="{DC086784-AFAC-3AD0-59F5-2FA7D128BDAB}"/>
+              </a:ext>
+            </a:extLst>
+          </p:cNvPr>
+          <p:cNvSpPr/>
+          <p:nvPr/>
+        </p:nvSpPr>
+        <p:spPr>
+          <a:xfrm>
+            <a:off x="822959" y="1097279"/>
+            <a:ext cx="10493551" cy="2119333"/>
+          </a:xfrm>
+          <a:prstGeom prst="rect">
+            <a:avLst/>
+          </a:prstGeom>
+          <a:solidFill>
+            <a:srgbClr val="1A1A1A"/>
+          </a:solidFill>
+          <a:ln>
+            <a:noFill/>
+          </a:ln>
+        </p:spPr>
+        <p:style>
+          <a:lnRef idx="1">
+            <a:schemeClr val="accent1"/>
+          </a:lnRef>
+          <a:fillRef idx="3">
+            <a:schemeClr val="accent1"/>
+          </a:fillRef>
+          <a:effectRef idx="2">
+            <a:schemeClr val="accent1"/>
+          </a:effectRef>
+          <a:fontRef idx="minor">
+            <a:schemeClr val="lt1"/>
+          </a:fontRef>
+        </p:style>
+        <p:txBody>
+          <a:bodyPr rtlCol="0" anchor="ctr"/>
+          <a:lstStyle/>
+          <a:p>
+            <a:pPr algn="ctr"/>
+            <a:endParaRPr/>
+          </a:p>
+        </p:txBody>
+      </p:sp>
+      <p:sp>
+        <p:nvSpPr>
+          <p:cNvPr id="17" name="TextBox 16">
+            <a:extLst>
+              <a:ext uri="{FF2B5EF4-FFF2-40B4-BE49-F238E27FC236}">
+                <a16:creationId xmlns:a16="http://schemas.microsoft.com/office/drawing/2014/main" id="{F0F8376E-7E0B-8214-C597-74B4731D2DAB}"/>
+              </a:ext>
+            </a:extLst>
+          </p:cNvPr>
+          <p:cNvSpPr txBox="1"/>
+          <p:nvPr/>
+        </p:nvSpPr>
+        <p:spPr>
+          <a:xfrm>
+            <a:off x="1005839" y="1188720"/>
+            <a:ext cx="9921175" cy="1692771"/>
+          </a:xfrm>
+          <a:prstGeom prst="rect">
+            <a:avLst/>
+          </a:prstGeom>
+          <a:noFill/>
+        </p:spPr>
+        <p:txBody>
+          <a:bodyPr wrap="square">
+            <a:spAutoFit/>
+          </a:bodyPr>
+          <a:lstStyle/>
+          <a:p>
+            <a:pPr algn="l">
+              <a:defRPr sz="1300" b="0">
+                <a:solidFill>
+                  <a:srgbClr val="E0E0E0"/>
+                </a:solidFill>
+                <a:latin typeface="Courier New"/>
+              </a:defRPr>
+            </a:pPr>
+            <a:r>
+              <a:rPr lang="en-US" b="0" i="0" dirty="0">
+                <a:solidFill>
+                  <a:srgbClr val="FF7B72"/>
+                </a:solidFill>
+                <a:effectLst/>
+                <a:latin typeface="Courier New" panose="02070309020205020404" pitchFamily="49" charset="0"/>
+              </a:rPr>
+              <a:t>for</a:t>
+            </a:r>
+            <a:r>
+              <a:rPr lang="en-US" b="0" i="0" dirty="0">
+                <a:solidFill>
+                  <a:srgbClr val="E0E0E0"/>
+                </a:solidFill>
+                <a:effectLst/>
+                <a:latin typeface="Courier New" panose="02070309020205020404" pitchFamily="49" charset="0"/>
+              </a:rPr>
+              <a:t> </a:t>
+            </a:r>
+            <a:r>
+              <a:rPr lang="en-US" b="0" i="0" dirty="0" err="1">
+                <a:solidFill>
+                  <a:srgbClr val="E0E0E0"/>
+                </a:solidFill>
+                <a:effectLst/>
+                <a:latin typeface="Courier New" panose="02070309020205020404" pitchFamily="49" charset="0"/>
+              </a:rPr>
+              <a:t>i</a:t>
+            </a:r>
+            <a:r>
+              <a:rPr lang="en-US" b="0" i="0" dirty="0">
+                <a:solidFill>
+                  <a:srgbClr val="E0E0E0"/>
+                </a:solidFill>
+                <a:effectLst/>
+                <a:latin typeface="Courier New" panose="02070309020205020404" pitchFamily="49" charset="0"/>
+              </a:rPr>
+              <a:t> </a:t>
+            </a:r>
+            <a:r>
+              <a:rPr lang="en-US" b="0" i="0" dirty="0">
+                <a:solidFill>
+                  <a:srgbClr val="FF7B72"/>
+                </a:solidFill>
+                <a:effectLst/>
+                <a:latin typeface="Courier New" panose="02070309020205020404" pitchFamily="49" charset="0"/>
+              </a:rPr>
+              <a:t>in</a:t>
+            </a:r>
+            <a:r>
+              <a:rPr lang="en-US" b="0" i="0" dirty="0">
+                <a:solidFill>
+                  <a:srgbClr val="E0E0E0"/>
+                </a:solidFill>
+                <a:effectLst/>
+                <a:latin typeface="Courier New" panose="02070309020205020404" pitchFamily="49" charset="0"/>
+              </a:rPr>
+              <a:t> </a:t>
+            </a:r>
+            <a:r>
+              <a:rPr lang="en-US" b="0" i="0" dirty="0">
+                <a:solidFill>
+                  <a:srgbClr val="D2A8FF"/>
+                </a:solidFill>
+                <a:effectLst/>
+                <a:latin typeface="Courier New" panose="02070309020205020404" pitchFamily="49" charset="0"/>
+              </a:rPr>
+              <a:t>range</a:t>
+            </a:r>
+            <a:r>
+              <a:rPr lang="en-US" b="0" i="0" dirty="0">
+                <a:solidFill>
+                  <a:srgbClr val="E0E0E0"/>
+                </a:solidFill>
+                <a:effectLst/>
+                <a:latin typeface="Courier New" panose="02070309020205020404" pitchFamily="49" charset="0"/>
+              </a:rPr>
+              <a:t>(</a:t>
+            </a:r>
+            <a:r>
+              <a:rPr lang="en-US" b="0" i="0" dirty="0" err="1">
+                <a:solidFill>
+                  <a:srgbClr val="E0E0E0"/>
+                </a:solidFill>
+                <a:effectLst/>
+                <a:latin typeface="Courier New" panose="02070309020205020404" pitchFamily="49" charset="0"/>
+              </a:rPr>
+              <a:t>n_iterations</a:t>
+            </a:r>
+            <a:r>
+              <a:rPr lang="en-US" b="0" i="0" dirty="0">
+                <a:solidFill>
+                  <a:srgbClr val="E0E0E0"/>
+                </a:solidFill>
+                <a:effectLst/>
+                <a:latin typeface="Courier New" panose="02070309020205020404" pitchFamily="49" charset="0"/>
+              </a:rPr>
+              <a:t>):</a:t>
+            </a:r>
+            <a:br>
+              <a:rPr lang="en-US" dirty="0"/>
+            </a:br>
+            <a:r>
+              <a:rPr lang="en-US" b="0" i="0" dirty="0">
+                <a:solidFill>
+                  <a:srgbClr val="E0E0E0"/>
+                </a:solidFill>
+                <a:effectLst/>
+                <a:latin typeface="Courier New" panose="02070309020205020404" pitchFamily="49" charset="0"/>
+              </a:rPr>
+              <a:t>  </a:t>
+            </a:r>
+            <a:r>
+              <a:rPr lang="en-US" b="0" i="0" dirty="0" err="1">
+                <a:solidFill>
+                  <a:srgbClr val="E0E0E0"/>
+                </a:solidFill>
+                <a:effectLst/>
+                <a:latin typeface="Courier New" panose="02070309020205020404" pitchFamily="49" charset="0"/>
+              </a:rPr>
+              <a:t>gp</a:t>
+            </a:r>
+            <a:r>
+              <a:rPr lang="en-US" b="0" i="0" dirty="0">
+                <a:solidFill>
+                  <a:srgbClr val="E0E0E0"/>
+                </a:solidFill>
+                <a:effectLst/>
+                <a:latin typeface="Courier New" panose="02070309020205020404" pitchFamily="49" charset="0"/>
+              </a:rPr>
+              <a:t> = </a:t>
+            </a:r>
+            <a:r>
+              <a:rPr lang="en-US" b="0" i="0" dirty="0" err="1">
+                <a:solidFill>
+                  <a:srgbClr val="D2A8FF"/>
+                </a:solidFill>
+                <a:effectLst/>
+                <a:latin typeface="Courier New" panose="02070309020205020404" pitchFamily="49" charset="0"/>
+              </a:rPr>
+              <a:t>fit_gp</a:t>
+            </a:r>
+            <a:r>
+              <a:rPr lang="en-US" b="0" i="0" dirty="0">
+                <a:solidFill>
+                  <a:srgbClr val="E0E0E0"/>
+                </a:solidFill>
+                <a:effectLst/>
+                <a:latin typeface="Courier New" panose="02070309020205020404" pitchFamily="49" charset="0"/>
+              </a:rPr>
+              <a:t>(</a:t>
+            </a:r>
+            <a:r>
+              <a:rPr lang="en-US" b="0" i="0" dirty="0" err="1">
+                <a:solidFill>
+                  <a:srgbClr val="E0E0E0"/>
+                </a:solidFill>
+                <a:effectLst/>
+                <a:latin typeface="Courier New" panose="02070309020205020404" pitchFamily="49" charset="0"/>
+              </a:rPr>
+              <a:t>X_obs</a:t>
+            </a:r>
+            <a:r>
+              <a:rPr lang="en-US" b="0" i="0" dirty="0">
+                <a:solidFill>
+                  <a:srgbClr val="E0E0E0"/>
+                </a:solidFill>
+                <a:effectLst/>
+                <a:latin typeface="Courier New" panose="02070309020205020404" pitchFamily="49" charset="0"/>
+              </a:rPr>
+              <a:t>, </a:t>
+            </a:r>
+            <a:r>
+              <a:rPr lang="en-US" b="0" i="0" dirty="0" err="1">
+                <a:solidFill>
+                  <a:srgbClr val="E0E0E0"/>
+                </a:solidFill>
+                <a:effectLst/>
+                <a:latin typeface="Courier New" panose="02070309020205020404" pitchFamily="49" charset="0"/>
+              </a:rPr>
+              <a:t>y_obs</a:t>
+            </a:r>
+            <a:r>
+              <a:rPr lang="en-US" b="0" i="0" dirty="0">
+                <a:solidFill>
+                  <a:srgbClr val="E0E0E0"/>
+                </a:solidFill>
+                <a:effectLst/>
+                <a:latin typeface="Courier New" panose="02070309020205020404" pitchFamily="49" charset="0"/>
+              </a:rPr>
+              <a:t>)              </a:t>
+            </a:r>
+            <a:r>
+              <a:rPr lang="en-US" b="0" i="0" dirty="0">
+                <a:solidFill>
+                  <a:srgbClr val="8B949E"/>
+                </a:solidFill>
+                <a:effectLst/>
+                <a:latin typeface="Courier New" panose="02070309020205020404" pitchFamily="49" charset="0"/>
+              </a:rPr>
+              <a:t># step 2a: fit surrogate</a:t>
+            </a:r>
+            <a:br>
+              <a:rPr lang="en-US" dirty="0"/>
+            </a:br>
+            <a:r>
+              <a:rPr lang="en-US" b="0" i="0" dirty="0">
+                <a:solidFill>
+                  <a:srgbClr val="E0E0E0"/>
+                </a:solidFill>
+                <a:effectLst/>
+                <a:latin typeface="Courier New" panose="02070309020205020404" pitchFamily="49" charset="0"/>
+              </a:rPr>
+              <a:t>  </a:t>
+            </a:r>
+            <a:r>
+              <a:rPr lang="en-US" b="0" i="0" dirty="0" err="1">
+                <a:solidFill>
+                  <a:srgbClr val="E0E0E0"/>
+                </a:solidFill>
+                <a:effectLst/>
+                <a:latin typeface="Courier New" panose="02070309020205020404" pitchFamily="49" charset="0"/>
+              </a:rPr>
+              <a:t>f_best</a:t>
+            </a:r>
+            <a:r>
+              <a:rPr lang="en-US" b="0" i="0" dirty="0">
+                <a:solidFill>
+                  <a:srgbClr val="E0E0E0"/>
+                </a:solidFill>
+                <a:effectLst/>
+                <a:latin typeface="Courier New" panose="02070309020205020404" pitchFamily="49" charset="0"/>
+              </a:rPr>
+              <a:t> = </a:t>
+            </a:r>
+            <a:r>
+              <a:rPr lang="en-US" b="0" i="0" dirty="0" err="1">
+                <a:solidFill>
+                  <a:srgbClr val="E0E0E0"/>
+                </a:solidFill>
+                <a:effectLst/>
+                <a:latin typeface="Courier New" panose="02070309020205020404" pitchFamily="49" charset="0"/>
+              </a:rPr>
+              <a:t>np.</a:t>
+            </a:r>
+            <a:r>
+              <a:rPr lang="en-US" b="0" i="0" dirty="0" err="1">
+                <a:solidFill>
+                  <a:srgbClr val="D2A8FF"/>
+                </a:solidFill>
+                <a:effectLst/>
+                <a:latin typeface="Courier New" panose="02070309020205020404" pitchFamily="49" charset="0"/>
+              </a:rPr>
+              <a:t>max</a:t>
+            </a:r>
+            <a:r>
+              <a:rPr lang="en-US" b="0" i="0" dirty="0">
+                <a:solidFill>
+                  <a:srgbClr val="E0E0E0"/>
+                </a:solidFill>
+                <a:effectLst/>
+                <a:latin typeface="Courier New" panose="02070309020205020404" pitchFamily="49" charset="0"/>
+              </a:rPr>
+              <a:t>(</a:t>
+            </a:r>
+            <a:r>
+              <a:rPr lang="en-US" b="0" i="0" dirty="0" err="1">
+                <a:solidFill>
+                  <a:srgbClr val="E0E0E0"/>
+                </a:solidFill>
+                <a:effectLst/>
+                <a:latin typeface="Courier New" panose="02070309020205020404" pitchFamily="49" charset="0"/>
+              </a:rPr>
+              <a:t>y_obs</a:t>
+            </a:r>
+            <a:r>
+              <a:rPr lang="en-US" b="0" i="0" dirty="0">
+                <a:solidFill>
+                  <a:srgbClr val="E0E0E0"/>
+                </a:solidFill>
+                <a:effectLst/>
+                <a:latin typeface="Courier New" panose="02070309020205020404" pitchFamily="49" charset="0"/>
+              </a:rPr>
+              <a:t>)                </a:t>
+            </a:r>
+            <a:r>
+              <a:rPr lang="en-US" b="0" i="0" dirty="0">
+                <a:solidFill>
+                  <a:srgbClr val="8B949E"/>
+                </a:solidFill>
+                <a:effectLst/>
+                <a:latin typeface="Courier New" panose="02070309020205020404" pitchFamily="49" charset="0"/>
+              </a:rPr>
+              <a:t># current incumbent</a:t>
+            </a:r>
+            <a:br>
+              <a:rPr lang="en-US" dirty="0"/>
+            </a:br>
+            <a:r>
+              <a:rPr lang="en-US" b="0" i="0" dirty="0">
+                <a:solidFill>
+                  <a:srgbClr val="E0E0E0"/>
+                </a:solidFill>
+                <a:effectLst/>
+                <a:latin typeface="Courier New" panose="02070309020205020404" pitchFamily="49" charset="0"/>
+              </a:rPr>
+              <a:t>  </a:t>
+            </a:r>
+            <a:r>
+              <a:rPr lang="en-US" b="0" i="0" dirty="0" err="1">
+                <a:solidFill>
+                  <a:srgbClr val="E0E0E0"/>
+                </a:solidFill>
+                <a:effectLst/>
+                <a:latin typeface="Courier New" panose="02070309020205020404" pitchFamily="49" charset="0"/>
+              </a:rPr>
+              <a:t>ei</a:t>
+            </a:r>
+            <a:r>
+              <a:rPr lang="en-US" b="0" i="0" dirty="0">
+                <a:solidFill>
+                  <a:srgbClr val="E0E0E0"/>
+                </a:solidFill>
+                <a:effectLst/>
+                <a:latin typeface="Courier New" panose="02070309020205020404" pitchFamily="49" charset="0"/>
+              </a:rPr>
+              <a:t> = </a:t>
+            </a:r>
+            <a:r>
+              <a:rPr lang="en-US" b="0" i="0" dirty="0" err="1">
+                <a:solidFill>
+                  <a:srgbClr val="D2A8FF"/>
+                </a:solidFill>
+                <a:effectLst/>
+                <a:latin typeface="Courier New" panose="02070309020205020404" pitchFamily="49" charset="0"/>
+              </a:rPr>
+              <a:t>expected_improvement</a:t>
+            </a:r>
+            <a:r>
+              <a:rPr lang="en-US" b="0" i="0" dirty="0">
+                <a:solidFill>
+                  <a:srgbClr val="E0E0E0"/>
+                </a:solidFill>
+                <a:effectLst/>
+                <a:latin typeface="Courier New" panose="02070309020205020404" pitchFamily="49" charset="0"/>
+              </a:rPr>
+              <a:t>(X, </a:t>
+            </a:r>
+            <a:r>
+              <a:rPr lang="en-US" b="0" i="0" dirty="0" err="1">
+                <a:solidFill>
+                  <a:srgbClr val="E0E0E0"/>
+                </a:solidFill>
+                <a:effectLst/>
+                <a:latin typeface="Courier New" panose="02070309020205020404" pitchFamily="49" charset="0"/>
+              </a:rPr>
+              <a:t>gp</a:t>
+            </a:r>
+            <a:r>
+              <a:rPr lang="en-US" b="0" i="0" dirty="0">
+                <a:solidFill>
+                  <a:srgbClr val="E0E0E0"/>
+                </a:solidFill>
+                <a:effectLst/>
+                <a:latin typeface="Courier New" panose="02070309020205020404" pitchFamily="49" charset="0"/>
+              </a:rPr>
+              <a:t>, </a:t>
+            </a:r>
+            <a:r>
+              <a:rPr lang="en-US" b="0" i="0" dirty="0" err="1">
+                <a:solidFill>
+                  <a:srgbClr val="E0E0E0"/>
+                </a:solidFill>
+                <a:effectLst/>
+                <a:latin typeface="Courier New" panose="02070309020205020404" pitchFamily="49" charset="0"/>
+              </a:rPr>
+              <a:t>f_best</a:t>
+            </a:r>
+            <a:r>
+              <a:rPr lang="en-US" b="0" i="0" dirty="0">
+                <a:solidFill>
+                  <a:srgbClr val="E0E0E0"/>
+                </a:solidFill>
+                <a:effectLst/>
+                <a:latin typeface="Courier New" panose="02070309020205020404" pitchFamily="49" charset="0"/>
+              </a:rPr>
+              <a:t>) </a:t>
+            </a:r>
+            <a:r>
+              <a:rPr lang="en-US" b="0" i="0" dirty="0">
+                <a:solidFill>
+                  <a:srgbClr val="8B949E"/>
+                </a:solidFill>
+                <a:effectLst/>
+                <a:latin typeface="Courier New" panose="02070309020205020404" pitchFamily="49" charset="0"/>
+              </a:rPr>
+              <a:t># step 2b: compute alpha</a:t>
+            </a:r>
+            <a:br>
+              <a:rPr lang="en-US" dirty="0"/>
+            </a:br>
+            <a:r>
+              <a:rPr lang="en-US" b="0" i="0" dirty="0">
+                <a:solidFill>
+                  <a:srgbClr val="E0E0E0"/>
+                </a:solidFill>
+                <a:effectLst/>
+                <a:latin typeface="Courier New" panose="02070309020205020404" pitchFamily="49" charset="0"/>
+              </a:rPr>
+              <a:t>  </a:t>
+            </a:r>
+            <a:r>
+              <a:rPr lang="en-US" b="0" i="0" dirty="0" err="1">
+                <a:solidFill>
+                  <a:srgbClr val="E0E0E0"/>
+                </a:solidFill>
+                <a:effectLst/>
+                <a:latin typeface="Courier New" panose="02070309020205020404" pitchFamily="49" charset="0"/>
+              </a:rPr>
+              <a:t>x_new</a:t>
+            </a:r>
+            <a:r>
+              <a:rPr lang="en-US" b="0" i="0" dirty="0">
+                <a:solidFill>
+                  <a:srgbClr val="E0E0E0"/>
+                </a:solidFill>
+                <a:effectLst/>
+                <a:latin typeface="Courier New" panose="02070309020205020404" pitchFamily="49" charset="0"/>
+              </a:rPr>
+              <a:t> = X[</a:t>
+            </a:r>
+            <a:r>
+              <a:rPr lang="en-US" b="0" i="0" dirty="0" err="1">
+                <a:solidFill>
+                  <a:srgbClr val="E0E0E0"/>
+                </a:solidFill>
+                <a:effectLst/>
+                <a:latin typeface="Courier New" panose="02070309020205020404" pitchFamily="49" charset="0"/>
+              </a:rPr>
+              <a:t>np.</a:t>
+            </a:r>
+            <a:r>
+              <a:rPr lang="en-US" b="0" i="0" dirty="0" err="1">
+                <a:solidFill>
+                  <a:srgbClr val="D2A8FF"/>
+                </a:solidFill>
+                <a:effectLst/>
+                <a:latin typeface="Courier New" panose="02070309020205020404" pitchFamily="49" charset="0"/>
+              </a:rPr>
+              <a:t>argmax</a:t>
+            </a:r>
+            <a:r>
+              <a:rPr lang="en-US" b="0" i="0" dirty="0">
+                <a:solidFill>
+                  <a:srgbClr val="E0E0E0"/>
+                </a:solidFill>
+                <a:effectLst/>
+                <a:latin typeface="Courier New" panose="02070309020205020404" pitchFamily="49" charset="0"/>
+              </a:rPr>
+              <a:t>(</a:t>
+            </a:r>
+            <a:r>
+              <a:rPr lang="en-US" b="0" i="0" dirty="0" err="1">
+                <a:solidFill>
+                  <a:srgbClr val="E0E0E0"/>
+                </a:solidFill>
+                <a:effectLst/>
+                <a:latin typeface="Courier New" panose="02070309020205020404" pitchFamily="49" charset="0"/>
+              </a:rPr>
+              <a:t>ei</a:t>
+            </a:r>
+            <a:r>
+              <a:rPr lang="en-US" b="0" i="0" dirty="0">
+                <a:solidFill>
+                  <a:srgbClr val="E0E0E0"/>
+                </a:solidFill>
+                <a:effectLst/>
+                <a:latin typeface="Courier New" panose="02070309020205020404" pitchFamily="49" charset="0"/>
+              </a:rPr>
+              <a:t>)]             </a:t>
+            </a:r>
+            <a:r>
+              <a:rPr lang="en-US" b="0" i="0" dirty="0">
+                <a:solidFill>
+                  <a:srgbClr val="8B949E"/>
+                </a:solidFill>
+                <a:effectLst/>
+                <a:latin typeface="Courier New" panose="02070309020205020404" pitchFamily="49" charset="0"/>
+              </a:rPr>
+              <a:t># step 2c: argmax alpha</a:t>
+            </a:r>
+            <a:br>
+              <a:rPr lang="en-US" dirty="0"/>
+            </a:br>
+            <a:r>
+              <a:rPr lang="en-US" b="0" i="0" dirty="0">
+                <a:solidFill>
+                  <a:srgbClr val="E0E0E0"/>
+                </a:solidFill>
+                <a:effectLst/>
+                <a:latin typeface="Courier New" panose="02070309020205020404" pitchFamily="49" charset="0"/>
+              </a:rPr>
+              <a:t>  </a:t>
+            </a:r>
+            <a:r>
+              <a:rPr lang="en-US" b="0" i="0" dirty="0" err="1">
+                <a:solidFill>
+                  <a:srgbClr val="E0E0E0"/>
+                </a:solidFill>
+                <a:effectLst/>
+                <a:latin typeface="Courier New" panose="02070309020205020404" pitchFamily="49" charset="0"/>
+              </a:rPr>
+              <a:t>y_new</a:t>
+            </a:r>
+            <a:r>
+              <a:rPr lang="en-US" b="0" i="0" dirty="0">
+                <a:solidFill>
+                  <a:srgbClr val="E0E0E0"/>
+                </a:solidFill>
+                <a:effectLst/>
+                <a:latin typeface="Courier New" panose="02070309020205020404" pitchFamily="49" charset="0"/>
+              </a:rPr>
+              <a:t> = </a:t>
+            </a:r>
+            <a:r>
+              <a:rPr lang="en-US" b="0" i="0" dirty="0">
+                <a:solidFill>
+                  <a:srgbClr val="D2A8FF"/>
+                </a:solidFill>
+                <a:effectLst/>
+                <a:latin typeface="Courier New" panose="02070309020205020404" pitchFamily="49" charset="0"/>
+              </a:rPr>
+              <a:t>objective</a:t>
+            </a:r>
+            <a:r>
+              <a:rPr lang="en-US" b="0" i="0" dirty="0">
+                <a:solidFill>
+                  <a:srgbClr val="E0E0E0"/>
+                </a:solidFill>
+                <a:effectLst/>
+                <a:latin typeface="Courier New" panose="02070309020205020404" pitchFamily="49" charset="0"/>
+              </a:rPr>
+              <a:t>(</a:t>
+            </a:r>
+            <a:r>
+              <a:rPr lang="en-US" b="0" i="0" dirty="0" err="1">
+                <a:solidFill>
+                  <a:srgbClr val="E0E0E0"/>
+                </a:solidFill>
+                <a:effectLst/>
+                <a:latin typeface="Courier New" panose="02070309020205020404" pitchFamily="49" charset="0"/>
+              </a:rPr>
+              <a:t>x_new</a:t>
+            </a:r>
+            <a:r>
+              <a:rPr lang="en-US" b="0" i="0" dirty="0">
+                <a:solidFill>
+                  <a:srgbClr val="E0E0E0"/>
+                </a:solidFill>
+                <a:effectLst/>
+                <a:latin typeface="Courier New" panose="02070309020205020404" pitchFamily="49" charset="0"/>
+              </a:rPr>
+              <a:t>)              </a:t>
+            </a:r>
+            <a:r>
+              <a:rPr lang="en-US" b="0" i="0" dirty="0">
+                <a:solidFill>
+                  <a:srgbClr val="8B949E"/>
+                </a:solidFill>
+                <a:effectLst/>
+                <a:latin typeface="Courier New" panose="02070309020205020404" pitchFamily="49" charset="0"/>
+              </a:rPr>
+              <a:t># step 2d: EXPENSIVE call</a:t>
+            </a:r>
+            <a:br>
+              <a:rPr lang="en-US" dirty="0"/>
+            </a:br>
+            <a:r>
+              <a:rPr lang="en-US" b="0" i="0" dirty="0">
+                <a:solidFill>
+                  <a:srgbClr val="E0E0E0"/>
+                </a:solidFill>
+                <a:effectLst/>
+                <a:latin typeface="Courier New" panose="02070309020205020404" pitchFamily="49" charset="0"/>
+              </a:rPr>
+              <a:t>  </a:t>
+            </a:r>
+            <a:r>
+              <a:rPr lang="en-US" b="0" i="0" dirty="0" err="1">
+                <a:solidFill>
+                  <a:srgbClr val="E0E0E0"/>
+                </a:solidFill>
+                <a:effectLst/>
+                <a:latin typeface="Courier New" panose="02070309020205020404" pitchFamily="49" charset="0"/>
+              </a:rPr>
+              <a:t>X_obs</a:t>
+            </a:r>
+            <a:r>
+              <a:rPr lang="en-US" b="0" i="0" dirty="0">
+                <a:solidFill>
+                  <a:srgbClr val="E0E0E0"/>
+                </a:solidFill>
+                <a:effectLst/>
+                <a:latin typeface="Courier New" panose="02070309020205020404" pitchFamily="49" charset="0"/>
+              </a:rPr>
+              <a:t> = </a:t>
+            </a:r>
+            <a:r>
+              <a:rPr lang="en-US" b="0" i="0" dirty="0" err="1">
+                <a:solidFill>
+                  <a:srgbClr val="E0E0E0"/>
+                </a:solidFill>
+                <a:effectLst/>
+                <a:latin typeface="Courier New" panose="02070309020205020404" pitchFamily="49" charset="0"/>
+              </a:rPr>
+              <a:t>np.</a:t>
+            </a:r>
+            <a:r>
+              <a:rPr lang="en-US" b="0" i="0" dirty="0" err="1">
+                <a:solidFill>
+                  <a:srgbClr val="D2A8FF"/>
+                </a:solidFill>
+                <a:effectLst/>
+                <a:latin typeface="Courier New" panose="02070309020205020404" pitchFamily="49" charset="0"/>
+              </a:rPr>
+              <a:t>vstack</a:t>
+            </a:r>
+            <a:r>
+              <a:rPr lang="en-US" b="0" i="0" dirty="0">
+                <a:solidFill>
+                  <a:srgbClr val="E0E0E0"/>
+                </a:solidFill>
+                <a:effectLst/>
+                <a:latin typeface="Courier New" panose="02070309020205020404" pitchFamily="49" charset="0"/>
+              </a:rPr>
+              <a:t>([</a:t>
+            </a:r>
+            <a:r>
+              <a:rPr lang="en-US" b="0" i="0" dirty="0" err="1">
+                <a:solidFill>
+                  <a:srgbClr val="E0E0E0"/>
+                </a:solidFill>
+                <a:effectLst/>
+                <a:latin typeface="Courier New" panose="02070309020205020404" pitchFamily="49" charset="0"/>
+              </a:rPr>
+              <a:t>X_obs</a:t>
+            </a:r>
+            <a:r>
+              <a:rPr lang="en-US" b="0" i="0" dirty="0">
+                <a:solidFill>
+                  <a:srgbClr val="E0E0E0"/>
+                </a:solidFill>
+                <a:effectLst/>
+                <a:latin typeface="Courier New" panose="02070309020205020404" pitchFamily="49" charset="0"/>
+              </a:rPr>
+              <a:t>, </a:t>
+            </a:r>
+            <a:r>
+              <a:rPr lang="en-US" b="0" i="0" dirty="0" err="1">
+                <a:solidFill>
+                  <a:srgbClr val="E0E0E0"/>
+                </a:solidFill>
+                <a:effectLst/>
+                <a:latin typeface="Courier New" panose="02070309020205020404" pitchFamily="49" charset="0"/>
+              </a:rPr>
+              <a:t>x_new</a:t>
+            </a:r>
+            <a:r>
+              <a:rPr lang="en-US" b="0" i="0" dirty="0">
+                <a:solidFill>
+                  <a:srgbClr val="E0E0E0"/>
+                </a:solidFill>
+                <a:effectLst/>
+                <a:latin typeface="Courier New" panose="02070309020205020404" pitchFamily="49" charset="0"/>
+              </a:rPr>
+              <a:t>])     </a:t>
+            </a:r>
+            <a:r>
+              <a:rPr lang="en-US" b="0" i="0" dirty="0">
+                <a:solidFill>
+                  <a:srgbClr val="8B949E"/>
+                </a:solidFill>
+                <a:effectLst/>
+                <a:latin typeface="Courier New" panose="02070309020205020404" pitchFamily="49" charset="0"/>
+              </a:rPr>
+              <a:t># step 2e: update data</a:t>
+            </a:r>
+            <a:br>
+              <a:rPr lang="en-US" dirty="0"/>
+            </a:br>
+            <a:r>
+              <a:rPr lang="en-US" b="0" i="0" dirty="0">
+                <a:solidFill>
+                  <a:srgbClr val="E0E0E0"/>
+                </a:solidFill>
+                <a:effectLst/>
+                <a:latin typeface="Courier New" panose="02070309020205020404" pitchFamily="49" charset="0"/>
+              </a:rPr>
+              <a:t>  </a:t>
+            </a:r>
+            <a:r>
+              <a:rPr lang="en-US" b="0" i="0" dirty="0" err="1">
+                <a:solidFill>
+                  <a:srgbClr val="E0E0E0"/>
+                </a:solidFill>
+                <a:effectLst/>
+                <a:latin typeface="Courier New" panose="02070309020205020404" pitchFamily="49" charset="0"/>
+              </a:rPr>
+              <a:t>y_obs</a:t>
+            </a:r>
+            <a:r>
+              <a:rPr lang="en-US" b="0" i="0" dirty="0">
+                <a:solidFill>
+                  <a:srgbClr val="E0E0E0"/>
+                </a:solidFill>
+                <a:effectLst/>
+                <a:latin typeface="Courier New" panose="02070309020205020404" pitchFamily="49" charset="0"/>
+              </a:rPr>
+              <a:t> = </a:t>
+            </a:r>
+            <a:r>
+              <a:rPr lang="en-US" b="0" i="0" dirty="0" err="1">
+                <a:solidFill>
+                  <a:srgbClr val="E0E0E0"/>
+                </a:solidFill>
+                <a:effectLst/>
+                <a:latin typeface="Courier New" panose="02070309020205020404" pitchFamily="49" charset="0"/>
+              </a:rPr>
+              <a:t>np.</a:t>
+            </a:r>
+            <a:r>
+              <a:rPr lang="en-US" b="0" i="0" dirty="0" err="1">
+                <a:solidFill>
+                  <a:srgbClr val="D2A8FF"/>
+                </a:solidFill>
+                <a:effectLst/>
+                <a:latin typeface="Courier New" panose="02070309020205020404" pitchFamily="49" charset="0"/>
+              </a:rPr>
+              <a:t>vstack</a:t>
+            </a:r>
+            <a:r>
+              <a:rPr lang="en-US" b="0" i="0" dirty="0">
+                <a:solidFill>
+                  <a:srgbClr val="E0E0E0"/>
+                </a:solidFill>
+                <a:effectLst/>
+                <a:latin typeface="Courier New" panose="02070309020205020404" pitchFamily="49" charset="0"/>
+              </a:rPr>
+              <a:t>([</a:t>
+            </a:r>
+            <a:r>
+              <a:rPr lang="en-US" b="0" i="0" dirty="0" err="1">
+                <a:solidFill>
+                  <a:srgbClr val="E0E0E0"/>
+                </a:solidFill>
+                <a:effectLst/>
+                <a:latin typeface="Courier New" panose="02070309020205020404" pitchFamily="49" charset="0"/>
+              </a:rPr>
+              <a:t>y_obs</a:t>
+            </a:r>
+            <a:r>
+              <a:rPr lang="en-US" b="0" i="0" dirty="0">
+                <a:solidFill>
+                  <a:srgbClr val="E0E0E0"/>
+                </a:solidFill>
+                <a:effectLst/>
+                <a:latin typeface="Courier New" panose="02070309020205020404" pitchFamily="49" charset="0"/>
+              </a:rPr>
+              <a:t>, </a:t>
+            </a:r>
+            <a:r>
+              <a:rPr lang="en-US" b="0" i="0" dirty="0" err="1">
+                <a:solidFill>
+                  <a:srgbClr val="E0E0E0"/>
+                </a:solidFill>
+                <a:effectLst/>
+                <a:latin typeface="Courier New" panose="02070309020205020404" pitchFamily="49" charset="0"/>
+              </a:rPr>
+              <a:t>y_new</a:t>
+            </a:r>
+            <a:r>
+              <a:rPr lang="en-US" b="0" i="0" dirty="0">
+                <a:solidFill>
+                  <a:srgbClr val="E0E0E0"/>
+                </a:solidFill>
+                <a:effectLst/>
+                <a:latin typeface="Courier New" panose="02070309020205020404" pitchFamily="49" charset="0"/>
+              </a:rPr>
+              <a:t>])</a:t>
+            </a:r>
+            <a:endParaRPr lang="en-US" dirty="0"/>
           </a:p>
         </p:txBody>
       </p:sp>
@@ -13028,8 +16718,8 @@
         </p:blipFill>
         <p:spPr>
           <a:xfrm>
-            <a:off x="3724714" y="1417320"/>
-            <a:ext cx="4742267" cy="2926079"/>
+            <a:off x="3145277" y="1310188"/>
+            <a:ext cx="5727819" cy="3534186"/>
           </a:xfrm>
           <a:prstGeom prst="rect">
             <a:avLst/>
@@ -13044,8 +16734,8 @@
         </p:nvSpPr>
         <p:spPr>
           <a:xfrm>
-            <a:off x="1188720" y="4480560"/>
-            <a:ext cx="9601200" cy="365760"/>
+            <a:off x="1188720" y="4937760"/>
+            <a:ext cx="9601200" cy="323165"/>
           </a:xfrm>
           <a:prstGeom prst="rect">
             <a:avLst/>
@@ -13067,7 +16757,16 @@
               </a:defRPr>
             </a:pPr>
             <a:r>
-              <a:t>•  BO (blue) reaches the optimum in ~6 evaluations — deterministic given initial samples</a:t>
+              <a:rPr dirty="0"/>
+              <a:t>•  </a:t>
+            </a:r>
+            <a:r>
+              <a:rPr b="1" dirty="0"/>
+              <a:t>BO</a:t>
+            </a:r>
+            <a:r>
+              <a:rPr dirty="0"/>
+              <a:t> (blue) reaches the optimum in ~6 evaluations — deterministic given initial samples</a:t>
             </a:r>
           </a:p>
         </p:txBody>
@@ -13080,8 +16779,8 @@
         </p:nvSpPr>
         <p:spPr>
           <a:xfrm>
-            <a:off x="1188720" y="4800600"/>
-            <a:ext cx="9601200" cy="365760"/>
+            <a:off x="1188720" y="5257800"/>
+            <a:ext cx="9601200" cy="323165"/>
           </a:xfrm>
           <a:prstGeom prst="rect">
             <a:avLst/>
@@ -13103,7 +16802,16 @@
               </a:defRPr>
             </a:pPr>
             <a:r>
-              <a:t>•  Random search (red band = 10th–90th percentile) has high variance and often fails within budget</a:t>
+              <a:rPr dirty="0"/>
+              <a:t>•  </a:t>
+            </a:r>
+            <a:r>
+              <a:rPr b="1" dirty="0"/>
+              <a:t>Random search </a:t>
+            </a:r>
+            <a:r>
+              <a:rPr dirty="0"/>
+              <a:t>(red band = 10th–90th percentile) has high variance and often fails within budget</a:t>
             </a:r>
           </a:p>
         </p:txBody>
@@ -13116,8 +16824,8 @@
         </p:nvSpPr>
         <p:spPr>
           <a:xfrm>
-            <a:off x="1188720" y="5120640"/>
-            <a:ext cx="9601200" cy="365760"/>
+            <a:off x="1188720" y="5577840"/>
+            <a:ext cx="9601200" cy="323165"/>
           </a:xfrm>
           <a:prstGeom prst="rect">
             <a:avLst/>
@@ -13139,8 +16847,59 @@
               </a:defRPr>
             </a:pPr>
             <a:r>
+              <a:rPr dirty="0"/>
               <a:t>•  The gap widens dramatically on more expensive or higher-dimensional problems</a:t>
             </a:r>
+          </a:p>
+        </p:txBody>
+      </p:sp>
+      <p:sp>
+        <p:nvSpPr>
+          <p:cNvPr id="8" name="Rectangle 7">
+            <a:extLst>
+              <a:ext uri="{FF2B5EF4-FFF2-40B4-BE49-F238E27FC236}">
+                <a16:creationId xmlns:a16="http://schemas.microsoft.com/office/drawing/2014/main" id="{C42AFBE7-4ACF-8415-2500-1772ABB073A1}"/>
+              </a:ext>
+            </a:extLst>
+          </p:cNvPr>
+          <p:cNvSpPr/>
+          <p:nvPr/>
+        </p:nvSpPr>
+        <p:spPr>
+          <a:xfrm>
+            <a:off x="822960" y="826770"/>
+            <a:ext cx="3657600" cy="38100"/>
+          </a:xfrm>
+          <a:prstGeom prst="rect">
+            <a:avLst/>
+          </a:prstGeom>
+          <a:solidFill>
+            <a:srgbClr val="1A1A1A"/>
+          </a:solidFill>
+          <a:ln>
+            <a:noFill/>
+          </a:ln>
+        </p:spPr>
+        <p:style>
+          <a:lnRef idx="1">
+            <a:schemeClr val="accent1"/>
+          </a:lnRef>
+          <a:fillRef idx="3">
+            <a:schemeClr val="accent1"/>
+          </a:fillRef>
+          <a:effectRef idx="2">
+            <a:schemeClr val="accent1"/>
+          </a:effectRef>
+          <a:fontRef idx="minor">
+            <a:schemeClr val="lt1"/>
+          </a:fontRef>
+        </p:style>
+        <p:txBody>
+          <a:bodyPr rtlCol="0" anchor="ctr"/>
+          <a:lstStyle/>
+          <a:p>
+            <a:pPr algn="ctr"/>
+            <a:endParaRPr/>
           </a:p>
         </p:txBody>
       </p:sp>
@@ -13257,8 +17016,8 @@
         </p:blipFill>
         <p:spPr>
           <a:xfrm>
-            <a:off x="1854461" y="1417320"/>
-            <a:ext cx="8482772" cy="2926079"/>
+            <a:off x="899561" y="1417319"/>
+            <a:ext cx="10179518" cy="3511361"/>
           </a:xfrm>
           <a:prstGeom prst="rect">
             <a:avLst/>
@@ -13273,8 +17032,8 @@
         </p:nvSpPr>
         <p:spPr>
           <a:xfrm>
-            <a:off x="1188720" y="4480560"/>
-            <a:ext cx="9601200" cy="365760"/>
+            <a:off x="1188720" y="4983480"/>
+            <a:ext cx="9601200" cy="323165"/>
           </a:xfrm>
           <a:prstGeom prst="rect">
             <a:avLst/>
@@ -13296,21 +17055,143 @@
               </a:defRPr>
             </a:pPr>
             <a:r>
-              <a:t>•  PI clusters tightly near the first promising region — pure exploitation, as predicted by theory</a:t>
-            </a:r>
-          </a:p>
-        </p:txBody>
-      </p:sp>
-      <p:sp>
-        <p:nvSpPr>
-          <p:cNvPr id="6" name="TextBox 5"/>
+              <a:rPr dirty="0"/>
+              <a:t>•  </a:t>
+            </a:r>
+            <a:r>
+              <a:rPr b="1" dirty="0"/>
+              <a:t>PI</a:t>
+            </a:r>
+            <a:r>
+              <a:rPr dirty="0"/>
+              <a:t> clusters tightly near the first promising region — pure exploitation, as predicted by theory</a:t>
+            </a:r>
+          </a:p>
+        </p:txBody>
+      </p:sp>
+      <mc:AlternateContent xmlns:mc="http://schemas.openxmlformats.org/markup-compatibility/2006" xmlns:a14="http://schemas.microsoft.com/office/drawing/2010/main">
+        <mc:Choice Requires="a14">
+          <p:sp>
+            <p:nvSpPr>
+              <p:cNvPr id="6" name="TextBox 5"/>
+              <p:cNvSpPr txBox="1"/>
+              <p:nvPr/>
+            </p:nvSpPr>
+            <p:spPr>
+              <a:xfrm>
+                <a:off x="1188720" y="5303520"/>
+                <a:ext cx="9601200" cy="323165"/>
+              </a:xfrm>
+              <a:prstGeom prst="rect">
+                <a:avLst/>
+              </a:prstGeom>
+              <a:noFill/>
+            </p:spPr>
+            <p:txBody>
+              <a:bodyPr wrap="square">
+                <a:spAutoFit/>
+              </a:bodyPr>
+              <a:lstStyle/>
+              <a:p>
+                <a:pPr algn="l">
+                  <a:defRPr sz="1500" b="0">
+                    <a:solidFill>
+                      <a:srgbClr val="444444"/>
+                    </a:solidFill>
+                    <a:latin typeface="Nunito"/>
+                  </a:defRPr>
+                </a:pPr>
+                <a:r>
+                  <a:rPr dirty="0"/>
+                  <a:t>•  </a:t>
+                </a:r>
+                <a:r>
+                  <a:rPr b="1" dirty="0"/>
+                  <a:t>UCB</a:t>
+                </a:r>
+                <a:r>
+                  <a:rPr dirty="0"/>
+                  <a:t> (</a:t>
+                </a:r>
+                <a14:m>
+                  <m:oMath xmlns:m="http://schemas.openxmlformats.org/officeDocument/2006/math">
+                    <m:r>
+                      <a:rPr lang="en-US" i="1" dirty="0" smtClean="0">
+                        <a:latin typeface="Cambria Math" panose="02040503050406030204" pitchFamily="18" charset="0"/>
+                      </a:rPr>
+                      <m:t>𝜅</m:t>
+                    </m:r>
+                    <m:r>
+                      <a:rPr lang="en-US" i="1" dirty="0" smtClean="0">
+                        <a:latin typeface="Cambria Math" panose="02040503050406030204" pitchFamily="18" charset="0"/>
+                      </a:rPr>
+                      <m:t>=</m:t>
+                    </m:r>
+                    <m:r>
+                      <a:rPr lang="en-US" i="1" dirty="0" smtClean="0">
+                        <a:latin typeface="Cambria Math" panose="02040503050406030204" pitchFamily="18" charset="0"/>
+                      </a:rPr>
+                      <m:t>2</m:t>
+                    </m:r>
+                  </m:oMath>
+                </a14:m>
+                <a:r>
+                  <a:rPr dirty="0"/>
+                  <a:t>) spreads broadly, probing uncertain regions even when the mean is low</a:t>
+                </a:r>
+              </a:p>
+            </p:txBody>
+          </p:sp>
+        </mc:Choice>
+        <mc:Fallback xmlns="">
+          <p:sp>
+            <p:nvSpPr>
+              <p:cNvPr id="6" name="TextBox 5"/>
+              <p:cNvSpPr txBox="1">
+                <a:spLocks noRot="1" noChangeAspect="1" noMove="1" noResize="1" noEditPoints="1" noAdjustHandles="1" noChangeArrowheads="1" noChangeShapeType="1" noTextEdit="1"/>
+              </p:cNvSpPr>
+              <p:nvPr/>
+            </p:nvSpPr>
+            <p:spPr>
+              <a:xfrm>
+                <a:off x="1188720" y="5303520"/>
+                <a:ext cx="9601200" cy="323165"/>
+              </a:xfrm>
+              <a:prstGeom prst="rect">
+                <a:avLst/>
+              </a:prstGeom>
+              <a:blipFill>
+                <a:blip r:embed="rId3"/>
+                <a:stretch>
+                  <a:fillRect l="-254" t="-1887" b="-20755"/>
+                </a:stretch>
+              </a:blipFill>
+            </p:spPr>
+            <p:txBody>
+              <a:bodyPr/>
+              <a:lstStyle/>
+              <a:p>
+                <a:r>
+                  <a:rPr lang="en-US">
+                    <a:noFill/>
+                  </a:rPr>
+                  <a:t> </a:t>
+                </a:r>
+              </a:p>
+            </p:txBody>
+          </p:sp>
+        </mc:Fallback>
+      </mc:AlternateContent>
+      <p:sp>
+        <p:nvSpPr>
+          <p:cNvPr id="7" name="TextBox 6"/>
           <p:cNvSpPr txBox="1"/>
           <p:nvPr/>
         </p:nvSpPr>
         <p:spPr>
           <a:xfrm>
-            <a:off x="1188720" y="4800600"/>
-            <a:ext cx="9601200" cy="365760"/>
+            <a:off x="1188720" y="5623560"/>
+            <a:ext cx="9601200" cy="323165"/>
           </a:xfrm>
           <a:prstGeom prst="rect">
             <a:avLst/>
@@ -13332,44 +17213,67 @@
               </a:defRPr>
             </a:pPr>
             <a:r>
-              <a:t>•  UCB (κ = 2) spreads broadly, probing uncertain regions even when the mean is low</a:t>
-            </a:r>
-          </a:p>
-        </p:txBody>
-      </p:sp>
-      <p:sp>
-        <p:nvSpPr>
-          <p:cNvPr id="7" name="TextBox 6"/>
-          <p:cNvSpPr txBox="1"/>
-          <p:nvPr/>
-        </p:nvSpPr>
-        <p:spPr>
-          <a:xfrm>
-            <a:off x="1188720" y="5120640"/>
-            <a:ext cx="9601200" cy="365760"/>
-          </a:xfrm>
-          <a:prstGeom prst="rect">
-            <a:avLst/>
-          </a:prstGeom>
-          <a:noFill/>
-        </p:spPr>
-        <p:txBody>
-          <a:bodyPr wrap="square">
-            <a:spAutoFit/>
-          </a:bodyPr>
-          <a:lstStyle/>
-          <a:p>
-            <a:pPr algn="l">
-              <a:defRPr sz="1500" b="0">
-                <a:solidFill>
-                  <a:srgbClr val="444444"/>
-                </a:solidFill>
-                <a:latin typeface="Nunito"/>
-              </a:defRPr>
-            </a:pPr>
-            <a:r>
-              <a:t>•  EI strikes a middle ground: it explores somewhat but converges toward the optimum</a:t>
-            </a:r>
+              <a:rPr dirty="0"/>
+              <a:t>•  </a:t>
+            </a:r>
+            <a:r>
+              <a:rPr b="1" dirty="0"/>
+              <a:t>EI</a:t>
+            </a:r>
+            <a:r>
+              <a:rPr dirty="0"/>
+              <a:t> strikes a middle ground: it explores somewhat but converges toward the optimum</a:t>
+            </a:r>
+          </a:p>
+        </p:txBody>
+      </p:sp>
+      <p:sp>
+        <p:nvSpPr>
+          <p:cNvPr id="8" name="Rectangle 7">
+            <a:extLst>
+              <a:ext uri="{FF2B5EF4-FFF2-40B4-BE49-F238E27FC236}">
+                <a16:creationId xmlns:a16="http://schemas.microsoft.com/office/drawing/2014/main" id="{0197C161-C5AB-A3BB-076F-570A95740EA2}"/>
+              </a:ext>
+            </a:extLst>
+          </p:cNvPr>
+          <p:cNvSpPr/>
+          <p:nvPr/>
+        </p:nvSpPr>
+        <p:spPr>
+          <a:xfrm>
+            <a:off x="822960" y="856845"/>
+            <a:ext cx="3657600" cy="38100"/>
+          </a:xfrm>
+          <a:prstGeom prst="rect">
+            <a:avLst/>
+          </a:prstGeom>
+          <a:solidFill>
+            <a:srgbClr val="1A1A1A"/>
+          </a:solidFill>
+          <a:ln>
+            <a:noFill/>
+          </a:ln>
+        </p:spPr>
+        <p:style>
+          <a:lnRef idx="1">
+            <a:schemeClr val="accent1"/>
+          </a:lnRef>
+          <a:fillRef idx="3">
+            <a:schemeClr val="accent1"/>
+          </a:fillRef>
+          <a:effectRef idx="2">
+            <a:schemeClr val="accent1"/>
+          </a:effectRef>
+          <a:fontRef idx="minor">
+            <a:schemeClr val="lt1"/>
+          </a:fontRef>
+        </p:style>
+        <p:txBody>
+          <a:bodyPr rtlCol="0" anchor="ctr"/>
+          <a:lstStyle/>
+          <a:p>
+            <a:pPr algn="ctr"/>
+            <a:endParaRPr/>
           </a:p>
         </p:txBody>
       </p:sp>
@@ -13434,42 +17338,6 @@
           </a:p>
         </p:txBody>
       </p:sp>
-      <p:sp>
-        <p:nvSpPr>
-          <p:cNvPr id="3" name="TextBox 2"/>
-          <p:cNvSpPr txBox="1"/>
-          <p:nvPr/>
-        </p:nvSpPr>
-        <p:spPr>
-          <a:xfrm>
-            <a:off x="822960" y="914400"/>
-            <a:ext cx="10058400" cy="502920"/>
-          </a:xfrm>
-          <a:prstGeom prst="rect">
-            <a:avLst/>
-          </a:prstGeom>
-          <a:noFill/>
-        </p:spPr>
-        <p:txBody>
-          <a:bodyPr wrap="square">
-            <a:spAutoFit/>
-          </a:bodyPr>
-          <a:lstStyle/>
-          <a:p>
-            <a:pPr algn="l">
-              <a:defRPr sz="1600" b="0">
-                <a:solidFill>
-                  <a:srgbClr val="444444"/>
-                </a:solidFill>
-                <a:latin typeface="Nunito"/>
-              </a:defRPr>
-            </a:pPr>
-            <a:r>
-              <a:t>Best value found so far as a function of the number of evaluations for all three acquisition functions:</a:t>
-            </a:r>
-          </a:p>
-        </p:txBody>
-      </p:sp>
       <p:pic>
         <p:nvPicPr>
           <p:cNvPr id="4" name="Picture 3" descr="convergence_comparison.png"/>
@@ -13486,8 +17354,8 @@
         </p:blipFill>
         <p:spPr>
           <a:xfrm>
-            <a:off x="3422016" y="1417320"/>
-            <a:ext cx="5347663" cy="2926079"/>
+            <a:off x="2221247" y="1095983"/>
+            <a:ext cx="7271853" cy="3978937"/>
           </a:xfrm>
           <a:prstGeom prst="rect">
             <a:avLst/>
@@ -13502,7 +17370,7 @@
         </p:nvSpPr>
         <p:spPr>
           <a:xfrm>
-            <a:off x="1188720" y="4480560"/>
+            <a:off x="1188720" y="5146256"/>
             <a:ext cx="9601200" cy="365760"/>
           </a:xfrm>
           <a:prstGeom prst="rect">
@@ -13538,7 +17406,7 @@
         </p:nvSpPr>
         <p:spPr>
           <a:xfrm>
-            <a:off x="1188720" y="4800600"/>
+            <a:off x="1188720" y="5466296"/>
             <a:ext cx="9601200" cy="365760"/>
           </a:xfrm>
           <a:prstGeom prst="rect">
@@ -13574,7 +17442,7 @@
         </p:nvSpPr>
         <p:spPr>
           <a:xfrm>
-            <a:off x="1188720" y="5120640"/>
+            <a:off x="1188720" y="5786336"/>
             <a:ext cx="9601200" cy="365760"/>
           </a:xfrm>
           <a:prstGeom prst="rect">
@@ -13599,6 +17467,56 @@
             <a:r>
               <a:t>•  The grey band marks the 3 initial samples — all methods start from the same baseline</a:t>
             </a:r>
+          </a:p>
+        </p:txBody>
+      </p:sp>
+      <p:sp>
+        <p:nvSpPr>
+          <p:cNvPr id="8" name="Rectangle 7">
+            <a:extLst>
+              <a:ext uri="{FF2B5EF4-FFF2-40B4-BE49-F238E27FC236}">
+                <a16:creationId xmlns:a16="http://schemas.microsoft.com/office/drawing/2014/main" id="{5DD866AE-41E5-8AEB-1D3A-E0BB26EA75CC}"/>
+              </a:ext>
+            </a:extLst>
+          </p:cNvPr>
+          <p:cNvSpPr/>
+          <p:nvPr/>
+        </p:nvSpPr>
+        <p:spPr>
+          <a:xfrm>
+            <a:off x="822960" y="856845"/>
+            <a:ext cx="3657600" cy="38100"/>
+          </a:xfrm>
+          <a:prstGeom prst="rect">
+            <a:avLst/>
+          </a:prstGeom>
+          <a:solidFill>
+            <a:srgbClr val="1A1A1A"/>
+          </a:solidFill>
+          <a:ln>
+            <a:noFill/>
+          </a:ln>
+        </p:spPr>
+        <p:style>
+          <a:lnRef idx="1">
+            <a:schemeClr val="accent1"/>
+          </a:lnRef>
+          <a:fillRef idx="3">
+            <a:schemeClr val="accent1"/>
+          </a:fillRef>
+          <a:effectRef idx="2">
+            <a:schemeClr val="accent1"/>
+          </a:effectRef>
+          <a:fontRef idx="minor">
+            <a:schemeClr val="lt1"/>
+          </a:fontRef>
+        </p:style>
+        <p:txBody>
+          <a:bodyPr rtlCol="0" anchor="ctr"/>
+          <a:lstStyle/>
+          <a:p>
+            <a:pPr algn="ctr"/>
+            <a:endParaRPr/>
           </a:p>
         </p:txBody>
       </p:sp>
@@ -13627,78 +17545,6 @@
           <a:chExt cx="0" cy="0"/>
         </a:xfrm>
       </p:grpSpPr>
-      <p:sp>
-        <p:nvSpPr>
-          <p:cNvPr id="2" name="TextBox 1"/>
-          <p:cNvSpPr txBox="1"/>
-          <p:nvPr/>
-        </p:nvSpPr>
-        <p:spPr>
-          <a:xfrm>
-            <a:off x="822960" y="365760"/>
-            <a:ext cx="10058400" cy="548640"/>
-          </a:xfrm>
-          <a:prstGeom prst="rect">
-            <a:avLst/>
-          </a:prstGeom>
-          <a:noFill/>
-        </p:spPr>
-        <p:txBody>
-          <a:bodyPr wrap="square">
-            <a:spAutoFit/>
-          </a:bodyPr>
-          <a:lstStyle/>
-          <a:p>
-            <a:pPr algn="l">
-              <a:defRPr sz="2800" b="1">
-                <a:solidFill>
-                  <a:srgbClr val="1A1A1A"/>
-                </a:solidFill>
-                <a:latin typeface="Archivo"/>
-              </a:defRPr>
-            </a:pPr>
-            <a:r>
-              <a:t>Final Result</a:t>
-            </a:r>
-          </a:p>
-        </p:txBody>
-      </p:sp>
-      <p:sp>
-        <p:nvSpPr>
-          <p:cNvPr id="3" name="TextBox 2"/>
-          <p:cNvSpPr txBox="1"/>
-          <p:nvPr/>
-        </p:nvSpPr>
-        <p:spPr>
-          <a:xfrm>
-            <a:off x="822960" y="914400"/>
-            <a:ext cx="10058400" cy="502920"/>
-          </a:xfrm>
-          <a:prstGeom prst="rect">
-            <a:avLst/>
-          </a:prstGeom>
-          <a:noFill/>
-        </p:spPr>
-        <p:txBody>
-          <a:bodyPr wrap="square">
-            <a:spAutoFit/>
-          </a:bodyPr>
-          <a:lstStyle/>
-          <a:p>
-            <a:pPr algn="l">
-              <a:defRPr sz="1600" b="0">
-                <a:solidFill>
-                  <a:srgbClr val="444444"/>
-                </a:solidFill>
-                <a:latin typeface="Nunito"/>
-              </a:defRPr>
-            </a:pPr>
-            <a:r>
-              <a:t>GP surrogate after all 7 BO iterations (10 total evaluations). Red circles: initial samples. Green diamonds: BO-selected points. Gold star: best observation.</a:t>
-            </a:r>
-          </a:p>
-        </p:txBody>
-      </p:sp>
       <p:pic>
         <p:nvPicPr>
           <p:cNvPr id="4" name="Picture 3" descr="final_result.png"/>
@@ -13715,8 +17561,8 @@
         </p:blipFill>
         <p:spPr>
           <a:xfrm>
-            <a:off x="3422016" y="1417320"/>
-            <a:ext cx="5347663" cy="2926079"/>
+            <a:off x="2786368" y="1595854"/>
+            <a:ext cx="6385387" cy="3493890"/>
           </a:xfrm>
           <a:prstGeom prst="rect">
             <a:avLst/>
@@ -13725,14 +17571,14 @@
       </p:pic>
       <p:sp>
         <p:nvSpPr>
-          <p:cNvPr id="5" name="TextBox 4"/>
+          <p:cNvPr id="2" name="TextBox 1"/>
           <p:cNvSpPr txBox="1"/>
           <p:nvPr/>
         </p:nvSpPr>
         <p:spPr>
           <a:xfrm>
-            <a:off x="1188720" y="4480560"/>
-            <a:ext cx="9601200" cy="365760"/>
+            <a:off x="822960" y="365760"/>
+            <a:ext cx="10058400" cy="548640"/>
           </a:xfrm>
           <a:prstGeom prst="rect">
             <a:avLst/>
@@ -13746,29 +17592,29 @@
           <a:lstStyle/>
           <a:p>
             <a:pPr algn="l">
-              <a:defRPr sz="1500" b="0">
-                <a:solidFill>
-                  <a:srgbClr val="444444"/>
-                </a:solidFill>
-                <a:latin typeface="Nunito"/>
+              <a:defRPr sz="2800" b="1">
+                <a:solidFill>
+                  <a:srgbClr val="1A1A1A"/>
+                </a:solidFill>
+                <a:latin typeface="Archivo"/>
               </a:defRPr>
             </a:pPr>
             <a:r>
-              <a:t>•  The surrogate now closely tracks the true function across the entire domain</a:t>
-            </a:r>
-          </a:p>
-        </p:txBody>
-      </p:sp>
-      <p:sp>
-        <p:nvSpPr>
-          <p:cNvPr id="6" name="TextBox 5"/>
+              <a:t>Final Result</a:t>
+            </a:r>
+          </a:p>
+        </p:txBody>
+      </p:sp>
+      <p:sp>
+        <p:nvSpPr>
+          <p:cNvPr id="3" name="TextBox 2"/>
           <p:cNvSpPr txBox="1"/>
           <p:nvPr/>
         </p:nvSpPr>
         <p:spPr>
           <a:xfrm>
-            <a:off x="1188720" y="4800600"/>
-            <a:ext cx="9601200" cy="365760"/>
+            <a:off x="822960" y="937260"/>
+            <a:ext cx="10707559" cy="830997"/>
           </a:xfrm>
           <a:prstGeom prst="rect">
             <a:avLst/>
@@ -13782,7 +17628,7 @@
           <a:lstStyle/>
           <a:p>
             <a:pPr algn="l">
-              <a:defRPr sz="1500" b="0">
+              <a:defRPr sz="1600" b="0">
                 <a:solidFill>
                   <a:srgbClr val="444444"/>
                 </a:solidFill>
@@ -13790,20 +17636,48 @@
               </a:defRPr>
             </a:pPr>
             <a:r>
-              <a:t>•  The confidence band has collapsed nearly everywhere — very little uncertainty remains</a:t>
-            </a:r>
-          </a:p>
-        </p:txBody>
-      </p:sp>
-      <p:sp>
-        <p:nvSpPr>
-          <p:cNvPr id="7" name="TextBox 6"/>
+              <a:rPr lang="en-US" b="0" i="0" dirty="0">
+                <a:solidFill>
+                  <a:srgbClr val="444444"/>
+                </a:solidFill>
+                <a:effectLst/>
+                <a:latin typeface="Nunito" pitchFamily="2" charset="0"/>
+              </a:rPr>
+              <a:t>The figure below shows the GP surrogate </a:t>
+            </a:r>
+            <a:r>
+              <a:rPr lang="en-US" b="1" i="0" dirty="0">
+                <a:solidFill>
+                  <a:srgbClr val="1A1A1A"/>
+                </a:solidFill>
+                <a:effectLst/>
+                <a:latin typeface="Nunito" pitchFamily="2" charset="0"/>
+              </a:rPr>
+              <a:t>after all 7 BO iterations</a:t>
+            </a:r>
+            <a:r>
+              <a:rPr lang="en-US" b="0" i="0" dirty="0">
+                <a:solidFill>
+                  <a:srgbClr val="444444"/>
+                </a:solidFill>
+                <a:effectLst/>
+                <a:latin typeface="Nunito" pitchFamily="2" charset="0"/>
+              </a:rPr>
+              <a:t> (10 total evaluations), using EI as the acquisition function. Red circles are the initial samples; green diamonds are the points selected by BO; the gold star is the best observation:</a:t>
+            </a:r>
+            <a:endParaRPr dirty="0"/>
+          </a:p>
+        </p:txBody>
+      </p:sp>
+      <p:sp>
+        <p:nvSpPr>
+          <p:cNvPr id="5" name="TextBox 4"/>
           <p:cNvSpPr txBox="1"/>
           <p:nvPr/>
         </p:nvSpPr>
         <p:spPr>
           <a:xfrm>
-            <a:off x="1188720" y="5120640"/>
+            <a:off x="1188720" y="5015925"/>
             <a:ext cx="9601200" cy="365760"/>
           </a:xfrm>
           <a:prstGeom prst="rect">
@@ -13826,8 +17700,130 @@
               </a:defRPr>
             </a:pPr>
             <a:r>
+              <a:t>•  The surrogate now closely tracks the true function across the entire domain</a:t>
+            </a:r>
+          </a:p>
+        </p:txBody>
+      </p:sp>
+      <p:sp>
+        <p:nvSpPr>
+          <p:cNvPr id="6" name="TextBox 5"/>
+          <p:cNvSpPr txBox="1"/>
+          <p:nvPr/>
+        </p:nvSpPr>
+        <p:spPr>
+          <a:xfrm>
+            <a:off x="1188720" y="5335965"/>
+            <a:ext cx="9601200" cy="365760"/>
+          </a:xfrm>
+          <a:prstGeom prst="rect">
+            <a:avLst/>
+          </a:prstGeom>
+          <a:noFill/>
+        </p:spPr>
+        <p:txBody>
+          <a:bodyPr wrap="square">
+            <a:spAutoFit/>
+          </a:bodyPr>
+          <a:lstStyle/>
+          <a:p>
+            <a:pPr algn="l">
+              <a:defRPr sz="1500" b="0">
+                <a:solidFill>
+                  <a:srgbClr val="444444"/>
+                </a:solidFill>
+                <a:latin typeface="Nunito"/>
+              </a:defRPr>
+            </a:pPr>
+            <a:r>
+              <a:t>•  The confidence band has collapsed nearly everywhere — very little uncertainty remains</a:t>
+            </a:r>
+          </a:p>
+        </p:txBody>
+      </p:sp>
+      <p:sp>
+        <p:nvSpPr>
+          <p:cNvPr id="7" name="TextBox 6"/>
+          <p:cNvSpPr txBox="1"/>
+          <p:nvPr/>
+        </p:nvSpPr>
+        <p:spPr>
+          <a:xfrm>
+            <a:off x="1188720" y="5656005"/>
+            <a:ext cx="9601200" cy="365760"/>
+          </a:xfrm>
+          <a:prstGeom prst="rect">
+            <a:avLst/>
+          </a:prstGeom>
+          <a:noFill/>
+        </p:spPr>
+        <p:txBody>
+          <a:bodyPr wrap="square">
+            <a:spAutoFit/>
+          </a:bodyPr>
+          <a:lstStyle/>
+          <a:p>
+            <a:pPr algn="l">
+              <a:defRPr sz="1500" b="0">
+                <a:solidFill>
+                  <a:srgbClr val="444444"/>
+                </a:solidFill>
+                <a:latin typeface="Nunito"/>
+              </a:defRPr>
+            </a:pPr>
+            <a:r>
               <a:t>•  Best found value f(x*) = 0.5003 matches the true optimum to 4 decimal places</a:t>
             </a:r>
+          </a:p>
+        </p:txBody>
+      </p:sp>
+      <p:sp>
+        <p:nvSpPr>
+          <p:cNvPr id="8" name="Rectangle 7">
+            <a:extLst>
+              <a:ext uri="{FF2B5EF4-FFF2-40B4-BE49-F238E27FC236}">
+                <a16:creationId xmlns:a16="http://schemas.microsoft.com/office/drawing/2014/main" id="{9FD77547-3E5F-76CD-61A5-CA3A9275135F}"/>
+              </a:ext>
+            </a:extLst>
+          </p:cNvPr>
+          <p:cNvSpPr/>
+          <p:nvPr/>
+        </p:nvSpPr>
+        <p:spPr>
+          <a:xfrm>
+            <a:off x="822960" y="856845"/>
+            <a:ext cx="3657600" cy="38100"/>
+          </a:xfrm>
+          <a:prstGeom prst="rect">
+            <a:avLst/>
+          </a:prstGeom>
+          <a:solidFill>
+            <a:srgbClr val="1A1A1A"/>
+          </a:solidFill>
+          <a:ln>
+            <a:noFill/>
+          </a:ln>
+        </p:spPr>
+        <p:style>
+          <a:lnRef idx="1">
+            <a:schemeClr val="accent1"/>
+          </a:lnRef>
+          <a:fillRef idx="3">
+            <a:schemeClr val="accent1"/>
+          </a:fillRef>
+          <a:effectRef idx="2">
+            <a:schemeClr val="accent1"/>
+          </a:effectRef>
+          <a:fontRef idx="minor">
+            <a:schemeClr val="lt1"/>
+          </a:fontRef>
+        </p:style>
+        <p:txBody>
+          <a:bodyPr rtlCol="0" anchor="ctr"/>
+          <a:lstStyle/>
+          <a:p>
+            <a:pPr algn="ctr"/>
+            <a:endParaRPr/>
           </a:p>
         </p:txBody>
       </p:sp>
@@ -13945,6 +17941,42 @@
         <p:spPr>
           <a:xfrm>
             <a:off x="822960" y="1188720"/>
+            <a:ext cx="9601200" cy="369332"/>
+          </a:xfrm>
+          <a:prstGeom prst="rect">
+            <a:avLst/>
+          </a:prstGeom>
+          <a:noFill/>
+        </p:spPr>
+        <p:txBody>
+          <a:bodyPr wrap="square">
+            <a:spAutoFit/>
+          </a:bodyPr>
+          <a:lstStyle/>
+          <a:p>
+            <a:pPr algn="l"/>
+            <a:r>
+              <a:rPr lang="en-US" b="1" i="0" dirty="0">
+                <a:solidFill>
+                  <a:srgbClr val="2A7D2A"/>
+                </a:solidFill>
+                <a:effectLst/>
+                <a:latin typeface="Archivo"/>
+              </a:rPr>
+              <a:t>Good fit</a:t>
+            </a:r>
+          </a:p>
+        </p:txBody>
+      </p:sp>
+      <p:sp>
+        <p:nvSpPr>
+          <p:cNvPr id="5" name="TextBox 4"/>
+          <p:cNvSpPr txBox="1"/>
+          <p:nvPr/>
+        </p:nvSpPr>
+        <p:spPr>
+          <a:xfrm>
+            <a:off x="1188720" y="1502474"/>
             <a:ext cx="9601200" cy="457200"/>
           </a:xfrm>
           <a:prstGeom prst="rect">
@@ -13970,20 +18002,128 @@
               </a:defRPr>
             </a:pPr>
             <a:r>
-              <a:t>GOOD FIT:</a:t>
-            </a:r>
-          </a:p>
-        </p:txBody>
-      </p:sp>
-      <p:sp>
-        <p:nvSpPr>
-          <p:cNvPr id="5" name="TextBox 4"/>
+              <a:t>•  Expensive evaluations (simulations, physical experiments)</a:t>
+            </a:r>
+          </a:p>
+        </p:txBody>
+      </p:sp>
+      <mc:AlternateContent xmlns:mc="http://schemas.openxmlformats.org/markup-compatibility/2006" xmlns:a14="http://schemas.microsoft.com/office/drawing/2010/main">
+        <mc:Choice Requires="a14">
+          <p:sp>
+            <p:nvSpPr>
+              <p:cNvPr id="6" name="TextBox 5"/>
+              <p:cNvSpPr txBox="1"/>
+              <p:nvPr/>
+            </p:nvSpPr>
+            <p:spPr>
+              <a:xfrm>
+                <a:off x="1188720" y="1904096"/>
+                <a:ext cx="9601200" cy="369332"/>
+              </a:xfrm>
+              <a:prstGeom prst="rect">
+                <a:avLst/>
+              </a:prstGeom>
+              <a:noFill/>
+            </p:spPr>
+            <p:txBody>
+              <a:bodyPr wrap="square">
+                <a:spAutoFit/>
+              </a:bodyPr>
+              <a:lstStyle/>
+              <a:p>
+                <a:pPr algn="l">
+                  <a:spcAft>
+                    <a:spcPts val="400"/>
+                  </a:spcAft>
+                  <a:defRPr sz="1800" b="0">
+                    <a:solidFill>
+                      <a:srgbClr val="444444"/>
+                    </a:solidFill>
+                    <a:latin typeface="Nunito"/>
+                  </a:defRPr>
+                </a:pPr>
+                <a:r>
+                  <a:rPr dirty="0"/>
+                  <a:t>•  Low-dimensional input space (typically </a:t>
+                </a:r>
+                <a14:m>
+                  <m:oMath xmlns:m="http://schemas.openxmlformats.org/officeDocument/2006/math">
+                    <m:r>
+                      <a:rPr lang="en-US" i="1" dirty="0" smtClean="0">
+                        <a:latin typeface="Cambria Math" panose="02040503050406030204" pitchFamily="18" charset="0"/>
+                      </a:rPr>
+                      <m:t>𝑑</m:t>
+                    </m:r>
+                    <m:r>
+                      <a:rPr lang="en-US" i="1" dirty="0" smtClean="0">
+                        <a:latin typeface="Cambria Math" panose="02040503050406030204" pitchFamily="18" charset="0"/>
+                      </a:rPr>
+                      <m:t> &lt; </m:t>
+                    </m:r>
+                    <m:r>
+                      <a:rPr lang="en-US" i="1" dirty="0" smtClean="0">
+                        <a:latin typeface="Cambria Math" panose="02040503050406030204" pitchFamily="18" charset="0"/>
+                      </a:rPr>
+                      <m:t>20</m:t>
+                    </m:r>
+                  </m:oMath>
+                </a14:m>
+                <a:r>
+                  <a:rPr dirty="0"/>
+                  <a:t>)</a:t>
+                </a:r>
+              </a:p>
+            </p:txBody>
+          </p:sp>
+        </mc:Choice>
+        <mc:Fallback xmlns="">
+          <p:sp>
+            <p:nvSpPr>
+              <p:cNvPr id="6" name="TextBox 5"/>
+              <p:cNvSpPr txBox="1">
+                <a:spLocks noRot="1" noChangeAspect="1" noMove="1" noResize="1" noEditPoints="1" noAdjustHandles="1" noChangeArrowheads="1" noChangeShapeType="1" noTextEdit="1"/>
+              </p:cNvSpPr>
+              <p:nvPr/>
+            </p:nvSpPr>
+            <p:spPr>
+              <a:xfrm>
+                <a:off x="1188720" y="1904096"/>
+                <a:ext cx="9601200" cy="369332"/>
+              </a:xfrm>
+              <a:prstGeom prst="rect">
+                <a:avLst/>
+              </a:prstGeom>
+              <a:blipFill>
+                <a:blip r:embed="rId2"/>
+                <a:stretch>
+                  <a:fillRect l="-508" t="-6557" b="-26230"/>
+                </a:stretch>
+              </a:blipFill>
+            </p:spPr>
+            <p:txBody>
+              <a:bodyPr/>
+              <a:lstStyle/>
+              <a:p>
+                <a:r>
+                  <a:rPr lang="en-US">
+                    <a:noFill/>
+                  </a:rPr>
+                  <a:t> </a:t>
+                </a:r>
+              </a:p>
+            </p:txBody>
+          </p:sp>
+        </mc:Fallback>
+      </mc:AlternateContent>
+      <p:sp>
+        <p:nvSpPr>
+          <p:cNvPr id="7" name="TextBox 6"/>
           <p:cNvSpPr txBox="1"/>
           <p:nvPr/>
         </p:nvSpPr>
         <p:spPr>
           <a:xfrm>
-            <a:off x="1188720" y="1572768"/>
+            <a:off x="1188720" y="2305718"/>
             <a:ext cx="9601200" cy="457200"/>
           </a:xfrm>
           <a:prstGeom prst="rect">
@@ -14009,21 +18149,22 @@
               </a:defRPr>
             </a:pPr>
             <a:r>
-              <a:t>•  Expensive evaluations (simulations, physical experiments)</a:t>
-            </a:r>
-          </a:p>
-        </p:txBody>
-      </p:sp>
-      <p:sp>
-        <p:nvSpPr>
-          <p:cNvPr id="6" name="TextBox 5"/>
+              <a:rPr dirty="0"/>
+              <a:t>•  Smooth, continuous objective</a:t>
+            </a:r>
+          </a:p>
+        </p:txBody>
+      </p:sp>
+      <p:sp>
+        <p:nvSpPr>
+          <p:cNvPr id="8" name="TextBox 7"/>
           <p:cNvSpPr txBox="1"/>
           <p:nvPr/>
         </p:nvSpPr>
         <p:spPr>
           <a:xfrm>
-            <a:off x="1188720" y="1956816"/>
-            <a:ext cx="9601200" cy="457200"/>
+            <a:off x="1188720" y="2707340"/>
+            <a:ext cx="9601200" cy="369332"/>
           </a:xfrm>
           <a:prstGeom prst="rect">
             <a:avLst/>
@@ -14048,20 +18189,21 @@
               </a:defRPr>
             </a:pPr>
             <a:r>
-              <a:t>•  Low-dimensional input space (typically d &lt; 20)</a:t>
-            </a:r>
-          </a:p>
-        </p:txBody>
-      </p:sp>
-      <p:sp>
-        <p:nvSpPr>
-          <p:cNvPr id="7" name="TextBox 6"/>
+              <a:rPr dirty="0"/>
+              <a:t>•  Black-box: no gradients available</a:t>
+            </a:r>
+          </a:p>
+        </p:txBody>
+      </p:sp>
+      <p:sp>
+        <p:nvSpPr>
+          <p:cNvPr id="9" name="TextBox 8"/>
           <p:cNvSpPr txBox="1"/>
           <p:nvPr/>
         </p:nvSpPr>
         <p:spPr>
           <a:xfrm>
-            <a:off x="1188720" y="2340864"/>
+            <a:off x="1188720" y="3108960"/>
             <a:ext cx="9601200" cy="457200"/>
           </a:xfrm>
           <a:prstGeom prst="rect">
@@ -14087,20 +18229,56 @@
               </a:defRPr>
             </a:pPr>
             <a:r>
-              <a:t>•  Smooth, continuous objective</a:t>
-            </a:r>
-          </a:p>
-        </p:txBody>
-      </p:sp>
-      <p:sp>
-        <p:nvSpPr>
-          <p:cNvPr id="8" name="TextBox 7"/>
+              <a:t>•  Budget of 10–100 evaluations</a:t>
+            </a:r>
+          </a:p>
+        </p:txBody>
+      </p:sp>
+      <p:sp>
+        <p:nvSpPr>
+          <p:cNvPr id="11" name="TextBox 10"/>
           <p:cNvSpPr txBox="1"/>
           <p:nvPr/>
         </p:nvSpPr>
         <p:spPr>
           <a:xfrm>
-            <a:off x="1188720" y="2724912"/>
+            <a:off x="822960" y="3706499"/>
+            <a:ext cx="9601200" cy="369332"/>
+          </a:xfrm>
+          <a:prstGeom prst="rect">
+            <a:avLst/>
+          </a:prstGeom>
+          <a:noFill/>
+        </p:spPr>
+        <p:txBody>
+          <a:bodyPr wrap="square">
+            <a:spAutoFit/>
+          </a:bodyPr>
+          <a:lstStyle/>
+          <a:p>
+            <a:pPr algn="l"/>
+            <a:r>
+              <a:rPr lang="en-US" b="1" i="0" dirty="0">
+                <a:solidFill>
+                  <a:srgbClr val="FF3300"/>
+                </a:solidFill>
+                <a:effectLst/>
+                <a:latin typeface="Archivo"/>
+              </a:rPr>
+              <a:t>Poor fit</a:t>
+            </a:r>
+          </a:p>
+        </p:txBody>
+      </p:sp>
+      <p:sp>
+        <p:nvSpPr>
+          <p:cNvPr id="12" name="TextBox 11"/>
+          <p:cNvSpPr txBox="1"/>
+          <p:nvPr/>
+        </p:nvSpPr>
+        <p:spPr>
+          <a:xfrm>
+            <a:off x="1188720" y="4055400"/>
             <a:ext cx="9601200" cy="457200"/>
           </a:xfrm>
           <a:prstGeom prst="rect">
@@ -14126,20 +18304,163 @@
               </a:defRPr>
             </a:pPr>
             <a:r>
-              <a:t>•  Black-box: no gradients available</a:t>
-            </a:r>
-          </a:p>
-        </p:txBody>
-      </p:sp>
-      <p:sp>
-        <p:nvSpPr>
-          <p:cNvPr id="9" name="TextBox 8"/>
+              <a:t>•  Cheap evaluations (can afford 10³+ calls)</a:t>
+            </a:r>
+          </a:p>
+        </p:txBody>
+      </p:sp>
+      <mc:AlternateContent xmlns:mc="http://schemas.openxmlformats.org/markup-compatibility/2006" xmlns:a14="http://schemas.microsoft.com/office/drawing/2010/main">
+        <mc:Choice Requires="a14">
+          <p:sp>
+            <p:nvSpPr>
+              <p:cNvPr id="13" name="TextBox 12"/>
+              <p:cNvSpPr txBox="1"/>
+              <p:nvPr/>
+            </p:nvSpPr>
+            <p:spPr>
+              <a:xfrm>
+                <a:off x="1188720" y="4492169"/>
+                <a:ext cx="9601200" cy="369332"/>
+              </a:xfrm>
+              <a:prstGeom prst="rect">
+                <a:avLst/>
+              </a:prstGeom>
+              <a:noFill/>
+            </p:spPr>
+            <p:txBody>
+              <a:bodyPr wrap="square">
+                <a:spAutoFit/>
+              </a:bodyPr>
+              <a:lstStyle/>
+              <a:p>
+                <a:pPr algn="l">
+                  <a:spcAft>
+                    <a:spcPts val="400"/>
+                  </a:spcAft>
+                  <a:defRPr sz="1800" b="0">
+                    <a:solidFill>
+                      <a:srgbClr val="444444"/>
+                    </a:solidFill>
+                    <a:latin typeface="Nunito"/>
+                  </a:defRPr>
+                </a:pPr>
+                <a:r>
+                  <a:rPr lang="en-US" dirty="0"/>
+                  <a:t>•  Very high-dimensional (</a:t>
+                </a:r>
+                <a14:m>
+                  <m:oMath xmlns:m="http://schemas.openxmlformats.org/officeDocument/2006/math">
+                    <m:r>
+                      <a:rPr lang="en-US" b="0" i="1" dirty="0" smtClean="0">
+                        <a:latin typeface="Cambria Math" panose="02040503050406030204" pitchFamily="18" charset="0"/>
+                      </a:rPr>
+                      <m:t>𝑑</m:t>
+                    </m:r>
+                    <m:r>
+                      <a:rPr lang="en-US" b="0" i="1" dirty="0" smtClean="0">
+                        <a:latin typeface="Cambria Math" panose="02040503050406030204" pitchFamily="18" charset="0"/>
+                      </a:rPr>
+                      <m:t>&gt;</m:t>
+                    </m:r>
+                    <m:r>
+                      <a:rPr lang="en-US" b="0" i="1" dirty="0" smtClean="0">
+                        <a:latin typeface="Cambria Math" panose="02040503050406030204" pitchFamily="18" charset="0"/>
+                      </a:rPr>
+                      <m:t>20</m:t>
+                    </m:r>
+                  </m:oMath>
+                </a14:m>
+                <a:r>
+                  <a:rPr lang="en-US" dirty="0"/>
+                  <a:t>): GP cost is </a:t>
+                </a:r>
+                <a14:m>
+                  <m:oMath xmlns:m="http://schemas.openxmlformats.org/officeDocument/2006/math">
+                    <m:r>
+                      <a:rPr lang="en-US" i="1" dirty="0" smtClean="0">
+                        <a:latin typeface="Cambria Math" panose="02040503050406030204" pitchFamily="18" charset="0"/>
+                      </a:rPr>
+                      <m:t>𝑂</m:t>
+                    </m:r>
+                    <m:r>
+                      <a:rPr lang="en-US" i="1" dirty="0" smtClean="0">
+                        <a:latin typeface="Cambria Math" panose="02040503050406030204" pitchFamily="18" charset="0"/>
+                      </a:rPr>
+                      <m:t>(</m:t>
+                    </m:r>
+                    <m:r>
+                      <a:rPr lang="en-US" i="1" dirty="0" smtClean="0">
+                        <a:latin typeface="Cambria Math" panose="02040503050406030204" pitchFamily="18" charset="0"/>
+                      </a:rPr>
+                      <m:t>𝑛</m:t>
+                    </m:r>
+                    <m:r>
+                      <a:rPr lang="en-US" i="1" dirty="0" smtClean="0">
+                        <a:latin typeface="Cambria Math" panose="02040503050406030204" pitchFamily="18" charset="0"/>
+                      </a:rPr>
+                      <m:t>³</m:t>
+                    </m:r>
+                    <m:r>
+                      <a:rPr lang="en-US" i="1" dirty="0" smtClean="0">
+                        <a:latin typeface="Cambria Math" panose="02040503050406030204" pitchFamily="18" charset="0"/>
+                      </a:rPr>
+                      <m:t>)</m:t>
+                    </m:r>
+                  </m:oMath>
+                </a14:m>
+                <a:endParaRPr dirty="0"/>
+              </a:p>
+            </p:txBody>
+          </p:sp>
+        </mc:Choice>
+        <mc:Fallback xmlns="">
+          <p:sp>
+            <p:nvSpPr>
+              <p:cNvPr id="13" name="TextBox 12"/>
+              <p:cNvSpPr txBox="1">
+                <a:spLocks noRot="1" noChangeAspect="1" noMove="1" noResize="1" noEditPoints="1" noAdjustHandles="1" noChangeArrowheads="1" noChangeShapeType="1" noTextEdit="1"/>
+              </p:cNvSpPr>
+              <p:nvPr/>
+            </p:nvSpPr>
+            <p:spPr>
+              <a:xfrm>
+                <a:off x="1188720" y="4492169"/>
+                <a:ext cx="9601200" cy="369332"/>
+              </a:xfrm>
+              <a:prstGeom prst="rect">
+                <a:avLst/>
+              </a:prstGeom>
+              <a:blipFill>
+                <a:blip r:embed="rId3"/>
+                <a:stretch>
+                  <a:fillRect l="-508" t="-8333" b="-28333"/>
+                </a:stretch>
+              </a:blipFill>
+            </p:spPr>
+            <p:txBody>
+              <a:bodyPr/>
+              <a:lstStyle/>
+              <a:p>
+                <a:r>
+                  <a:rPr lang="en-US">
+                    <a:noFill/>
+                  </a:rPr>
+                  <a:t> </a:t>
+                </a:r>
+              </a:p>
+            </p:txBody>
+          </p:sp>
+        </mc:Fallback>
+      </mc:AlternateContent>
+      <p:sp>
+        <p:nvSpPr>
+          <p:cNvPr id="14" name="TextBox 13"/>
           <p:cNvSpPr txBox="1"/>
           <p:nvPr/>
         </p:nvSpPr>
         <p:spPr>
           <a:xfrm>
-            <a:off x="1188720" y="3108960"/>
+            <a:off x="1188720" y="4841070"/>
             <a:ext cx="9601200" cy="457200"/>
           </a:xfrm>
           <a:prstGeom prst="rect">
@@ -14165,21 +18486,21 @@
               </a:defRPr>
             </a:pPr>
             <a:r>
-              <a:t>•  Budget of 10–100 evaluations</a:t>
-            </a:r>
-          </a:p>
-        </p:txBody>
-      </p:sp>
-      <p:sp>
-        <p:nvSpPr>
-          <p:cNvPr id="10" name="TextBox 9"/>
+              <a:t>•  Highly discrete or combinatorial problems</a:t>
+            </a:r>
+          </a:p>
+        </p:txBody>
+      </p:sp>
+      <p:sp>
+        <p:nvSpPr>
+          <p:cNvPr id="15" name="TextBox 14"/>
           <p:cNvSpPr txBox="1"/>
           <p:nvPr/>
         </p:nvSpPr>
         <p:spPr>
           <a:xfrm>
-            <a:off x="822960" y="3493008"/>
-            <a:ext cx="9601200" cy="457200"/>
+            <a:off x="1188720" y="5277839"/>
+            <a:ext cx="9601200" cy="369332"/>
           </a:xfrm>
           <a:prstGeom prst="rect">
             <a:avLst/>
@@ -14203,20 +18524,29 @@
                 <a:latin typeface="Nunito"/>
               </a:defRPr>
             </a:pPr>
-            <a:endParaRPr/>
-          </a:p>
-        </p:txBody>
-      </p:sp>
-      <p:sp>
-        <p:nvSpPr>
-          <p:cNvPr id="11" name="TextBox 10"/>
+            <a:r>
+              <a:rPr dirty="0"/>
+              <a:t>•  Gradient information available (use gradient descent)</a:t>
+            </a:r>
+          </a:p>
+        </p:txBody>
+      </p:sp>
+      <p:sp>
+        <p:nvSpPr>
+          <p:cNvPr id="16" name="TextBox 15">
+            <a:extLst>
+              <a:ext uri="{FF2B5EF4-FFF2-40B4-BE49-F238E27FC236}">
+                <a16:creationId xmlns:a16="http://schemas.microsoft.com/office/drawing/2014/main" id="{B562C16B-5BC4-0C8E-1AED-FF937AADF035}"/>
+              </a:ext>
+            </a:extLst>
+          </p:cNvPr>
           <p:cNvSpPr txBox="1"/>
           <p:nvPr/>
         </p:nvSpPr>
         <p:spPr>
           <a:xfrm>
-            <a:off x="822960" y="3877056"/>
-            <a:ext cx="9601200" cy="457200"/>
+            <a:off x="1188720" y="5626739"/>
+            <a:ext cx="9601200" cy="369332"/>
           </a:xfrm>
           <a:prstGeom prst="rect">
             <a:avLst/>
@@ -14229,7 +18559,7 @@
           </a:bodyPr>
           <a:lstStyle/>
           <a:p>
-            <a:pPr algn="l">
+            <a:pPr>
               <a:spcAft>
                 <a:spcPts val="400"/>
               </a:spcAft>
@@ -14241,163 +18571,18 @@
               </a:defRPr>
             </a:pPr>
             <a:r>
-              <a:t>POOR FIT:</a:t>
-            </a:r>
-          </a:p>
-        </p:txBody>
-      </p:sp>
-      <p:sp>
-        <p:nvSpPr>
-          <p:cNvPr id="12" name="TextBox 11"/>
-          <p:cNvSpPr txBox="1"/>
-          <p:nvPr/>
-        </p:nvSpPr>
-        <p:spPr>
-          <a:xfrm>
-            <a:off x="1188720" y="4261104"/>
-            <a:ext cx="9601200" cy="457200"/>
-          </a:xfrm>
-          <a:prstGeom prst="rect">
-            <a:avLst/>
-          </a:prstGeom>
-          <a:noFill/>
-        </p:spPr>
-        <p:txBody>
-          <a:bodyPr wrap="square">
-            <a:spAutoFit/>
-          </a:bodyPr>
-          <a:lstStyle/>
-          <a:p>
-            <a:pPr algn="l">
-              <a:spcAft>
-                <a:spcPts val="400"/>
-              </a:spcAft>
-              <a:defRPr sz="1800" b="0">
+              <a:rPr lang="fr-FR" dirty="0"/>
+              <a:t>•  </a:t>
+            </a:r>
+            <a:r>
+              <a:rPr lang="en-US" b="0" i="0" dirty="0">
                 <a:solidFill>
                   <a:srgbClr val="444444"/>
                 </a:solidFill>
-                <a:latin typeface="Nunito"/>
-              </a:defRPr>
-            </a:pPr>
-            <a:r>
-              <a:t>•  Cheap evaluations (can afford 10³+ calls)</a:t>
-            </a:r>
-          </a:p>
-        </p:txBody>
-      </p:sp>
-      <p:sp>
-        <p:nvSpPr>
-          <p:cNvPr id="13" name="TextBox 12"/>
-          <p:cNvSpPr txBox="1"/>
-          <p:nvPr/>
-        </p:nvSpPr>
-        <p:spPr>
-          <a:xfrm>
-            <a:off x="1188720" y="4645152"/>
-            <a:ext cx="9601200" cy="457200"/>
-          </a:xfrm>
-          <a:prstGeom prst="rect">
-            <a:avLst/>
-          </a:prstGeom>
-          <a:noFill/>
-        </p:spPr>
-        <p:txBody>
-          <a:bodyPr wrap="square">
-            <a:spAutoFit/>
-          </a:bodyPr>
-          <a:lstStyle/>
-          <a:p>
-            <a:pPr algn="l">
-              <a:spcAft>
-                <a:spcPts val="400"/>
-              </a:spcAft>
-              <a:defRPr sz="1800" b="0">
-                <a:solidFill>
-                  <a:srgbClr val="444444"/>
-                </a:solidFill>
-                <a:latin typeface="Nunito"/>
-              </a:defRPr>
-            </a:pPr>
-            <a:r>
-              <a:t>•  Very high-dimensional (d &gt; 20): GP cost is O(n³)</a:t>
-            </a:r>
-          </a:p>
-        </p:txBody>
-      </p:sp>
-      <p:sp>
-        <p:nvSpPr>
-          <p:cNvPr id="14" name="TextBox 13"/>
-          <p:cNvSpPr txBox="1"/>
-          <p:nvPr/>
-        </p:nvSpPr>
-        <p:spPr>
-          <a:xfrm>
-            <a:off x="1188720" y="5029200"/>
-            <a:ext cx="9601200" cy="457200"/>
-          </a:xfrm>
-          <a:prstGeom prst="rect">
-            <a:avLst/>
-          </a:prstGeom>
-          <a:noFill/>
-        </p:spPr>
-        <p:txBody>
-          <a:bodyPr wrap="square">
-            <a:spAutoFit/>
-          </a:bodyPr>
-          <a:lstStyle/>
-          <a:p>
-            <a:pPr algn="l">
-              <a:spcAft>
-                <a:spcPts val="400"/>
-              </a:spcAft>
-              <a:defRPr sz="1800" b="0">
-                <a:solidFill>
-                  <a:srgbClr val="444444"/>
-                </a:solidFill>
-                <a:latin typeface="Nunito"/>
-              </a:defRPr>
-            </a:pPr>
-            <a:r>
-              <a:t>•  Highly discrete or combinatorial problems</a:t>
-            </a:r>
-          </a:p>
-        </p:txBody>
-      </p:sp>
-      <p:sp>
-        <p:nvSpPr>
-          <p:cNvPr id="15" name="TextBox 14"/>
-          <p:cNvSpPr txBox="1"/>
-          <p:nvPr/>
-        </p:nvSpPr>
-        <p:spPr>
-          <a:xfrm>
-            <a:off x="1188720" y="5413248"/>
-            <a:ext cx="9601200" cy="457200"/>
-          </a:xfrm>
-          <a:prstGeom prst="rect">
-            <a:avLst/>
-          </a:prstGeom>
-          <a:noFill/>
-        </p:spPr>
-        <p:txBody>
-          <a:bodyPr wrap="square">
-            <a:spAutoFit/>
-          </a:bodyPr>
-          <a:lstStyle/>
-          <a:p>
-            <a:pPr algn="l">
-              <a:spcAft>
-                <a:spcPts val="400"/>
-              </a:spcAft>
-              <a:defRPr sz="1800" b="0">
-                <a:solidFill>
-                  <a:srgbClr val="444444"/>
-                </a:solidFill>
-                <a:latin typeface="Nunito"/>
-              </a:defRPr>
-            </a:pPr>
-            <a:r>
-              <a:t>•  Gradient information available (use gradient descent)</a:t>
+                <a:effectLst/>
+                <a:latin typeface="Nunito" pitchFamily="2" charset="0"/>
+              </a:rPr>
+              <a:t>Extremely noisy with no structure</a:t>
             </a:r>
           </a:p>
         </p:txBody>
@@ -14516,7 +18701,7 @@
         <p:spPr>
           <a:xfrm>
             <a:off x="1188720" y="1188720"/>
-            <a:ext cx="9601200" cy="457200"/>
+            <a:ext cx="9601200" cy="646331"/>
           </a:xfrm>
           <a:prstGeom prst="rect">
             <a:avLst/>
@@ -14541,7 +18726,8 @@
               </a:defRPr>
             </a:pPr>
             <a:r>
-              <a:t>•  Bayesian Optimisation is a sequential, model-based strategy for optimising expensive black-box functions using as few evaluations as possible.</a:t>
+              <a:rPr dirty="0"/>
+              <a:t>•  Bayesian Optimization is a sequential, model-based strategy for optimizing expensive black-box functions using as few evaluations as possible.</a:t>
             </a:r>
           </a:p>
         </p:txBody>
@@ -14554,8 +18740,8 @@
         </p:nvSpPr>
         <p:spPr>
           <a:xfrm>
-            <a:off x="1188720" y="1572768"/>
-            <a:ext cx="9601200" cy="457200"/>
+            <a:off x="1188720" y="1876714"/>
+            <a:ext cx="9601200" cy="646331"/>
           </a:xfrm>
           <a:prstGeom prst="rect">
             <a:avLst/>
@@ -14580,6 +18766,7 @@
               </a:defRPr>
             </a:pPr>
             <a:r>
+              <a:rPr dirty="0"/>
               <a:t>•  The surrogate model (typically a GP) provides predictions with calibrated uncertainty, enabling intelligent sampling.</a:t>
             </a:r>
           </a:p>
@@ -14593,8 +18780,8 @@
         </p:nvSpPr>
         <p:spPr>
           <a:xfrm>
-            <a:off x="1188720" y="1956816"/>
-            <a:ext cx="9601200" cy="457200"/>
+            <a:off x="1188720" y="2564708"/>
+            <a:ext cx="9601200" cy="369332"/>
           </a:xfrm>
           <a:prstGeom prst="rect">
             <a:avLst/>
@@ -14619,7 +18806,8 @@
               </a:defRPr>
             </a:pPr>
             <a:r>
-              <a:t>•  Acquisition functions formalise the exploration–exploitation trade-off:</a:t>
+              <a:rPr dirty="0"/>
+              <a:t>•  Acquisition functions formalize the exploration–exploitation trade-off:</a:t>
             </a:r>
           </a:p>
         </p:txBody>
@@ -14632,8 +18820,8 @@
         </p:nvSpPr>
         <p:spPr>
           <a:xfrm>
-            <a:off x="822960" y="2340864"/>
-            <a:ext cx="9601200" cy="457200"/>
+            <a:off x="1510382" y="2975703"/>
+            <a:ext cx="7691985" cy="369332"/>
           </a:xfrm>
           <a:prstGeom prst="rect">
             <a:avLst/>
@@ -14658,21 +18846,240 @@
               </a:defRPr>
             </a:pPr>
             <a:r>
-              <a:t>    EI: expected magnitude of improvement (balanced, parameter-free)</a:t>
-            </a:r>
-          </a:p>
-        </p:txBody>
-      </p:sp>
-      <p:sp>
-        <p:nvSpPr>
-          <p:cNvPr id="8" name="TextBox 7"/>
+              <a:rPr lang="en-US" dirty="0"/>
+              <a:t>•  </a:t>
+            </a:r>
+            <a:r>
+              <a:rPr dirty="0"/>
+              <a:t>EI: expected magnitude of improvement (balanced, parameter-free)</a:t>
+            </a:r>
+          </a:p>
+        </p:txBody>
+      </p:sp>
+      <mc:AlternateContent xmlns:mc="http://schemas.openxmlformats.org/markup-compatibility/2006" xmlns:a14="http://schemas.microsoft.com/office/drawing/2010/main">
+        <mc:Choice Requires="a14">
+          <p:sp>
+            <p:nvSpPr>
+              <p:cNvPr id="8" name="TextBox 7"/>
+              <p:cNvSpPr txBox="1"/>
+              <p:nvPr/>
+            </p:nvSpPr>
+            <p:spPr>
+              <a:xfrm>
+                <a:off x="1510382" y="3386698"/>
+                <a:ext cx="7691985" cy="369332"/>
+              </a:xfrm>
+              <a:prstGeom prst="rect">
+                <a:avLst/>
+              </a:prstGeom>
+              <a:noFill/>
+            </p:spPr>
+            <p:txBody>
+              <a:bodyPr wrap="square">
+                <a:spAutoFit/>
+              </a:bodyPr>
+              <a:lstStyle/>
+              <a:p>
+                <a:pPr algn="l">
+                  <a:spcAft>
+                    <a:spcPts val="400"/>
+                  </a:spcAft>
+                  <a:defRPr sz="1800" b="0">
+                    <a:solidFill>
+                      <a:srgbClr val="444444"/>
+                    </a:solidFill>
+                    <a:latin typeface="Nunito"/>
+                  </a:defRPr>
+                </a:pPr>
+                <a:r>
+                  <a:rPr lang="en-US" dirty="0"/>
+                  <a:t>•  </a:t>
+                </a:r>
+                <a:r>
+                  <a:rPr dirty="0"/>
+                  <a:t>PI: probability of improvement (greedy, tunable via </a:t>
+                </a:r>
+                <a14:m>
+                  <m:oMath xmlns:m="http://schemas.openxmlformats.org/officeDocument/2006/math">
+                    <m:r>
+                      <a:rPr lang="en-US" i="1" dirty="0" smtClean="0">
+                        <a:latin typeface="Cambria Math" panose="02040503050406030204" pitchFamily="18" charset="0"/>
+                      </a:rPr>
+                      <m:t>𝜉</m:t>
+                    </m:r>
+                  </m:oMath>
+                </a14:m>
+                <a:r>
+                  <a:rPr dirty="0"/>
+                  <a:t>)</a:t>
+                </a:r>
+              </a:p>
+            </p:txBody>
+          </p:sp>
+        </mc:Choice>
+        <mc:Fallback xmlns="">
+          <p:sp>
+            <p:nvSpPr>
+              <p:cNvPr id="8" name="TextBox 7"/>
+              <p:cNvSpPr txBox="1">
+                <a:spLocks noRot="1" noChangeAspect="1" noMove="1" noResize="1" noEditPoints="1" noAdjustHandles="1" noChangeArrowheads="1" noChangeShapeType="1" noTextEdit="1"/>
+              </p:cNvSpPr>
+              <p:nvPr/>
+            </p:nvSpPr>
+            <p:spPr>
+              <a:xfrm>
+                <a:off x="1510382" y="3386698"/>
+                <a:ext cx="7691985" cy="369332"/>
+              </a:xfrm>
+              <a:prstGeom prst="rect">
+                <a:avLst/>
+              </a:prstGeom>
+              <a:blipFill>
+                <a:blip r:embed="rId2"/>
+                <a:stretch>
+                  <a:fillRect l="-713" t="-8333" b="-28333"/>
+                </a:stretch>
+              </a:blipFill>
+            </p:spPr>
+            <p:txBody>
+              <a:bodyPr/>
+              <a:lstStyle/>
+              <a:p>
+                <a:r>
+                  <a:rPr lang="en-US">
+                    <a:noFill/>
+                  </a:rPr>
+                  <a:t> </a:t>
+                </a:r>
+              </a:p>
+            </p:txBody>
+          </p:sp>
+        </mc:Fallback>
+      </mc:AlternateContent>
+      <mc:AlternateContent xmlns:mc="http://schemas.openxmlformats.org/markup-compatibility/2006" xmlns:a14="http://schemas.microsoft.com/office/drawing/2010/main">
+        <mc:Choice Requires="a14">
+          <p:sp>
+            <p:nvSpPr>
+              <p:cNvPr id="9" name="TextBox 8"/>
+              <p:cNvSpPr txBox="1"/>
+              <p:nvPr/>
+            </p:nvSpPr>
+            <p:spPr>
+              <a:xfrm>
+                <a:off x="1510382" y="3797693"/>
+                <a:ext cx="7691985" cy="369332"/>
+              </a:xfrm>
+              <a:prstGeom prst="rect">
+                <a:avLst/>
+              </a:prstGeom>
+              <a:noFill/>
+            </p:spPr>
+            <p:txBody>
+              <a:bodyPr wrap="square">
+                <a:spAutoFit/>
+              </a:bodyPr>
+              <a:lstStyle/>
+              <a:p>
+                <a:pPr algn="l">
+                  <a:spcAft>
+                    <a:spcPts val="400"/>
+                  </a:spcAft>
+                  <a:defRPr sz="1800" b="0">
+                    <a:solidFill>
+                      <a:srgbClr val="444444"/>
+                    </a:solidFill>
+                    <a:latin typeface="Nunito"/>
+                  </a:defRPr>
+                </a:pPr>
+                <a:r>
+                  <a:rPr lang="en-US" dirty="0"/>
+                  <a:t>•  </a:t>
+                </a:r>
+                <a:r>
+                  <a:rPr dirty="0"/>
+                  <a:t>UCB: optimistic bound on </a:t>
+                </a:r>
+                <a14:m>
+                  <m:oMath xmlns:m="http://schemas.openxmlformats.org/officeDocument/2006/math">
+                    <m:r>
+                      <a:rPr lang="en-US" i="1" dirty="0" smtClean="0">
+                        <a:latin typeface="Cambria Math" panose="02040503050406030204" pitchFamily="18" charset="0"/>
+                      </a:rPr>
+                      <m:t>𝑓</m:t>
+                    </m:r>
+                  </m:oMath>
+                </a14:m>
+                <a:r>
+                  <a:rPr dirty="0"/>
+                  <a:t> (principled, tunable via </a:t>
+                </a:r>
+                <a14:m>
+                  <m:oMath xmlns:m="http://schemas.openxmlformats.org/officeDocument/2006/math">
+                    <m:r>
+                      <a:rPr lang="en-US" i="1" dirty="0" smtClean="0">
+                        <a:latin typeface="Cambria Math" panose="02040503050406030204" pitchFamily="18" charset="0"/>
+                      </a:rPr>
+                      <m:t>𝜅</m:t>
+                    </m:r>
+                  </m:oMath>
+                </a14:m>
+                <a:r>
+                  <a:rPr dirty="0"/>
+                  <a:t>)</a:t>
+                </a:r>
+              </a:p>
+            </p:txBody>
+          </p:sp>
+        </mc:Choice>
+        <mc:Fallback xmlns="">
+          <p:sp>
+            <p:nvSpPr>
+              <p:cNvPr id="9" name="TextBox 8"/>
+              <p:cNvSpPr txBox="1">
+                <a:spLocks noRot="1" noChangeAspect="1" noMove="1" noResize="1" noEditPoints="1" noAdjustHandles="1" noChangeArrowheads="1" noChangeShapeType="1" noTextEdit="1"/>
+              </p:cNvSpPr>
+              <p:nvPr/>
+            </p:nvSpPr>
+            <p:spPr>
+              <a:xfrm>
+                <a:off x="1510382" y="3797693"/>
+                <a:ext cx="7691985" cy="369332"/>
+              </a:xfrm>
+              <a:prstGeom prst="rect">
+                <a:avLst/>
+              </a:prstGeom>
+              <a:blipFill>
+                <a:blip r:embed="rId3"/>
+                <a:stretch>
+                  <a:fillRect l="-713" t="-8197" b="-26230"/>
+                </a:stretch>
+              </a:blipFill>
+            </p:spPr>
+            <p:txBody>
+              <a:bodyPr/>
+              <a:lstStyle/>
+              <a:p>
+                <a:r>
+                  <a:rPr lang="en-US">
+                    <a:noFill/>
+                  </a:rPr>
+                  <a:t> </a:t>
+                </a:r>
+              </a:p>
+            </p:txBody>
+          </p:sp>
+        </mc:Fallback>
+      </mc:AlternateContent>
+      <p:sp>
+        <p:nvSpPr>
+          <p:cNvPr id="10" name="TextBox 9"/>
           <p:cNvSpPr txBox="1"/>
           <p:nvPr/>
         </p:nvSpPr>
         <p:spPr>
           <a:xfrm>
-            <a:off x="822960" y="2724912"/>
-            <a:ext cx="9601200" cy="457200"/>
+            <a:off x="1188720" y="4208687"/>
+            <a:ext cx="9601200" cy="646331"/>
           </a:xfrm>
           <a:prstGeom prst="rect">
             <a:avLst/>
@@ -14697,85 +19104,28 @@
               </a:defRPr>
             </a:pPr>
             <a:r>
-              <a:t>    PI: probability of improvement (greedy, tuneable via ξ)</a:t>
-            </a:r>
-          </a:p>
-        </p:txBody>
-      </p:sp>
-      <p:sp>
-        <p:nvSpPr>
-          <p:cNvPr id="9" name="TextBox 8"/>
-          <p:cNvSpPr txBox="1"/>
-          <p:nvPr/>
-        </p:nvSpPr>
-        <p:spPr>
-          <a:xfrm>
-            <a:off x="822960" y="3108960"/>
-            <a:ext cx="9601200" cy="457200"/>
-          </a:xfrm>
-          <a:prstGeom prst="rect">
-            <a:avLst/>
-          </a:prstGeom>
-          <a:noFill/>
-        </p:spPr>
-        <p:txBody>
-          <a:bodyPr wrap="square">
-            <a:spAutoFit/>
-          </a:bodyPr>
-          <a:lstStyle/>
-          <a:p>
-            <a:pPr algn="l">
-              <a:spcAft>
-                <a:spcPts val="400"/>
-              </a:spcAft>
-              <a:defRPr sz="1800" b="0">
-                <a:solidFill>
-                  <a:srgbClr val="444444"/>
-                </a:solidFill>
-                <a:latin typeface="Nunito"/>
-              </a:defRPr>
-            </a:pPr>
-            <a:r>
-              <a:t>    UCB: optimistic bound on f (principled, tuneable via κ)</a:t>
-            </a:r>
-          </a:p>
-        </p:txBody>
-      </p:sp>
-      <p:sp>
-        <p:nvSpPr>
-          <p:cNvPr id="10" name="TextBox 9"/>
-          <p:cNvSpPr txBox="1"/>
-          <p:nvPr/>
-        </p:nvSpPr>
-        <p:spPr>
-          <a:xfrm>
-            <a:off x="1188720" y="3493008"/>
-            <a:ext cx="9601200" cy="457200"/>
-          </a:xfrm>
-          <a:prstGeom prst="rect">
-            <a:avLst/>
-          </a:prstGeom>
-          <a:noFill/>
-        </p:spPr>
-        <p:txBody>
-          <a:bodyPr wrap="square">
-            <a:spAutoFit/>
-          </a:bodyPr>
-          <a:lstStyle/>
-          <a:p>
-            <a:pPr algn="l">
-              <a:spcAft>
-                <a:spcPts val="400"/>
-              </a:spcAft>
-              <a:defRPr sz="1800" b="0">
-                <a:solidFill>
-                  <a:srgbClr val="444444"/>
-                </a:solidFill>
-                <a:latin typeface="Nunito"/>
-              </a:defRPr>
-            </a:pPr>
-            <a:r>
-              <a:t>•  The BO loop — fit, decide, evaluate, update — converges to the optimum in very few evaluations compared to uninformed methods.</a:t>
+              <a:rPr dirty="0"/>
+              <a:t>•  The BO loop </a:t>
+            </a:r>
+            <a:r>
+              <a:rPr lang="en-US" dirty="0"/>
+              <a:t>-</a:t>
+            </a:r>
+            <a:r>
+              <a:rPr dirty="0"/>
+              <a:t> </a:t>
+            </a:r>
+            <a:r>
+              <a:rPr i="1" dirty="0"/>
+              <a:t>fit, decide, evaluate, update </a:t>
+            </a:r>
+            <a:r>
+              <a:rPr lang="en-US" dirty="0"/>
+              <a:t>- </a:t>
+            </a:r>
+            <a:r>
+              <a:rPr dirty="0"/>
+              <a:t>converges to the optimum in very few evaluations compared to uninformed methods.</a:t>
             </a:r>
           </a:p>
         </p:txBody>
@@ -15339,7 +19689,7 @@
         <p:spPr>
           <a:xfrm>
             <a:off x="1188720" y="1188720"/>
-            <a:ext cx="9601200" cy="457200"/>
+            <a:ext cx="9601200" cy="646331"/>
           </a:xfrm>
           <a:prstGeom prst="rect">
             <a:avLst/>
@@ -15364,6 +19714,7 @@
               </a:defRPr>
             </a:pPr>
             <a:r>
+              <a:rPr dirty="0"/>
               <a:t>•  Kushner, H.J. (1964). A New Method of Locating the Maximum Point of an Arbitrary Multipeak Curve in the Presence of Noise. — introduced PI</a:t>
             </a:r>
           </a:p>
@@ -15377,8 +19728,8 @@
         </p:nvSpPr>
         <p:spPr>
           <a:xfrm>
-            <a:off x="1188720" y="1572768"/>
-            <a:ext cx="9601200" cy="457200"/>
+            <a:off x="1188720" y="1936487"/>
+            <a:ext cx="9601200" cy="369332"/>
           </a:xfrm>
           <a:prstGeom prst="rect">
             <a:avLst/>
@@ -15403,7 +19754,16 @@
               </a:defRPr>
             </a:pPr>
             <a:r>
-              <a:t>•  Mockus, J. (1975). On Bayesian Methods for Seeking the Extremum. — introduced EI</a:t>
+              <a:rPr dirty="0"/>
+              <a:t>•  </a:t>
+            </a:r>
+            <a:r>
+              <a:rPr dirty="0" err="1"/>
+              <a:t>Mockus</a:t>
+            </a:r>
+            <a:r>
+              <a:rPr dirty="0"/>
+              <a:t>, J. (1975). On Bayesian Methods for Seeking the Extremum. — introduced EI</a:t>
             </a:r>
           </a:p>
         </p:txBody>
@@ -15416,8 +19776,8 @@
         </p:nvSpPr>
         <p:spPr>
           <a:xfrm>
-            <a:off x="1188720" y="1956816"/>
-            <a:ext cx="9601200" cy="457200"/>
+            <a:off x="1188720" y="2407255"/>
+            <a:ext cx="9601200" cy="646331"/>
           </a:xfrm>
           <a:prstGeom prst="rect">
             <a:avLst/>
@@ -15442,8 +19802,14 @@
               </a:defRPr>
             </a:pPr>
             <a:r>
+              <a:rPr dirty="0"/>
               <a:t>•  Srinivas, N. et al. (2010). Gaussian Process Optimization in the Bandit Setting: No Regret and Experimental Design. ICML. — GP-UCB regret bounds</a:t>
             </a:r>
+            <a:r>
+              <a:rPr lang="en-US" dirty="0"/>
+              <a:t> </a:t>
+            </a:r>
+            <a:endParaRPr dirty="0"/>
           </a:p>
         </p:txBody>
       </p:sp>
@@ -15455,8 +19821,8 @@
         </p:nvSpPr>
         <p:spPr>
           <a:xfrm>
-            <a:off x="1188720" y="2340864"/>
-            <a:ext cx="9601200" cy="457200"/>
+            <a:off x="1188720" y="3155022"/>
+            <a:ext cx="9601200" cy="369332"/>
           </a:xfrm>
           <a:prstGeom prst="rect">
             <a:avLst/>
@@ -15481,8 +19847,22 @@
               </a:defRPr>
             </a:pPr>
             <a:r>
-              <a:t>•  Brochu, E., Cora, V.M. &amp; de Freitas, N. (2010). A Tutorial on Bayesian Optimization.</a:t>
-            </a:r>
+              <a:rPr dirty="0"/>
+              <a:t>•  </a:t>
+            </a:r>
+            <a:r>
+              <a:rPr dirty="0" err="1"/>
+              <a:t>Brochu</a:t>
+            </a:r>
+            <a:r>
+              <a:rPr dirty="0"/>
+              <a:t>, E., Cora, V.M. &amp; de Freitas, N. (2010). A Tutorial on Bayesian Optimization.</a:t>
+            </a:r>
+            <a:r>
+              <a:rPr lang="en-US" dirty="0"/>
+              <a:t> </a:t>
+            </a:r>
+            <a:endParaRPr dirty="0"/>
           </a:p>
         </p:txBody>
       </p:sp>
@@ -15494,8 +19874,8 @@
         </p:nvSpPr>
         <p:spPr>
           <a:xfrm>
-            <a:off x="1188720" y="2724912"/>
-            <a:ext cx="9601200" cy="457200"/>
+            <a:off x="1188720" y="3625790"/>
+            <a:ext cx="9601200" cy="646331"/>
           </a:xfrm>
           <a:prstGeom prst="rect">
             <a:avLst/>
@@ -15520,7 +19900,16 @@
               </a:defRPr>
             </a:pPr>
             <a:r>
-              <a:t>•  Shahriari, B. et al. (2016). Taking the Human Out of the Loop: A Review of Bayesian Optimization. Proc. IEEE.</a:t>
+              <a:rPr dirty="0"/>
+              <a:t>•  </a:t>
+            </a:r>
+            <a:r>
+              <a:rPr dirty="0" err="1"/>
+              <a:t>Shahriari</a:t>
+            </a:r>
+            <a:r>
+              <a:rPr dirty="0"/>
+              <a:t>, B. et al. (2016). Taking the Human Out of the Loop: A Review of Bayesian Optimization. Proc. IEEE.</a:t>
             </a:r>
           </a:p>
         </p:txBody>
@@ -15533,8 +19922,8 @@
         </p:nvSpPr>
         <p:spPr>
           <a:xfrm>
-            <a:off x="1188720" y="3108960"/>
-            <a:ext cx="9601200" cy="457200"/>
+            <a:off x="1188720" y="4373556"/>
+            <a:ext cx="9601200" cy="369332"/>
           </a:xfrm>
           <a:prstGeom prst="rect">
             <a:avLst/>
@@ -15559,8 +19948,14 @@
               </a:defRPr>
             </a:pPr>
             <a:r>
+              <a:rPr dirty="0"/>
               <a:t>•  Frazier, P.I. (2018). A Tutorial on Bayesian Optimization. arXiv:1807.02811.</a:t>
             </a:r>
+            <a:r>
+              <a:rPr lang="en-US" dirty="0"/>
+              <a:t> </a:t>
+            </a:r>
+            <a:endParaRPr dirty="0"/>
           </a:p>
         </p:txBody>
       </p:sp>

--- a/presentation.pptx
+++ b/presentation.pptx
@@ -36,16 +36,17 @@
     <p:sldId id="284" r:id="rId30"/>
     <p:sldId id="285" r:id="rId31"/>
     <p:sldId id="286" r:id="rId32"/>
-    <p:sldId id="287" r:id="rId33"/>
-    <p:sldId id="288" r:id="rId34"/>
-    <p:sldId id="289" r:id="rId35"/>
-    <p:sldId id="290" r:id="rId36"/>
-    <p:sldId id="291" r:id="rId37"/>
-    <p:sldId id="292" r:id="rId38"/>
-    <p:sldId id="293" r:id="rId39"/>
-    <p:sldId id="294" r:id="rId40"/>
-    <p:sldId id="295" r:id="rId41"/>
-    <p:sldId id="296" r:id="rId42"/>
+    <p:sldId id="297" r:id="rId33"/>
+    <p:sldId id="287" r:id="rId34"/>
+    <p:sldId id="288" r:id="rId35"/>
+    <p:sldId id="289" r:id="rId36"/>
+    <p:sldId id="290" r:id="rId37"/>
+    <p:sldId id="291" r:id="rId38"/>
+    <p:sldId id="292" r:id="rId39"/>
+    <p:sldId id="293" r:id="rId40"/>
+    <p:sldId id="294" r:id="rId41"/>
+    <p:sldId id="295" r:id="rId42"/>
+    <p:sldId id="296" r:id="rId43"/>
   </p:sldIdLst>
   <p:sldSz cx="12192000" cy="6858000"/>
   <p:notesSz cx="6858000" cy="9144000"/>
@@ -342,7 +343,7 @@
           <a:p>
             <a:fld id="{5BCAD085-E8A6-8845-BD4E-CB4CCA059FC4}" type="datetimeFigureOut">
               <a:rPr lang="en-US" smtClean="0"/>
-              <a:t>4/17/2026</a:t>
+              <a:t>4/19/2026</a:t>
             </a:fld>
             <a:endParaRPr lang="en-US"/>
           </a:p>
@@ -510,7 +511,7 @@
           <a:p>
             <a:fld id="{5BCAD085-E8A6-8845-BD4E-CB4CCA059FC4}" type="datetimeFigureOut">
               <a:rPr lang="en-US" smtClean="0"/>
-              <a:t>4/17/2026</a:t>
+              <a:t>4/19/2026</a:t>
             </a:fld>
             <a:endParaRPr lang="en-US"/>
           </a:p>
@@ -688,7 +689,7 @@
           <a:p>
             <a:fld id="{5BCAD085-E8A6-8845-BD4E-CB4CCA059FC4}" type="datetimeFigureOut">
               <a:rPr lang="en-US" smtClean="0"/>
-              <a:t>4/17/2026</a:t>
+              <a:t>4/19/2026</a:t>
             </a:fld>
             <a:endParaRPr lang="en-US"/>
           </a:p>
@@ -856,7 +857,7 @@
           <a:p>
             <a:fld id="{5BCAD085-E8A6-8845-BD4E-CB4CCA059FC4}" type="datetimeFigureOut">
               <a:rPr lang="en-US" smtClean="0"/>
-              <a:t>4/17/2026</a:t>
+              <a:t>4/19/2026</a:t>
             </a:fld>
             <a:endParaRPr lang="en-US"/>
           </a:p>
@@ -1101,7 +1102,7 @@
           <a:p>
             <a:fld id="{5BCAD085-E8A6-8845-BD4E-CB4CCA059FC4}" type="datetimeFigureOut">
               <a:rPr lang="en-US" smtClean="0"/>
-              <a:t>4/17/2026</a:t>
+              <a:t>4/19/2026</a:t>
             </a:fld>
             <a:endParaRPr lang="en-US"/>
           </a:p>
@@ -1386,7 +1387,7 @@
           <a:p>
             <a:fld id="{5BCAD085-E8A6-8845-BD4E-CB4CCA059FC4}" type="datetimeFigureOut">
               <a:rPr lang="en-US" smtClean="0"/>
-              <a:t>4/17/2026</a:t>
+              <a:t>4/19/2026</a:t>
             </a:fld>
             <a:endParaRPr lang="en-US"/>
           </a:p>
@@ -1805,7 +1806,7 @@
           <a:p>
             <a:fld id="{5BCAD085-E8A6-8845-BD4E-CB4CCA059FC4}" type="datetimeFigureOut">
               <a:rPr lang="en-US" smtClean="0"/>
-              <a:t>4/17/2026</a:t>
+              <a:t>4/19/2026</a:t>
             </a:fld>
             <a:endParaRPr lang="en-US"/>
           </a:p>
@@ -1922,7 +1923,7 @@
           <a:p>
             <a:fld id="{5BCAD085-E8A6-8845-BD4E-CB4CCA059FC4}" type="datetimeFigureOut">
               <a:rPr lang="en-US" smtClean="0"/>
-              <a:t>4/17/2026</a:t>
+              <a:t>4/19/2026</a:t>
             </a:fld>
             <a:endParaRPr lang="en-US"/>
           </a:p>
@@ -2017,7 +2018,7 @@
           <a:p>
             <a:fld id="{5BCAD085-E8A6-8845-BD4E-CB4CCA059FC4}" type="datetimeFigureOut">
               <a:rPr lang="en-US" smtClean="0"/>
-              <a:t>4/17/2026</a:t>
+              <a:t>4/19/2026</a:t>
             </a:fld>
             <a:endParaRPr lang="en-US"/>
           </a:p>
@@ -2292,7 +2293,7 @@
           <a:p>
             <a:fld id="{5BCAD085-E8A6-8845-BD4E-CB4CCA059FC4}" type="datetimeFigureOut">
               <a:rPr lang="en-US" smtClean="0"/>
-              <a:t>4/17/2026</a:t>
+              <a:t>4/19/2026</a:t>
             </a:fld>
             <a:endParaRPr lang="en-US"/>
           </a:p>
@@ -2544,7 +2545,7 @@
           <a:p>
             <a:fld id="{5BCAD085-E8A6-8845-BD4E-CB4CCA059FC4}" type="datetimeFigureOut">
               <a:rPr lang="en-US" smtClean="0"/>
-              <a:t>4/17/2026</a:t>
+              <a:t>4/19/2026</a:t>
             </a:fld>
             <a:endParaRPr lang="en-US"/>
           </a:p>
@@ -2755,7 +2756,7 @@
           <a:p>
             <a:fld id="{5BCAD085-E8A6-8845-BD4E-CB4CCA059FC4}" type="datetimeFigureOut">
               <a:rPr lang="en-US" smtClean="0"/>
-              <a:t>4/17/2026</a:t>
+              <a:t>4/19/2026</a:t>
             </a:fld>
             <a:endParaRPr lang="en-US"/>
           </a:p>
@@ -14497,6 +14498,1265 @@
   <p:cSld>
     <p:spTree>
       <p:nvGrpSpPr>
+        <p:cNvPr id="1" name="">
+          <a:extLst>
+            <a:ext uri="{FF2B5EF4-FFF2-40B4-BE49-F238E27FC236}">
+              <a16:creationId xmlns:a16="http://schemas.microsoft.com/office/drawing/2014/main" id="{B9744801-7C06-36EC-E6FE-8E214F67CCC5}"/>
+            </a:ext>
+          </a:extLst>
+        </p:cNvPr>
+        <p:cNvGrpSpPr/>
+        <p:nvPr/>
+      </p:nvGrpSpPr>
+      <p:grpSpPr>
+        <a:xfrm>
+          <a:off x="0" y="0"/>
+          <a:ext cx="0" cy="0"/>
+          <a:chOff x="0" y="0"/>
+          <a:chExt cx="0" cy="0"/>
+        </a:xfrm>
+      </p:grpSpPr>
+      <p:sp>
+        <p:nvSpPr>
+          <p:cNvPr id="2" name="TextBox 1">
+            <a:extLst>
+              <a:ext uri="{FF2B5EF4-FFF2-40B4-BE49-F238E27FC236}">
+                <a16:creationId xmlns:a16="http://schemas.microsoft.com/office/drawing/2014/main" id="{9FBA26E5-6F10-3BFC-293F-9407BC34CDA6}"/>
+              </a:ext>
+            </a:extLst>
+          </p:cNvPr>
+          <p:cNvSpPr txBox="1"/>
+          <p:nvPr/>
+        </p:nvSpPr>
+        <p:spPr>
+          <a:xfrm>
+            <a:off x="822960" y="365760"/>
+            <a:ext cx="10058400" cy="523220"/>
+          </a:xfrm>
+          <a:prstGeom prst="rect">
+            <a:avLst/>
+          </a:prstGeom>
+          <a:noFill/>
+        </p:spPr>
+        <p:txBody>
+          <a:bodyPr wrap="square">
+            <a:spAutoFit/>
+          </a:bodyPr>
+          <a:lstStyle/>
+          <a:p>
+            <a:pPr algn="l">
+              <a:defRPr sz="2800" b="1">
+                <a:solidFill>
+                  <a:srgbClr val="1A1A1A"/>
+                </a:solidFill>
+                <a:latin typeface="Archivo"/>
+              </a:defRPr>
+            </a:pPr>
+            <a:r>
+              <a:rPr lang="en-US" dirty="0"/>
+              <a:t>The Matern Kernel</a:t>
+            </a:r>
+            <a:endParaRPr dirty="0"/>
+          </a:p>
+        </p:txBody>
+      </p:sp>
+      <p:sp>
+        <p:nvSpPr>
+          <p:cNvPr id="3" name="Rectangle 2">
+            <a:extLst>
+              <a:ext uri="{FF2B5EF4-FFF2-40B4-BE49-F238E27FC236}">
+                <a16:creationId xmlns:a16="http://schemas.microsoft.com/office/drawing/2014/main" id="{FCFB6F4B-4A12-EFF5-81C0-40F432176B78}"/>
+              </a:ext>
+            </a:extLst>
+          </p:cNvPr>
+          <p:cNvSpPr/>
+          <p:nvPr/>
+        </p:nvSpPr>
+        <p:spPr>
+          <a:xfrm>
+            <a:off x="822960" y="1097281"/>
+            <a:ext cx="10032040" cy="1741170"/>
+          </a:xfrm>
+          <a:prstGeom prst="rect">
+            <a:avLst/>
+          </a:prstGeom>
+          <a:solidFill>
+            <a:srgbClr val="1A1A1A"/>
+          </a:solidFill>
+          <a:ln>
+            <a:noFill/>
+          </a:ln>
+        </p:spPr>
+        <p:style>
+          <a:lnRef idx="1">
+            <a:schemeClr val="accent1"/>
+          </a:lnRef>
+          <a:fillRef idx="3">
+            <a:schemeClr val="accent1"/>
+          </a:fillRef>
+          <a:effectRef idx="2">
+            <a:schemeClr val="accent1"/>
+          </a:effectRef>
+          <a:fontRef idx="minor">
+            <a:schemeClr val="lt1"/>
+          </a:fontRef>
+        </p:style>
+        <p:txBody>
+          <a:bodyPr rtlCol="0" anchor="ctr"/>
+          <a:lstStyle/>
+          <a:p>
+            <a:pPr algn="ctr"/>
+            <a:endParaRPr/>
+          </a:p>
+        </p:txBody>
+      </p:sp>
+      <mc:AlternateContent xmlns:mc="http://schemas.openxmlformats.org/markup-compatibility/2006">
+        <mc:Choice xmlns:a14="http://schemas.microsoft.com/office/drawing/2010/main" Requires="a14">
+          <p:sp>
+            <p:nvSpPr>
+              <p:cNvPr id="5" name="TextBox 4">
+                <a:extLst>
+                  <a:ext uri="{FF2B5EF4-FFF2-40B4-BE49-F238E27FC236}">
+                    <a16:creationId xmlns:a16="http://schemas.microsoft.com/office/drawing/2014/main" id="{AE287E2E-54C2-C71F-1855-D7D216F54035}"/>
+                  </a:ext>
+                </a:extLst>
+              </p:cNvPr>
+              <p:cNvSpPr txBox="1"/>
+              <p:nvPr/>
+            </p:nvSpPr>
+            <p:spPr>
+              <a:xfrm>
+                <a:off x="822960" y="3347085"/>
+                <a:ext cx="6387465" cy="2062103"/>
+              </a:xfrm>
+              <a:prstGeom prst="rect">
+                <a:avLst/>
+              </a:prstGeom>
+              <a:noFill/>
+            </p:spPr>
+            <p:txBody>
+              <a:bodyPr wrap="square">
+                <a:spAutoFit/>
+              </a:bodyPr>
+              <a:lstStyle/>
+              <a:p>
+                <a:pPr marL="285750" indent="-285750" algn="l">
+                  <a:buFont typeface="Arial" panose="020B0604020202020204" pitchFamily="34" charset="0"/>
+                  <a:buChar char="•"/>
+                  <a:defRPr sz="1600" b="0">
+                    <a:solidFill>
+                      <a:srgbClr val="444444"/>
+                    </a:solidFill>
+                    <a:latin typeface="Nunito"/>
+                  </a:defRPr>
+                </a:pPr>
+                <a:r>
+                  <a:rPr lang="en-US" dirty="0"/>
+                  <a:t>A generalization of the </a:t>
+                </a:r>
+                <a:r>
+                  <a:rPr lang="en-US" b="1" dirty="0"/>
+                  <a:t>RBF</a:t>
+                </a:r>
+              </a:p>
+              <a:p>
+                <a:pPr marL="285750" indent="-285750" algn="l">
+                  <a:buFont typeface="Arial" panose="020B0604020202020204" pitchFamily="34" charset="0"/>
+                  <a:buChar char="•"/>
+                  <a:defRPr sz="1600" b="0">
+                    <a:solidFill>
+                      <a:srgbClr val="444444"/>
+                    </a:solidFill>
+                    <a:latin typeface="Nunito"/>
+                  </a:defRPr>
+                </a:pPr>
+                <a:r>
+                  <a:rPr lang="en-US" dirty="0"/>
+                  <a:t>Addition parameter </a:t>
+                </a:r>
+                <a14:m>
+                  <m:oMath xmlns:m="http://schemas.openxmlformats.org/officeDocument/2006/math">
+                    <m:r>
+                      <a:rPr lang="en-US" b="1" i="1" smtClean="0">
+                        <a:latin typeface="Cambria Math" panose="02040503050406030204" pitchFamily="18" charset="0"/>
+                        <a:ea typeface="Cambria Math" panose="02040503050406030204" pitchFamily="18" charset="0"/>
+                      </a:rPr>
+                      <m:t>𝝊</m:t>
+                    </m:r>
+                  </m:oMath>
+                </a14:m>
+                <a:r>
+                  <a:rPr lang="en-US" b="1" dirty="0"/>
+                  <a:t> </a:t>
+                </a:r>
+                <a:r>
+                  <a:rPr lang="en-US" dirty="0"/>
+                  <a:t>controlling the smoothness of the function</a:t>
+                </a:r>
+                <a:r>
+                  <a:rPr lang="en-US" b="1" dirty="0"/>
+                  <a:t>.</a:t>
+                </a:r>
+              </a:p>
+              <a:p>
+                <a:pPr marL="285750" indent="-285750" algn="l">
+                  <a:buFont typeface="Arial" panose="020B0604020202020204" pitchFamily="34" charset="0"/>
+                  <a:buChar char="•"/>
+                  <a:defRPr sz="1600" b="0">
+                    <a:solidFill>
+                      <a:srgbClr val="444444"/>
+                    </a:solidFill>
+                    <a:latin typeface="Nunito"/>
+                  </a:defRPr>
+                </a:pPr>
+                <a:r>
+                  <a:rPr lang="en-US" dirty="0"/>
+                  <a:t>At different values, it takes different forms:</a:t>
+                </a:r>
+              </a:p>
+              <a:p>
+                <a:pPr marL="742950" lvl="1" indent="-285750">
+                  <a:buFont typeface="Arial" panose="020B0604020202020204" pitchFamily="34" charset="0"/>
+                  <a:buChar char="•"/>
+                  <a:defRPr sz="1600" b="0">
+                    <a:solidFill>
+                      <a:srgbClr val="444444"/>
+                    </a:solidFill>
+                    <a:latin typeface="Nunito"/>
+                  </a:defRPr>
+                </a:pPr>
+                <a14:m>
+                  <m:oMath xmlns:m="http://schemas.openxmlformats.org/officeDocument/2006/math">
+                    <m:r>
+                      <a:rPr lang="en-US" sz="1600" i="1" smtClean="0"/>
+                      <m:t>𝜈</m:t>
+                    </m:r>
+                    <m:r>
+                      <a:rPr lang="en-US" sz="1600" i="1" smtClean="0"/>
+                      <m:t>→</m:t>
+                    </m:r>
+                    <m:r>
+                      <a:rPr lang="en-US" sz="1600" i="1" smtClean="0"/>
+                      <m:t>∞</m:t>
+                    </m:r>
+                  </m:oMath>
+                </a14:m>
+                <a:r>
+                  <a:rPr lang="en-US" sz="1600" dirty="0"/>
+                  <a:t>, the kernel becomes equivalent to the RBF kernel</a:t>
+                </a:r>
+              </a:p>
+              <a:p>
+                <a:pPr marL="742950" lvl="1" indent="-285750">
+                  <a:buFont typeface="Arial" panose="020B0604020202020204" pitchFamily="34" charset="0"/>
+                  <a:buChar char="•"/>
+                  <a:defRPr sz="1600" b="0">
+                    <a:solidFill>
+                      <a:srgbClr val="444444"/>
+                    </a:solidFill>
+                    <a:latin typeface="Nunito"/>
+                  </a:defRPr>
+                </a:pPr>
+                <a14:m>
+                  <m:oMath xmlns:m="http://schemas.openxmlformats.org/officeDocument/2006/math">
+                    <m:r>
+                      <a:rPr lang="en-US" i="1" dirty="0" smtClean="0">
+                        <a:latin typeface="Cambria Math" panose="02040503050406030204" pitchFamily="18" charset="0"/>
+                      </a:rPr>
+                      <m:t>𝜈</m:t>
+                    </m:r>
+                    <m:r>
+                      <a:rPr lang="en-US" i="1" dirty="0" smtClean="0">
+                        <a:latin typeface="Cambria Math" panose="02040503050406030204" pitchFamily="18" charset="0"/>
+                      </a:rPr>
+                      <m:t>= ½</m:t>
+                    </m:r>
+                  </m:oMath>
+                </a14:m>
+                <a:r>
+                  <a:rPr lang="en-US" dirty="0"/>
+                  <a:t>, the </a:t>
+                </a:r>
+                <a:r>
+                  <a:rPr lang="en-US" sz="1600" dirty="0"/>
+                  <a:t>kernel becomes identical to the absolute exponential kernel</a:t>
+                </a:r>
+              </a:p>
+              <a:p>
+                <a:pPr marL="742950" lvl="1" indent="-285750">
+                  <a:buFont typeface="Arial" panose="020B0604020202020204" pitchFamily="34" charset="0"/>
+                  <a:buChar char="•"/>
+                  <a:defRPr sz="1600" b="0">
+                    <a:solidFill>
+                      <a:srgbClr val="444444"/>
+                    </a:solidFill>
+                    <a:latin typeface="Nunito"/>
+                  </a:defRPr>
+                </a:pPr>
+                <a14:m>
+                  <m:oMath xmlns:m="http://schemas.openxmlformats.org/officeDocument/2006/math">
+                    <m:r>
+                      <a:rPr lang="en-US" i="1" dirty="0" smtClean="0">
+                        <a:latin typeface="Cambria Math" panose="02040503050406030204" pitchFamily="18" charset="0"/>
+                      </a:rPr>
+                      <m:t>𝜈</m:t>
+                    </m:r>
+                    <m:r>
+                      <a:rPr lang="en-US" i="1" dirty="0" smtClean="0">
+                        <a:latin typeface="Cambria Math" panose="02040503050406030204" pitchFamily="18" charset="0"/>
+                      </a:rPr>
+                      <m:t>=</m:t>
+                    </m:r>
+                    <m:r>
+                      <a:rPr lang="en-US" i="1" dirty="0" smtClean="0">
+                        <a:latin typeface="Cambria Math" panose="02040503050406030204" pitchFamily="18" charset="0"/>
+                      </a:rPr>
+                      <m:t>1</m:t>
+                    </m:r>
+                    <m:r>
+                      <a:rPr lang="en-US" i="1" dirty="0" smtClean="0">
+                        <a:latin typeface="Cambria Math" panose="02040503050406030204" pitchFamily="18" charset="0"/>
+                      </a:rPr>
+                      <m:t>.</m:t>
+                    </m:r>
+                    <m:r>
+                      <a:rPr lang="en-US" i="1" dirty="0" smtClean="0">
+                        <a:latin typeface="Cambria Math" panose="02040503050406030204" pitchFamily="18" charset="0"/>
+                      </a:rPr>
+                      <m:t>5</m:t>
+                    </m:r>
+                  </m:oMath>
+                </a14:m>
+                <a:r>
+                  <a:rPr lang="en-US" dirty="0"/>
+                  <a:t>, for </a:t>
+                </a:r>
+                <a:r>
+                  <a:rPr lang="en-US" sz="1600" dirty="0"/>
+                  <a:t>once differentiable functions</a:t>
+                </a:r>
+                <a:endParaRPr lang="en-US" dirty="0"/>
+              </a:p>
+              <a:p>
+                <a:pPr marL="742950" lvl="1" indent="-285750">
+                  <a:buFont typeface="Arial" panose="020B0604020202020204" pitchFamily="34" charset="0"/>
+                  <a:buChar char="•"/>
+                  <a:defRPr sz="1600" b="0">
+                    <a:solidFill>
+                      <a:srgbClr val="444444"/>
+                    </a:solidFill>
+                    <a:latin typeface="Nunito"/>
+                  </a:defRPr>
+                </a:pPr>
+                <a14:m>
+                  <m:oMath xmlns:m="http://schemas.openxmlformats.org/officeDocument/2006/math">
+                    <m:r>
+                      <a:rPr lang="en-US" i="1" dirty="0" smtClean="0">
+                        <a:latin typeface="Cambria Math" panose="02040503050406030204" pitchFamily="18" charset="0"/>
+                      </a:rPr>
+                      <m:t>𝜈</m:t>
+                    </m:r>
+                    <m:r>
+                      <a:rPr lang="en-US" i="1" dirty="0" smtClean="0">
+                        <a:latin typeface="Cambria Math" panose="02040503050406030204" pitchFamily="18" charset="0"/>
+                      </a:rPr>
+                      <m:t>=</m:t>
+                    </m:r>
+                    <m:r>
+                      <a:rPr lang="en-US" i="1" dirty="0" smtClean="0">
+                        <a:latin typeface="Cambria Math" panose="02040503050406030204" pitchFamily="18" charset="0"/>
+                      </a:rPr>
+                      <m:t>2</m:t>
+                    </m:r>
+                    <m:r>
+                      <a:rPr lang="en-US" i="1" dirty="0" smtClean="0">
+                        <a:latin typeface="Cambria Math" panose="02040503050406030204" pitchFamily="18" charset="0"/>
+                      </a:rPr>
+                      <m:t>.</m:t>
+                    </m:r>
+                    <m:r>
+                      <a:rPr lang="en-US" i="1" dirty="0" smtClean="0">
+                        <a:latin typeface="Cambria Math" panose="02040503050406030204" pitchFamily="18" charset="0"/>
+                      </a:rPr>
+                      <m:t>5</m:t>
+                    </m:r>
+                  </m:oMath>
+                </a14:m>
+                <a:r>
+                  <a:rPr lang="en-US" dirty="0"/>
+                  <a:t>, for </a:t>
+                </a:r>
+                <a:r>
+                  <a:rPr lang="en-US" sz="1600" dirty="0"/>
+                  <a:t>twice differentiable functions</a:t>
+                </a:r>
+                <a:endParaRPr lang="en-US" dirty="0"/>
+              </a:p>
+            </p:txBody>
+          </p:sp>
+        </mc:Choice>
+        <mc:Fallback>
+          <p:sp>
+            <p:nvSpPr>
+              <p:cNvPr id="5" name="TextBox 4">
+                <a:extLst>
+                  <a:ext uri="{FF2B5EF4-FFF2-40B4-BE49-F238E27FC236}">
+                    <a16:creationId xmlns:a16="http://schemas.microsoft.com/office/drawing/2014/main" id="{AE287E2E-54C2-C71F-1855-D7D216F54035}"/>
+                  </a:ext>
+                </a:extLst>
+              </p:cNvPr>
+              <p:cNvSpPr txBox="1">
+                <a:spLocks noRot="1" noChangeAspect="1" noMove="1" noResize="1" noEditPoints="1" noAdjustHandles="1" noChangeArrowheads="1" noChangeShapeType="1" noTextEdit="1"/>
+              </p:cNvSpPr>
+              <p:nvPr/>
+            </p:nvSpPr>
+            <p:spPr>
+              <a:xfrm>
+                <a:off x="822960" y="3347085"/>
+                <a:ext cx="6387465" cy="2062103"/>
+              </a:xfrm>
+              <a:prstGeom prst="rect">
+                <a:avLst/>
+              </a:prstGeom>
+              <a:blipFill>
+                <a:blip r:embed="rId2"/>
+                <a:stretch>
+                  <a:fillRect l="-382" t="-592" r="-286" b="-3254"/>
+                </a:stretch>
+              </a:blipFill>
+            </p:spPr>
+            <p:txBody>
+              <a:bodyPr/>
+              <a:lstStyle/>
+              <a:p>
+                <a:r>
+                  <a:rPr lang="en-US">
+                    <a:noFill/>
+                  </a:rPr>
+                  <a:t> </a:t>
+                </a:r>
+              </a:p>
+            </p:txBody>
+          </p:sp>
+        </mc:Fallback>
+      </mc:AlternateContent>
+      <p:sp>
+        <p:nvSpPr>
+          <p:cNvPr id="8" name="Rectangle 7">
+            <a:extLst>
+              <a:ext uri="{FF2B5EF4-FFF2-40B4-BE49-F238E27FC236}">
+                <a16:creationId xmlns:a16="http://schemas.microsoft.com/office/drawing/2014/main" id="{444DDFCA-4931-FB28-638D-138AFA48C3D3}"/>
+              </a:ext>
+            </a:extLst>
+          </p:cNvPr>
+          <p:cNvSpPr/>
+          <p:nvPr/>
+        </p:nvSpPr>
+        <p:spPr>
+          <a:xfrm>
+            <a:off x="822960" y="856845"/>
+            <a:ext cx="3657600" cy="38100"/>
+          </a:xfrm>
+          <a:prstGeom prst="rect">
+            <a:avLst/>
+          </a:prstGeom>
+          <a:solidFill>
+            <a:srgbClr val="1A1A1A"/>
+          </a:solidFill>
+          <a:ln>
+            <a:noFill/>
+          </a:ln>
+        </p:spPr>
+        <p:style>
+          <a:lnRef idx="1">
+            <a:schemeClr val="accent1"/>
+          </a:lnRef>
+          <a:fillRef idx="3">
+            <a:schemeClr val="accent1"/>
+          </a:fillRef>
+          <a:effectRef idx="2">
+            <a:schemeClr val="accent1"/>
+          </a:effectRef>
+          <a:fontRef idx="minor">
+            <a:schemeClr val="lt1"/>
+          </a:fontRef>
+        </p:style>
+        <p:txBody>
+          <a:bodyPr rtlCol="0" anchor="ctr"/>
+          <a:lstStyle/>
+          <a:p>
+            <a:pPr algn="ctr"/>
+            <a:endParaRPr/>
+          </a:p>
+        </p:txBody>
+      </p:sp>
+      <mc:AlternateContent xmlns:mc="http://schemas.openxmlformats.org/markup-compatibility/2006">
+        <mc:Choice xmlns:a14="http://schemas.microsoft.com/office/drawing/2010/main" Requires="a14">
+          <p:sp>
+            <p:nvSpPr>
+              <p:cNvPr id="9" name="TextBox 8">
+                <a:extLst>
+                  <a:ext uri="{FF2B5EF4-FFF2-40B4-BE49-F238E27FC236}">
+                    <a16:creationId xmlns:a16="http://schemas.microsoft.com/office/drawing/2014/main" id="{C7959E06-B7CA-9095-7BA9-4FEFDEB140FB}"/>
+                  </a:ext>
+                </a:extLst>
+              </p:cNvPr>
+              <p:cNvSpPr txBox="1"/>
+              <p:nvPr/>
+            </p:nvSpPr>
+            <p:spPr>
+              <a:xfrm>
+                <a:off x="1117731" y="1423652"/>
+                <a:ext cx="9000975" cy="748025"/>
+              </a:xfrm>
+              <a:prstGeom prst="rect">
+                <a:avLst/>
+              </a:prstGeom>
+              <a:noFill/>
+            </p:spPr>
+            <p:txBody>
+              <a:bodyPr wrap="square" lIns="0" tIns="0" rIns="0" bIns="0" rtlCol="0">
+                <a:spAutoFit/>
+              </a:bodyPr>
+              <a:lstStyle/>
+              <a:p>
+                <a14:m>
+                  <m:oMathPara xmlns:m="http://schemas.openxmlformats.org/officeDocument/2006/math">
+                    <m:oMathParaPr>
+                      <m:jc m:val="centerGroup"/>
+                    </m:oMathParaPr>
+                    <m:oMath xmlns:m="http://schemas.openxmlformats.org/officeDocument/2006/math">
+                      <m:r>
+                        <a:rPr lang="en-US" i="1" smtClean="0">
+                          <a:solidFill>
+                            <a:schemeClr val="bg1"/>
+                          </a:solidFill>
+                          <a:latin typeface="Cambria Math" panose="02040503050406030204" pitchFamily="18" charset="0"/>
+                        </a:rPr>
+                        <m:t>𝑘</m:t>
+                      </m:r>
+                      <m:d>
+                        <m:dPr>
+                          <m:ctrlPr>
+                            <a:rPr lang="en-US" i="1">
+                              <a:solidFill>
+                                <a:schemeClr val="bg1"/>
+                              </a:solidFill>
+                              <a:latin typeface="Cambria Math" panose="02040503050406030204" pitchFamily="18" charset="0"/>
+                            </a:rPr>
+                          </m:ctrlPr>
+                        </m:dPr>
+                        <m:e>
+                          <m:sSub>
+                            <m:sSubPr>
+                              <m:ctrlPr>
+                                <a:rPr lang="en-US" i="1">
+                                  <a:solidFill>
+                                    <a:schemeClr val="bg1"/>
+                                  </a:solidFill>
+                                  <a:latin typeface="Cambria Math" panose="02040503050406030204" pitchFamily="18" charset="0"/>
+                                </a:rPr>
+                              </m:ctrlPr>
+                            </m:sSubPr>
+                            <m:e>
+                              <m:r>
+                                <a:rPr lang="en-US" i="1">
+                                  <a:solidFill>
+                                    <a:schemeClr val="bg1"/>
+                                  </a:solidFill>
+                                  <a:latin typeface="Cambria Math" panose="02040503050406030204" pitchFamily="18" charset="0"/>
+                                </a:rPr>
+                                <m:t>𝑥</m:t>
+                              </m:r>
+                            </m:e>
+                            <m:sub>
+                              <m:r>
+                                <a:rPr lang="en-US" i="1">
+                                  <a:solidFill>
+                                    <a:schemeClr val="bg1"/>
+                                  </a:solidFill>
+                                  <a:latin typeface="Cambria Math" panose="02040503050406030204" pitchFamily="18" charset="0"/>
+                                </a:rPr>
+                                <m:t>𝑖</m:t>
+                              </m:r>
+                            </m:sub>
+                          </m:sSub>
+                          <m:r>
+                            <a:rPr lang="en-US" i="1">
+                              <a:solidFill>
+                                <a:schemeClr val="bg1"/>
+                              </a:solidFill>
+                              <a:latin typeface="Cambria Math" panose="02040503050406030204" pitchFamily="18" charset="0"/>
+                            </a:rPr>
+                            <m:t>,</m:t>
+                          </m:r>
+                          <m:sSub>
+                            <m:sSubPr>
+                              <m:ctrlPr>
+                                <a:rPr lang="en-US" i="1">
+                                  <a:solidFill>
+                                    <a:schemeClr val="bg1"/>
+                                  </a:solidFill>
+                                  <a:latin typeface="Cambria Math" panose="02040503050406030204" pitchFamily="18" charset="0"/>
+                                </a:rPr>
+                              </m:ctrlPr>
+                            </m:sSubPr>
+                            <m:e>
+                              <m:r>
+                                <a:rPr lang="en-US" i="1">
+                                  <a:solidFill>
+                                    <a:schemeClr val="bg1"/>
+                                  </a:solidFill>
+                                  <a:latin typeface="Cambria Math" panose="02040503050406030204" pitchFamily="18" charset="0"/>
+                                </a:rPr>
+                                <m:t>𝑥</m:t>
+                              </m:r>
+                            </m:e>
+                            <m:sub>
+                              <m:r>
+                                <a:rPr lang="en-US" i="1">
+                                  <a:solidFill>
+                                    <a:schemeClr val="bg1"/>
+                                  </a:solidFill>
+                                  <a:latin typeface="Cambria Math" panose="02040503050406030204" pitchFamily="18" charset="0"/>
+                                </a:rPr>
+                                <m:t>𝑗</m:t>
+                              </m:r>
+                            </m:sub>
+                          </m:sSub>
+                        </m:e>
+                      </m:d>
+                      <m:r>
+                        <a:rPr lang="en-US" i="1">
+                          <a:solidFill>
+                            <a:schemeClr val="bg1"/>
+                          </a:solidFill>
+                          <a:latin typeface="Cambria Math" panose="02040503050406030204" pitchFamily="18" charset="0"/>
+                        </a:rPr>
+                        <m:t>=</m:t>
+                      </m:r>
+                      <m:f>
+                        <m:fPr>
+                          <m:ctrlPr>
+                            <a:rPr lang="en-US" i="1">
+                              <a:solidFill>
+                                <a:schemeClr val="bg1"/>
+                              </a:solidFill>
+                              <a:latin typeface="Cambria Math" panose="02040503050406030204" pitchFamily="18" charset="0"/>
+                            </a:rPr>
+                          </m:ctrlPr>
+                        </m:fPr>
+                        <m:num>
+                          <m:r>
+                            <a:rPr lang="en-US" i="1">
+                              <a:solidFill>
+                                <a:schemeClr val="bg1"/>
+                              </a:solidFill>
+                              <a:latin typeface="Cambria Math" panose="02040503050406030204" pitchFamily="18" charset="0"/>
+                            </a:rPr>
+                            <m:t>1</m:t>
+                          </m:r>
+                        </m:num>
+                        <m:den>
+                          <m:r>
+                            <m:rPr>
+                              <m:sty m:val="p"/>
+                            </m:rPr>
+                            <a:rPr lang="en-US" i="0">
+                              <a:solidFill>
+                                <a:schemeClr val="bg1"/>
+                              </a:solidFill>
+                              <a:latin typeface="Cambria Math" panose="02040503050406030204" pitchFamily="18" charset="0"/>
+                            </a:rPr>
+                            <m:t>Γ</m:t>
+                          </m:r>
+                          <m:d>
+                            <m:dPr>
+                              <m:ctrlPr>
+                                <a:rPr lang="en-US" i="1">
+                                  <a:solidFill>
+                                    <a:schemeClr val="bg1"/>
+                                  </a:solidFill>
+                                  <a:latin typeface="Cambria Math" panose="02040503050406030204" pitchFamily="18" charset="0"/>
+                                </a:rPr>
+                              </m:ctrlPr>
+                            </m:dPr>
+                            <m:e>
+                              <m:r>
+                                <a:rPr lang="en-US" i="1">
+                                  <a:solidFill>
+                                    <a:schemeClr val="bg1"/>
+                                  </a:solidFill>
+                                  <a:latin typeface="Cambria Math" panose="02040503050406030204" pitchFamily="18" charset="0"/>
+                                </a:rPr>
+                                <m:t>𝜈</m:t>
+                              </m:r>
+                            </m:e>
+                          </m:d>
+                          <m:sSup>
+                            <m:sSupPr>
+                              <m:ctrlPr>
+                                <a:rPr lang="en-US" i="1">
+                                  <a:solidFill>
+                                    <a:schemeClr val="bg1"/>
+                                  </a:solidFill>
+                                  <a:latin typeface="Cambria Math" panose="02040503050406030204" pitchFamily="18" charset="0"/>
+                                </a:rPr>
+                              </m:ctrlPr>
+                            </m:sSupPr>
+                            <m:e>
+                              <m:r>
+                                <a:rPr lang="en-US" i="1">
+                                  <a:solidFill>
+                                    <a:schemeClr val="bg1"/>
+                                  </a:solidFill>
+                                  <a:latin typeface="Cambria Math" panose="02040503050406030204" pitchFamily="18" charset="0"/>
+                                </a:rPr>
+                                <m:t>2</m:t>
+                              </m:r>
+                            </m:e>
+                            <m:sup>
+                              <m:r>
+                                <a:rPr lang="en-US" i="1">
+                                  <a:solidFill>
+                                    <a:schemeClr val="bg1"/>
+                                  </a:solidFill>
+                                  <a:latin typeface="Cambria Math" panose="02040503050406030204" pitchFamily="18" charset="0"/>
+                                </a:rPr>
+                                <m:t>𝜈</m:t>
+                              </m:r>
+                              <m:r>
+                                <a:rPr lang="en-US" i="1">
+                                  <a:solidFill>
+                                    <a:schemeClr val="bg1"/>
+                                  </a:solidFill>
+                                  <a:latin typeface="Cambria Math" panose="02040503050406030204" pitchFamily="18" charset="0"/>
+                                </a:rPr>
+                                <m:t>−</m:t>
+                              </m:r>
+                              <m:r>
+                                <a:rPr lang="en-US" i="1">
+                                  <a:solidFill>
+                                    <a:schemeClr val="bg1"/>
+                                  </a:solidFill>
+                                  <a:latin typeface="Cambria Math" panose="02040503050406030204" pitchFamily="18" charset="0"/>
+                                </a:rPr>
+                                <m:t>1</m:t>
+                              </m:r>
+                            </m:sup>
+                          </m:sSup>
+                        </m:den>
+                      </m:f>
+                      <m:sSup>
+                        <m:sSupPr>
+                          <m:ctrlPr>
+                            <a:rPr lang="en-US" i="1">
+                              <a:solidFill>
+                                <a:schemeClr val="bg1"/>
+                              </a:solidFill>
+                              <a:latin typeface="Cambria Math" panose="02040503050406030204" pitchFamily="18" charset="0"/>
+                            </a:rPr>
+                          </m:ctrlPr>
+                        </m:sSupPr>
+                        <m:e>
+                          <m:d>
+                            <m:dPr>
+                              <m:ctrlPr>
+                                <a:rPr lang="en-US" i="1">
+                                  <a:solidFill>
+                                    <a:schemeClr val="bg1"/>
+                                  </a:solidFill>
+                                  <a:latin typeface="Cambria Math" panose="02040503050406030204" pitchFamily="18" charset="0"/>
+                                </a:rPr>
+                              </m:ctrlPr>
+                            </m:dPr>
+                            <m:e>
+                              <m:f>
+                                <m:fPr>
+                                  <m:ctrlPr>
+                                    <a:rPr lang="en-US" i="1">
+                                      <a:solidFill>
+                                        <a:schemeClr val="bg1"/>
+                                      </a:solidFill>
+                                      <a:latin typeface="Cambria Math" panose="02040503050406030204" pitchFamily="18" charset="0"/>
+                                    </a:rPr>
+                                  </m:ctrlPr>
+                                </m:fPr>
+                                <m:num>
+                                  <m:rad>
+                                    <m:radPr>
+                                      <m:degHide m:val="on"/>
+                                      <m:ctrlPr>
+                                        <a:rPr lang="en-US" i="1">
+                                          <a:solidFill>
+                                            <a:schemeClr val="bg1"/>
+                                          </a:solidFill>
+                                          <a:latin typeface="Cambria Math" panose="02040503050406030204" pitchFamily="18" charset="0"/>
+                                        </a:rPr>
+                                      </m:ctrlPr>
+                                    </m:radPr>
+                                    <m:deg/>
+                                    <m:e>
+                                      <m:r>
+                                        <a:rPr lang="en-US" i="1">
+                                          <a:solidFill>
+                                            <a:schemeClr val="bg1"/>
+                                          </a:solidFill>
+                                          <a:latin typeface="Cambria Math" panose="02040503050406030204" pitchFamily="18" charset="0"/>
+                                        </a:rPr>
+                                        <m:t>2</m:t>
+                                      </m:r>
+                                      <m:r>
+                                        <a:rPr lang="en-US" i="1">
+                                          <a:solidFill>
+                                            <a:schemeClr val="bg1"/>
+                                          </a:solidFill>
+                                          <a:latin typeface="Cambria Math" panose="02040503050406030204" pitchFamily="18" charset="0"/>
+                                        </a:rPr>
+                                        <m:t>𝜈</m:t>
+                                      </m:r>
+                                    </m:e>
+                                  </m:rad>
+                                </m:num>
+                                <m:den>
+                                  <m:r>
+                                    <a:rPr lang="en-US" i="1">
+                                      <a:solidFill>
+                                        <a:schemeClr val="bg1"/>
+                                      </a:solidFill>
+                                      <a:latin typeface="Cambria Math" panose="02040503050406030204" pitchFamily="18" charset="0"/>
+                                    </a:rPr>
+                                    <m:t>𝑙</m:t>
+                                  </m:r>
+                                </m:den>
+                              </m:f>
+                              <m:r>
+                                <a:rPr lang="en-US" i="1">
+                                  <a:solidFill>
+                                    <a:schemeClr val="bg1"/>
+                                  </a:solidFill>
+                                  <a:latin typeface="Cambria Math" panose="02040503050406030204" pitchFamily="18" charset="0"/>
+                                </a:rPr>
+                                <m:t>𝑑</m:t>
+                              </m:r>
+                              <m:d>
+                                <m:dPr>
+                                  <m:ctrlPr>
+                                    <a:rPr lang="en-US" i="1">
+                                      <a:solidFill>
+                                        <a:schemeClr val="bg1"/>
+                                      </a:solidFill>
+                                      <a:latin typeface="Cambria Math" panose="02040503050406030204" pitchFamily="18" charset="0"/>
+                                    </a:rPr>
+                                  </m:ctrlPr>
+                                </m:dPr>
+                                <m:e>
+                                  <m:sSub>
+                                    <m:sSubPr>
+                                      <m:ctrlPr>
+                                        <a:rPr lang="en-US" i="1">
+                                          <a:solidFill>
+                                            <a:schemeClr val="bg1"/>
+                                          </a:solidFill>
+                                          <a:latin typeface="Cambria Math" panose="02040503050406030204" pitchFamily="18" charset="0"/>
+                                        </a:rPr>
+                                      </m:ctrlPr>
+                                    </m:sSubPr>
+                                    <m:e>
+                                      <m:r>
+                                        <a:rPr lang="en-US" i="1">
+                                          <a:solidFill>
+                                            <a:schemeClr val="bg1"/>
+                                          </a:solidFill>
+                                          <a:latin typeface="Cambria Math" panose="02040503050406030204" pitchFamily="18" charset="0"/>
+                                        </a:rPr>
+                                        <m:t>𝑥</m:t>
+                                      </m:r>
+                                    </m:e>
+                                    <m:sub>
+                                      <m:r>
+                                        <a:rPr lang="en-US" i="1">
+                                          <a:solidFill>
+                                            <a:schemeClr val="bg1"/>
+                                          </a:solidFill>
+                                          <a:latin typeface="Cambria Math" panose="02040503050406030204" pitchFamily="18" charset="0"/>
+                                        </a:rPr>
+                                        <m:t>𝑖</m:t>
+                                      </m:r>
+                                    </m:sub>
+                                  </m:sSub>
+                                  <m:r>
+                                    <a:rPr lang="en-US" i="1">
+                                      <a:solidFill>
+                                        <a:schemeClr val="bg1"/>
+                                      </a:solidFill>
+                                      <a:latin typeface="Cambria Math" panose="02040503050406030204" pitchFamily="18" charset="0"/>
+                                    </a:rPr>
+                                    <m:t>,</m:t>
+                                  </m:r>
+                                  <m:sSub>
+                                    <m:sSubPr>
+                                      <m:ctrlPr>
+                                        <a:rPr lang="en-US" i="1">
+                                          <a:solidFill>
+                                            <a:schemeClr val="bg1"/>
+                                          </a:solidFill>
+                                          <a:latin typeface="Cambria Math" panose="02040503050406030204" pitchFamily="18" charset="0"/>
+                                        </a:rPr>
+                                      </m:ctrlPr>
+                                    </m:sSubPr>
+                                    <m:e>
+                                      <m:r>
+                                        <a:rPr lang="en-US" i="1">
+                                          <a:solidFill>
+                                            <a:schemeClr val="bg1"/>
+                                          </a:solidFill>
+                                          <a:latin typeface="Cambria Math" panose="02040503050406030204" pitchFamily="18" charset="0"/>
+                                        </a:rPr>
+                                        <m:t>𝑥</m:t>
+                                      </m:r>
+                                    </m:e>
+                                    <m:sub>
+                                      <m:r>
+                                        <a:rPr lang="en-US" i="1">
+                                          <a:solidFill>
+                                            <a:schemeClr val="bg1"/>
+                                          </a:solidFill>
+                                          <a:latin typeface="Cambria Math" panose="02040503050406030204" pitchFamily="18" charset="0"/>
+                                        </a:rPr>
+                                        <m:t>𝑗</m:t>
+                                      </m:r>
+                                    </m:sub>
+                                  </m:sSub>
+                                </m:e>
+                              </m:d>
+                            </m:e>
+                          </m:d>
+                        </m:e>
+                        <m:sup>
+                          <m:r>
+                            <a:rPr lang="en-US" i="1">
+                              <a:solidFill>
+                                <a:schemeClr val="bg1"/>
+                              </a:solidFill>
+                              <a:latin typeface="Cambria Math" panose="02040503050406030204" pitchFamily="18" charset="0"/>
+                            </a:rPr>
+                            <m:t>𝜈</m:t>
+                          </m:r>
+                        </m:sup>
+                      </m:sSup>
+                      <m:sSub>
+                        <m:sSubPr>
+                          <m:ctrlPr>
+                            <a:rPr lang="en-US" i="1">
+                              <a:solidFill>
+                                <a:schemeClr val="bg1"/>
+                              </a:solidFill>
+                              <a:latin typeface="Cambria Math" panose="02040503050406030204" pitchFamily="18" charset="0"/>
+                            </a:rPr>
+                          </m:ctrlPr>
+                        </m:sSubPr>
+                        <m:e>
+                          <m:r>
+                            <a:rPr lang="en-US" i="1">
+                              <a:solidFill>
+                                <a:schemeClr val="bg1"/>
+                              </a:solidFill>
+                              <a:latin typeface="Cambria Math" panose="02040503050406030204" pitchFamily="18" charset="0"/>
+                            </a:rPr>
+                            <m:t>𝐾</m:t>
+                          </m:r>
+                        </m:e>
+                        <m:sub>
+                          <m:r>
+                            <a:rPr lang="en-US" i="1">
+                              <a:solidFill>
+                                <a:schemeClr val="bg1"/>
+                              </a:solidFill>
+                              <a:latin typeface="Cambria Math" panose="02040503050406030204" pitchFamily="18" charset="0"/>
+                            </a:rPr>
+                            <m:t>𝜈</m:t>
+                          </m:r>
+                        </m:sub>
+                      </m:sSub>
+                      <m:d>
+                        <m:dPr>
+                          <m:ctrlPr>
+                            <a:rPr lang="en-US" i="1">
+                              <a:solidFill>
+                                <a:schemeClr val="bg1"/>
+                              </a:solidFill>
+                              <a:latin typeface="Cambria Math" panose="02040503050406030204" pitchFamily="18" charset="0"/>
+                            </a:rPr>
+                          </m:ctrlPr>
+                        </m:dPr>
+                        <m:e>
+                          <m:f>
+                            <m:fPr>
+                              <m:ctrlPr>
+                                <a:rPr lang="en-US" i="1">
+                                  <a:solidFill>
+                                    <a:schemeClr val="bg1"/>
+                                  </a:solidFill>
+                                  <a:latin typeface="Cambria Math" panose="02040503050406030204" pitchFamily="18" charset="0"/>
+                                </a:rPr>
+                              </m:ctrlPr>
+                            </m:fPr>
+                            <m:num>
+                              <m:rad>
+                                <m:radPr>
+                                  <m:degHide m:val="on"/>
+                                  <m:ctrlPr>
+                                    <a:rPr lang="en-US" i="1">
+                                      <a:solidFill>
+                                        <a:schemeClr val="bg1"/>
+                                      </a:solidFill>
+                                      <a:latin typeface="Cambria Math" panose="02040503050406030204" pitchFamily="18" charset="0"/>
+                                    </a:rPr>
+                                  </m:ctrlPr>
+                                </m:radPr>
+                                <m:deg/>
+                                <m:e>
+                                  <m:r>
+                                    <a:rPr lang="en-US" i="1">
+                                      <a:solidFill>
+                                        <a:schemeClr val="bg1"/>
+                                      </a:solidFill>
+                                      <a:latin typeface="Cambria Math" panose="02040503050406030204" pitchFamily="18" charset="0"/>
+                                    </a:rPr>
+                                    <m:t>2</m:t>
+                                  </m:r>
+                                  <m:r>
+                                    <a:rPr lang="en-US" i="1">
+                                      <a:solidFill>
+                                        <a:schemeClr val="bg1"/>
+                                      </a:solidFill>
+                                      <a:latin typeface="Cambria Math" panose="02040503050406030204" pitchFamily="18" charset="0"/>
+                                    </a:rPr>
+                                    <m:t>𝜈</m:t>
+                                  </m:r>
+                                </m:e>
+                              </m:rad>
+                            </m:num>
+                            <m:den>
+                              <m:r>
+                                <a:rPr lang="en-US" i="1">
+                                  <a:solidFill>
+                                    <a:schemeClr val="bg1"/>
+                                  </a:solidFill>
+                                  <a:latin typeface="Cambria Math" panose="02040503050406030204" pitchFamily="18" charset="0"/>
+                                </a:rPr>
+                                <m:t>𝑙</m:t>
+                              </m:r>
+                            </m:den>
+                          </m:f>
+                          <m:r>
+                            <a:rPr lang="en-US" i="1">
+                              <a:solidFill>
+                                <a:schemeClr val="bg1"/>
+                              </a:solidFill>
+                              <a:latin typeface="Cambria Math" panose="02040503050406030204" pitchFamily="18" charset="0"/>
+                            </a:rPr>
+                            <m:t>𝑑</m:t>
+                          </m:r>
+                          <m:d>
+                            <m:dPr>
+                              <m:ctrlPr>
+                                <a:rPr lang="en-US" i="1">
+                                  <a:solidFill>
+                                    <a:schemeClr val="bg1"/>
+                                  </a:solidFill>
+                                  <a:latin typeface="Cambria Math" panose="02040503050406030204" pitchFamily="18" charset="0"/>
+                                </a:rPr>
+                              </m:ctrlPr>
+                            </m:dPr>
+                            <m:e>
+                              <m:sSub>
+                                <m:sSubPr>
+                                  <m:ctrlPr>
+                                    <a:rPr lang="en-US" i="1">
+                                      <a:solidFill>
+                                        <a:schemeClr val="bg1"/>
+                                      </a:solidFill>
+                                      <a:latin typeface="Cambria Math" panose="02040503050406030204" pitchFamily="18" charset="0"/>
+                                    </a:rPr>
+                                  </m:ctrlPr>
+                                </m:sSubPr>
+                                <m:e>
+                                  <m:r>
+                                    <a:rPr lang="en-US" i="1">
+                                      <a:solidFill>
+                                        <a:schemeClr val="bg1"/>
+                                      </a:solidFill>
+                                      <a:latin typeface="Cambria Math" panose="02040503050406030204" pitchFamily="18" charset="0"/>
+                                    </a:rPr>
+                                    <m:t>𝑥</m:t>
+                                  </m:r>
+                                </m:e>
+                                <m:sub>
+                                  <m:r>
+                                    <a:rPr lang="en-US" i="1">
+                                      <a:solidFill>
+                                        <a:schemeClr val="bg1"/>
+                                      </a:solidFill>
+                                      <a:latin typeface="Cambria Math" panose="02040503050406030204" pitchFamily="18" charset="0"/>
+                                    </a:rPr>
+                                    <m:t>𝑖</m:t>
+                                  </m:r>
+                                </m:sub>
+                              </m:sSub>
+                              <m:r>
+                                <a:rPr lang="en-US" i="1">
+                                  <a:solidFill>
+                                    <a:schemeClr val="bg1"/>
+                                  </a:solidFill>
+                                  <a:latin typeface="Cambria Math" panose="02040503050406030204" pitchFamily="18" charset="0"/>
+                                </a:rPr>
+                                <m:t>,</m:t>
+                              </m:r>
+                              <m:sSub>
+                                <m:sSubPr>
+                                  <m:ctrlPr>
+                                    <a:rPr lang="en-US" i="1">
+                                      <a:solidFill>
+                                        <a:schemeClr val="bg1"/>
+                                      </a:solidFill>
+                                      <a:latin typeface="Cambria Math" panose="02040503050406030204" pitchFamily="18" charset="0"/>
+                                    </a:rPr>
+                                  </m:ctrlPr>
+                                </m:sSubPr>
+                                <m:e>
+                                  <m:r>
+                                    <a:rPr lang="en-US" i="1">
+                                      <a:solidFill>
+                                        <a:schemeClr val="bg1"/>
+                                      </a:solidFill>
+                                      <a:latin typeface="Cambria Math" panose="02040503050406030204" pitchFamily="18" charset="0"/>
+                                    </a:rPr>
+                                    <m:t>𝑥</m:t>
+                                  </m:r>
+                                </m:e>
+                                <m:sub>
+                                  <m:r>
+                                    <a:rPr lang="en-US" i="1">
+                                      <a:solidFill>
+                                        <a:schemeClr val="bg1"/>
+                                      </a:solidFill>
+                                      <a:latin typeface="Cambria Math" panose="02040503050406030204" pitchFamily="18" charset="0"/>
+                                    </a:rPr>
+                                    <m:t>𝑗</m:t>
+                                  </m:r>
+                                </m:sub>
+                              </m:sSub>
+                            </m:e>
+                          </m:d>
+                        </m:e>
+                      </m:d>
+                    </m:oMath>
+                  </m:oMathPara>
+                </a14:m>
+                <a:endParaRPr lang="en-US" dirty="0">
+                  <a:solidFill>
+                    <a:schemeClr val="bg1"/>
+                  </a:solidFill>
+                </a:endParaRPr>
+              </a:p>
+            </p:txBody>
+          </p:sp>
+        </mc:Choice>
+        <mc:Fallback>
+          <p:sp>
+            <p:nvSpPr>
+              <p:cNvPr id="9" name="TextBox 8">
+                <a:extLst>
+                  <a:ext uri="{FF2B5EF4-FFF2-40B4-BE49-F238E27FC236}">
+                    <a16:creationId xmlns:a16="http://schemas.microsoft.com/office/drawing/2014/main" id="{C7959E06-B7CA-9095-7BA9-4FEFDEB140FB}"/>
+                  </a:ext>
+                </a:extLst>
+              </p:cNvPr>
+              <p:cNvSpPr txBox="1">
+                <a:spLocks noRot="1" noChangeAspect="1" noMove="1" noResize="1" noEditPoints="1" noAdjustHandles="1" noChangeArrowheads="1" noChangeShapeType="1" noTextEdit="1"/>
+              </p:cNvSpPr>
+              <p:nvPr/>
+            </p:nvSpPr>
+            <p:spPr>
+              <a:xfrm>
+                <a:off x="1117731" y="1423652"/>
+                <a:ext cx="9000975" cy="748025"/>
+              </a:xfrm>
+              <a:prstGeom prst="rect">
+                <a:avLst/>
+              </a:prstGeom>
+              <a:blipFill>
+                <a:blip r:embed="rId3"/>
+                <a:stretch>
+                  <a:fillRect/>
+                </a:stretch>
+              </a:blipFill>
+            </p:spPr>
+            <p:txBody>
+              <a:bodyPr/>
+              <a:lstStyle/>
+              <a:p>
+                <a:r>
+                  <a:rPr lang="en-US">
+                    <a:noFill/>
+                  </a:rPr>
+                  <a:t> </a:t>
+                </a:r>
+              </a:p>
+            </p:txBody>
+          </p:sp>
+        </mc:Fallback>
+      </mc:AlternateContent>
+      <p:pic>
+        <p:nvPicPr>
+          <p:cNvPr id="11" name="Picture 10">
+            <a:extLst>
+              <a:ext uri="{FF2B5EF4-FFF2-40B4-BE49-F238E27FC236}">
+                <a16:creationId xmlns:a16="http://schemas.microsoft.com/office/drawing/2014/main" id="{A46E8E23-90E8-7432-4E04-FDE6E5060104}"/>
+              </a:ext>
+            </a:extLst>
+          </p:cNvPr>
+          <p:cNvPicPr>
+            <a:picLocks noChangeAspect="1"/>
+          </p:cNvPicPr>
+          <p:nvPr/>
+        </p:nvPicPr>
+        <p:blipFill>
+          <a:blip r:embed="rId4"/>
+          <a:stretch>
+            <a:fillRect/>
+          </a:stretch>
+        </p:blipFill>
+        <p:spPr>
+          <a:xfrm>
+            <a:off x="7357715" y="3040787"/>
+            <a:ext cx="3893224" cy="3491247"/>
+          </a:xfrm>
+          <a:prstGeom prst="rect">
+            <a:avLst/>
+          </a:prstGeom>
+        </p:spPr>
+      </p:pic>
+    </p:spTree>
+    <p:extLst>
+      <p:ext uri="{BB962C8B-B14F-4D97-AF65-F5344CB8AC3E}">
+        <p14:creationId xmlns:p14="http://schemas.microsoft.com/office/powerpoint/2010/main" val="2269992758"/>
+      </p:ext>
+    </p:extLst>
+  </p:cSld>
+  <p:clrMapOvr>
+    <a:masterClrMapping/>
+  </p:clrMapOvr>
+</p:sld>
+</file>
+
+<file path=ppt/slides/slide33.xml><?xml version="1.0" encoding="utf-8"?>
+<p:sld xmlns:a="http://schemas.openxmlformats.org/drawingml/2006/main" xmlns:r="http://schemas.openxmlformats.org/officeDocument/2006/relationships" xmlns:p="http://schemas.openxmlformats.org/presentationml/2006/main">
+  <p:cSld>
+    <p:spTree>
+      <p:nvGrpSpPr>
         <p:cNvPr id="1" name=""/>
         <p:cNvGrpSpPr/>
         <p:nvPr/>
@@ -15502,1117 +16762,6 @@
 </p:sld>
 </file>
 
-<file path=ppt/slides/slide33.xml><?xml version="1.0" encoding="utf-8"?>
-<p:sld xmlns:a="http://schemas.openxmlformats.org/drawingml/2006/main" xmlns:r="http://schemas.openxmlformats.org/officeDocument/2006/relationships" xmlns:p="http://schemas.openxmlformats.org/presentationml/2006/main">
-  <p:cSld>
-    <p:spTree>
-      <p:nvGrpSpPr>
-        <p:cNvPr id="1" name=""/>
-        <p:cNvGrpSpPr/>
-        <p:nvPr/>
-      </p:nvGrpSpPr>
-      <p:grpSpPr>
-        <a:xfrm>
-          <a:off x="0" y="0"/>
-          <a:ext cx="0" cy="0"/>
-          <a:chOff x="0" y="0"/>
-          <a:chExt cx="0" cy="0"/>
-        </a:xfrm>
-      </p:grpSpPr>
-      <p:sp>
-        <p:nvSpPr>
-          <p:cNvPr id="2" name="TextBox 1"/>
-          <p:cNvSpPr txBox="1"/>
-          <p:nvPr/>
-        </p:nvSpPr>
-        <p:spPr>
-          <a:xfrm>
-            <a:off x="822960" y="457200"/>
-            <a:ext cx="10058400" cy="640080"/>
-          </a:xfrm>
-          <a:prstGeom prst="rect">
-            <a:avLst/>
-          </a:prstGeom>
-          <a:noFill/>
-        </p:spPr>
-        <p:txBody>
-          <a:bodyPr wrap="square">
-            <a:spAutoFit/>
-          </a:bodyPr>
-          <a:lstStyle/>
-          <a:p>
-            <a:pPr algn="l">
-              <a:defRPr sz="2800" b="1">
-                <a:solidFill>
-                  <a:srgbClr val="1A1A1A"/>
-                </a:solidFill>
-                <a:latin typeface="Archivo"/>
-              </a:defRPr>
-            </a:pPr>
-            <a:r>
-              <a:t>Step 4: The Complete BO Loop</a:t>
-            </a:r>
-          </a:p>
-        </p:txBody>
-      </p:sp>
-      <p:sp>
-        <p:nvSpPr>
-          <p:cNvPr id="3" name="Rectangle 2"/>
-          <p:cNvSpPr/>
-          <p:nvPr/>
-        </p:nvSpPr>
-        <p:spPr>
-          <a:xfrm>
-            <a:off x="822960" y="960120"/>
-            <a:ext cx="3657600" cy="38100"/>
-          </a:xfrm>
-          <a:prstGeom prst="rect">
-            <a:avLst/>
-          </a:prstGeom>
-          <a:solidFill>
-            <a:srgbClr val="1A1A1A"/>
-          </a:solidFill>
-          <a:ln>
-            <a:noFill/>
-          </a:ln>
-        </p:spPr>
-        <p:style>
-          <a:lnRef idx="1">
-            <a:schemeClr val="accent1"/>
-          </a:lnRef>
-          <a:fillRef idx="3">
-            <a:schemeClr val="accent1"/>
-          </a:fillRef>
-          <a:effectRef idx="2">
-            <a:schemeClr val="accent1"/>
-          </a:effectRef>
-          <a:fontRef idx="minor">
-            <a:schemeClr val="lt1"/>
-          </a:fontRef>
-        </p:style>
-        <p:txBody>
-          <a:bodyPr rtlCol="0" anchor="ctr"/>
-          <a:lstStyle/>
-          <a:p>
-            <a:pPr algn="ctr"/>
-            <a:endParaRPr/>
-          </a:p>
-        </p:txBody>
-      </p:sp>
-      <p:sp>
-        <p:nvSpPr>
-          <p:cNvPr id="13" name="TextBox 12"/>
-          <p:cNvSpPr txBox="1"/>
-          <p:nvPr/>
-        </p:nvSpPr>
-        <p:spPr>
-          <a:xfrm>
-            <a:off x="822960" y="3527431"/>
-            <a:ext cx="9601200" cy="646331"/>
-          </a:xfrm>
-          <a:prstGeom prst="rect">
-            <a:avLst/>
-          </a:prstGeom>
-          <a:noFill/>
-        </p:spPr>
-        <p:txBody>
-          <a:bodyPr wrap="square">
-            <a:spAutoFit/>
-          </a:bodyPr>
-          <a:lstStyle/>
-          <a:p>
-            <a:pPr algn="l">
-              <a:spcAft>
-                <a:spcPts val="400"/>
-              </a:spcAft>
-              <a:defRPr sz="1800" b="0">
-                <a:solidFill>
-                  <a:srgbClr val="444444"/>
-                </a:solidFill>
-                <a:latin typeface="Nunito"/>
-              </a:defRPr>
-            </a:pPr>
-            <a:r>
-              <a:rPr dirty="0"/>
-              <a:t>Each iteration maps directly to steps 2a–2e of the pseudocode. The entire BO engine is under 10 lines of Python.</a:t>
-            </a:r>
-          </a:p>
-        </p:txBody>
-      </p:sp>
-      <p:sp>
-        <p:nvSpPr>
-          <p:cNvPr id="14" name="Rectangle 13"/>
-          <p:cNvSpPr/>
-          <p:nvPr/>
-        </p:nvSpPr>
-        <p:spPr>
-          <a:xfrm>
-            <a:off x="822960" y="4902014"/>
-            <a:ext cx="50800" cy="457200"/>
-          </a:xfrm>
-          <a:prstGeom prst="rect">
-            <a:avLst/>
-          </a:prstGeom>
-          <a:solidFill>
-            <a:srgbClr val="FF3300"/>
-          </a:solidFill>
-          <a:ln>
-            <a:noFill/>
-          </a:ln>
-        </p:spPr>
-        <p:style>
-          <a:lnRef idx="1">
-            <a:schemeClr val="accent1"/>
-          </a:lnRef>
-          <a:fillRef idx="3">
-            <a:schemeClr val="accent1"/>
-          </a:fillRef>
-          <a:effectRef idx="2">
-            <a:schemeClr val="accent1"/>
-          </a:effectRef>
-          <a:fontRef idx="minor">
-            <a:schemeClr val="lt1"/>
-          </a:fontRef>
-        </p:style>
-        <p:txBody>
-          <a:bodyPr rtlCol="0" anchor="ctr"/>
-          <a:lstStyle/>
-          <a:p>
-            <a:pPr algn="ctr"/>
-            <a:endParaRPr/>
-          </a:p>
-        </p:txBody>
-      </p:sp>
-      <p:sp>
-        <p:nvSpPr>
-          <p:cNvPr id="15" name="TextBox 14"/>
-          <p:cNvSpPr txBox="1"/>
-          <p:nvPr/>
-        </p:nvSpPr>
-        <p:spPr>
-          <a:xfrm>
-            <a:off x="1005840" y="4902014"/>
-            <a:ext cx="9144000" cy="646331"/>
-          </a:xfrm>
-          <a:prstGeom prst="rect">
-            <a:avLst/>
-          </a:prstGeom>
-          <a:noFill/>
-        </p:spPr>
-        <p:txBody>
-          <a:bodyPr wrap="square">
-            <a:spAutoFit/>
-          </a:bodyPr>
-          <a:lstStyle/>
-          <a:p>
-            <a:pPr algn="l">
-              <a:defRPr sz="1800" b="1">
-                <a:solidFill>
-                  <a:srgbClr val="1A1A1A"/>
-                </a:solidFill>
-                <a:latin typeface="Nunito"/>
-              </a:defRPr>
-            </a:pPr>
-            <a:r>
-              <a:rPr dirty="0"/>
-              <a:t>Result after 7 iterations (10 total evaluations): f(x*) = 0.5003 — matching the true optimum to 4 decimal places.</a:t>
-            </a:r>
-            <a:r>
-              <a:rPr lang="en-US" dirty="0"/>
-              <a:t> </a:t>
-            </a:r>
-          </a:p>
-        </p:txBody>
-      </p:sp>
-      <p:sp>
-        <p:nvSpPr>
-          <p:cNvPr id="16" name="Rectangle 15">
-            <a:extLst>
-              <a:ext uri="{FF2B5EF4-FFF2-40B4-BE49-F238E27FC236}">
-                <a16:creationId xmlns:a16="http://schemas.microsoft.com/office/drawing/2014/main" id="{DC086784-AFAC-3AD0-59F5-2FA7D128BDAB}"/>
-              </a:ext>
-            </a:extLst>
-          </p:cNvPr>
-          <p:cNvSpPr/>
-          <p:nvPr/>
-        </p:nvSpPr>
-        <p:spPr>
-          <a:xfrm>
-            <a:off x="822959" y="1097279"/>
-            <a:ext cx="10493551" cy="2119333"/>
-          </a:xfrm>
-          <a:prstGeom prst="rect">
-            <a:avLst/>
-          </a:prstGeom>
-          <a:solidFill>
-            <a:srgbClr val="1A1A1A"/>
-          </a:solidFill>
-          <a:ln>
-            <a:noFill/>
-          </a:ln>
-        </p:spPr>
-        <p:style>
-          <a:lnRef idx="1">
-            <a:schemeClr val="accent1"/>
-          </a:lnRef>
-          <a:fillRef idx="3">
-            <a:schemeClr val="accent1"/>
-          </a:fillRef>
-          <a:effectRef idx="2">
-            <a:schemeClr val="accent1"/>
-          </a:effectRef>
-          <a:fontRef idx="minor">
-            <a:schemeClr val="lt1"/>
-          </a:fontRef>
-        </p:style>
-        <p:txBody>
-          <a:bodyPr rtlCol="0" anchor="ctr"/>
-          <a:lstStyle/>
-          <a:p>
-            <a:pPr algn="ctr"/>
-            <a:endParaRPr/>
-          </a:p>
-        </p:txBody>
-      </p:sp>
-      <p:sp>
-        <p:nvSpPr>
-          <p:cNvPr id="17" name="TextBox 16">
-            <a:extLst>
-              <a:ext uri="{FF2B5EF4-FFF2-40B4-BE49-F238E27FC236}">
-                <a16:creationId xmlns:a16="http://schemas.microsoft.com/office/drawing/2014/main" id="{F0F8376E-7E0B-8214-C597-74B4731D2DAB}"/>
-              </a:ext>
-            </a:extLst>
-          </p:cNvPr>
-          <p:cNvSpPr txBox="1"/>
-          <p:nvPr/>
-        </p:nvSpPr>
-        <p:spPr>
-          <a:xfrm>
-            <a:off x="1005839" y="1188720"/>
-            <a:ext cx="9921175" cy="1692771"/>
-          </a:xfrm>
-          <a:prstGeom prst="rect">
-            <a:avLst/>
-          </a:prstGeom>
-          <a:noFill/>
-        </p:spPr>
-        <p:txBody>
-          <a:bodyPr wrap="square">
-            <a:spAutoFit/>
-          </a:bodyPr>
-          <a:lstStyle/>
-          <a:p>
-            <a:pPr algn="l">
-              <a:defRPr sz="1300" b="0">
-                <a:solidFill>
-                  <a:srgbClr val="E0E0E0"/>
-                </a:solidFill>
-                <a:latin typeface="Courier New"/>
-              </a:defRPr>
-            </a:pPr>
-            <a:r>
-              <a:rPr lang="en-US" b="0" i="0" dirty="0">
-                <a:solidFill>
-                  <a:srgbClr val="FF7B72"/>
-                </a:solidFill>
-                <a:effectLst/>
-                <a:latin typeface="Courier New" panose="02070309020205020404" pitchFamily="49" charset="0"/>
-              </a:rPr>
-              <a:t>for</a:t>
-            </a:r>
-            <a:r>
-              <a:rPr lang="en-US" b="0" i="0" dirty="0">
-                <a:solidFill>
-                  <a:srgbClr val="E0E0E0"/>
-                </a:solidFill>
-                <a:effectLst/>
-                <a:latin typeface="Courier New" panose="02070309020205020404" pitchFamily="49" charset="0"/>
-              </a:rPr>
-              <a:t> </a:t>
-            </a:r>
-            <a:r>
-              <a:rPr lang="en-US" b="0" i="0" dirty="0" err="1">
-                <a:solidFill>
-                  <a:srgbClr val="E0E0E0"/>
-                </a:solidFill>
-                <a:effectLst/>
-                <a:latin typeface="Courier New" panose="02070309020205020404" pitchFamily="49" charset="0"/>
-              </a:rPr>
-              <a:t>i</a:t>
-            </a:r>
-            <a:r>
-              <a:rPr lang="en-US" b="0" i="0" dirty="0">
-                <a:solidFill>
-                  <a:srgbClr val="E0E0E0"/>
-                </a:solidFill>
-                <a:effectLst/>
-                <a:latin typeface="Courier New" panose="02070309020205020404" pitchFamily="49" charset="0"/>
-              </a:rPr>
-              <a:t> </a:t>
-            </a:r>
-            <a:r>
-              <a:rPr lang="en-US" b="0" i="0" dirty="0">
-                <a:solidFill>
-                  <a:srgbClr val="FF7B72"/>
-                </a:solidFill>
-                <a:effectLst/>
-                <a:latin typeface="Courier New" panose="02070309020205020404" pitchFamily="49" charset="0"/>
-              </a:rPr>
-              <a:t>in</a:t>
-            </a:r>
-            <a:r>
-              <a:rPr lang="en-US" b="0" i="0" dirty="0">
-                <a:solidFill>
-                  <a:srgbClr val="E0E0E0"/>
-                </a:solidFill>
-                <a:effectLst/>
-                <a:latin typeface="Courier New" panose="02070309020205020404" pitchFamily="49" charset="0"/>
-              </a:rPr>
-              <a:t> </a:t>
-            </a:r>
-            <a:r>
-              <a:rPr lang="en-US" b="0" i="0" dirty="0">
-                <a:solidFill>
-                  <a:srgbClr val="D2A8FF"/>
-                </a:solidFill>
-                <a:effectLst/>
-                <a:latin typeface="Courier New" panose="02070309020205020404" pitchFamily="49" charset="0"/>
-              </a:rPr>
-              <a:t>range</a:t>
-            </a:r>
-            <a:r>
-              <a:rPr lang="en-US" b="0" i="0" dirty="0">
-                <a:solidFill>
-                  <a:srgbClr val="E0E0E0"/>
-                </a:solidFill>
-                <a:effectLst/>
-                <a:latin typeface="Courier New" panose="02070309020205020404" pitchFamily="49" charset="0"/>
-              </a:rPr>
-              <a:t>(</a:t>
-            </a:r>
-            <a:r>
-              <a:rPr lang="en-US" b="0" i="0" dirty="0" err="1">
-                <a:solidFill>
-                  <a:srgbClr val="E0E0E0"/>
-                </a:solidFill>
-                <a:effectLst/>
-                <a:latin typeface="Courier New" panose="02070309020205020404" pitchFamily="49" charset="0"/>
-              </a:rPr>
-              <a:t>n_iterations</a:t>
-            </a:r>
-            <a:r>
-              <a:rPr lang="en-US" b="0" i="0" dirty="0">
-                <a:solidFill>
-                  <a:srgbClr val="E0E0E0"/>
-                </a:solidFill>
-                <a:effectLst/>
-                <a:latin typeface="Courier New" panose="02070309020205020404" pitchFamily="49" charset="0"/>
-              </a:rPr>
-              <a:t>):</a:t>
-            </a:r>
-            <a:br>
-              <a:rPr lang="en-US" dirty="0"/>
-            </a:br>
-            <a:r>
-              <a:rPr lang="en-US" b="0" i="0" dirty="0">
-                <a:solidFill>
-                  <a:srgbClr val="E0E0E0"/>
-                </a:solidFill>
-                <a:effectLst/>
-                <a:latin typeface="Courier New" panose="02070309020205020404" pitchFamily="49" charset="0"/>
-              </a:rPr>
-              <a:t>  </a:t>
-            </a:r>
-            <a:r>
-              <a:rPr lang="en-US" b="0" i="0" dirty="0" err="1">
-                <a:solidFill>
-                  <a:srgbClr val="E0E0E0"/>
-                </a:solidFill>
-                <a:effectLst/>
-                <a:latin typeface="Courier New" panose="02070309020205020404" pitchFamily="49" charset="0"/>
-              </a:rPr>
-              <a:t>gp</a:t>
-            </a:r>
-            <a:r>
-              <a:rPr lang="en-US" b="0" i="0" dirty="0">
-                <a:solidFill>
-                  <a:srgbClr val="E0E0E0"/>
-                </a:solidFill>
-                <a:effectLst/>
-                <a:latin typeface="Courier New" panose="02070309020205020404" pitchFamily="49" charset="0"/>
-              </a:rPr>
-              <a:t> = </a:t>
-            </a:r>
-            <a:r>
-              <a:rPr lang="en-US" b="0" i="0" dirty="0" err="1">
-                <a:solidFill>
-                  <a:srgbClr val="D2A8FF"/>
-                </a:solidFill>
-                <a:effectLst/>
-                <a:latin typeface="Courier New" panose="02070309020205020404" pitchFamily="49" charset="0"/>
-              </a:rPr>
-              <a:t>fit_gp</a:t>
-            </a:r>
-            <a:r>
-              <a:rPr lang="en-US" b="0" i="0" dirty="0">
-                <a:solidFill>
-                  <a:srgbClr val="E0E0E0"/>
-                </a:solidFill>
-                <a:effectLst/>
-                <a:latin typeface="Courier New" panose="02070309020205020404" pitchFamily="49" charset="0"/>
-              </a:rPr>
-              <a:t>(</a:t>
-            </a:r>
-            <a:r>
-              <a:rPr lang="en-US" b="0" i="0" dirty="0" err="1">
-                <a:solidFill>
-                  <a:srgbClr val="E0E0E0"/>
-                </a:solidFill>
-                <a:effectLst/>
-                <a:latin typeface="Courier New" panose="02070309020205020404" pitchFamily="49" charset="0"/>
-              </a:rPr>
-              <a:t>X_obs</a:t>
-            </a:r>
-            <a:r>
-              <a:rPr lang="en-US" b="0" i="0" dirty="0">
-                <a:solidFill>
-                  <a:srgbClr val="E0E0E0"/>
-                </a:solidFill>
-                <a:effectLst/>
-                <a:latin typeface="Courier New" panose="02070309020205020404" pitchFamily="49" charset="0"/>
-              </a:rPr>
-              <a:t>, </a:t>
-            </a:r>
-            <a:r>
-              <a:rPr lang="en-US" b="0" i="0" dirty="0" err="1">
-                <a:solidFill>
-                  <a:srgbClr val="E0E0E0"/>
-                </a:solidFill>
-                <a:effectLst/>
-                <a:latin typeface="Courier New" panose="02070309020205020404" pitchFamily="49" charset="0"/>
-              </a:rPr>
-              <a:t>y_obs</a:t>
-            </a:r>
-            <a:r>
-              <a:rPr lang="en-US" b="0" i="0" dirty="0">
-                <a:solidFill>
-                  <a:srgbClr val="E0E0E0"/>
-                </a:solidFill>
-                <a:effectLst/>
-                <a:latin typeface="Courier New" panose="02070309020205020404" pitchFamily="49" charset="0"/>
-              </a:rPr>
-              <a:t>)              </a:t>
-            </a:r>
-            <a:r>
-              <a:rPr lang="en-US" b="0" i="0" dirty="0">
-                <a:solidFill>
-                  <a:srgbClr val="8B949E"/>
-                </a:solidFill>
-                <a:effectLst/>
-                <a:latin typeface="Courier New" panose="02070309020205020404" pitchFamily="49" charset="0"/>
-              </a:rPr>
-              <a:t># step 2a: fit surrogate</a:t>
-            </a:r>
-            <a:br>
-              <a:rPr lang="en-US" dirty="0"/>
-            </a:br>
-            <a:r>
-              <a:rPr lang="en-US" b="0" i="0" dirty="0">
-                <a:solidFill>
-                  <a:srgbClr val="E0E0E0"/>
-                </a:solidFill>
-                <a:effectLst/>
-                <a:latin typeface="Courier New" panose="02070309020205020404" pitchFamily="49" charset="0"/>
-              </a:rPr>
-              <a:t>  </a:t>
-            </a:r>
-            <a:r>
-              <a:rPr lang="en-US" b="0" i="0" dirty="0" err="1">
-                <a:solidFill>
-                  <a:srgbClr val="E0E0E0"/>
-                </a:solidFill>
-                <a:effectLst/>
-                <a:latin typeface="Courier New" panose="02070309020205020404" pitchFamily="49" charset="0"/>
-              </a:rPr>
-              <a:t>f_best</a:t>
-            </a:r>
-            <a:r>
-              <a:rPr lang="en-US" b="0" i="0" dirty="0">
-                <a:solidFill>
-                  <a:srgbClr val="E0E0E0"/>
-                </a:solidFill>
-                <a:effectLst/>
-                <a:latin typeface="Courier New" panose="02070309020205020404" pitchFamily="49" charset="0"/>
-              </a:rPr>
-              <a:t> = </a:t>
-            </a:r>
-            <a:r>
-              <a:rPr lang="en-US" b="0" i="0" dirty="0" err="1">
-                <a:solidFill>
-                  <a:srgbClr val="E0E0E0"/>
-                </a:solidFill>
-                <a:effectLst/>
-                <a:latin typeface="Courier New" panose="02070309020205020404" pitchFamily="49" charset="0"/>
-              </a:rPr>
-              <a:t>np.</a:t>
-            </a:r>
-            <a:r>
-              <a:rPr lang="en-US" b="0" i="0" dirty="0" err="1">
-                <a:solidFill>
-                  <a:srgbClr val="D2A8FF"/>
-                </a:solidFill>
-                <a:effectLst/>
-                <a:latin typeface="Courier New" panose="02070309020205020404" pitchFamily="49" charset="0"/>
-              </a:rPr>
-              <a:t>max</a:t>
-            </a:r>
-            <a:r>
-              <a:rPr lang="en-US" b="0" i="0" dirty="0">
-                <a:solidFill>
-                  <a:srgbClr val="E0E0E0"/>
-                </a:solidFill>
-                <a:effectLst/>
-                <a:latin typeface="Courier New" panose="02070309020205020404" pitchFamily="49" charset="0"/>
-              </a:rPr>
-              <a:t>(</a:t>
-            </a:r>
-            <a:r>
-              <a:rPr lang="en-US" b="0" i="0" dirty="0" err="1">
-                <a:solidFill>
-                  <a:srgbClr val="E0E0E0"/>
-                </a:solidFill>
-                <a:effectLst/>
-                <a:latin typeface="Courier New" panose="02070309020205020404" pitchFamily="49" charset="0"/>
-              </a:rPr>
-              <a:t>y_obs</a:t>
-            </a:r>
-            <a:r>
-              <a:rPr lang="en-US" b="0" i="0" dirty="0">
-                <a:solidFill>
-                  <a:srgbClr val="E0E0E0"/>
-                </a:solidFill>
-                <a:effectLst/>
-                <a:latin typeface="Courier New" panose="02070309020205020404" pitchFamily="49" charset="0"/>
-              </a:rPr>
-              <a:t>)                </a:t>
-            </a:r>
-            <a:r>
-              <a:rPr lang="en-US" b="0" i="0" dirty="0">
-                <a:solidFill>
-                  <a:srgbClr val="8B949E"/>
-                </a:solidFill>
-                <a:effectLst/>
-                <a:latin typeface="Courier New" panose="02070309020205020404" pitchFamily="49" charset="0"/>
-              </a:rPr>
-              <a:t># current incumbent</a:t>
-            </a:r>
-            <a:br>
-              <a:rPr lang="en-US" dirty="0"/>
-            </a:br>
-            <a:r>
-              <a:rPr lang="en-US" b="0" i="0" dirty="0">
-                <a:solidFill>
-                  <a:srgbClr val="E0E0E0"/>
-                </a:solidFill>
-                <a:effectLst/>
-                <a:latin typeface="Courier New" panose="02070309020205020404" pitchFamily="49" charset="0"/>
-              </a:rPr>
-              <a:t>  </a:t>
-            </a:r>
-            <a:r>
-              <a:rPr lang="en-US" b="0" i="0" dirty="0" err="1">
-                <a:solidFill>
-                  <a:srgbClr val="E0E0E0"/>
-                </a:solidFill>
-                <a:effectLst/>
-                <a:latin typeface="Courier New" panose="02070309020205020404" pitchFamily="49" charset="0"/>
-              </a:rPr>
-              <a:t>ei</a:t>
-            </a:r>
-            <a:r>
-              <a:rPr lang="en-US" b="0" i="0" dirty="0">
-                <a:solidFill>
-                  <a:srgbClr val="E0E0E0"/>
-                </a:solidFill>
-                <a:effectLst/>
-                <a:latin typeface="Courier New" panose="02070309020205020404" pitchFamily="49" charset="0"/>
-              </a:rPr>
-              <a:t> = </a:t>
-            </a:r>
-            <a:r>
-              <a:rPr lang="en-US" b="0" i="0" dirty="0" err="1">
-                <a:solidFill>
-                  <a:srgbClr val="D2A8FF"/>
-                </a:solidFill>
-                <a:effectLst/>
-                <a:latin typeface="Courier New" panose="02070309020205020404" pitchFamily="49" charset="0"/>
-              </a:rPr>
-              <a:t>expected_improvement</a:t>
-            </a:r>
-            <a:r>
-              <a:rPr lang="en-US" b="0" i="0" dirty="0">
-                <a:solidFill>
-                  <a:srgbClr val="E0E0E0"/>
-                </a:solidFill>
-                <a:effectLst/>
-                <a:latin typeface="Courier New" panose="02070309020205020404" pitchFamily="49" charset="0"/>
-              </a:rPr>
-              <a:t>(X, </a:t>
-            </a:r>
-            <a:r>
-              <a:rPr lang="en-US" b="0" i="0" dirty="0" err="1">
-                <a:solidFill>
-                  <a:srgbClr val="E0E0E0"/>
-                </a:solidFill>
-                <a:effectLst/>
-                <a:latin typeface="Courier New" panose="02070309020205020404" pitchFamily="49" charset="0"/>
-              </a:rPr>
-              <a:t>gp</a:t>
-            </a:r>
-            <a:r>
-              <a:rPr lang="en-US" b="0" i="0" dirty="0">
-                <a:solidFill>
-                  <a:srgbClr val="E0E0E0"/>
-                </a:solidFill>
-                <a:effectLst/>
-                <a:latin typeface="Courier New" panose="02070309020205020404" pitchFamily="49" charset="0"/>
-              </a:rPr>
-              <a:t>, </a:t>
-            </a:r>
-            <a:r>
-              <a:rPr lang="en-US" b="0" i="0" dirty="0" err="1">
-                <a:solidFill>
-                  <a:srgbClr val="E0E0E0"/>
-                </a:solidFill>
-                <a:effectLst/>
-                <a:latin typeface="Courier New" panose="02070309020205020404" pitchFamily="49" charset="0"/>
-              </a:rPr>
-              <a:t>f_best</a:t>
-            </a:r>
-            <a:r>
-              <a:rPr lang="en-US" b="0" i="0" dirty="0">
-                <a:solidFill>
-                  <a:srgbClr val="E0E0E0"/>
-                </a:solidFill>
-                <a:effectLst/>
-                <a:latin typeface="Courier New" panose="02070309020205020404" pitchFamily="49" charset="0"/>
-              </a:rPr>
-              <a:t>) </a:t>
-            </a:r>
-            <a:r>
-              <a:rPr lang="en-US" b="0" i="0" dirty="0">
-                <a:solidFill>
-                  <a:srgbClr val="8B949E"/>
-                </a:solidFill>
-                <a:effectLst/>
-                <a:latin typeface="Courier New" panose="02070309020205020404" pitchFamily="49" charset="0"/>
-              </a:rPr>
-              <a:t># step 2b: compute alpha</a:t>
-            </a:r>
-            <a:br>
-              <a:rPr lang="en-US" dirty="0"/>
-            </a:br>
-            <a:r>
-              <a:rPr lang="en-US" b="0" i="0" dirty="0">
-                <a:solidFill>
-                  <a:srgbClr val="E0E0E0"/>
-                </a:solidFill>
-                <a:effectLst/>
-                <a:latin typeface="Courier New" panose="02070309020205020404" pitchFamily="49" charset="0"/>
-              </a:rPr>
-              <a:t>  </a:t>
-            </a:r>
-            <a:r>
-              <a:rPr lang="en-US" b="0" i="0" dirty="0" err="1">
-                <a:solidFill>
-                  <a:srgbClr val="E0E0E0"/>
-                </a:solidFill>
-                <a:effectLst/>
-                <a:latin typeface="Courier New" panose="02070309020205020404" pitchFamily="49" charset="0"/>
-              </a:rPr>
-              <a:t>x_new</a:t>
-            </a:r>
-            <a:r>
-              <a:rPr lang="en-US" b="0" i="0" dirty="0">
-                <a:solidFill>
-                  <a:srgbClr val="E0E0E0"/>
-                </a:solidFill>
-                <a:effectLst/>
-                <a:latin typeface="Courier New" panose="02070309020205020404" pitchFamily="49" charset="0"/>
-              </a:rPr>
-              <a:t> = X[</a:t>
-            </a:r>
-            <a:r>
-              <a:rPr lang="en-US" b="0" i="0" dirty="0" err="1">
-                <a:solidFill>
-                  <a:srgbClr val="E0E0E0"/>
-                </a:solidFill>
-                <a:effectLst/>
-                <a:latin typeface="Courier New" panose="02070309020205020404" pitchFamily="49" charset="0"/>
-              </a:rPr>
-              <a:t>np.</a:t>
-            </a:r>
-            <a:r>
-              <a:rPr lang="en-US" b="0" i="0" dirty="0" err="1">
-                <a:solidFill>
-                  <a:srgbClr val="D2A8FF"/>
-                </a:solidFill>
-                <a:effectLst/>
-                <a:latin typeface="Courier New" panose="02070309020205020404" pitchFamily="49" charset="0"/>
-              </a:rPr>
-              <a:t>argmax</a:t>
-            </a:r>
-            <a:r>
-              <a:rPr lang="en-US" b="0" i="0" dirty="0">
-                <a:solidFill>
-                  <a:srgbClr val="E0E0E0"/>
-                </a:solidFill>
-                <a:effectLst/>
-                <a:latin typeface="Courier New" panose="02070309020205020404" pitchFamily="49" charset="0"/>
-              </a:rPr>
-              <a:t>(</a:t>
-            </a:r>
-            <a:r>
-              <a:rPr lang="en-US" b="0" i="0" dirty="0" err="1">
-                <a:solidFill>
-                  <a:srgbClr val="E0E0E0"/>
-                </a:solidFill>
-                <a:effectLst/>
-                <a:latin typeface="Courier New" panose="02070309020205020404" pitchFamily="49" charset="0"/>
-              </a:rPr>
-              <a:t>ei</a:t>
-            </a:r>
-            <a:r>
-              <a:rPr lang="en-US" b="0" i="0" dirty="0">
-                <a:solidFill>
-                  <a:srgbClr val="E0E0E0"/>
-                </a:solidFill>
-                <a:effectLst/>
-                <a:latin typeface="Courier New" panose="02070309020205020404" pitchFamily="49" charset="0"/>
-              </a:rPr>
-              <a:t>)]             </a:t>
-            </a:r>
-            <a:r>
-              <a:rPr lang="en-US" b="0" i="0" dirty="0">
-                <a:solidFill>
-                  <a:srgbClr val="8B949E"/>
-                </a:solidFill>
-                <a:effectLst/>
-                <a:latin typeface="Courier New" panose="02070309020205020404" pitchFamily="49" charset="0"/>
-              </a:rPr>
-              <a:t># step 2c: argmax alpha</a:t>
-            </a:r>
-            <a:br>
-              <a:rPr lang="en-US" dirty="0"/>
-            </a:br>
-            <a:r>
-              <a:rPr lang="en-US" b="0" i="0" dirty="0">
-                <a:solidFill>
-                  <a:srgbClr val="E0E0E0"/>
-                </a:solidFill>
-                <a:effectLst/>
-                <a:latin typeface="Courier New" panose="02070309020205020404" pitchFamily="49" charset="0"/>
-              </a:rPr>
-              <a:t>  </a:t>
-            </a:r>
-            <a:r>
-              <a:rPr lang="en-US" b="0" i="0" dirty="0" err="1">
-                <a:solidFill>
-                  <a:srgbClr val="E0E0E0"/>
-                </a:solidFill>
-                <a:effectLst/>
-                <a:latin typeface="Courier New" panose="02070309020205020404" pitchFamily="49" charset="0"/>
-              </a:rPr>
-              <a:t>y_new</a:t>
-            </a:r>
-            <a:r>
-              <a:rPr lang="en-US" b="0" i="0" dirty="0">
-                <a:solidFill>
-                  <a:srgbClr val="E0E0E0"/>
-                </a:solidFill>
-                <a:effectLst/>
-                <a:latin typeface="Courier New" panose="02070309020205020404" pitchFamily="49" charset="0"/>
-              </a:rPr>
-              <a:t> = </a:t>
-            </a:r>
-            <a:r>
-              <a:rPr lang="en-US" b="0" i="0" dirty="0">
-                <a:solidFill>
-                  <a:srgbClr val="D2A8FF"/>
-                </a:solidFill>
-                <a:effectLst/>
-                <a:latin typeface="Courier New" panose="02070309020205020404" pitchFamily="49" charset="0"/>
-              </a:rPr>
-              <a:t>objective</a:t>
-            </a:r>
-            <a:r>
-              <a:rPr lang="en-US" b="0" i="0" dirty="0">
-                <a:solidFill>
-                  <a:srgbClr val="E0E0E0"/>
-                </a:solidFill>
-                <a:effectLst/>
-                <a:latin typeface="Courier New" panose="02070309020205020404" pitchFamily="49" charset="0"/>
-              </a:rPr>
-              <a:t>(</a:t>
-            </a:r>
-            <a:r>
-              <a:rPr lang="en-US" b="0" i="0" dirty="0" err="1">
-                <a:solidFill>
-                  <a:srgbClr val="E0E0E0"/>
-                </a:solidFill>
-                <a:effectLst/>
-                <a:latin typeface="Courier New" panose="02070309020205020404" pitchFamily="49" charset="0"/>
-              </a:rPr>
-              <a:t>x_new</a:t>
-            </a:r>
-            <a:r>
-              <a:rPr lang="en-US" b="0" i="0" dirty="0">
-                <a:solidFill>
-                  <a:srgbClr val="E0E0E0"/>
-                </a:solidFill>
-                <a:effectLst/>
-                <a:latin typeface="Courier New" panose="02070309020205020404" pitchFamily="49" charset="0"/>
-              </a:rPr>
-              <a:t>)              </a:t>
-            </a:r>
-            <a:r>
-              <a:rPr lang="en-US" b="0" i="0" dirty="0">
-                <a:solidFill>
-                  <a:srgbClr val="8B949E"/>
-                </a:solidFill>
-                <a:effectLst/>
-                <a:latin typeface="Courier New" panose="02070309020205020404" pitchFamily="49" charset="0"/>
-              </a:rPr>
-              <a:t># step 2d: EXPENSIVE call</a:t>
-            </a:r>
-            <a:br>
-              <a:rPr lang="en-US" dirty="0"/>
-            </a:br>
-            <a:r>
-              <a:rPr lang="en-US" b="0" i="0" dirty="0">
-                <a:solidFill>
-                  <a:srgbClr val="E0E0E0"/>
-                </a:solidFill>
-                <a:effectLst/>
-                <a:latin typeface="Courier New" panose="02070309020205020404" pitchFamily="49" charset="0"/>
-              </a:rPr>
-              <a:t>  </a:t>
-            </a:r>
-            <a:r>
-              <a:rPr lang="en-US" b="0" i="0" dirty="0" err="1">
-                <a:solidFill>
-                  <a:srgbClr val="E0E0E0"/>
-                </a:solidFill>
-                <a:effectLst/>
-                <a:latin typeface="Courier New" panose="02070309020205020404" pitchFamily="49" charset="0"/>
-              </a:rPr>
-              <a:t>X_obs</a:t>
-            </a:r>
-            <a:r>
-              <a:rPr lang="en-US" b="0" i="0" dirty="0">
-                <a:solidFill>
-                  <a:srgbClr val="E0E0E0"/>
-                </a:solidFill>
-                <a:effectLst/>
-                <a:latin typeface="Courier New" panose="02070309020205020404" pitchFamily="49" charset="0"/>
-              </a:rPr>
-              <a:t> = </a:t>
-            </a:r>
-            <a:r>
-              <a:rPr lang="en-US" b="0" i="0" dirty="0" err="1">
-                <a:solidFill>
-                  <a:srgbClr val="E0E0E0"/>
-                </a:solidFill>
-                <a:effectLst/>
-                <a:latin typeface="Courier New" panose="02070309020205020404" pitchFamily="49" charset="0"/>
-              </a:rPr>
-              <a:t>np.</a:t>
-            </a:r>
-            <a:r>
-              <a:rPr lang="en-US" b="0" i="0" dirty="0" err="1">
-                <a:solidFill>
-                  <a:srgbClr val="D2A8FF"/>
-                </a:solidFill>
-                <a:effectLst/>
-                <a:latin typeface="Courier New" panose="02070309020205020404" pitchFamily="49" charset="0"/>
-              </a:rPr>
-              <a:t>vstack</a:t>
-            </a:r>
-            <a:r>
-              <a:rPr lang="en-US" b="0" i="0" dirty="0">
-                <a:solidFill>
-                  <a:srgbClr val="E0E0E0"/>
-                </a:solidFill>
-                <a:effectLst/>
-                <a:latin typeface="Courier New" panose="02070309020205020404" pitchFamily="49" charset="0"/>
-              </a:rPr>
-              <a:t>([</a:t>
-            </a:r>
-            <a:r>
-              <a:rPr lang="en-US" b="0" i="0" dirty="0" err="1">
-                <a:solidFill>
-                  <a:srgbClr val="E0E0E0"/>
-                </a:solidFill>
-                <a:effectLst/>
-                <a:latin typeface="Courier New" panose="02070309020205020404" pitchFamily="49" charset="0"/>
-              </a:rPr>
-              <a:t>X_obs</a:t>
-            </a:r>
-            <a:r>
-              <a:rPr lang="en-US" b="0" i="0" dirty="0">
-                <a:solidFill>
-                  <a:srgbClr val="E0E0E0"/>
-                </a:solidFill>
-                <a:effectLst/>
-                <a:latin typeface="Courier New" panose="02070309020205020404" pitchFamily="49" charset="0"/>
-              </a:rPr>
-              <a:t>, </a:t>
-            </a:r>
-            <a:r>
-              <a:rPr lang="en-US" b="0" i="0" dirty="0" err="1">
-                <a:solidFill>
-                  <a:srgbClr val="E0E0E0"/>
-                </a:solidFill>
-                <a:effectLst/>
-                <a:latin typeface="Courier New" panose="02070309020205020404" pitchFamily="49" charset="0"/>
-              </a:rPr>
-              <a:t>x_new</a:t>
-            </a:r>
-            <a:r>
-              <a:rPr lang="en-US" b="0" i="0" dirty="0">
-                <a:solidFill>
-                  <a:srgbClr val="E0E0E0"/>
-                </a:solidFill>
-                <a:effectLst/>
-                <a:latin typeface="Courier New" panose="02070309020205020404" pitchFamily="49" charset="0"/>
-              </a:rPr>
-              <a:t>])     </a:t>
-            </a:r>
-            <a:r>
-              <a:rPr lang="en-US" b="0" i="0" dirty="0">
-                <a:solidFill>
-                  <a:srgbClr val="8B949E"/>
-                </a:solidFill>
-                <a:effectLst/>
-                <a:latin typeface="Courier New" panose="02070309020205020404" pitchFamily="49" charset="0"/>
-              </a:rPr>
-              <a:t># step 2e: update data</a:t>
-            </a:r>
-            <a:br>
-              <a:rPr lang="en-US" dirty="0"/>
-            </a:br>
-            <a:r>
-              <a:rPr lang="en-US" b="0" i="0" dirty="0">
-                <a:solidFill>
-                  <a:srgbClr val="E0E0E0"/>
-                </a:solidFill>
-                <a:effectLst/>
-                <a:latin typeface="Courier New" panose="02070309020205020404" pitchFamily="49" charset="0"/>
-              </a:rPr>
-              <a:t>  </a:t>
-            </a:r>
-            <a:r>
-              <a:rPr lang="en-US" b="0" i="0" dirty="0" err="1">
-                <a:solidFill>
-                  <a:srgbClr val="E0E0E0"/>
-                </a:solidFill>
-                <a:effectLst/>
-                <a:latin typeface="Courier New" panose="02070309020205020404" pitchFamily="49" charset="0"/>
-              </a:rPr>
-              <a:t>y_obs</a:t>
-            </a:r>
-            <a:r>
-              <a:rPr lang="en-US" b="0" i="0" dirty="0">
-                <a:solidFill>
-                  <a:srgbClr val="E0E0E0"/>
-                </a:solidFill>
-                <a:effectLst/>
-                <a:latin typeface="Courier New" panose="02070309020205020404" pitchFamily="49" charset="0"/>
-              </a:rPr>
-              <a:t> = </a:t>
-            </a:r>
-            <a:r>
-              <a:rPr lang="en-US" b="0" i="0" dirty="0" err="1">
-                <a:solidFill>
-                  <a:srgbClr val="E0E0E0"/>
-                </a:solidFill>
-                <a:effectLst/>
-                <a:latin typeface="Courier New" panose="02070309020205020404" pitchFamily="49" charset="0"/>
-              </a:rPr>
-              <a:t>np.</a:t>
-            </a:r>
-            <a:r>
-              <a:rPr lang="en-US" b="0" i="0" dirty="0" err="1">
-                <a:solidFill>
-                  <a:srgbClr val="D2A8FF"/>
-                </a:solidFill>
-                <a:effectLst/>
-                <a:latin typeface="Courier New" panose="02070309020205020404" pitchFamily="49" charset="0"/>
-              </a:rPr>
-              <a:t>vstack</a:t>
-            </a:r>
-            <a:r>
-              <a:rPr lang="en-US" b="0" i="0" dirty="0">
-                <a:solidFill>
-                  <a:srgbClr val="E0E0E0"/>
-                </a:solidFill>
-                <a:effectLst/>
-                <a:latin typeface="Courier New" panose="02070309020205020404" pitchFamily="49" charset="0"/>
-              </a:rPr>
-              <a:t>([</a:t>
-            </a:r>
-            <a:r>
-              <a:rPr lang="en-US" b="0" i="0" dirty="0" err="1">
-                <a:solidFill>
-                  <a:srgbClr val="E0E0E0"/>
-                </a:solidFill>
-                <a:effectLst/>
-                <a:latin typeface="Courier New" panose="02070309020205020404" pitchFamily="49" charset="0"/>
-              </a:rPr>
-              <a:t>y_obs</a:t>
-            </a:r>
-            <a:r>
-              <a:rPr lang="en-US" b="0" i="0" dirty="0">
-                <a:solidFill>
-                  <a:srgbClr val="E0E0E0"/>
-                </a:solidFill>
-                <a:effectLst/>
-                <a:latin typeface="Courier New" panose="02070309020205020404" pitchFamily="49" charset="0"/>
-              </a:rPr>
-              <a:t>, </a:t>
-            </a:r>
-            <a:r>
-              <a:rPr lang="en-US" b="0" i="0" dirty="0" err="1">
-                <a:solidFill>
-                  <a:srgbClr val="E0E0E0"/>
-                </a:solidFill>
-                <a:effectLst/>
-                <a:latin typeface="Courier New" panose="02070309020205020404" pitchFamily="49" charset="0"/>
-              </a:rPr>
-              <a:t>y_new</a:t>
-            </a:r>
-            <a:r>
-              <a:rPr lang="en-US" b="0" i="0" dirty="0">
-                <a:solidFill>
-                  <a:srgbClr val="E0E0E0"/>
-                </a:solidFill>
-                <a:effectLst/>
-                <a:latin typeface="Courier New" panose="02070309020205020404" pitchFamily="49" charset="0"/>
-              </a:rPr>
-              <a:t>])</a:t>
-            </a:r>
-            <a:endParaRPr lang="en-US" dirty="0"/>
-          </a:p>
-        </p:txBody>
-      </p:sp>
-    </p:spTree>
-  </p:cSld>
-  <p:clrMapOvr>
-    <a:masterClrMapping/>
-  </p:clrMapOvr>
-</p:sld>
-</file>
-
 <file path=ppt/slides/slide34.xml><?xml version="1.0" encoding="utf-8"?>
 <p:sld xmlns:a="http://schemas.openxmlformats.org/drawingml/2006/main" xmlns:r="http://schemas.openxmlformats.org/officeDocument/2006/relationships" xmlns:p="http://schemas.openxmlformats.org/presentationml/2006/main">
   <p:cSld>
@@ -16638,8 +16787,8 @@
         </p:nvSpPr>
         <p:spPr>
           <a:xfrm>
-            <a:off x="822960" y="365760"/>
-            <a:ext cx="10058400" cy="548640"/>
+            <a:off x="822960" y="457200"/>
+            <a:ext cx="10058400" cy="640080"/>
           </a:xfrm>
           <a:prstGeom prst="rect">
             <a:avLst/>
@@ -16661,213 +16810,20 @@
               </a:defRPr>
             </a:pPr>
             <a:r>
-              <a:t>BO vs. Random Search</a:t>
-            </a:r>
-          </a:p>
-        </p:txBody>
-      </p:sp>
-      <p:sp>
-        <p:nvSpPr>
-          <p:cNvPr id="3" name="TextBox 2"/>
-          <p:cNvSpPr txBox="1"/>
-          <p:nvPr/>
-        </p:nvSpPr>
-        <p:spPr>
-          <a:xfrm>
-            <a:off x="822960" y="914400"/>
-            <a:ext cx="10058400" cy="502920"/>
-          </a:xfrm>
-          <a:prstGeom prst="rect">
-            <a:avLst/>
-          </a:prstGeom>
-          <a:noFill/>
-        </p:spPr>
-        <p:txBody>
-          <a:bodyPr wrap="square">
-            <a:spAutoFit/>
-          </a:bodyPr>
-          <a:lstStyle/>
-          <a:p>
-            <a:pPr algn="l">
-              <a:defRPr sz="1600" b="0">
-                <a:solidFill>
-                  <a:srgbClr val="444444"/>
-                </a:solidFill>
-                <a:latin typeface="Nunito"/>
-              </a:defRPr>
-            </a:pPr>
-            <a:r>
-              <a:t>50 independent random-search trials with the same evaluation budget (10 calls) compared against BO:</a:t>
-            </a:r>
-          </a:p>
-        </p:txBody>
-      </p:sp>
-      <p:pic>
-        <p:nvPicPr>
-          <p:cNvPr id="4" name="Picture 3" descr="bo_vs_random.png"/>
-          <p:cNvPicPr>
-            <a:picLocks noChangeAspect="1"/>
-          </p:cNvPicPr>
-          <p:nvPr/>
-        </p:nvPicPr>
-        <p:blipFill>
-          <a:blip r:embed="rId2"/>
-          <a:stretch>
-            <a:fillRect/>
-          </a:stretch>
-        </p:blipFill>
-        <p:spPr>
-          <a:xfrm>
-            <a:off x="3145277" y="1310188"/>
-            <a:ext cx="5727819" cy="3534186"/>
-          </a:xfrm>
-          <a:prstGeom prst="rect">
-            <a:avLst/>
-          </a:prstGeom>
-        </p:spPr>
-      </p:pic>
-      <p:sp>
-        <p:nvSpPr>
-          <p:cNvPr id="5" name="TextBox 4"/>
-          <p:cNvSpPr txBox="1"/>
-          <p:nvPr/>
-        </p:nvSpPr>
-        <p:spPr>
-          <a:xfrm>
-            <a:off x="1188720" y="4937760"/>
-            <a:ext cx="9601200" cy="323165"/>
-          </a:xfrm>
-          <a:prstGeom prst="rect">
-            <a:avLst/>
-          </a:prstGeom>
-          <a:noFill/>
-        </p:spPr>
-        <p:txBody>
-          <a:bodyPr wrap="square">
-            <a:spAutoFit/>
-          </a:bodyPr>
-          <a:lstStyle/>
-          <a:p>
-            <a:pPr algn="l">
-              <a:defRPr sz="1500" b="0">
-                <a:solidFill>
-                  <a:srgbClr val="444444"/>
-                </a:solidFill>
-                <a:latin typeface="Nunito"/>
-              </a:defRPr>
-            </a:pPr>
-            <a:r>
-              <a:rPr dirty="0"/>
-              <a:t>•  </a:t>
-            </a:r>
-            <a:r>
-              <a:rPr b="1" dirty="0"/>
-              <a:t>BO</a:t>
-            </a:r>
-            <a:r>
-              <a:rPr dirty="0"/>
-              <a:t> (blue) reaches the optimum in ~6 evaluations — deterministic given initial samples</a:t>
-            </a:r>
-          </a:p>
-        </p:txBody>
-      </p:sp>
-      <p:sp>
-        <p:nvSpPr>
-          <p:cNvPr id="6" name="TextBox 5"/>
-          <p:cNvSpPr txBox="1"/>
-          <p:nvPr/>
-        </p:nvSpPr>
-        <p:spPr>
-          <a:xfrm>
-            <a:off x="1188720" y="5257800"/>
-            <a:ext cx="9601200" cy="323165"/>
-          </a:xfrm>
-          <a:prstGeom prst="rect">
-            <a:avLst/>
-          </a:prstGeom>
-          <a:noFill/>
-        </p:spPr>
-        <p:txBody>
-          <a:bodyPr wrap="square">
-            <a:spAutoFit/>
-          </a:bodyPr>
-          <a:lstStyle/>
-          <a:p>
-            <a:pPr algn="l">
-              <a:defRPr sz="1500" b="0">
-                <a:solidFill>
-                  <a:srgbClr val="444444"/>
-                </a:solidFill>
-                <a:latin typeface="Nunito"/>
-              </a:defRPr>
-            </a:pPr>
-            <a:r>
-              <a:rPr dirty="0"/>
-              <a:t>•  </a:t>
-            </a:r>
-            <a:r>
-              <a:rPr b="1" dirty="0"/>
-              <a:t>Random search </a:t>
-            </a:r>
-            <a:r>
-              <a:rPr dirty="0"/>
-              <a:t>(red band = 10th–90th percentile) has high variance and often fails within budget</a:t>
-            </a:r>
-          </a:p>
-        </p:txBody>
-      </p:sp>
-      <p:sp>
-        <p:nvSpPr>
-          <p:cNvPr id="7" name="TextBox 6"/>
-          <p:cNvSpPr txBox="1"/>
-          <p:nvPr/>
-        </p:nvSpPr>
-        <p:spPr>
-          <a:xfrm>
-            <a:off x="1188720" y="5577840"/>
-            <a:ext cx="9601200" cy="323165"/>
-          </a:xfrm>
-          <a:prstGeom prst="rect">
-            <a:avLst/>
-          </a:prstGeom>
-          <a:noFill/>
-        </p:spPr>
-        <p:txBody>
-          <a:bodyPr wrap="square">
-            <a:spAutoFit/>
-          </a:bodyPr>
-          <a:lstStyle/>
-          <a:p>
-            <a:pPr algn="l">
-              <a:defRPr sz="1500" b="0">
-                <a:solidFill>
-                  <a:srgbClr val="444444"/>
-                </a:solidFill>
-                <a:latin typeface="Nunito"/>
-              </a:defRPr>
-            </a:pPr>
-            <a:r>
-              <a:rPr dirty="0"/>
-              <a:t>•  The gap widens dramatically on more expensive or higher-dimensional problems</a:t>
-            </a:r>
-          </a:p>
-        </p:txBody>
-      </p:sp>
-      <p:sp>
-        <p:nvSpPr>
-          <p:cNvPr id="8" name="Rectangle 7">
-            <a:extLst>
-              <a:ext uri="{FF2B5EF4-FFF2-40B4-BE49-F238E27FC236}">
-                <a16:creationId xmlns:a16="http://schemas.microsoft.com/office/drawing/2014/main" id="{C42AFBE7-4ACF-8415-2500-1772ABB073A1}"/>
-              </a:ext>
-            </a:extLst>
-          </p:cNvPr>
+              <a:t>Step 4: The Complete BO Loop</a:t>
+            </a:r>
+          </a:p>
+        </p:txBody>
+      </p:sp>
+      <p:sp>
+        <p:nvSpPr>
+          <p:cNvPr id="3" name="Rectangle 2"/>
           <p:cNvSpPr/>
           <p:nvPr/>
         </p:nvSpPr>
         <p:spPr>
           <a:xfrm>
-            <a:off x="822960" y="826770"/>
+            <a:off x="822960" y="960120"/>
             <a:ext cx="3657600" cy="38100"/>
           </a:xfrm>
           <a:prstGeom prst="rect">
@@ -16903,6 +16859,1012 @@
           </a:p>
         </p:txBody>
       </p:sp>
+      <p:sp>
+        <p:nvSpPr>
+          <p:cNvPr id="13" name="TextBox 12"/>
+          <p:cNvSpPr txBox="1"/>
+          <p:nvPr/>
+        </p:nvSpPr>
+        <p:spPr>
+          <a:xfrm>
+            <a:off x="822960" y="3527431"/>
+            <a:ext cx="9601200" cy="646331"/>
+          </a:xfrm>
+          <a:prstGeom prst="rect">
+            <a:avLst/>
+          </a:prstGeom>
+          <a:noFill/>
+        </p:spPr>
+        <p:txBody>
+          <a:bodyPr wrap="square">
+            <a:spAutoFit/>
+          </a:bodyPr>
+          <a:lstStyle/>
+          <a:p>
+            <a:pPr algn="l">
+              <a:spcAft>
+                <a:spcPts val="400"/>
+              </a:spcAft>
+              <a:defRPr sz="1800" b="0">
+                <a:solidFill>
+                  <a:srgbClr val="444444"/>
+                </a:solidFill>
+                <a:latin typeface="Nunito"/>
+              </a:defRPr>
+            </a:pPr>
+            <a:r>
+              <a:rPr dirty="0"/>
+              <a:t>Each iteration maps directly to steps 2a–2e of the pseudocode. The entire BO engine is under 10 lines of Python.</a:t>
+            </a:r>
+          </a:p>
+        </p:txBody>
+      </p:sp>
+      <p:sp>
+        <p:nvSpPr>
+          <p:cNvPr id="14" name="Rectangle 13"/>
+          <p:cNvSpPr/>
+          <p:nvPr/>
+        </p:nvSpPr>
+        <p:spPr>
+          <a:xfrm>
+            <a:off x="822960" y="4902014"/>
+            <a:ext cx="50800" cy="457200"/>
+          </a:xfrm>
+          <a:prstGeom prst="rect">
+            <a:avLst/>
+          </a:prstGeom>
+          <a:solidFill>
+            <a:srgbClr val="FF3300"/>
+          </a:solidFill>
+          <a:ln>
+            <a:noFill/>
+          </a:ln>
+        </p:spPr>
+        <p:style>
+          <a:lnRef idx="1">
+            <a:schemeClr val="accent1"/>
+          </a:lnRef>
+          <a:fillRef idx="3">
+            <a:schemeClr val="accent1"/>
+          </a:fillRef>
+          <a:effectRef idx="2">
+            <a:schemeClr val="accent1"/>
+          </a:effectRef>
+          <a:fontRef idx="minor">
+            <a:schemeClr val="lt1"/>
+          </a:fontRef>
+        </p:style>
+        <p:txBody>
+          <a:bodyPr rtlCol="0" anchor="ctr"/>
+          <a:lstStyle/>
+          <a:p>
+            <a:pPr algn="ctr"/>
+            <a:endParaRPr/>
+          </a:p>
+        </p:txBody>
+      </p:sp>
+      <p:sp>
+        <p:nvSpPr>
+          <p:cNvPr id="15" name="TextBox 14"/>
+          <p:cNvSpPr txBox="1"/>
+          <p:nvPr/>
+        </p:nvSpPr>
+        <p:spPr>
+          <a:xfrm>
+            <a:off x="1005840" y="4902014"/>
+            <a:ext cx="9144000" cy="646331"/>
+          </a:xfrm>
+          <a:prstGeom prst="rect">
+            <a:avLst/>
+          </a:prstGeom>
+          <a:noFill/>
+        </p:spPr>
+        <p:txBody>
+          <a:bodyPr wrap="square">
+            <a:spAutoFit/>
+          </a:bodyPr>
+          <a:lstStyle/>
+          <a:p>
+            <a:pPr algn="l">
+              <a:defRPr sz="1800" b="1">
+                <a:solidFill>
+                  <a:srgbClr val="1A1A1A"/>
+                </a:solidFill>
+                <a:latin typeface="Nunito"/>
+              </a:defRPr>
+            </a:pPr>
+            <a:r>
+              <a:rPr dirty="0"/>
+              <a:t>Result after 7 iterations (10 total evaluations): f(x*) = 0.5003 — matching the true optimum to 4 decimal places.</a:t>
+            </a:r>
+            <a:r>
+              <a:rPr lang="en-US" dirty="0"/>
+              <a:t> </a:t>
+            </a:r>
+          </a:p>
+        </p:txBody>
+      </p:sp>
+      <p:sp>
+        <p:nvSpPr>
+          <p:cNvPr id="16" name="Rectangle 15">
+            <a:extLst>
+              <a:ext uri="{FF2B5EF4-FFF2-40B4-BE49-F238E27FC236}">
+                <a16:creationId xmlns:a16="http://schemas.microsoft.com/office/drawing/2014/main" id="{DC086784-AFAC-3AD0-59F5-2FA7D128BDAB}"/>
+              </a:ext>
+            </a:extLst>
+          </p:cNvPr>
+          <p:cNvSpPr/>
+          <p:nvPr/>
+        </p:nvSpPr>
+        <p:spPr>
+          <a:xfrm>
+            <a:off x="822959" y="1097279"/>
+            <a:ext cx="10493551" cy="2119333"/>
+          </a:xfrm>
+          <a:prstGeom prst="rect">
+            <a:avLst/>
+          </a:prstGeom>
+          <a:solidFill>
+            <a:srgbClr val="1A1A1A"/>
+          </a:solidFill>
+          <a:ln>
+            <a:noFill/>
+          </a:ln>
+        </p:spPr>
+        <p:style>
+          <a:lnRef idx="1">
+            <a:schemeClr val="accent1"/>
+          </a:lnRef>
+          <a:fillRef idx="3">
+            <a:schemeClr val="accent1"/>
+          </a:fillRef>
+          <a:effectRef idx="2">
+            <a:schemeClr val="accent1"/>
+          </a:effectRef>
+          <a:fontRef idx="minor">
+            <a:schemeClr val="lt1"/>
+          </a:fontRef>
+        </p:style>
+        <p:txBody>
+          <a:bodyPr rtlCol="0" anchor="ctr"/>
+          <a:lstStyle/>
+          <a:p>
+            <a:pPr algn="ctr"/>
+            <a:endParaRPr/>
+          </a:p>
+        </p:txBody>
+      </p:sp>
+      <p:sp>
+        <p:nvSpPr>
+          <p:cNvPr id="17" name="TextBox 16">
+            <a:extLst>
+              <a:ext uri="{FF2B5EF4-FFF2-40B4-BE49-F238E27FC236}">
+                <a16:creationId xmlns:a16="http://schemas.microsoft.com/office/drawing/2014/main" id="{F0F8376E-7E0B-8214-C597-74B4731D2DAB}"/>
+              </a:ext>
+            </a:extLst>
+          </p:cNvPr>
+          <p:cNvSpPr txBox="1"/>
+          <p:nvPr/>
+        </p:nvSpPr>
+        <p:spPr>
+          <a:xfrm>
+            <a:off x="1005839" y="1188720"/>
+            <a:ext cx="9921175" cy="1692771"/>
+          </a:xfrm>
+          <a:prstGeom prst="rect">
+            <a:avLst/>
+          </a:prstGeom>
+          <a:noFill/>
+        </p:spPr>
+        <p:txBody>
+          <a:bodyPr wrap="square">
+            <a:spAutoFit/>
+          </a:bodyPr>
+          <a:lstStyle/>
+          <a:p>
+            <a:pPr algn="l">
+              <a:defRPr sz="1300" b="0">
+                <a:solidFill>
+                  <a:srgbClr val="E0E0E0"/>
+                </a:solidFill>
+                <a:latin typeface="Courier New"/>
+              </a:defRPr>
+            </a:pPr>
+            <a:r>
+              <a:rPr lang="en-US" b="0" i="0" dirty="0">
+                <a:solidFill>
+                  <a:srgbClr val="FF7B72"/>
+                </a:solidFill>
+                <a:effectLst/>
+                <a:latin typeface="Courier New" panose="02070309020205020404" pitchFamily="49" charset="0"/>
+              </a:rPr>
+              <a:t>for</a:t>
+            </a:r>
+            <a:r>
+              <a:rPr lang="en-US" b="0" i="0" dirty="0">
+                <a:solidFill>
+                  <a:srgbClr val="E0E0E0"/>
+                </a:solidFill>
+                <a:effectLst/>
+                <a:latin typeface="Courier New" panose="02070309020205020404" pitchFamily="49" charset="0"/>
+              </a:rPr>
+              <a:t> </a:t>
+            </a:r>
+            <a:r>
+              <a:rPr lang="en-US" b="0" i="0" dirty="0" err="1">
+                <a:solidFill>
+                  <a:srgbClr val="E0E0E0"/>
+                </a:solidFill>
+                <a:effectLst/>
+                <a:latin typeface="Courier New" panose="02070309020205020404" pitchFamily="49" charset="0"/>
+              </a:rPr>
+              <a:t>i</a:t>
+            </a:r>
+            <a:r>
+              <a:rPr lang="en-US" b="0" i="0" dirty="0">
+                <a:solidFill>
+                  <a:srgbClr val="E0E0E0"/>
+                </a:solidFill>
+                <a:effectLst/>
+                <a:latin typeface="Courier New" panose="02070309020205020404" pitchFamily="49" charset="0"/>
+              </a:rPr>
+              <a:t> </a:t>
+            </a:r>
+            <a:r>
+              <a:rPr lang="en-US" b="0" i="0" dirty="0">
+                <a:solidFill>
+                  <a:srgbClr val="FF7B72"/>
+                </a:solidFill>
+                <a:effectLst/>
+                <a:latin typeface="Courier New" panose="02070309020205020404" pitchFamily="49" charset="0"/>
+              </a:rPr>
+              <a:t>in</a:t>
+            </a:r>
+            <a:r>
+              <a:rPr lang="en-US" b="0" i="0" dirty="0">
+                <a:solidFill>
+                  <a:srgbClr val="E0E0E0"/>
+                </a:solidFill>
+                <a:effectLst/>
+                <a:latin typeface="Courier New" panose="02070309020205020404" pitchFamily="49" charset="0"/>
+              </a:rPr>
+              <a:t> </a:t>
+            </a:r>
+            <a:r>
+              <a:rPr lang="en-US" b="0" i="0" dirty="0">
+                <a:solidFill>
+                  <a:srgbClr val="D2A8FF"/>
+                </a:solidFill>
+                <a:effectLst/>
+                <a:latin typeface="Courier New" panose="02070309020205020404" pitchFamily="49" charset="0"/>
+              </a:rPr>
+              <a:t>range</a:t>
+            </a:r>
+            <a:r>
+              <a:rPr lang="en-US" b="0" i="0" dirty="0">
+                <a:solidFill>
+                  <a:srgbClr val="E0E0E0"/>
+                </a:solidFill>
+                <a:effectLst/>
+                <a:latin typeface="Courier New" panose="02070309020205020404" pitchFamily="49" charset="0"/>
+              </a:rPr>
+              <a:t>(</a:t>
+            </a:r>
+            <a:r>
+              <a:rPr lang="en-US" b="0" i="0" dirty="0" err="1">
+                <a:solidFill>
+                  <a:srgbClr val="E0E0E0"/>
+                </a:solidFill>
+                <a:effectLst/>
+                <a:latin typeface="Courier New" panose="02070309020205020404" pitchFamily="49" charset="0"/>
+              </a:rPr>
+              <a:t>n_iterations</a:t>
+            </a:r>
+            <a:r>
+              <a:rPr lang="en-US" b="0" i="0" dirty="0">
+                <a:solidFill>
+                  <a:srgbClr val="E0E0E0"/>
+                </a:solidFill>
+                <a:effectLst/>
+                <a:latin typeface="Courier New" panose="02070309020205020404" pitchFamily="49" charset="0"/>
+              </a:rPr>
+              <a:t>):</a:t>
+            </a:r>
+            <a:br>
+              <a:rPr lang="en-US" dirty="0"/>
+            </a:br>
+            <a:r>
+              <a:rPr lang="en-US" b="0" i="0" dirty="0">
+                <a:solidFill>
+                  <a:srgbClr val="E0E0E0"/>
+                </a:solidFill>
+                <a:effectLst/>
+                <a:latin typeface="Courier New" panose="02070309020205020404" pitchFamily="49" charset="0"/>
+              </a:rPr>
+              <a:t>  </a:t>
+            </a:r>
+            <a:r>
+              <a:rPr lang="en-US" b="0" i="0" dirty="0" err="1">
+                <a:solidFill>
+                  <a:srgbClr val="E0E0E0"/>
+                </a:solidFill>
+                <a:effectLst/>
+                <a:latin typeface="Courier New" panose="02070309020205020404" pitchFamily="49" charset="0"/>
+              </a:rPr>
+              <a:t>gp</a:t>
+            </a:r>
+            <a:r>
+              <a:rPr lang="en-US" b="0" i="0" dirty="0">
+                <a:solidFill>
+                  <a:srgbClr val="E0E0E0"/>
+                </a:solidFill>
+                <a:effectLst/>
+                <a:latin typeface="Courier New" panose="02070309020205020404" pitchFamily="49" charset="0"/>
+              </a:rPr>
+              <a:t> = </a:t>
+            </a:r>
+            <a:r>
+              <a:rPr lang="en-US" b="0" i="0" dirty="0" err="1">
+                <a:solidFill>
+                  <a:srgbClr val="D2A8FF"/>
+                </a:solidFill>
+                <a:effectLst/>
+                <a:latin typeface="Courier New" panose="02070309020205020404" pitchFamily="49" charset="0"/>
+              </a:rPr>
+              <a:t>fit_gp</a:t>
+            </a:r>
+            <a:r>
+              <a:rPr lang="en-US" b="0" i="0" dirty="0">
+                <a:solidFill>
+                  <a:srgbClr val="E0E0E0"/>
+                </a:solidFill>
+                <a:effectLst/>
+                <a:latin typeface="Courier New" panose="02070309020205020404" pitchFamily="49" charset="0"/>
+              </a:rPr>
+              <a:t>(</a:t>
+            </a:r>
+            <a:r>
+              <a:rPr lang="en-US" b="0" i="0" dirty="0" err="1">
+                <a:solidFill>
+                  <a:srgbClr val="E0E0E0"/>
+                </a:solidFill>
+                <a:effectLst/>
+                <a:latin typeface="Courier New" panose="02070309020205020404" pitchFamily="49" charset="0"/>
+              </a:rPr>
+              <a:t>X_obs</a:t>
+            </a:r>
+            <a:r>
+              <a:rPr lang="en-US" b="0" i="0" dirty="0">
+                <a:solidFill>
+                  <a:srgbClr val="E0E0E0"/>
+                </a:solidFill>
+                <a:effectLst/>
+                <a:latin typeface="Courier New" panose="02070309020205020404" pitchFamily="49" charset="0"/>
+              </a:rPr>
+              <a:t>, </a:t>
+            </a:r>
+            <a:r>
+              <a:rPr lang="en-US" b="0" i="0" dirty="0" err="1">
+                <a:solidFill>
+                  <a:srgbClr val="E0E0E0"/>
+                </a:solidFill>
+                <a:effectLst/>
+                <a:latin typeface="Courier New" panose="02070309020205020404" pitchFamily="49" charset="0"/>
+              </a:rPr>
+              <a:t>y_obs</a:t>
+            </a:r>
+            <a:r>
+              <a:rPr lang="en-US" b="0" i="0" dirty="0">
+                <a:solidFill>
+                  <a:srgbClr val="E0E0E0"/>
+                </a:solidFill>
+                <a:effectLst/>
+                <a:latin typeface="Courier New" panose="02070309020205020404" pitchFamily="49" charset="0"/>
+              </a:rPr>
+              <a:t>)              </a:t>
+            </a:r>
+            <a:r>
+              <a:rPr lang="en-US" b="0" i="0" dirty="0">
+                <a:solidFill>
+                  <a:srgbClr val="8B949E"/>
+                </a:solidFill>
+                <a:effectLst/>
+                <a:latin typeface="Courier New" panose="02070309020205020404" pitchFamily="49" charset="0"/>
+              </a:rPr>
+              <a:t># step 2a: fit surrogate</a:t>
+            </a:r>
+            <a:br>
+              <a:rPr lang="en-US" dirty="0"/>
+            </a:br>
+            <a:r>
+              <a:rPr lang="en-US" b="0" i="0" dirty="0">
+                <a:solidFill>
+                  <a:srgbClr val="E0E0E0"/>
+                </a:solidFill>
+                <a:effectLst/>
+                <a:latin typeface="Courier New" panose="02070309020205020404" pitchFamily="49" charset="0"/>
+              </a:rPr>
+              <a:t>  </a:t>
+            </a:r>
+            <a:r>
+              <a:rPr lang="en-US" b="0" i="0" dirty="0" err="1">
+                <a:solidFill>
+                  <a:srgbClr val="E0E0E0"/>
+                </a:solidFill>
+                <a:effectLst/>
+                <a:latin typeface="Courier New" panose="02070309020205020404" pitchFamily="49" charset="0"/>
+              </a:rPr>
+              <a:t>f_best</a:t>
+            </a:r>
+            <a:r>
+              <a:rPr lang="en-US" b="0" i="0" dirty="0">
+                <a:solidFill>
+                  <a:srgbClr val="E0E0E0"/>
+                </a:solidFill>
+                <a:effectLst/>
+                <a:latin typeface="Courier New" panose="02070309020205020404" pitchFamily="49" charset="0"/>
+              </a:rPr>
+              <a:t> = </a:t>
+            </a:r>
+            <a:r>
+              <a:rPr lang="en-US" b="0" i="0" dirty="0" err="1">
+                <a:solidFill>
+                  <a:srgbClr val="E0E0E0"/>
+                </a:solidFill>
+                <a:effectLst/>
+                <a:latin typeface="Courier New" panose="02070309020205020404" pitchFamily="49" charset="0"/>
+              </a:rPr>
+              <a:t>np.</a:t>
+            </a:r>
+            <a:r>
+              <a:rPr lang="en-US" b="0" i="0" dirty="0" err="1">
+                <a:solidFill>
+                  <a:srgbClr val="D2A8FF"/>
+                </a:solidFill>
+                <a:effectLst/>
+                <a:latin typeface="Courier New" panose="02070309020205020404" pitchFamily="49" charset="0"/>
+              </a:rPr>
+              <a:t>max</a:t>
+            </a:r>
+            <a:r>
+              <a:rPr lang="en-US" b="0" i="0" dirty="0">
+                <a:solidFill>
+                  <a:srgbClr val="E0E0E0"/>
+                </a:solidFill>
+                <a:effectLst/>
+                <a:latin typeface="Courier New" panose="02070309020205020404" pitchFamily="49" charset="0"/>
+              </a:rPr>
+              <a:t>(</a:t>
+            </a:r>
+            <a:r>
+              <a:rPr lang="en-US" b="0" i="0" dirty="0" err="1">
+                <a:solidFill>
+                  <a:srgbClr val="E0E0E0"/>
+                </a:solidFill>
+                <a:effectLst/>
+                <a:latin typeface="Courier New" panose="02070309020205020404" pitchFamily="49" charset="0"/>
+              </a:rPr>
+              <a:t>y_obs</a:t>
+            </a:r>
+            <a:r>
+              <a:rPr lang="en-US" b="0" i="0" dirty="0">
+                <a:solidFill>
+                  <a:srgbClr val="E0E0E0"/>
+                </a:solidFill>
+                <a:effectLst/>
+                <a:latin typeface="Courier New" panose="02070309020205020404" pitchFamily="49" charset="0"/>
+              </a:rPr>
+              <a:t>)                </a:t>
+            </a:r>
+            <a:r>
+              <a:rPr lang="en-US" b="0" i="0" dirty="0">
+                <a:solidFill>
+                  <a:srgbClr val="8B949E"/>
+                </a:solidFill>
+                <a:effectLst/>
+                <a:latin typeface="Courier New" panose="02070309020205020404" pitchFamily="49" charset="0"/>
+              </a:rPr>
+              <a:t># current incumbent</a:t>
+            </a:r>
+            <a:br>
+              <a:rPr lang="en-US" dirty="0"/>
+            </a:br>
+            <a:r>
+              <a:rPr lang="en-US" b="0" i="0" dirty="0">
+                <a:solidFill>
+                  <a:srgbClr val="E0E0E0"/>
+                </a:solidFill>
+                <a:effectLst/>
+                <a:latin typeface="Courier New" panose="02070309020205020404" pitchFamily="49" charset="0"/>
+              </a:rPr>
+              <a:t>  </a:t>
+            </a:r>
+            <a:r>
+              <a:rPr lang="en-US" b="0" i="0" dirty="0" err="1">
+                <a:solidFill>
+                  <a:srgbClr val="E0E0E0"/>
+                </a:solidFill>
+                <a:effectLst/>
+                <a:latin typeface="Courier New" panose="02070309020205020404" pitchFamily="49" charset="0"/>
+              </a:rPr>
+              <a:t>ei</a:t>
+            </a:r>
+            <a:r>
+              <a:rPr lang="en-US" b="0" i="0" dirty="0">
+                <a:solidFill>
+                  <a:srgbClr val="E0E0E0"/>
+                </a:solidFill>
+                <a:effectLst/>
+                <a:latin typeface="Courier New" panose="02070309020205020404" pitchFamily="49" charset="0"/>
+              </a:rPr>
+              <a:t> = </a:t>
+            </a:r>
+            <a:r>
+              <a:rPr lang="en-US" b="0" i="0" dirty="0" err="1">
+                <a:solidFill>
+                  <a:srgbClr val="D2A8FF"/>
+                </a:solidFill>
+                <a:effectLst/>
+                <a:latin typeface="Courier New" panose="02070309020205020404" pitchFamily="49" charset="0"/>
+              </a:rPr>
+              <a:t>expected_improvement</a:t>
+            </a:r>
+            <a:r>
+              <a:rPr lang="en-US" b="0" i="0" dirty="0">
+                <a:solidFill>
+                  <a:srgbClr val="E0E0E0"/>
+                </a:solidFill>
+                <a:effectLst/>
+                <a:latin typeface="Courier New" panose="02070309020205020404" pitchFamily="49" charset="0"/>
+              </a:rPr>
+              <a:t>(X, </a:t>
+            </a:r>
+            <a:r>
+              <a:rPr lang="en-US" b="0" i="0" dirty="0" err="1">
+                <a:solidFill>
+                  <a:srgbClr val="E0E0E0"/>
+                </a:solidFill>
+                <a:effectLst/>
+                <a:latin typeface="Courier New" panose="02070309020205020404" pitchFamily="49" charset="0"/>
+              </a:rPr>
+              <a:t>gp</a:t>
+            </a:r>
+            <a:r>
+              <a:rPr lang="en-US" b="0" i="0" dirty="0">
+                <a:solidFill>
+                  <a:srgbClr val="E0E0E0"/>
+                </a:solidFill>
+                <a:effectLst/>
+                <a:latin typeface="Courier New" panose="02070309020205020404" pitchFamily="49" charset="0"/>
+              </a:rPr>
+              <a:t>, </a:t>
+            </a:r>
+            <a:r>
+              <a:rPr lang="en-US" b="0" i="0" dirty="0" err="1">
+                <a:solidFill>
+                  <a:srgbClr val="E0E0E0"/>
+                </a:solidFill>
+                <a:effectLst/>
+                <a:latin typeface="Courier New" panose="02070309020205020404" pitchFamily="49" charset="0"/>
+              </a:rPr>
+              <a:t>f_best</a:t>
+            </a:r>
+            <a:r>
+              <a:rPr lang="en-US" b="0" i="0" dirty="0">
+                <a:solidFill>
+                  <a:srgbClr val="E0E0E0"/>
+                </a:solidFill>
+                <a:effectLst/>
+                <a:latin typeface="Courier New" panose="02070309020205020404" pitchFamily="49" charset="0"/>
+              </a:rPr>
+              <a:t>) </a:t>
+            </a:r>
+            <a:r>
+              <a:rPr lang="en-US" b="0" i="0" dirty="0">
+                <a:solidFill>
+                  <a:srgbClr val="8B949E"/>
+                </a:solidFill>
+                <a:effectLst/>
+                <a:latin typeface="Courier New" panose="02070309020205020404" pitchFamily="49" charset="0"/>
+              </a:rPr>
+              <a:t># step 2b: compute alpha</a:t>
+            </a:r>
+            <a:br>
+              <a:rPr lang="en-US" dirty="0"/>
+            </a:br>
+            <a:r>
+              <a:rPr lang="en-US" b="0" i="0" dirty="0">
+                <a:solidFill>
+                  <a:srgbClr val="E0E0E0"/>
+                </a:solidFill>
+                <a:effectLst/>
+                <a:latin typeface="Courier New" panose="02070309020205020404" pitchFamily="49" charset="0"/>
+              </a:rPr>
+              <a:t>  </a:t>
+            </a:r>
+            <a:r>
+              <a:rPr lang="en-US" b="0" i="0" dirty="0" err="1">
+                <a:solidFill>
+                  <a:srgbClr val="E0E0E0"/>
+                </a:solidFill>
+                <a:effectLst/>
+                <a:latin typeface="Courier New" panose="02070309020205020404" pitchFamily="49" charset="0"/>
+              </a:rPr>
+              <a:t>x_new</a:t>
+            </a:r>
+            <a:r>
+              <a:rPr lang="en-US" b="0" i="0" dirty="0">
+                <a:solidFill>
+                  <a:srgbClr val="E0E0E0"/>
+                </a:solidFill>
+                <a:effectLst/>
+                <a:latin typeface="Courier New" panose="02070309020205020404" pitchFamily="49" charset="0"/>
+              </a:rPr>
+              <a:t> = X[</a:t>
+            </a:r>
+            <a:r>
+              <a:rPr lang="en-US" b="0" i="0" dirty="0" err="1">
+                <a:solidFill>
+                  <a:srgbClr val="E0E0E0"/>
+                </a:solidFill>
+                <a:effectLst/>
+                <a:latin typeface="Courier New" panose="02070309020205020404" pitchFamily="49" charset="0"/>
+              </a:rPr>
+              <a:t>np.</a:t>
+            </a:r>
+            <a:r>
+              <a:rPr lang="en-US" b="0" i="0" dirty="0" err="1">
+                <a:solidFill>
+                  <a:srgbClr val="D2A8FF"/>
+                </a:solidFill>
+                <a:effectLst/>
+                <a:latin typeface="Courier New" panose="02070309020205020404" pitchFamily="49" charset="0"/>
+              </a:rPr>
+              <a:t>argmax</a:t>
+            </a:r>
+            <a:r>
+              <a:rPr lang="en-US" b="0" i="0" dirty="0">
+                <a:solidFill>
+                  <a:srgbClr val="E0E0E0"/>
+                </a:solidFill>
+                <a:effectLst/>
+                <a:latin typeface="Courier New" panose="02070309020205020404" pitchFamily="49" charset="0"/>
+              </a:rPr>
+              <a:t>(</a:t>
+            </a:r>
+            <a:r>
+              <a:rPr lang="en-US" b="0" i="0" dirty="0" err="1">
+                <a:solidFill>
+                  <a:srgbClr val="E0E0E0"/>
+                </a:solidFill>
+                <a:effectLst/>
+                <a:latin typeface="Courier New" panose="02070309020205020404" pitchFamily="49" charset="0"/>
+              </a:rPr>
+              <a:t>ei</a:t>
+            </a:r>
+            <a:r>
+              <a:rPr lang="en-US" b="0" i="0" dirty="0">
+                <a:solidFill>
+                  <a:srgbClr val="E0E0E0"/>
+                </a:solidFill>
+                <a:effectLst/>
+                <a:latin typeface="Courier New" panose="02070309020205020404" pitchFamily="49" charset="0"/>
+              </a:rPr>
+              <a:t>)]             </a:t>
+            </a:r>
+            <a:r>
+              <a:rPr lang="en-US" b="0" i="0" dirty="0">
+                <a:solidFill>
+                  <a:srgbClr val="8B949E"/>
+                </a:solidFill>
+                <a:effectLst/>
+                <a:latin typeface="Courier New" panose="02070309020205020404" pitchFamily="49" charset="0"/>
+              </a:rPr>
+              <a:t># step 2c: argmax alpha</a:t>
+            </a:r>
+            <a:br>
+              <a:rPr lang="en-US" dirty="0"/>
+            </a:br>
+            <a:r>
+              <a:rPr lang="en-US" b="0" i="0" dirty="0">
+                <a:solidFill>
+                  <a:srgbClr val="E0E0E0"/>
+                </a:solidFill>
+                <a:effectLst/>
+                <a:latin typeface="Courier New" panose="02070309020205020404" pitchFamily="49" charset="0"/>
+              </a:rPr>
+              <a:t>  </a:t>
+            </a:r>
+            <a:r>
+              <a:rPr lang="en-US" b="0" i="0" dirty="0" err="1">
+                <a:solidFill>
+                  <a:srgbClr val="E0E0E0"/>
+                </a:solidFill>
+                <a:effectLst/>
+                <a:latin typeface="Courier New" panose="02070309020205020404" pitchFamily="49" charset="0"/>
+              </a:rPr>
+              <a:t>y_new</a:t>
+            </a:r>
+            <a:r>
+              <a:rPr lang="en-US" b="0" i="0" dirty="0">
+                <a:solidFill>
+                  <a:srgbClr val="E0E0E0"/>
+                </a:solidFill>
+                <a:effectLst/>
+                <a:latin typeface="Courier New" panose="02070309020205020404" pitchFamily="49" charset="0"/>
+              </a:rPr>
+              <a:t> = </a:t>
+            </a:r>
+            <a:r>
+              <a:rPr lang="en-US" b="0" i="0" dirty="0">
+                <a:solidFill>
+                  <a:srgbClr val="D2A8FF"/>
+                </a:solidFill>
+                <a:effectLst/>
+                <a:latin typeface="Courier New" panose="02070309020205020404" pitchFamily="49" charset="0"/>
+              </a:rPr>
+              <a:t>objective</a:t>
+            </a:r>
+            <a:r>
+              <a:rPr lang="en-US" b="0" i="0" dirty="0">
+                <a:solidFill>
+                  <a:srgbClr val="E0E0E0"/>
+                </a:solidFill>
+                <a:effectLst/>
+                <a:latin typeface="Courier New" panose="02070309020205020404" pitchFamily="49" charset="0"/>
+              </a:rPr>
+              <a:t>(</a:t>
+            </a:r>
+            <a:r>
+              <a:rPr lang="en-US" b="0" i="0" dirty="0" err="1">
+                <a:solidFill>
+                  <a:srgbClr val="E0E0E0"/>
+                </a:solidFill>
+                <a:effectLst/>
+                <a:latin typeface="Courier New" panose="02070309020205020404" pitchFamily="49" charset="0"/>
+              </a:rPr>
+              <a:t>x_new</a:t>
+            </a:r>
+            <a:r>
+              <a:rPr lang="en-US" b="0" i="0" dirty="0">
+                <a:solidFill>
+                  <a:srgbClr val="E0E0E0"/>
+                </a:solidFill>
+                <a:effectLst/>
+                <a:latin typeface="Courier New" panose="02070309020205020404" pitchFamily="49" charset="0"/>
+              </a:rPr>
+              <a:t>)              </a:t>
+            </a:r>
+            <a:r>
+              <a:rPr lang="en-US" b="0" i="0" dirty="0">
+                <a:solidFill>
+                  <a:srgbClr val="8B949E"/>
+                </a:solidFill>
+                <a:effectLst/>
+                <a:latin typeface="Courier New" panose="02070309020205020404" pitchFamily="49" charset="0"/>
+              </a:rPr>
+              <a:t># step 2d: EXPENSIVE call</a:t>
+            </a:r>
+            <a:br>
+              <a:rPr lang="en-US" dirty="0"/>
+            </a:br>
+            <a:r>
+              <a:rPr lang="en-US" b="0" i="0" dirty="0">
+                <a:solidFill>
+                  <a:srgbClr val="E0E0E0"/>
+                </a:solidFill>
+                <a:effectLst/>
+                <a:latin typeface="Courier New" panose="02070309020205020404" pitchFamily="49" charset="0"/>
+              </a:rPr>
+              <a:t>  </a:t>
+            </a:r>
+            <a:r>
+              <a:rPr lang="en-US" b="0" i="0" dirty="0" err="1">
+                <a:solidFill>
+                  <a:srgbClr val="E0E0E0"/>
+                </a:solidFill>
+                <a:effectLst/>
+                <a:latin typeface="Courier New" panose="02070309020205020404" pitchFamily="49" charset="0"/>
+              </a:rPr>
+              <a:t>X_obs</a:t>
+            </a:r>
+            <a:r>
+              <a:rPr lang="en-US" b="0" i="0" dirty="0">
+                <a:solidFill>
+                  <a:srgbClr val="E0E0E0"/>
+                </a:solidFill>
+                <a:effectLst/>
+                <a:latin typeface="Courier New" panose="02070309020205020404" pitchFamily="49" charset="0"/>
+              </a:rPr>
+              <a:t> = </a:t>
+            </a:r>
+            <a:r>
+              <a:rPr lang="en-US" b="0" i="0" dirty="0" err="1">
+                <a:solidFill>
+                  <a:srgbClr val="E0E0E0"/>
+                </a:solidFill>
+                <a:effectLst/>
+                <a:latin typeface="Courier New" panose="02070309020205020404" pitchFamily="49" charset="0"/>
+              </a:rPr>
+              <a:t>np.</a:t>
+            </a:r>
+            <a:r>
+              <a:rPr lang="en-US" b="0" i="0" dirty="0" err="1">
+                <a:solidFill>
+                  <a:srgbClr val="D2A8FF"/>
+                </a:solidFill>
+                <a:effectLst/>
+                <a:latin typeface="Courier New" panose="02070309020205020404" pitchFamily="49" charset="0"/>
+              </a:rPr>
+              <a:t>vstack</a:t>
+            </a:r>
+            <a:r>
+              <a:rPr lang="en-US" b="0" i="0" dirty="0">
+                <a:solidFill>
+                  <a:srgbClr val="E0E0E0"/>
+                </a:solidFill>
+                <a:effectLst/>
+                <a:latin typeface="Courier New" panose="02070309020205020404" pitchFamily="49" charset="0"/>
+              </a:rPr>
+              <a:t>([</a:t>
+            </a:r>
+            <a:r>
+              <a:rPr lang="en-US" b="0" i="0" dirty="0" err="1">
+                <a:solidFill>
+                  <a:srgbClr val="E0E0E0"/>
+                </a:solidFill>
+                <a:effectLst/>
+                <a:latin typeface="Courier New" panose="02070309020205020404" pitchFamily="49" charset="0"/>
+              </a:rPr>
+              <a:t>X_obs</a:t>
+            </a:r>
+            <a:r>
+              <a:rPr lang="en-US" b="0" i="0" dirty="0">
+                <a:solidFill>
+                  <a:srgbClr val="E0E0E0"/>
+                </a:solidFill>
+                <a:effectLst/>
+                <a:latin typeface="Courier New" panose="02070309020205020404" pitchFamily="49" charset="0"/>
+              </a:rPr>
+              <a:t>, </a:t>
+            </a:r>
+            <a:r>
+              <a:rPr lang="en-US" b="0" i="0" dirty="0" err="1">
+                <a:solidFill>
+                  <a:srgbClr val="E0E0E0"/>
+                </a:solidFill>
+                <a:effectLst/>
+                <a:latin typeface="Courier New" panose="02070309020205020404" pitchFamily="49" charset="0"/>
+              </a:rPr>
+              <a:t>x_new</a:t>
+            </a:r>
+            <a:r>
+              <a:rPr lang="en-US" b="0" i="0" dirty="0">
+                <a:solidFill>
+                  <a:srgbClr val="E0E0E0"/>
+                </a:solidFill>
+                <a:effectLst/>
+                <a:latin typeface="Courier New" panose="02070309020205020404" pitchFamily="49" charset="0"/>
+              </a:rPr>
+              <a:t>])     </a:t>
+            </a:r>
+            <a:r>
+              <a:rPr lang="en-US" b="0" i="0" dirty="0">
+                <a:solidFill>
+                  <a:srgbClr val="8B949E"/>
+                </a:solidFill>
+                <a:effectLst/>
+                <a:latin typeface="Courier New" panose="02070309020205020404" pitchFamily="49" charset="0"/>
+              </a:rPr>
+              <a:t># step 2e: update data</a:t>
+            </a:r>
+            <a:br>
+              <a:rPr lang="en-US" dirty="0"/>
+            </a:br>
+            <a:r>
+              <a:rPr lang="en-US" b="0" i="0" dirty="0">
+                <a:solidFill>
+                  <a:srgbClr val="E0E0E0"/>
+                </a:solidFill>
+                <a:effectLst/>
+                <a:latin typeface="Courier New" panose="02070309020205020404" pitchFamily="49" charset="0"/>
+              </a:rPr>
+              <a:t>  </a:t>
+            </a:r>
+            <a:r>
+              <a:rPr lang="en-US" b="0" i="0" dirty="0" err="1">
+                <a:solidFill>
+                  <a:srgbClr val="E0E0E0"/>
+                </a:solidFill>
+                <a:effectLst/>
+                <a:latin typeface="Courier New" panose="02070309020205020404" pitchFamily="49" charset="0"/>
+              </a:rPr>
+              <a:t>y_obs</a:t>
+            </a:r>
+            <a:r>
+              <a:rPr lang="en-US" b="0" i="0" dirty="0">
+                <a:solidFill>
+                  <a:srgbClr val="E0E0E0"/>
+                </a:solidFill>
+                <a:effectLst/>
+                <a:latin typeface="Courier New" panose="02070309020205020404" pitchFamily="49" charset="0"/>
+              </a:rPr>
+              <a:t> = </a:t>
+            </a:r>
+            <a:r>
+              <a:rPr lang="en-US" b="0" i="0" dirty="0" err="1">
+                <a:solidFill>
+                  <a:srgbClr val="E0E0E0"/>
+                </a:solidFill>
+                <a:effectLst/>
+                <a:latin typeface="Courier New" panose="02070309020205020404" pitchFamily="49" charset="0"/>
+              </a:rPr>
+              <a:t>np.</a:t>
+            </a:r>
+            <a:r>
+              <a:rPr lang="en-US" b="0" i="0" dirty="0" err="1">
+                <a:solidFill>
+                  <a:srgbClr val="D2A8FF"/>
+                </a:solidFill>
+                <a:effectLst/>
+                <a:latin typeface="Courier New" panose="02070309020205020404" pitchFamily="49" charset="0"/>
+              </a:rPr>
+              <a:t>vstack</a:t>
+            </a:r>
+            <a:r>
+              <a:rPr lang="en-US" b="0" i="0" dirty="0">
+                <a:solidFill>
+                  <a:srgbClr val="E0E0E0"/>
+                </a:solidFill>
+                <a:effectLst/>
+                <a:latin typeface="Courier New" panose="02070309020205020404" pitchFamily="49" charset="0"/>
+              </a:rPr>
+              <a:t>([</a:t>
+            </a:r>
+            <a:r>
+              <a:rPr lang="en-US" b="0" i="0" dirty="0" err="1">
+                <a:solidFill>
+                  <a:srgbClr val="E0E0E0"/>
+                </a:solidFill>
+                <a:effectLst/>
+                <a:latin typeface="Courier New" panose="02070309020205020404" pitchFamily="49" charset="0"/>
+              </a:rPr>
+              <a:t>y_obs</a:t>
+            </a:r>
+            <a:r>
+              <a:rPr lang="en-US" b="0" i="0" dirty="0">
+                <a:solidFill>
+                  <a:srgbClr val="E0E0E0"/>
+                </a:solidFill>
+                <a:effectLst/>
+                <a:latin typeface="Courier New" panose="02070309020205020404" pitchFamily="49" charset="0"/>
+              </a:rPr>
+              <a:t>, </a:t>
+            </a:r>
+            <a:r>
+              <a:rPr lang="en-US" b="0" i="0" dirty="0" err="1">
+                <a:solidFill>
+                  <a:srgbClr val="E0E0E0"/>
+                </a:solidFill>
+                <a:effectLst/>
+                <a:latin typeface="Courier New" panose="02070309020205020404" pitchFamily="49" charset="0"/>
+              </a:rPr>
+              <a:t>y_new</a:t>
+            </a:r>
+            <a:r>
+              <a:rPr lang="en-US" b="0" i="0" dirty="0">
+                <a:solidFill>
+                  <a:srgbClr val="E0E0E0"/>
+                </a:solidFill>
+                <a:effectLst/>
+                <a:latin typeface="Courier New" panose="02070309020205020404" pitchFamily="49" charset="0"/>
+              </a:rPr>
+              <a:t>])</a:t>
+            </a:r>
+            <a:endParaRPr lang="en-US" dirty="0"/>
+          </a:p>
+        </p:txBody>
+      </p:sp>
     </p:spTree>
   </p:cSld>
   <p:clrMapOvr>
@@ -16912,6 +17874,304 @@
 </file>
 
 <file path=ppt/slides/slide35.xml><?xml version="1.0" encoding="utf-8"?>
+<p:sld xmlns:a="http://schemas.openxmlformats.org/drawingml/2006/main" xmlns:r="http://schemas.openxmlformats.org/officeDocument/2006/relationships" xmlns:p="http://schemas.openxmlformats.org/presentationml/2006/main">
+  <p:cSld>
+    <p:spTree>
+      <p:nvGrpSpPr>
+        <p:cNvPr id="1" name=""/>
+        <p:cNvGrpSpPr/>
+        <p:nvPr/>
+      </p:nvGrpSpPr>
+      <p:grpSpPr>
+        <a:xfrm>
+          <a:off x="0" y="0"/>
+          <a:ext cx="0" cy="0"/>
+          <a:chOff x="0" y="0"/>
+          <a:chExt cx="0" cy="0"/>
+        </a:xfrm>
+      </p:grpSpPr>
+      <p:sp>
+        <p:nvSpPr>
+          <p:cNvPr id="2" name="TextBox 1"/>
+          <p:cNvSpPr txBox="1"/>
+          <p:nvPr/>
+        </p:nvSpPr>
+        <p:spPr>
+          <a:xfrm>
+            <a:off x="822960" y="365760"/>
+            <a:ext cx="10058400" cy="548640"/>
+          </a:xfrm>
+          <a:prstGeom prst="rect">
+            <a:avLst/>
+          </a:prstGeom>
+          <a:noFill/>
+        </p:spPr>
+        <p:txBody>
+          <a:bodyPr wrap="square">
+            <a:spAutoFit/>
+          </a:bodyPr>
+          <a:lstStyle/>
+          <a:p>
+            <a:pPr algn="l">
+              <a:defRPr sz="2800" b="1">
+                <a:solidFill>
+                  <a:srgbClr val="1A1A1A"/>
+                </a:solidFill>
+                <a:latin typeface="Archivo"/>
+              </a:defRPr>
+            </a:pPr>
+            <a:r>
+              <a:t>BO vs. Random Search</a:t>
+            </a:r>
+          </a:p>
+        </p:txBody>
+      </p:sp>
+      <p:sp>
+        <p:nvSpPr>
+          <p:cNvPr id="3" name="TextBox 2"/>
+          <p:cNvSpPr txBox="1"/>
+          <p:nvPr/>
+        </p:nvSpPr>
+        <p:spPr>
+          <a:xfrm>
+            <a:off x="822960" y="914400"/>
+            <a:ext cx="10058400" cy="502920"/>
+          </a:xfrm>
+          <a:prstGeom prst="rect">
+            <a:avLst/>
+          </a:prstGeom>
+          <a:noFill/>
+        </p:spPr>
+        <p:txBody>
+          <a:bodyPr wrap="square">
+            <a:spAutoFit/>
+          </a:bodyPr>
+          <a:lstStyle/>
+          <a:p>
+            <a:pPr algn="l">
+              <a:defRPr sz="1600" b="0">
+                <a:solidFill>
+                  <a:srgbClr val="444444"/>
+                </a:solidFill>
+                <a:latin typeface="Nunito"/>
+              </a:defRPr>
+            </a:pPr>
+            <a:r>
+              <a:t>50 independent random-search trials with the same evaluation budget (10 calls) compared against BO:</a:t>
+            </a:r>
+          </a:p>
+        </p:txBody>
+      </p:sp>
+      <p:pic>
+        <p:nvPicPr>
+          <p:cNvPr id="4" name="Picture 3" descr="bo_vs_random.png"/>
+          <p:cNvPicPr>
+            <a:picLocks noChangeAspect="1"/>
+          </p:cNvPicPr>
+          <p:nvPr/>
+        </p:nvPicPr>
+        <p:blipFill>
+          <a:blip r:embed="rId2"/>
+          <a:stretch>
+            <a:fillRect/>
+          </a:stretch>
+        </p:blipFill>
+        <p:spPr>
+          <a:xfrm>
+            <a:off x="3145277" y="1310188"/>
+            <a:ext cx="5727819" cy="3534186"/>
+          </a:xfrm>
+          <a:prstGeom prst="rect">
+            <a:avLst/>
+          </a:prstGeom>
+        </p:spPr>
+      </p:pic>
+      <p:sp>
+        <p:nvSpPr>
+          <p:cNvPr id="5" name="TextBox 4"/>
+          <p:cNvSpPr txBox="1"/>
+          <p:nvPr/>
+        </p:nvSpPr>
+        <p:spPr>
+          <a:xfrm>
+            <a:off x="1188720" y="4937760"/>
+            <a:ext cx="9601200" cy="323165"/>
+          </a:xfrm>
+          <a:prstGeom prst="rect">
+            <a:avLst/>
+          </a:prstGeom>
+          <a:noFill/>
+        </p:spPr>
+        <p:txBody>
+          <a:bodyPr wrap="square">
+            <a:spAutoFit/>
+          </a:bodyPr>
+          <a:lstStyle/>
+          <a:p>
+            <a:pPr algn="l">
+              <a:defRPr sz="1500" b="0">
+                <a:solidFill>
+                  <a:srgbClr val="444444"/>
+                </a:solidFill>
+                <a:latin typeface="Nunito"/>
+              </a:defRPr>
+            </a:pPr>
+            <a:r>
+              <a:rPr dirty="0"/>
+              <a:t>•  </a:t>
+            </a:r>
+            <a:r>
+              <a:rPr b="1" dirty="0"/>
+              <a:t>BO</a:t>
+            </a:r>
+            <a:r>
+              <a:rPr dirty="0"/>
+              <a:t> (blue) reaches the optimum in ~6 evaluations — deterministic given initial samples</a:t>
+            </a:r>
+          </a:p>
+        </p:txBody>
+      </p:sp>
+      <p:sp>
+        <p:nvSpPr>
+          <p:cNvPr id="6" name="TextBox 5"/>
+          <p:cNvSpPr txBox="1"/>
+          <p:nvPr/>
+        </p:nvSpPr>
+        <p:spPr>
+          <a:xfrm>
+            <a:off x="1188720" y="5257800"/>
+            <a:ext cx="9601200" cy="323165"/>
+          </a:xfrm>
+          <a:prstGeom prst="rect">
+            <a:avLst/>
+          </a:prstGeom>
+          <a:noFill/>
+        </p:spPr>
+        <p:txBody>
+          <a:bodyPr wrap="square">
+            <a:spAutoFit/>
+          </a:bodyPr>
+          <a:lstStyle/>
+          <a:p>
+            <a:pPr algn="l">
+              <a:defRPr sz="1500" b="0">
+                <a:solidFill>
+                  <a:srgbClr val="444444"/>
+                </a:solidFill>
+                <a:latin typeface="Nunito"/>
+              </a:defRPr>
+            </a:pPr>
+            <a:r>
+              <a:rPr dirty="0"/>
+              <a:t>•  </a:t>
+            </a:r>
+            <a:r>
+              <a:rPr b="1" dirty="0"/>
+              <a:t>Random search </a:t>
+            </a:r>
+            <a:r>
+              <a:rPr dirty="0"/>
+              <a:t>(red band = 10th–90th percentile) has high variance and often fails within budget</a:t>
+            </a:r>
+          </a:p>
+        </p:txBody>
+      </p:sp>
+      <p:sp>
+        <p:nvSpPr>
+          <p:cNvPr id="7" name="TextBox 6"/>
+          <p:cNvSpPr txBox="1"/>
+          <p:nvPr/>
+        </p:nvSpPr>
+        <p:spPr>
+          <a:xfrm>
+            <a:off x="1188720" y="5577840"/>
+            <a:ext cx="9601200" cy="323165"/>
+          </a:xfrm>
+          <a:prstGeom prst="rect">
+            <a:avLst/>
+          </a:prstGeom>
+          <a:noFill/>
+        </p:spPr>
+        <p:txBody>
+          <a:bodyPr wrap="square">
+            <a:spAutoFit/>
+          </a:bodyPr>
+          <a:lstStyle/>
+          <a:p>
+            <a:pPr algn="l">
+              <a:defRPr sz="1500" b="0">
+                <a:solidFill>
+                  <a:srgbClr val="444444"/>
+                </a:solidFill>
+                <a:latin typeface="Nunito"/>
+              </a:defRPr>
+            </a:pPr>
+            <a:r>
+              <a:rPr dirty="0"/>
+              <a:t>•  The gap widens dramatically on more expensive or higher-dimensional problems</a:t>
+            </a:r>
+          </a:p>
+        </p:txBody>
+      </p:sp>
+      <p:sp>
+        <p:nvSpPr>
+          <p:cNvPr id="8" name="Rectangle 7">
+            <a:extLst>
+              <a:ext uri="{FF2B5EF4-FFF2-40B4-BE49-F238E27FC236}">
+                <a16:creationId xmlns:a16="http://schemas.microsoft.com/office/drawing/2014/main" id="{C42AFBE7-4ACF-8415-2500-1772ABB073A1}"/>
+              </a:ext>
+            </a:extLst>
+          </p:cNvPr>
+          <p:cNvSpPr/>
+          <p:nvPr/>
+        </p:nvSpPr>
+        <p:spPr>
+          <a:xfrm>
+            <a:off x="822960" y="826770"/>
+            <a:ext cx="3657600" cy="38100"/>
+          </a:xfrm>
+          <a:prstGeom prst="rect">
+            <a:avLst/>
+          </a:prstGeom>
+          <a:solidFill>
+            <a:srgbClr val="1A1A1A"/>
+          </a:solidFill>
+          <a:ln>
+            <a:noFill/>
+          </a:ln>
+        </p:spPr>
+        <p:style>
+          <a:lnRef idx="1">
+            <a:schemeClr val="accent1"/>
+          </a:lnRef>
+          <a:fillRef idx="3">
+            <a:schemeClr val="accent1"/>
+          </a:fillRef>
+          <a:effectRef idx="2">
+            <a:schemeClr val="accent1"/>
+          </a:effectRef>
+          <a:fontRef idx="minor">
+            <a:schemeClr val="lt1"/>
+          </a:fontRef>
+        </p:style>
+        <p:txBody>
+          <a:bodyPr rtlCol="0" anchor="ctr"/>
+          <a:lstStyle/>
+          <a:p>
+            <a:pPr algn="ctr"/>
+            <a:endParaRPr/>
+          </a:p>
+        </p:txBody>
+      </p:sp>
+    </p:spTree>
+  </p:cSld>
+  <p:clrMapOvr>
+    <a:masterClrMapping/>
+  </p:clrMapOvr>
+</p:sld>
+</file>
+
+<file path=ppt/slides/slide36.xml><?xml version="1.0" encoding="utf-8"?>
 <p:sld xmlns:a="http://schemas.openxmlformats.org/drawingml/2006/main" xmlns:r="http://schemas.openxmlformats.org/officeDocument/2006/relationships" xmlns:p="http://schemas.openxmlformats.org/presentationml/2006/main">
   <p:cSld>
     <p:spTree>
@@ -17285,7 +18545,7 @@
 </p:sld>
 </file>
 
-<file path=ppt/slides/slide36.xml><?xml version="1.0" encoding="utf-8"?>
+<file path=ppt/slides/slide37.xml><?xml version="1.0" encoding="utf-8"?>
 <p:sld xmlns:a="http://schemas.openxmlformats.org/drawingml/2006/main" xmlns:r="http://schemas.openxmlformats.org/officeDocument/2006/relationships" xmlns:p="http://schemas.openxmlformats.org/presentationml/2006/main">
   <p:cSld>
     <p:spTree>
@@ -17528,7 +18788,7 @@
 </p:sld>
 </file>
 
-<file path=ppt/slides/slide37.xml><?xml version="1.0" encoding="utf-8"?>
+<file path=ppt/slides/slide38.xml><?xml version="1.0" encoding="utf-8"?>
 <p:sld xmlns:a="http://schemas.openxmlformats.org/drawingml/2006/main" xmlns:r="http://schemas.openxmlformats.org/officeDocument/2006/relationships" xmlns:p="http://schemas.openxmlformats.org/presentationml/2006/main">
   <p:cSld>
     <p:spTree>
@@ -17835,7 +19095,7 @@
 </p:sld>
 </file>
 
-<file path=ppt/slides/slide38.xml><?xml version="1.0" encoding="utf-8"?>
+<file path=ppt/slides/slide39.xml><?xml version="1.0" encoding="utf-8"?>
 <p:sld xmlns:a="http://schemas.openxmlformats.org/drawingml/2006/main" xmlns:r="http://schemas.openxmlformats.org/officeDocument/2006/relationships" xmlns:p="http://schemas.openxmlformats.org/presentationml/2006/main">
   <p:cSld>
     <p:spTree>
@@ -18595,7 +19855,452 @@
 </p:sld>
 </file>
 
-<file path=ppt/slides/slide39.xml><?xml version="1.0" encoding="utf-8"?>
+<file path=ppt/slides/slide4.xml><?xml version="1.0" encoding="utf-8"?>
+<p:sld xmlns:a="http://schemas.openxmlformats.org/drawingml/2006/main" xmlns:r="http://schemas.openxmlformats.org/officeDocument/2006/relationships" xmlns:p="http://schemas.openxmlformats.org/presentationml/2006/main">
+  <p:cSld>
+    <p:spTree>
+      <p:nvGrpSpPr>
+        <p:cNvPr id="1" name=""/>
+        <p:cNvGrpSpPr/>
+        <p:nvPr/>
+      </p:nvGrpSpPr>
+      <p:grpSpPr>
+        <a:xfrm>
+          <a:off x="0" y="0"/>
+          <a:ext cx="0" cy="0"/>
+          <a:chOff x="0" y="0"/>
+          <a:chExt cx="0" cy="0"/>
+        </a:xfrm>
+      </p:grpSpPr>
+      <p:sp>
+        <p:nvSpPr>
+          <p:cNvPr id="2" name="TextBox 1"/>
+          <p:cNvSpPr txBox="1"/>
+          <p:nvPr/>
+        </p:nvSpPr>
+        <p:spPr>
+          <a:xfrm>
+            <a:off x="822960" y="457200"/>
+            <a:ext cx="10058400" cy="640080"/>
+          </a:xfrm>
+          <a:prstGeom prst="rect">
+            <a:avLst/>
+          </a:prstGeom>
+          <a:noFill/>
+        </p:spPr>
+        <p:txBody>
+          <a:bodyPr wrap="square">
+            <a:spAutoFit/>
+          </a:bodyPr>
+          <a:lstStyle/>
+          <a:p>
+            <a:pPr algn="l">
+              <a:defRPr sz="2800" b="1">
+                <a:solidFill>
+                  <a:srgbClr val="1A1A1A"/>
+                </a:solidFill>
+                <a:latin typeface="Archivo"/>
+              </a:defRPr>
+            </a:pPr>
+            <a:r>
+              <a:t>The Optimisation Problem</a:t>
+            </a:r>
+          </a:p>
+        </p:txBody>
+      </p:sp>
+      <p:sp>
+        <p:nvSpPr>
+          <p:cNvPr id="3" name="Rectangle 2"/>
+          <p:cNvSpPr/>
+          <p:nvPr/>
+        </p:nvSpPr>
+        <p:spPr>
+          <a:xfrm>
+            <a:off x="822960" y="960120"/>
+            <a:ext cx="3657600" cy="38100"/>
+          </a:xfrm>
+          <a:prstGeom prst="rect">
+            <a:avLst/>
+          </a:prstGeom>
+          <a:solidFill>
+            <a:srgbClr val="1A1A1A"/>
+          </a:solidFill>
+          <a:ln>
+            <a:noFill/>
+          </a:ln>
+        </p:spPr>
+        <p:style>
+          <a:lnRef idx="1">
+            <a:schemeClr val="accent1"/>
+          </a:lnRef>
+          <a:fillRef idx="3">
+            <a:schemeClr val="accent1"/>
+          </a:fillRef>
+          <a:effectRef idx="2">
+            <a:schemeClr val="accent1"/>
+          </a:effectRef>
+          <a:fontRef idx="minor">
+            <a:schemeClr val="lt1"/>
+          </a:fontRef>
+        </p:style>
+        <p:txBody>
+          <a:bodyPr rtlCol="0" anchor="ctr"/>
+          <a:lstStyle/>
+          <a:p>
+            <a:pPr algn="ctr"/>
+            <a:endParaRPr/>
+          </a:p>
+        </p:txBody>
+      </p:sp>
+      <p:sp>
+        <p:nvSpPr>
+          <p:cNvPr id="4" name="TextBox 3"/>
+          <p:cNvSpPr txBox="1"/>
+          <p:nvPr/>
+        </p:nvSpPr>
+        <p:spPr>
+          <a:xfrm>
+            <a:off x="822960" y="1188720"/>
+            <a:ext cx="9601200" cy="411480"/>
+          </a:xfrm>
+          <a:prstGeom prst="rect">
+            <a:avLst/>
+          </a:prstGeom>
+          <a:noFill/>
+        </p:spPr>
+        <p:txBody>
+          <a:bodyPr wrap="square">
+            <a:spAutoFit/>
+          </a:bodyPr>
+          <a:lstStyle/>
+          <a:p>
+            <a:pPr algn="l">
+              <a:defRPr sz="1800" b="0">
+                <a:solidFill>
+                  <a:srgbClr val="444444"/>
+                </a:solidFill>
+                <a:latin typeface="Nunito"/>
+              </a:defRPr>
+            </a:pPr>
+            <a:r>
+              <a:t>We seek the global optimum of an objective function:</a:t>
+            </a:r>
+          </a:p>
+        </p:txBody>
+      </p:sp>
+      <p:sp>
+        <p:nvSpPr>
+          <p:cNvPr id="5" name="Rectangle 4"/>
+          <p:cNvSpPr/>
+          <p:nvPr/>
+        </p:nvSpPr>
+        <p:spPr>
+          <a:xfrm>
+            <a:off x="822960" y="1572768"/>
+            <a:ext cx="10058400" cy="502920"/>
+          </a:xfrm>
+          <a:prstGeom prst="rect">
+            <a:avLst/>
+          </a:prstGeom>
+          <a:solidFill>
+            <a:srgbClr val="F5F5F5"/>
+          </a:solidFill>
+          <a:ln>
+            <a:noFill/>
+          </a:ln>
+        </p:spPr>
+        <p:style>
+          <a:lnRef idx="1">
+            <a:schemeClr val="accent1"/>
+          </a:lnRef>
+          <a:fillRef idx="3">
+            <a:schemeClr val="accent1"/>
+          </a:fillRef>
+          <a:effectRef idx="2">
+            <a:schemeClr val="accent1"/>
+          </a:effectRef>
+          <a:fontRef idx="minor">
+            <a:schemeClr val="lt1"/>
+          </a:fontRef>
+        </p:style>
+        <p:txBody>
+          <a:bodyPr rtlCol="0" anchor="ctr"/>
+          <a:lstStyle/>
+          <a:p>
+            <a:pPr algn="ctr"/>
+            <a:endParaRPr/>
+          </a:p>
+        </p:txBody>
+      </p:sp>
+      <p:sp>
+        <p:nvSpPr>
+          <p:cNvPr id="6" name="Rectangle 5"/>
+          <p:cNvSpPr/>
+          <p:nvPr/>
+        </p:nvSpPr>
+        <p:spPr>
+          <a:xfrm>
+            <a:off x="822960" y="1572768"/>
+            <a:ext cx="50800" cy="502920"/>
+          </a:xfrm>
+          <a:prstGeom prst="rect">
+            <a:avLst/>
+          </a:prstGeom>
+          <a:solidFill>
+            <a:srgbClr val="FF3300"/>
+          </a:solidFill>
+          <a:ln>
+            <a:noFill/>
+          </a:ln>
+        </p:spPr>
+        <p:style>
+          <a:lnRef idx="1">
+            <a:schemeClr val="accent1"/>
+          </a:lnRef>
+          <a:fillRef idx="3">
+            <a:schemeClr val="accent1"/>
+          </a:fillRef>
+          <a:effectRef idx="2">
+            <a:schemeClr val="accent1"/>
+          </a:effectRef>
+          <a:fontRef idx="minor">
+            <a:schemeClr val="lt1"/>
+          </a:fontRef>
+        </p:style>
+        <p:txBody>
+          <a:bodyPr rtlCol="0" anchor="ctr"/>
+          <a:lstStyle/>
+          <a:p>
+            <a:pPr algn="ctr"/>
+            <a:endParaRPr/>
+          </a:p>
+        </p:txBody>
+      </p:sp>
+      <p:sp>
+        <p:nvSpPr>
+          <p:cNvPr id="7" name="TextBox 6"/>
+          <p:cNvSpPr txBox="1"/>
+          <p:nvPr/>
+        </p:nvSpPr>
+        <p:spPr>
+          <a:xfrm>
+            <a:off x="1005840" y="1618488"/>
+            <a:ext cx="9601200" cy="411480"/>
+          </a:xfrm>
+          <a:prstGeom prst="rect">
+            <a:avLst/>
+          </a:prstGeom>
+          <a:noFill/>
+        </p:spPr>
+        <p:txBody>
+          <a:bodyPr wrap="square">
+            <a:spAutoFit/>
+          </a:bodyPr>
+          <a:lstStyle/>
+          <a:p>
+            <a:pPr algn="l">
+              <a:defRPr sz="2000" b="0">
+                <a:solidFill>
+                  <a:srgbClr val="1A1A1A"/>
+                </a:solidFill>
+                <a:latin typeface="Cambria Math"/>
+              </a:defRPr>
+            </a:pPr>
+            <a:r>
+              <a:t>x* = argmax  f(x),    x ∈ 𝒳</a:t>
+            </a:r>
+          </a:p>
+        </p:txBody>
+      </p:sp>
+      <p:sp>
+        <p:nvSpPr>
+          <p:cNvPr id="8" name="TextBox 7"/>
+          <p:cNvSpPr txBox="1"/>
+          <p:nvPr/>
+        </p:nvSpPr>
+        <p:spPr>
+          <a:xfrm>
+            <a:off x="822960" y="2167128"/>
+            <a:ext cx="9601200" cy="411480"/>
+          </a:xfrm>
+          <a:prstGeom prst="rect">
+            <a:avLst/>
+          </a:prstGeom>
+          <a:noFill/>
+        </p:spPr>
+        <p:txBody>
+          <a:bodyPr wrap="square">
+            <a:spAutoFit/>
+          </a:bodyPr>
+          <a:lstStyle/>
+          <a:p>
+            <a:pPr algn="l">
+              <a:defRPr sz="1800" b="0">
+                <a:solidFill>
+                  <a:srgbClr val="444444"/>
+                </a:solidFill>
+                <a:latin typeface="Nunito"/>
+              </a:defRPr>
+            </a:pPr>
+            <a:r>
+              <a:t>where f has properties that make classical methods impractical:</a:t>
+            </a:r>
+          </a:p>
+        </p:txBody>
+      </p:sp>
+      <p:sp>
+        <p:nvSpPr>
+          <p:cNvPr id="9" name="TextBox 8"/>
+          <p:cNvSpPr txBox="1"/>
+          <p:nvPr/>
+        </p:nvSpPr>
+        <p:spPr>
+          <a:xfrm>
+            <a:off x="1188720" y="2551176"/>
+            <a:ext cx="9601200" cy="411480"/>
+          </a:xfrm>
+          <a:prstGeom prst="rect">
+            <a:avLst/>
+          </a:prstGeom>
+          <a:noFill/>
+        </p:spPr>
+        <p:txBody>
+          <a:bodyPr wrap="square">
+            <a:spAutoFit/>
+          </a:bodyPr>
+          <a:lstStyle/>
+          <a:p>
+            <a:pPr algn="l">
+              <a:defRPr sz="1800" b="0">
+                <a:solidFill>
+                  <a:srgbClr val="444444"/>
+                </a:solidFill>
+                <a:latin typeface="Nunito"/>
+              </a:defRPr>
+            </a:pPr>
+            <a:r>
+              <a:t>•  Expensive to evaluate — each call may be a CFD simulation (hours), a physical experiment (days), or a neural-network training run</a:t>
+            </a:r>
+          </a:p>
+        </p:txBody>
+      </p:sp>
+      <p:sp>
+        <p:nvSpPr>
+          <p:cNvPr id="10" name="TextBox 9"/>
+          <p:cNvSpPr txBox="1"/>
+          <p:nvPr/>
+        </p:nvSpPr>
+        <p:spPr>
+          <a:xfrm>
+            <a:off x="1188720" y="2935224"/>
+            <a:ext cx="9601200" cy="411480"/>
+          </a:xfrm>
+          <a:prstGeom prst="rect">
+            <a:avLst/>
+          </a:prstGeom>
+          <a:noFill/>
+        </p:spPr>
+        <p:txBody>
+          <a:bodyPr wrap="square">
+            <a:spAutoFit/>
+          </a:bodyPr>
+          <a:lstStyle/>
+          <a:p>
+            <a:pPr algn="l">
+              <a:defRPr sz="1800" b="0">
+                <a:solidFill>
+                  <a:srgbClr val="444444"/>
+                </a:solidFill>
+                <a:latin typeface="Nunito"/>
+              </a:defRPr>
+            </a:pPr>
+            <a:r>
+              <a:t>•  Black-box — no closed-form expression is available; we only observe input-output pairs (xᵢ, yᵢ)</a:t>
+            </a:r>
+          </a:p>
+        </p:txBody>
+      </p:sp>
+      <p:sp>
+        <p:nvSpPr>
+          <p:cNvPr id="11" name="TextBox 10"/>
+          <p:cNvSpPr txBox="1"/>
+          <p:nvPr/>
+        </p:nvSpPr>
+        <p:spPr>
+          <a:xfrm>
+            <a:off x="1188720" y="3319272"/>
+            <a:ext cx="9601200" cy="411480"/>
+          </a:xfrm>
+          <a:prstGeom prst="rect">
+            <a:avLst/>
+          </a:prstGeom>
+          <a:noFill/>
+        </p:spPr>
+        <p:txBody>
+          <a:bodyPr wrap="square">
+            <a:spAutoFit/>
+          </a:bodyPr>
+          <a:lstStyle/>
+          <a:p>
+            <a:pPr algn="l">
+              <a:defRPr sz="1800" b="0">
+                <a:solidFill>
+                  <a:srgbClr val="444444"/>
+                </a:solidFill>
+                <a:latin typeface="Nunito"/>
+              </a:defRPr>
+            </a:pPr>
+            <a:r>
+              <a:t>•  No gradient information — derivatives of f are unavailable, so gradient-based optimisers cannot be used</a:t>
+            </a:r>
+          </a:p>
+        </p:txBody>
+      </p:sp>
+      <p:sp>
+        <p:nvSpPr>
+          <p:cNvPr id="12" name="TextBox 11"/>
+          <p:cNvSpPr txBox="1"/>
+          <p:nvPr/>
+        </p:nvSpPr>
+        <p:spPr>
+          <a:xfrm>
+            <a:off x="1188720" y="3703320"/>
+            <a:ext cx="9601200" cy="411480"/>
+          </a:xfrm>
+          <a:prstGeom prst="rect">
+            <a:avLst/>
+          </a:prstGeom>
+          <a:noFill/>
+        </p:spPr>
+        <p:txBody>
+          <a:bodyPr wrap="square">
+            <a:spAutoFit/>
+          </a:bodyPr>
+          <a:lstStyle/>
+          <a:p>
+            <a:pPr algn="l">
+              <a:defRPr sz="1800" b="0">
+                <a:solidFill>
+                  <a:srgbClr val="444444"/>
+                </a:solidFill>
+                <a:latin typeface="Nunito"/>
+              </a:defRPr>
+            </a:pPr>
+            <a:r>
+              <a:t>•  Possibly noisy — observations may be corrupted: y = f(x) + ε, where ε ~ N(0, σ²ₙ)</a:t>
+            </a:r>
+          </a:p>
+        </p:txBody>
+      </p:sp>
+    </p:spTree>
+  </p:cSld>
+  <p:clrMapOvr>
+    <a:masterClrMapping/>
+  </p:clrMapOvr>
+</p:sld>
+</file>
+
+<file path=ppt/slides/slide40.xml><?xml version="1.0" encoding="utf-8"?>
 <p:sld xmlns:a="http://schemas.openxmlformats.org/drawingml/2006/main" xmlns:r="http://schemas.openxmlformats.org/officeDocument/2006/relationships" xmlns:p="http://schemas.openxmlformats.org/presentationml/2006/main">
   <p:cSld>
     <p:spTree>
@@ -19138,7 +20843,7 @@
 </p:sld>
 </file>
 
-<file path=ppt/slides/slide4.xml><?xml version="1.0" encoding="utf-8"?>
+<file path=ppt/slides/slide41.xml><?xml version="1.0" encoding="utf-8"?>
 <p:sld xmlns:a="http://schemas.openxmlformats.org/drawingml/2006/main" xmlns:r="http://schemas.openxmlformats.org/officeDocument/2006/relationships" xmlns:p="http://schemas.openxmlformats.org/presentationml/2006/main">
   <p:cSld>
     <p:spTree>
@@ -19186,7 +20891,7 @@
               </a:defRPr>
             </a:pPr>
             <a:r>
-              <a:t>The Optimisation Problem</a:t>
+              <a:t>References &amp; Further Reading</a:t>
             </a:r>
           </a:p>
         </p:txBody>
@@ -19243,8 +20948,8 @@
         </p:nvSpPr>
         <p:spPr>
           <a:xfrm>
-            <a:off x="822960" y="1188720"/>
-            <a:ext cx="9601200" cy="411480"/>
+            <a:off x="1188720" y="1188720"/>
+            <a:ext cx="9601200" cy="646331"/>
           </a:xfrm>
           <a:prstGeom prst="rect">
             <a:avLst/>
@@ -19258,6 +20963,9 @@
           <a:lstStyle/>
           <a:p>
             <a:pPr algn="l">
+              <a:spcAft>
+                <a:spcPts val="400"/>
+              </a:spcAft>
               <a:defRPr sz="1800" b="0">
                 <a:solidFill>
                   <a:srgbClr val="444444"/>
@@ -19266,109 +20974,22 @@
               </a:defRPr>
             </a:pPr>
             <a:r>
-              <a:t>We seek the global optimum of an objective function:</a:t>
-            </a:r>
-          </a:p>
-        </p:txBody>
-      </p:sp>
-      <p:sp>
-        <p:nvSpPr>
-          <p:cNvPr id="5" name="Rectangle 4"/>
-          <p:cNvSpPr/>
-          <p:nvPr/>
-        </p:nvSpPr>
-        <p:spPr>
-          <a:xfrm>
-            <a:off x="822960" y="1572768"/>
-            <a:ext cx="10058400" cy="502920"/>
-          </a:xfrm>
-          <a:prstGeom prst="rect">
-            <a:avLst/>
-          </a:prstGeom>
-          <a:solidFill>
-            <a:srgbClr val="F5F5F5"/>
-          </a:solidFill>
-          <a:ln>
-            <a:noFill/>
-          </a:ln>
-        </p:spPr>
-        <p:style>
-          <a:lnRef idx="1">
-            <a:schemeClr val="accent1"/>
-          </a:lnRef>
-          <a:fillRef idx="3">
-            <a:schemeClr val="accent1"/>
-          </a:fillRef>
-          <a:effectRef idx="2">
-            <a:schemeClr val="accent1"/>
-          </a:effectRef>
-          <a:fontRef idx="minor">
-            <a:schemeClr val="lt1"/>
-          </a:fontRef>
-        </p:style>
-        <p:txBody>
-          <a:bodyPr rtlCol="0" anchor="ctr"/>
-          <a:lstStyle/>
-          <a:p>
-            <a:pPr algn="ctr"/>
-            <a:endParaRPr/>
-          </a:p>
-        </p:txBody>
-      </p:sp>
-      <p:sp>
-        <p:nvSpPr>
-          <p:cNvPr id="6" name="Rectangle 5"/>
-          <p:cNvSpPr/>
-          <p:nvPr/>
-        </p:nvSpPr>
-        <p:spPr>
-          <a:xfrm>
-            <a:off x="822960" y="1572768"/>
-            <a:ext cx="50800" cy="502920"/>
-          </a:xfrm>
-          <a:prstGeom prst="rect">
-            <a:avLst/>
-          </a:prstGeom>
-          <a:solidFill>
-            <a:srgbClr val="FF3300"/>
-          </a:solidFill>
-          <a:ln>
-            <a:noFill/>
-          </a:ln>
-        </p:spPr>
-        <p:style>
-          <a:lnRef idx="1">
-            <a:schemeClr val="accent1"/>
-          </a:lnRef>
-          <a:fillRef idx="3">
-            <a:schemeClr val="accent1"/>
-          </a:fillRef>
-          <a:effectRef idx="2">
-            <a:schemeClr val="accent1"/>
-          </a:effectRef>
-          <a:fontRef idx="minor">
-            <a:schemeClr val="lt1"/>
-          </a:fontRef>
-        </p:style>
-        <p:txBody>
-          <a:bodyPr rtlCol="0" anchor="ctr"/>
-          <a:lstStyle/>
-          <a:p>
-            <a:pPr algn="ctr"/>
-            <a:endParaRPr/>
-          </a:p>
-        </p:txBody>
-      </p:sp>
-      <p:sp>
-        <p:nvSpPr>
-          <p:cNvPr id="7" name="TextBox 6"/>
+              <a:rPr dirty="0"/>
+              <a:t>•  Kushner, H.J. (1964). A New Method of Locating the Maximum Point of an Arbitrary Multipeak Curve in the Presence of Noise. — introduced PI</a:t>
+            </a:r>
+          </a:p>
+        </p:txBody>
+      </p:sp>
+      <p:sp>
+        <p:nvSpPr>
+          <p:cNvPr id="5" name="TextBox 4"/>
           <p:cNvSpPr txBox="1"/>
           <p:nvPr/>
         </p:nvSpPr>
         <p:spPr>
           <a:xfrm>
-            <a:off x="1005840" y="1618488"/>
-            <a:ext cx="9601200" cy="411480"/>
+            <a:off x="1188720" y="1936487"/>
+            <a:ext cx="9601200" cy="369332"/>
           </a:xfrm>
           <a:prstGeom prst="rect">
             <a:avLst/>
@@ -19382,29 +21003,41 @@
           <a:lstStyle/>
           <a:p>
             <a:pPr algn="l">
-              <a:defRPr sz="2000" b="0">
-                <a:solidFill>
-                  <a:srgbClr val="1A1A1A"/>
-                </a:solidFill>
-                <a:latin typeface="Cambria Math"/>
+              <a:spcAft>
+                <a:spcPts val="400"/>
+              </a:spcAft>
+              <a:defRPr sz="1800" b="0">
+                <a:solidFill>
+                  <a:srgbClr val="444444"/>
+                </a:solidFill>
+                <a:latin typeface="Nunito"/>
               </a:defRPr>
             </a:pPr>
             <a:r>
-              <a:t>x* = argmax  f(x),    x ∈ 𝒳</a:t>
-            </a:r>
-          </a:p>
-        </p:txBody>
-      </p:sp>
-      <p:sp>
-        <p:nvSpPr>
-          <p:cNvPr id="8" name="TextBox 7"/>
+              <a:rPr dirty="0"/>
+              <a:t>•  </a:t>
+            </a:r>
+            <a:r>
+              <a:rPr dirty="0" err="1"/>
+              <a:t>Mockus</a:t>
+            </a:r>
+            <a:r>
+              <a:rPr dirty="0"/>
+              <a:t>, J. (1975). On Bayesian Methods for Seeking the Extremum. — introduced EI</a:t>
+            </a:r>
+          </a:p>
+        </p:txBody>
+      </p:sp>
+      <p:sp>
+        <p:nvSpPr>
+          <p:cNvPr id="6" name="TextBox 5"/>
           <p:cNvSpPr txBox="1"/>
           <p:nvPr/>
         </p:nvSpPr>
         <p:spPr>
           <a:xfrm>
-            <a:off x="822960" y="2167128"/>
-            <a:ext cx="9601200" cy="411480"/>
+            <a:off x="1188720" y="2407255"/>
+            <a:ext cx="9601200" cy="646331"/>
           </a:xfrm>
           <a:prstGeom prst="rect">
             <a:avLst/>
@@ -19418,6 +21051,9 @@
           <a:lstStyle/>
           <a:p>
             <a:pPr algn="l">
+              <a:spcAft>
+                <a:spcPts val="400"/>
+              </a:spcAft>
               <a:defRPr sz="1800" b="0">
                 <a:solidFill>
                   <a:srgbClr val="444444"/>
@@ -19426,21 +21062,27 @@
               </a:defRPr>
             </a:pPr>
             <a:r>
-              <a:t>where f has properties that make classical methods impractical:</a:t>
-            </a:r>
-          </a:p>
-        </p:txBody>
-      </p:sp>
-      <p:sp>
-        <p:nvSpPr>
-          <p:cNvPr id="9" name="TextBox 8"/>
+              <a:rPr dirty="0"/>
+              <a:t>•  Srinivas, N. et al. (2010). Gaussian Process Optimization in the Bandit Setting: No Regret and Experimental Design. ICML. — GP-UCB regret bounds</a:t>
+            </a:r>
+            <a:r>
+              <a:rPr lang="en-US" dirty="0"/>
+              <a:t> </a:t>
+            </a:r>
+            <a:endParaRPr dirty="0"/>
+          </a:p>
+        </p:txBody>
+      </p:sp>
+      <p:sp>
+        <p:nvSpPr>
+          <p:cNvPr id="7" name="TextBox 6"/>
           <p:cNvSpPr txBox="1"/>
           <p:nvPr/>
         </p:nvSpPr>
         <p:spPr>
           <a:xfrm>
-            <a:off x="1188720" y="2551176"/>
-            <a:ext cx="9601200" cy="411480"/>
+            <a:off x="1188720" y="3155022"/>
+            <a:ext cx="9601200" cy="369332"/>
           </a:xfrm>
           <a:prstGeom prst="rect">
             <a:avLst/>
@@ -19454,6 +21096,9 @@
           <a:lstStyle/>
           <a:p>
             <a:pPr algn="l">
+              <a:spcAft>
+                <a:spcPts val="400"/>
+              </a:spcAft>
               <a:defRPr sz="1800" b="0">
                 <a:solidFill>
                   <a:srgbClr val="444444"/>
@@ -19462,21 +21107,35 @@
               </a:defRPr>
             </a:pPr>
             <a:r>
-              <a:t>•  Expensive to evaluate — each call may be a CFD simulation (hours), a physical experiment (days), or a neural-network training run</a:t>
-            </a:r>
-          </a:p>
-        </p:txBody>
-      </p:sp>
-      <p:sp>
-        <p:nvSpPr>
-          <p:cNvPr id="10" name="TextBox 9"/>
+              <a:rPr dirty="0"/>
+              <a:t>•  </a:t>
+            </a:r>
+            <a:r>
+              <a:rPr dirty="0" err="1"/>
+              <a:t>Brochu</a:t>
+            </a:r>
+            <a:r>
+              <a:rPr dirty="0"/>
+              <a:t>, E., Cora, V.M. &amp; de Freitas, N. (2010). A Tutorial on Bayesian Optimization.</a:t>
+            </a:r>
+            <a:r>
+              <a:rPr lang="en-US" dirty="0"/>
+              <a:t> </a:t>
+            </a:r>
+            <a:endParaRPr dirty="0"/>
+          </a:p>
+        </p:txBody>
+      </p:sp>
+      <p:sp>
+        <p:nvSpPr>
+          <p:cNvPr id="8" name="TextBox 7"/>
           <p:cNvSpPr txBox="1"/>
           <p:nvPr/>
         </p:nvSpPr>
         <p:spPr>
           <a:xfrm>
-            <a:off x="1188720" y="2935224"/>
-            <a:ext cx="9601200" cy="411480"/>
+            <a:off x="1188720" y="3625790"/>
+            <a:ext cx="9601200" cy="646331"/>
           </a:xfrm>
           <a:prstGeom prst="rect">
             <a:avLst/>
@@ -19490,6 +21149,9 @@
           <a:lstStyle/>
           <a:p>
             <a:pPr algn="l">
+              <a:spcAft>
+                <a:spcPts val="400"/>
+              </a:spcAft>
               <a:defRPr sz="1800" b="0">
                 <a:solidFill>
                   <a:srgbClr val="444444"/>
@@ -19498,21 +21160,30 @@
               </a:defRPr>
             </a:pPr>
             <a:r>
-              <a:t>•  Black-box — no closed-form expression is available; we only observe input-output pairs (xᵢ, yᵢ)</a:t>
-            </a:r>
-          </a:p>
-        </p:txBody>
-      </p:sp>
-      <p:sp>
-        <p:nvSpPr>
-          <p:cNvPr id="11" name="TextBox 10"/>
+              <a:rPr dirty="0"/>
+              <a:t>•  </a:t>
+            </a:r>
+            <a:r>
+              <a:rPr dirty="0" err="1"/>
+              <a:t>Shahriari</a:t>
+            </a:r>
+            <a:r>
+              <a:rPr dirty="0"/>
+              <a:t>, B. et al. (2016). Taking the Human Out of the Loop: A Review of Bayesian Optimization. Proc. IEEE.</a:t>
+            </a:r>
+          </a:p>
+        </p:txBody>
+      </p:sp>
+      <p:sp>
+        <p:nvSpPr>
+          <p:cNvPr id="9" name="TextBox 8"/>
           <p:cNvSpPr txBox="1"/>
           <p:nvPr/>
         </p:nvSpPr>
         <p:spPr>
           <a:xfrm>
-            <a:off x="1188720" y="3319272"/>
-            <a:ext cx="9601200" cy="411480"/>
+            <a:off x="1188720" y="4373556"/>
+            <a:ext cx="9601200" cy="369332"/>
           </a:xfrm>
           <a:prstGeom prst="rect">
             <a:avLst/>
@@ -19526,6 +21197,9 @@
           <a:lstStyle/>
           <a:p>
             <a:pPr algn="l">
+              <a:spcAft>
+                <a:spcPts val="400"/>
+              </a:spcAft>
               <a:defRPr sz="1800" b="0">
                 <a:solidFill>
                   <a:srgbClr val="444444"/>
@@ -19534,44 +21208,14 @@
               </a:defRPr>
             </a:pPr>
             <a:r>
-              <a:t>•  No gradient information — derivatives of f are unavailable, so gradient-based optimisers cannot be used</a:t>
-            </a:r>
-          </a:p>
-        </p:txBody>
-      </p:sp>
-      <p:sp>
-        <p:nvSpPr>
-          <p:cNvPr id="12" name="TextBox 11"/>
-          <p:cNvSpPr txBox="1"/>
-          <p:nvPr/>
-        </p:nvSpPr>
-        <p:spPr>
-          <a:xfrm>
-            <a:off x="1188720" y="3703320"/>
-            <a:ext cx="9601200" cy="411480"/>
-          </a:xfrm>
-          <a:prstGeom prst="rect">
-            <a:avLst/>
-          </a:prstGeom>
-          <a:noFill/>
-        </p:spPr>
-        <p:txBody>
-          <a:bodyPr wrap="square">
-            <a:spAutoFit/>
-          </a:bodyPr>
-          <a:lstStyle/>
-          <a:p>
-            <a:pPr algn="l">
-              <a:defRPr sz="1800" b="0">
-                <a:solidFill>
-                  <a:srgbClr val="444444"/>
-                </a:solidFill>
-                <a:latin typeface="Nunito"/>
-              </a:defRPr>
-            </a:pPr>
-            <a:r>
-              <a:t>•  Possibly noisy — observations may be corrupted: y = f(x) + ε, where ε ~ N(0, σ²ₙ)</a:t>
-            </a:r>
+              <a:rPr dirty="0"/>
+              <a:t>•  Frazier, P.I. (2018). A Tutorial on Bayesian Optimization. arXiv:1807.02811.</a:t>
+            </a:r>
+            <a:r>
+              <a:rPr lang="en-US" dirty="0"/>
+              <a:t> </a:t>
+            </a:r>
+            <a:endParaRPr dirty="0"/>
           </a:p>
         </p:txBody>
       </p:sp>
@@ -19583,391 +21227,7 @@
 </p:sld>
 </file>
 
-<file path=ppt/slides/slide40.xml><?xml version="1.0" encoding="utf-8"?>
-<p:sld xmlns:a="http://schemas.openxmlformats.org/drawingml/2006/main" xmlns:r="http://schemas.openxmlformats.org/officeDocument/2006/relationships" xmlns:p="http://schemas.openxmlformats.org/presentationml/2006/main">
-  <p:cSld>
-    <p:spTree>
-      <p:nvGrpSpPr>
-        <p:cNvPr id="1" name=""/>
-        <p:cNvGrpSpPr/>
-        <p:nvPr/>
-      </p:nvGrpSpPr>
-      <p:grpSpPr>
-        <a:xfrm>
-          <a:off x="0" y="0"/>
-          <a:ext cx="0" cy="0"/>
-          <a:chOff x="0" y="0"/>
-          <a:chExt cx="0" cy="0"/>
-        </a:xfrm>
-      </p:grpSpPr>
-      <p:sp>
-        <p:nvSpPr>
-          <p:cNvPr id="2" name="TextBox 1"/>
-          <p:cNvSpPr txBox="1"/>
-          <p:nvPr/>
-        </p:nvSpPr>
-        <p:spPr>
-          <a:xfrm>
-            <a:off x="822960" y="457200"/>
-            <a:ext cx="10058400" cy="640080"/>
-          </a:xfrm>
-          <a:prstGeom prst="rect">
-            <a:avLst/>
-          </a:prstGeom>
-          <a:noFill/>
-        </p:spPr>
-        <p:txBody>
-          <a:bodyPr wrap="square">
-            <a:spAutoFit/>
-          </a:bodyPr>
-          <a:lstStyle/>
-          <a:p>
-            <a:pPr algn="l">
-              <a:defRPr sz="2800" b="1">
-                <a:solidFill>
-                  <a:srgbClr val="1A1A1A"/>
-                </a:solidFill>
-                <a:latin typeface="Archivo"/>
-              </a:defRPr>
-            </a:pPr>
-            <a:r>
-              <a:t>References &amp; Further Reading</a:t>
-            </a:r>
-          </a:p>
-        </p:txBody>
-      </p:sp>
-      <p:sp>
-        <p:nvSpPr>
-          <p:cNvPr id="3" name="Rectangle 2"/>
-          <p:cNvSpPr/>
-          <p:nvPr/>
-        </p:nvSpPr>
-        <p:spPr>
-          <a:xfrm>
-            <a:off x="822960" y="960120"/>
-            <a:ext cx="3657600" cy="38100"/>
-          </a:xfrm>
-          <a:prstGeom prst="rect">
-            <a:avLst/>
-          </a:prstGeom>
-          <a:solidFill>
-            <a:srgbClr val="1A1A1A"/>
-          </a:solidFill>
-          <a:ln>
-            <a:noFill/>
-          </a:ln>
-        </p:spPr>
-        <p:style>
-          <a:lnRef idx="1">
-            <a:schemeClr val="accent1"/>
-          </a:lnRef>
-          <a:fillRef idx="3">
-            <a:schemeClr val="accent1"/>
-          </a:fillRef>
-          <a:effectRef idx="2">
-            <a:schemeClr val="accent1"/>
-          </a:effectRef>
-          <a:fontRef idx="minor">
-            <a:schemeClr val="lt1"/>
-          </a:fontRef>
-        </p:style>
-        <p:txBody>
-          <a:bodyPr rtlCol="0" anchor="ctr"/>
-          <a:lstStyle/>
-          <a:p>
-            <a:pPr algn="ctr"/>
-            <a:endParaRPr/>
-          </a:p>
-        </p:txBody>
-      </p:sp>
-      <p:sp>
-        <p:nvSpPr>
-          <p:cNvPr id="4" name="TextBox 3"/>
-          <p:cNvSpPr txBox="1"/>
-          <p:nvPr/>
-        </p:nvSpPr>
-        <p:spPr>
-          <a:xfrm>
-            <a:off x="1188720" y="1188720"/>
-            <a:ext cx="9601200" cy="646331"/>
-          </a:xfrm>
-          <a:prstGeom prst="rect">
-            <a:avLst/>
-          </a:prstGeom>
-          <a:noFill/>
-        </p:spPr>
-        <p:txBody>
-          <a:bodyPr wrap="square">
-            <a:spAutoFit/>
-          </a:bodyPr>
-          <a:lstStyle/>
-          <a:p>
-            <a:pPr algn="l">
-              <a:spcAft>
-                <a:spcPts val="400"/>
-              </a:spcAft>
-              <a:defRPr sz="1800" b="0">
-                <a:solidFill>
-                  <a:srgbClr val="444444"/>
-                </a:solidFill>
-                <a:latin typeface="Nunito"/>
-              </a:defRPr>
-            </a:pPr>
-            <a:r>
-              <a:rPr dirty="0"/>
-              <a:t>•  Kushner, H.J. (1964). A New Method of Locating the Maximum Point of an Arbitrary Multipeak Curve in the Presence of Noise. — introduced PI</a:t>
-            </a:r>
-          </a:p>
-        </p:txBody>
-      </p:sp>
-      <p:sp>
-        <p:nvSpPr>
-          <p:cNvPr id="5" name="TextBox 4"/>
-          <p:cNvSpPr txBox="1"/>
-          <p:nvPr/>
-        </p:nvSpPr>
-        <p:spPr>
-          <a:xfrm>
-            <a:off x="1188720" y="1936487"/>
-            <a:ext cx="9601200" cy="369332"/>
-          </a:xfrm>
-          <a:prstGeom prst="rect">
-            <a:avLst/>
-          </a:prstGeom>
-          <a:noFill/>
-        </p:spPr>
-        <p:txBody>
-          <a:bodyPr wrap="square">
-            <a:spAutoFit/>
-          </a:bodyPr>
-          <a:lstStyle/>
-          <a:p>
-            <a:pPr algn="l">
-              <a:spcAft>
-                <a:spcPts val="400"/>
-              </a:spcAft>
-              <a:defRPr sz="1800" b="0">
-                <a:solidFill>
-                  <a:srgbClr val="444444"/>
-                </a:solidFill>
-                <a:latin typeface="Nunito"/>
-              </a:defRPr>
-            </a:pPr>
-            <a:r>
-              <a:rPr dirty="0"/>
-              <a:t>•  </a:t>
-            </a:r>
-            <a:r>
-              <a:rPr dirty="0" err="1"/>
-              <a:t>Mockus</a:t>
-            </a:r>
-            <a:r>
-              <a:rPr dirty="0"/>
-              <a:t>, J. (1975). On Bayesian Methods for Seeking the Extremum. — introduced EI</a:t>
-            </a:r>
-          </a:p>
-        </p:txBody>
-      </p:sp>
-      <p:sp>
-        <p:nvSpPr>
-          <p:cNvPr id="6" name="TextBox 5"/>
-          <p:cNvSpPr txBox="1"/>
-          <p:nvPr/>
-        </p:nvSpPr>
-        <p:spPr>
-          <a:xfrm>
-            <a:off x="1188720" y="2407255"/>
-            <a:ext cx="9601200" cy="646331"/>
-          </a:xfrm>
-          <a:prstGeom prst="rect">
-            <a:avLst/>
-          </a:prstGeom>
-          <a:noFill/>
-        </p:spPr>
-        <p:txBody>
-          <a:bodyPr wrap="square">
-            <a:spAutoFit/>
-          </a:bodyPr>
-          <a:lstStyle/>
-          <a:p>
-            <a:pPr algn="l">
-              <a:spcAft>
-                <a:spcPts val="400"/>
-              </a:spcAft>
-              <a:defRPr sz="1800" b="0">
-                <a:solidFill>
-                  <a:srgbClr val="444444"/>
-                </a:solidFill>
-                <a:latin typeface="Nunito"/>
-              </a:defRPr>
-            </a:pPr>
-            <a:r>
-              <a:rPr dirty="0"/>
-              <a:t>•  Srinivas, N. et al. (2010). Gaussian Process Optimization in the Bandit Setting: No Regret and Experimental Design. ICML. — GP-UCB regret bounds</a:t>
-            </a:r>
-            <a:r>
-              <a:rPr lang="en-US" dirty="0"/>
-              <a:t> </a:t>
-            </a:r>
-            <a:endParaRPr dirty="0"/>
-          </a:p>
-        </p:txBody>
-      </p:sp>
-      <p:sp>
-        <p:nvSpPr>
-          <p:cNvPr id="7" name="TextBox 6"/>
-          <p:cNvSpPr txBox="1"/>
-          <p:nvPr/>
-        </p:nvSpPr>
-        <p:spPr>
-          <a:xfrm>
-            <a:off x="1188720" y="3155022"/>
-            <a:ext cx="9601200" cy="369332"/>
-          </a:xfrm>
-          <a:prstGeom prst="rect">
-            <a:avLst/>
-          </a:prstGeom>
-          <a:noFill/>
-        </p:spPr>
-        <p:txBody>
-          <a:bodyPr wrap="square">
-            <a:spAutoFit/>
-          </a:bodyPr>
-          <a:lstStyle/>
-          <a:p>
-            <a:pPr algn="l">
-              <a:spcAft>
-                <a:spcPts val="400"/>
-              </a:spcAft>
-              <a:defRPr sz="1800" b="0">
-                <a:solidFill>
-                  <a:srgbClr val="444444"/>
-                </a:solidFill>
-                <a:latin typeface="Nunito"/>
-              </a:defRPr>
-            </a:pPr>
-            <a:r>
-              <a:rPr dirty="0"/>
-              <a:t>•  </a:t>
-            </a:r>
-            <a:r>
-              <a:rPr dirty="0" err="1"/>
-              <a:t>Brochu</a:t>
-            </a:r>
-            <a:r>
-              <a:rPr dirty="0"/>
-              <a:t>, E., Cora, V.M. &amp; de Freitas, N. (2010). A Tutorial on Bayesian Optimization.</a:t>
-            </a:r>
-            <a:r>
-              <a:rPr lang="en-US" dirty="0"/>
-              <a:t> </a:t>
-            </a:r>
-            <a:endParaRPr dirty="0"/>
-          </a:p>
-        </p:txBody>
-      </p:sp>
-      <p:sp>
-        <p:nvSpPr>
-          <p:cNvPr id="8" name="TextBox 7"/>
-          <p:cNvSpPr txBox="1"/>
-          <p:nvPr/>
-        </p:nvSpPr>
-        <p:spPr>
-          <a:xfrm>
-            <a:off x="1188720" y="3625790"/>
-            <a:ext cx="9601200" cy="646331"/>
-          </a:xfrm>
-          <a:prstGeom prst="rect">
-            <a:avLst/>
-          </a:prstGeom>
-          <a:noFill/>
-        </p:spPr>
-        <p:txBody>
-          <a:bodyPr wrap="square">
-            <a:spAutoFit/>
-          </a:bodyPr>
-          <a:lstStyle/>
-          <a:p>
-            <a:pPr algn="l">
-              <a:spcAft>
-                <a:spcPts val="400"/>
-              </a:spcAft>
-              <a:defRPr sz="1800" b="0">
-                <a:solidFill>
-                  <a:srgbClr val="444444"/>
-                </a:solidFill>
-                <a:latin typeface="Nunito"/>
-              </a:defRPr>
-            </a:pPr>
-            <a:r>
-              <a:rPr dirty="0"/>
-              <a:t>•  </a:t>
-            </a:r>
-            <a:r>
-              <a:rPr dirty="0" err="1"/>
-              <a:t>Shahriari</a:t>
-            </a:r>
-            <a:r>
-              <a:rPr dirty="0"/>
-              <a:t>, B. et al. (2016). Taking the Human Out of the Loop: A Review of Bayesian Optimization. Proc. IEEE.</a:t>
-            </a:r>
-          </a:p>
-        </p:txBody>
-      </p:sp>
-      <p:sp>
-        <p:nvSpPr>
-          <p:cNvPr id="9" name="TextBox 8"/>
-          <p:cNvSpPr txBox="1"/>
-          <p:nvPr/>
-        </p:nvSpPr>
-        <p:spPr>
-          <a:xfrm>
-            <a:off x="1188720" y="4373556"/>
-            <a:ext cx="9601200" cy="369332"/>
-          </a:xfrm>
-          <a:prstGeom prst="rect">
-            <a:avLst/>
-          </a:prstGeom>
-          <a:noFill/>
-        </p:spPr>
-        <p:txBody>
-          <a:bodyPr wrap="square">
-            <a:spAutoFit/>
-          </a:bodyPr>
-          <a:lstStyle/>
-          <a:p>
-            <a:pPr algn="l">
-              <a:spcAft>
-                <a:spcPts val="400"/>
-              </a:spcAft>
-              <a:defRPr sz="1800" b="0">
-                <a:solidFill>
-                  <a:srgbClr val="444444"/>
-                </a:solidFill>
-                <a:latin typeface="Nunito"/>
-              </a:defRPr>
-            </a:pPr>
-            <a:r>
-              <a:rPr dirty="0"/>
-              <a:t>•  Frazier, P.I. (2018). A Tutorial on Bayesian Optimization. arXiv:1807.02811.</a:t>
-            </a:r>
-            <a:r>
-              <a:rPr lang="en-US" dirty="0"/>
-              <a:t> </a:t>
-            </a:r>
-            <a:endParaRPr dirty="0"/>
-          </a:p>
-        </p:txBody>
-      </p:sp>
-    </p:spTree>
-  </p:cSld>
-  <p:clrMapOvr>
-    <a:masterClrMapping/>
-  </p:clrMapOvr>
-</p:sld>
-</file>
-
-<file path=ppt/slides/slide41.xml><?xml version="1.0" encoding="utf-8"?>
+<file path=ppt/slides/slide42.xml><?xml version="1.0" encoding="utf-8"?>
 <p:sld xmlns:a="http://schemas.openxmlformats.org/drawingml/2006/main" xmlns:r="http://schemas.openxmlformats.org/officeDocument/2006/relationships" xmlns:p="http://schemas.openxmlformats.org/presentationml/2006/main">
   <p:cSld>
     <p:spTree>
